--- a/Модуль 1/Unity Модуль 1 Урок 1. Структура проекту. Зміні.pptx
+++ b/Модуль 1/Unity Модуль 1 Урок 1. Структура проекту. Зміні.pptx
@@ -196,7 +196,7 @@
           <inkml:channelProperty channel="Y" name="resolution" value="1000" units="1/cm"/>
         </inkml:channelProperties>
       </inkml:inkSource>
-      <inkml:timestamp xml:id="ts0" timeString="2025-07-16T19:05:18.214"/>
+      <inkml:timestamp xml:id="ts0" timeString="2025-07-16T19:08:54.055"/>
     </inkml:context>
     <inkml:brush xml:id="br0">
       <inkml:brushProperty name="width" value="0.05" units="cm"/>
@@ -205,11 +205,11 @@
       <inkml:brushProperty name="ignorePressure" value="1"/>
     </inkml:brush>
   </inkml:definitions>
-  <inkml:trace contextRef="#ctx0" brushRef="#br0">1 1,'0'0</inkml:trace>
+  <inkml:trace contextRef="#ctx0" brushRef="#br0">0 1,'0'9,"0"12,0 7,0-1</inkml:trace>
 </inkml:ink>
 </file>
 
-<file path=ppt/ink/ink100.xml><?xml version="1.0" encoding="utf-8"?>
+<file path=ppt/ink/ink11.xml><?xml version="1.0" encoding="utf-8"?>
 <inkml:ink xmlns:inkml="http://www.w3.org/2003/InkML">
   <inkml:definitions>
     <inkml:context xml:id="ctx0">
@@ -223,7 +223,7 @@
           <inkml:channelProperty channel="Y" name="resolution" value="1000" units="1/cm"/>
         </inkml:channelProperties>
       </inkml:inkSource>
-      <inkml:timestamp xml:id="ts0" timeString="2025-07-16T19:21:08.596"/>
+      <inkml:timestamp xml:id="ts0" timeString="2025-07-16T19:06:40.401"/>
     </inkml:context>
     <inkml:brush xml:id="br0">
       <inkml:brushProperty name="width" value="0.05" units="cm"/>
@@ -232,11 +232,436 @@
       <inkml:brushProperty name="ignorePressure" value="1"/>
     </inkml:brush>
   </inkml:definitions>
-  <inkml:trace contextRef="#ctx0" brushRef="#br0">1351 5,'-120'-2,"35"-1,-120 12,174-2,1 0,0 2,1 1,0 2,-39 21,-2 0,33-15,1 3,-47 33,-33 21,89-57,0 1,2 1,1 1,-42 47,54-56,0 3,0-1,1 2,0 0,2 0,0 0,0 1,-11 35,-1-4,16-37,-1 1,1-1,1 2,-5 23,-7 126,9-109,1 64,2-23,-8-3,7-59,-3 45,9 363,-1-420,2 1,1-1,0 0,9 29,34 77,-28-78,-10-29,1 0,0-1,2 0,0-1,1 0,22 24,2-4,57 45,-62-55,-15-13,1 1,0-2,0-1,2 0,-1-1,2-1,24 10,106 41,-103-40,0-1,78 19,-74-29,0-2,0-3,58-1,-86-2,1 1,-1 0,44 14,25 4,-28-11,-4-1,83 4,-107-11,46 9,-46-5,40 1,-47-7</inkml:trace>
+  <inkml:trace contextRef="#ctx0" brushRef="#br0">0 1,'0'4,"0"11,0 7,0 5,0 2,0 4,0 3,0-2,0-1,0 2,0-9,0-14,0-12,0-17,0-4</inkml:trace>
 </inkml:ink>
 </file>
 
-<file path=ppt/ink/ink101.xml><?xml version="1.0" encoding="utf-8"?>
+<file path=ppt/ink/ink12.xml><?xml version="1.0" encoding="utf-8"?>
+<inkml:ink xmlns:inkml="http://www.w3.org/2003/InkML">
+  <inkml:definitions>
+    <inkml:context xml:id="ctx0">
+      <inkml:inkSource xml:id="inkSrc0">
+        <inkml:traceFormat>
+          <inkml:channel name="X" type="integer" min="-2.14748E9" max="2.14748E9" units="cm"/>
+          <inkml:channel name="Y" type="integer" min="-2.14748E9" max="2.14748E9" units="cm"/>
+        </inkml:traceFormat>
+        <inkml:channelProperties>
+          <inkml:channelProperty channel="X" name="resolution" value="1000" units="1/cm"/>
+          <inkml:channelProperty channel="Y" name="resolution" value="1000" units="1/cm"/>
+        </inkml:channelProperties>
+      </inkml:inkSource>
+      <inkml:timestamp xml:id="ts0" timeString="2025-10-29T15:32:10.624"/>
+    </inkml:context>
+    <inkml:brush xml:id="br0">
+      <inkml:brushProperty name="width" value="0.5" units="cm"/>
+      <inkml:brushProperty name="height" value="1" units="cm"/>
+      <inkml:brushProperty name="color" value="#A2D762"/>
+      <inkml:brushProperty name="tip" value="rectangle"/>
+      <inkml:brushProperty name="rasterOp" value="maskPen"/>
+      <inkml:brushProperty name="ignorePressure" value="1"/>
+    </inkml:brush>
+  </inkml:definitions>
+  <inkml:trace contextRef="#ctx0" brushRef="#br0">1 66,'1175'0,"-770"-28,-136 5,-190 15,-56 2</inkml:trace>
+</inkml:ink>
+</file>
+
+<file path=ppt/ink/ink13.xml><?xml version="1.0" encoding="utf-8"?>
+<inkml:ink xmlns:inkml="http://www.w3.org/2003/InkML">
+  <inkml:definitions>
+    <inkml:context xml:id="ctx0">
+      <inkml:inkSource xml:id="inkSrc0">
+        <inkml:traceFormat>
+          <inkml:channel name="X" type="integer" min="-2.14748E9" max="2.14748E9" units="cm"/>
+          <inkml:channel name="Y" type="integer" min="-2.14748E9" max="2.14748E9" units="cm"/>
+        </inkml:traceFormat>
+        <inkml:channelProperties>
+          <inkml:channelProperty channel="X" name="resolution" value="1000" units="1/cm"/>
+          <inkml:channelProperty channel="Y" name="resolution" value="1000" units="1/cm"/>
+        </inkml:channelProperties>
+      </inkml:inkSource>
+      <inkml:timestamp xml:id="ts0" timeString="2025-10-29T15:32:11.075"/>
+    </inkml:context>
+    <inkml:brush xml:id="br0">
+      <inkml:brushProperty name="width" value="0.5" units="cm"/>
+      <inkml:brushProperty name="height" value="1" units="cm"/>
+      <inkml:brushProperty name="color" value="#A2D762"/>
+      <inkml:brushProperty name="tip" value="rectangle"/>
+      <inkml:brushProperty name="rasterOp" value="maskPen"/>
+      <inkml:brushProperty name="ignorePressure" value="1"/>
+    </inkml:brush>
+  </inkml:definitions>
+  <inkml:trace contextRef="#ctx0" brushRef="#br0">0 80,'152'-6,"236"-40,-74 20,2 24,-189 3,-91-1</inkml:trace>
+</inkml:ink>
+</file>
+
+<file path=ppt/ink/ink14.xml><?xml version="1.0" encoding="utf-8"?>
+<inkml:ink xmlns:inkml="http://www.w3.org/2003/InkML">
+  <inkml:definitions>
+    <inkml:context xml:id="ctx0">
+      <inkml:inkSource xml:id="inkSrc0">
+        <inkml:traceFormat>
+          <inkml:channel name="X" type="integer" min="-2.14748E9" max="2.14748E9" units="cm"/>
+          <inkml:channel name="Y" type="integer" min="-2.14748E9" max="2.14748E9" units="cm"/>
+        </inkml:traceFormat>
+        <inkml:channelProperties>
+          <inkml:channelProperty channel="X" name="resolution" value="1000" units="1/cm"/>
+          <inkml:channelProperty channel="Y" name="resolution" value="1000" units="1/cm"/>
+        </inkml:channelProperties>
+      </inkml:inkSource>
+      <inkml:timestamp xml:id="ts0" timeString="2025-10-29T15:32:12.989"/>
+    </inkml:context>
+    <inkml:brush xml:id="br0">
+      <inkml:brushProperty name="width" value="0.5" units="cm"/>
+      <inkml:brushProperty name="height" value="1" units="cm"/>
+      <inkml:brushProperty name="color" value="#A2D762"/>
+      <inkml:brushProperty name="tip" value="rectangle"/>
+      <inkml:brushProperty name="rasterOp" value="maskPen"/>
+      <inkml:brushProperty name="ignorePressure" value="1"/>
+    </inkml:brush>
+  </inkml:definitions>
+  <inkml:trace contextRef="#ctx0" brushRef="#br0">1 1,'948'0,"-919"0</inkml:trace>
+</inkml:ink>
+</file>
+
+<file path=ppt/ink/ink15.xml><?xml version="1.0" encoding="utf-8"?>
+<inkml:ink xmlns:inkml="http://www.w3.org/2003/InkML">
+  <inkml:definitions>
+    <inkml:context xml:id="ctx0">
+      <inkml:inkSource xml:id="inkSrc0">
+        <inkml:traceFormat>
+          <inkml:channel name="X" type="integer" min="-2.14748E9" max="2.14748E9" units="cm"/>
+          <inkml:channel name="Y" type="integer" min="-2.14748E9" max="2.14748E9" units="cm"/>
+        </inkml:traceFormat>
+        <inkml:channelProperties>
+          <inkml:channelProperty channel="X" name="resolution" value="1000" units="1/cm"/>
+          <inkml:channelProperty channel="Y" name="resolution" value="1000" units="1/cm"/>
+        </inkml:channelProperties>
+      </inkml:inkSource>
+      <inkml:timestamp xml:id="ts0" timeString="2025-10-29T15:32:14.472"/>
+    </inkml:context>
+    <inkml:brush xml:id="br0">
+      <inkml:brushProperty name="width" value="0.5" units="cm"/>
+      <inkml:brushProperty name="height" value="1" units="cm"/>
+      <inkml:brushProperty name="color" value="#A2D762"/>
+      <inkml:brushProperty name="tip" value="rectangle"/>
+      <inkml:brushProperty name="rasterOp" value="maskPen"/>
+      <inkml:brushProperty name="ignorePressure" value="1"/>
+    </inkml:brush>
+  </inkml:definitions>
+  <inkml:trace contextRef="#ctx0" brushRef="#br0">1 0,'643'16,"-287"-6,92 7,-391-13,-7 0</inkml:trace>
+</inkml:ink>
+</file>
+
+<file path=ppt/ink/ink16.xml><?xml version="1.0" encoding="utf-8"?>
+<inkml:ink xmlns:inkml="http://www.w3.org/2003/InkML">
+  <inkml:definitions>
+    <inkml:context xml:id="ctx0">
+      <inkml:inkSource xml:id="inkSrc0">
+        <inkml:traceFormat>
+          <inkml:channel name="X" type="integer" min="-2.14748E9" max="2.14748E9" units="cm"/>
+          <inkml:channel name="Y" type="integer" min="-2.14748E9" max="2.14748E9" units="cm"/>
+        </inkml:traceFormat>
+        <inkml:channelProperties>
+          <inkml:channelProperty channel="X" name="resolution" value="1000" units="1/cm"/>
+          <inkml:channelProperty channel="Y" name="resolution" value="1000" units="1/cm"/>
+        </inkml:channelProperties>
+      </inkml:inkSource>
+      <inkml:timestamp xml:id="ts0" timeString="2025-10-29T15:32:18.847"/>
+    </inkml:context>
+    <inkml:brush xml:id="br0">
+      <inkml:brushProperty name="width" value="0.5" units="cm"/>
+      <inkml:brushProperty name="height" value="1" units="cm"/>
+      <inkml:brushProperty name="color" value="#A2D762"/>
+      <inkml:brushProperty name="tip" value="rectangle"/>
+      <inkml:brushProperty name="rasterOp" value="maskPen"/>
+      <inkml:brushProperty name="ignorePressure" value="1"/>
+    </inkml:brush>
+  </inkml:definitions>
+  <inkml:trace contextRef="#ctx0" brushRef="#br0">1 81,'40'-1,"50"-10,14 0,-19 7,-26 3,115-18,-103 6,0 3,1 4,-1 2,1 4,96 11,118 12,-128-12,178 20,-298-28</inkml:trace>
+</inkml:ink>
+</file>
+
+<file path=ppt/ink/ink17.xml><?xml version="1.0" encoding="utf-8"?>
+<inkml:ink xmlns:inkml="http://www.w3.org/2003/InkML">
+  <inkml:definitions>
+    <inkml:context xml:id="ctx0">
+      <inkml:inkSource xml:id="inkSrc0">
+        <inkml:traceFormat>
+          <inkml:channel name="X" type="integer" min="-2.14748E9" max="2.14748E9" units="cm"/>
+          <inkml:channel name="Y" type="integer" min="-2.14748E9" max="2.14748E9" units="cm"/>
+        </inkml:traceFormat>
+        <inkml:channelProperties>
+          <inkml:channelProperty channel="X" name="resolution" value="1000" units="1/cm"/>
+          <inkml:channelProperty channel="Y" name="resolution" value="1000" units="1/cm"/>
+        </inkml:channelProperties>
+      </inkml:inkSource>
+      <inkml:timestamp xml:id="ts0" timeString="2025-07-16T19:18:04.653"/>
+    </inkml:context>
+    <inkml:brush xml:id="br0">
+      <inkml:brushProperty name="width" value="0.05" units="cm"/>
+      <inkml:brushProperty name="height" value="0.05" units="cm"/>
+      <inkml:brushProperty name="color" value="#E71224"/>
+      <inkml:brushProperty name="ignorePressure" value="1"/>
+    </inkml:brush>
+  </inkml:definitions>
+  <inkml:trace contextRef="#ctx0" brushRef="#br0">1 54,'7'0,"0"-1,0 0,0 0,9-4,19-3,502-29,641 38,-1035-1</inkml:trace>
+</inkml:ink>
+</file>
+
+<file path=ppt/ink/ink18.xml><?xml version="1.0" encoding="utf-8"?>
+<inkml:ink xmlns:inkml="http://www.w3.org/2003/InkML">
+  <inkml:definitions>
+    <inkml:context xml:id="ctx0">
+      <inkml:inkSource xml:id="inkSrc0">
+        <inkml:traceFormat>
+          <inkml:channel name="X" type="integer" min="-2.14748E9" max="2.14748E9" units="cm"/>
+          <inkml:channel name="Y" type="integer" min="-2.14748E9" max="2.14748E9" units="cm"/>
+        </inkml:traceFormat>
+        <inkml:channelProperties>
+          <inkml:channelProperty channel="X" name="resolution" value="1000" units="1/cm"/>
+          <inkml:channelProperty channel="Y" name="resolution" value="1000" units="1/cm"/>
+        </inkml:channelProperties>
+      </inkml:inkSource>
+      <inkml:timestamp xml:id="ts0" timeString="2025-07-16T19:18:05.505"/>
+    </inkml:context>
+    <inkml:brush xml:id="br0">
+      <inkml:brushProperty name="width" value="0.05" units="cm"/>
+      <inkml:brushProperty name="height" value="0.05" units="cm"/>
+      <inkml:brushProperty name="color" value="#E71224"/>
+      <inkml:brushProperty name="ignorePressure" value="1"/>
+    </inkml:brush>
+  </inkml:definitions>
+  <inkml:trace contextRef="#ctx0" brushRef="#br0">0 1,'102'0,"754"25,752 58,-1345-84,-159 0</inkml:trace>
+</inkml:ink>
+</file>
+
+<file path=ppt/ink/ink19.xml><?xml version="1.0" encoding="utf-8"?>
+<inkml:ink xmlns:inkml="http://www.w3.org/2003/InkML">
+  <inkml:definitions>
+    <inkml:context xml:id="ctx0">
+      <inkml:inkSource xml:id="inkSrc0">
+        <inkml:traceFormat>
+          <inkml:channel name="X" type="integer" min="-2.14748E9" max="2.14748E9" units="cm"/>
+          <inkml:channel name="Y" type="integer" min="-2.14748E9" max="2.14748E9" units="cm"/>
+        </inkml:traceFormat>
+        <inkml:channelProperties>
+          <inkml:channelProperty channel="X" name="resolution" value="1000" units="1/cm"/>
+          <inkml:channelProperty channel="Y" name="resolution" value="1000" units="1/cm"/>
+        </inkml:channelProperties>
+      </inkml:inkSource>
+      <inkml:timestamp xml:id="ts0" timeString="2025-07-16T19:18:14.417"/>
+    </inkml:context>
+    <inkml:brush xml:id="br0">
+      <inkml:brushProperty name="width" value="0.05" units="cm"/>
+      <inkml:brushProperty name="height" value="0.05" units="cm"/>
+      <inkml:brushProperty name="color" value="#E71224"/>
+      <inkml:brushProperty name="ignorePressure" value="1"/>
+    </inkml:brush>
+  </inkml:definitions>
+  <inkml:trace contextRef="#ctx0" brushRef="#br0">0 267,'10'-1,"0"0,-1 0,18-5,8-2,662-41,-259 28,-345 14,1257-95,-1050 69,59-3,-294 34</inkml:trace>
+</inkml:ink>
+</file>
+
+<file path=ppt/ink/ink2.xml><?xml version="1.0" encoding="utf-8"?>
+<inkml:ink xmlns:inkml="http://www.w3.org/2003/InkML">
+  <inkml:definitions>
+    <inkml:context xml:id="ctx0">
+      <inkml:inkSource xml:id="inkSrc0">
+        <inkml:traceFormat>
+          <inkml:channel name="X" type="integer" min="-2.14748E9" max="2.14748E9" units="cm"/>
+          <inkml:channel name="Y" type="integer" min="-2.14748E9" max="2.14748E9" units="cm"/>
+        </inkml:traceFormat>
+        <inkml:channelProperties>
+          <inkml:channelProperty channel="X" name="resolution" value="1000" units="1/cm"/>
+          <inkml:channelProperty channel="Y" name="resolution" value="1000" units="1/cm"/>
+        </inkml:channelProperties>
+      </inkml:inkSource>
+      <inkml:timestamp xml:id="ts0" timeString="2025-10-29T15:29:54.089"/>
+    </inkml:context>
+    <inkml:brush xml:id="br0">
+      <inkml:brushProperty name="width" value="0.05" units="cm"/>
+      <inkml:brushProperty name="height" value="0.05" units="cm"/>
+      <inkml:brushProperty name="color" value="#0B868D"/>
+      <inkml:brushProperty name="ignorePressure" value="1"/>
+      <inkml:brushProperty name="inkEffects" value="ocean"/>
+      <inkml:brushProperty name="anchorX" value="0"/>
+      <inkml:brushProperty name="anchorY" value="0"/>
+      <inkml:brushProperty name="scaleFactor" value="0.5"/>
+    </inkml:brush>
+  </inkml:definitions>
+  <inkml:trace contextRef="#ctx0" brushRef="#br0">805 1,'0'0,"0"4,0 8,0 9,0 16,0 3,10 12,1 3,0 8,3 0,-2 5,-3-7,3-3,-2 3,-2-2,-3 4,-1-2,3 0,-1-3,-1 4,-1-7,-1-1,-2-2,0 0,-1-6,0 0,0-4,0-5,0-4,-1 2,12-12,-1-13,6-6,-1-11,-4-13,-2-6,-4-9,-2-6,-1-1,-2-4,-1-6,1 2,-1-7,-5 1,1-12,-6 1,-4-5,1 8,-4-2,4 9,-7 3,2 3,3 5,5 6,-2 6,4-3,2 4,7 6,8 8,7 7,16 5,9 4,19 2,15 8,8-1,4 1,-4-1,4-2,4-2,10 0,10-2,8 0,7 0,5 0,2 0,2 5,0 0,-5 0,-1 0,6-2,5-1,7-1,10-1,10 0,12 0,7 0,10 0,1 0,4-1,5 1,2 0,8 0,2 0,5 0,6-5,-7 0,-2-1,-9 2,-8 1,-16 1,-17-5,-25 1,-17 1,-17 1,-24 1,-21 1,-17 1,-7 1,-7 0,-4 0,-3 0,-7 6,5 5,0 5,-4 4,-4 9,-1 3,1 0,-3 11,7-2,-3 0,3-4,-5 7,2-2,-4-2,-3 1,1-3,-3-2,-2-4,-2 3,-2-1,-2-2,-1-1,0 3,0 0,-1-2,-4-6,3-24,1-1,0 1,0 0,0 0,-1-1,1 1,0-1,-1 1,1-1,-3 2,-17 9,-6-6,-1 2,-12-2,0-1,1-2,-8-1,-4-1,-6-1,-3 10,-5 1,-10 0,1-2,-7-3,-8-2,5-1,-4-3,-4 6,0-1,3 0,-3-1,2-1,-8-2,-9 5,-18 5,-14 0,-10 10,-7-3,-15 3,-7 2,-11-4,-3 0,-7 7,1-4,-4 2,3-1,-2-3,2-1,-1 7,2-5,3 2,4-5,7 1,-3-4,1-5,-5 2,0-2,-11-3,-4-3,1 9,-2 0,9-2,16-3,15-2,13 3,16-1,29-3,20 0,17-2,17-2,13 0,9-1,11 0</inkml:trace>
+</inkml:ink>
+</file>
+
+<file path=ppt/ink/ink20.xml><?xml version="1.0" encoding="utf-8"?>
+<inkml:ink xmlns:inkml="http://www.w3.org/2003/InkML">
+  <inkml:definitions>
+    <inkml:context xml:id="ctx0">
+      <inkml:inkSource xml:id="inkSrc0">
+        <inkml:traceFormat>
+          <inkml:channel name="X" type="integer" min="-2.14748E9" max="2.14748E9" units="cm"/>
+          <inkml:channel name="Y" type="integer" min="-2.14748E9" max="2.14748E9" units="cm"/>
+        </inkml:traceFormat>
+        <inkml:channelProperties>
+          <inkml:channelProperty channel="X" name="resolution" value="1000" units="1/cm"/>
+          <inkml:channelProperty channel="Y" name="resolution" value="1000" units="1/cm"/>
+        </inkml:channelProperties>
+      </inkml:inkSource>
+      <inkml:timestamp xml:id="ts0" timeString="2025-07-16T19:18:22.314"/>
+    </inkml:context>
+    <inkml:brush xml:id="br0">
+      <inkml:brushProperty name="width" value="0.05" units="cm"/>
+      <inkml:brushProperty name="height" value="0.05" units="cm"/>
+      <inkml:brushProperty name="ignorePressure" value="1"/>
+    </inkml:brush>
+  </inkml:definitions>
+  <inkml:trace contextRef="#ctx0" brushRef="#br0">0 48,'549'0,"-538"-1,0 0,-1-1,1 0,0-1,-1 0,20-9,13-4,-19 9</inkml:trace>
+</inkml:ink>
+</file>
+
+<file path=ppt/ink/ink21.xml><?xml version="1.0" encoding="utf-8"?>
+<inkml:ink xmlns:inkml="http://www.w3.org/2003/InkML">
+  <inkml:definitions>
+    <inkml:context xml:id="ctx0">
+      <inkml:inkSource xml:id="inkSrc0">
+        <inkml:traceFormat>
+          <inkml:channel name="X" type="integer" min="-2.14748E9" max="2.14748E9" units="cm"/>
+          <inkml:channel name="Y" type="integer" min="-2.14748E9" max="2.14748E9" units="cm"/>
+        </inkml:traceFormat>
+        <inkml:channelProperties>
+          <inkml:channelProperty channel="X" name="resolution" value="1000" units="1/cm"/>
+          <inkml:channelProperty channel="Y" name="resolution" value="1000" units="1/cm"/>
+        </inkml:channelProperties>
+      </inkml:inkSource>
+      <inkml:timestamp xml:id="ts0" timeString="2025-07-16T19:18:23.592"/>
+    </inkml:context>
+    <inkml:brush xml:id="br0">
+      <inkml:brushProperty name="width" value="0.05" units="cm"/>
+      <inkml:brushProperty name="height" value="0.05" units="cm"/>
+      <inkml:brushProperty name="ignorePressure" value="1"/>
+    </inkml:brush>
+  </inkml:definitions>
+  <inkml:trace contextRef="#ctx0" brushRef="#br0">0 2,'110'-1,"120"3,-149 11,5-1,-56-11</inkml:trace>
+</inkml:ink>
+</file>
+
+<file path=ppt/ink/ink22.xml><?xml version="1.0" encoding="utf-8"?>
+<inkml:ink xmlns:inkml="http://www.w3.org/2003/InkML">
+  <inkml:definitions>
+    <inkml:context xml:id="ctx0">
+      <inkml:inkSource xml:id="inkSrc0">
+        <inkml:traceFormat>
+          <inkml:channel name="X" type="integer" min="-2.14748E9" max="2.14748E9" units="cm"/>
+          <inkml:channel name="Y" type="integer" min="-2.14748E9" max="2.14748E9" units="cm"/>
+        </inkml:traceFormat>
+        <inkml:channelProperties>
+          <inkml:channelProperty channel="X" name="resolution" value="1000" units="1/cm"/>
+          <inkml:channelProperty channel="Y" name="resolution" value="1000" units="1/cm"/>
+        </inkml:channelProperties>
+      </inkml:inkSource>
+      <inkml:timestamp xml:id="ts0" timeString="2025-10-29T15:35:10.912"/>
+    </inkml:context>
+    <inkml:brush xml:id="br0">
+      <inkml:brushProperty name="width" value="0.5" units="cm"/>
+      <inkml:brushProperty name="height" value="1" units="cm"/>
+      <inkml:brushProperty name="color" value="#A2D762"/>
+      <inkml:brushProperty name="tip" value="rectangle"/>
+      <inkml:brushProperty name="rasterOp" value="maskPen"/>
+      <inkml:brushProperty name="ignorePressure" value="1"/>
+    </inkml:brush>
+  </inkml:definitions>
+  <inkml:trace contextRef="#ctx0" brushRef="#br0">1 11,'4'0,"7"0,9 0,7 0,3 0,1 0,-6-4,-5-2</inkml:trace>
+</inkml:ink>
+</file>
+
+<file path=ppt/ink/ink23.xml><?xml version="1.0" encoding="utf-8"?>
+<inkml:ink xmlns:inkml="http://www.w3.org/2003/InkML">
+  <inkml:definitions>
+    <inkml:context xml:id="ctx0">
+      <inkml:inkSource xml:id="inkSrc0">
+        <inkml:traceFormat>
+          <inkml:channel name="X" type="integer" min="-2.14748E9" max="2.14748E9" units="cm"/>
+          <inkml:channel name="Y" type="integer" min="-2.14748E9" max="2.14748E9" units="cm"/>
+        </inkml:traceFormat>
+        <inkml:channelProperties>
+          <inkml:channelProperty channel="X" name="resolution" value="1000" units="1/cm"/>
+          <inkml:channelProperty channel="Y" name="resolution" value="1000" units="1/cm"/>
+        </inkml:channelProperties>
+      </inkml:inkSource>
+      <inkml:timestamp xml:id="ts0" timeString="2025-10-29T15:35:16.334"/>
+    </inkml:context>
+    <inkml:brush xml:id="br0">
+      <inkml:brushProperty name="width" value="0.5" units="cm"/>
+      <inkml:brushProperty name="height" value="1" units="cm"/>
+      <inkml:brushProperty name="color" value="#A2D762"/>
+      <inkml:brushProperty name="tip" value="rectangle"/>
+      <inkml:brushProperty name="rasterOp" value="maskPen"/>
+      <inkml:brushProperty name="ignorePressure" value="1"/>
+    </inkml:brush>
+  </inkml:definitions>
+  <inkml:trace contextRef="#ctx0" brushRef="#br0">1 84,'5'0,"10"0,7 0,5 0,1 0,6 0,1 0,-5-4,-3-2,-2 0,-5-3,3 0,-3-8,1-1,-4 3</inkml:trace>
+</inkml:ink>
+</file>
+
+<file path=ppt/ink/ink24.xml><?xml version="1.0" encoding="utf-8"?>
+<inkml:ink xmlns:inkml="http://www.w3.org/2003/InkML">
+  <inkml:definitions>
+    <inkml:context xml:id="ctx0">
+      <inkml:inkSource xml:id="inkSrc0">
+        <inkml:traceFormat>
+          <inkml:channel name="X" type="integer" min="-2.14748E9" max="2.14748E9" units="cm"/>
+          <inkml:channel name="Y" type="integer" min="-2.14748E9" max="2.14748E9" units="cm"/>
+        </inkml:traceFormat>
+        <inkml:channelProperties>
+          <inkml:channelProperty channel="X" name="resolution" value="1000" units="1/cm"/>
+          <inkml:channelProperty channel="Y" name="resolution" value="1000" units="1/cm"/>
+        </inkml:channelProperties>
+      </inkml:inkSource>
+      <inkml:timestamp xml:id="ts0" timeString="2025-10-29T15:35:31.091"/>
+    </inkml:context>
+    <inkml:brush xml:id="br0">
+      <inkml:brushProperty name="width" value="0.05" units="cm"/>
+      <inkml:brushProperty name="height" value="0.05" units="cm"/>
+      <inkml:brushProperty name="color" value="#0B868D"/>
+      <inkml:brushProperty name="ignorePressure" value="1"/>
+      <inkml:brushProperty name="inkEffects" value="ocean"/>
+      <inkml:brushProperty name="anchorX" value="-12390.5752"/>
+      <inkml:brushProperty name="anchorY" value="-2474.8335"/>
+      <inkml:brushProperty name="scaleFactor" value="0.5"/>
+    </inkml:brush>
+  </inkml:definitions>
+  <inkml:trace contextRef="#ctx0" brushRef="#br0">1 44,'0'0,"0"-5,10-1,7 0,20 2,10 6,17 1,5 2,5-1,9-1,13 5,0-1,11 4,2-1,6 4,1-2,-1-3,-7 8,-3-2,-1-2,-2-3,-4 2,-5-3,1-1,-10-3,3-2,-8-2,-2 5,-5-1,4 0,0-1,-2-1,-1-1,-3-1,-11-1,2 0,-9 0,-7 0,-2 0,-4-1,-5 1,-2 0,2 0,-2 0,0 0,-2-11,10 0,-1 0,9-3,4 2,-3 3,11-3,6 2,-4 2,9 3,-3-3,-7 1,1 1,-2 1,-3 3,-6 0,-2 1,-1 1,-5-10,1-1,1 1,-3 1,-4 3,-3-3,1 1,-1 1,-3 3,9 1,-1 1,-1 1,-3 1,7 0,-2 1,-2-1,3 0,-4 0,-2 1,-4-1,3 0,-6-6,-2 1,-7 0</inkml:trace>
+</inkml:ink>
+</file>
+
+<file path=ppt/ink/ink25.xml><?xml version="1.0" encoding="utf-8"?>
+<inkml:ink xmlns:inkml="http://www.w3.org/2003/InkML">
+  <inkml:definitions>
+    <inkml:context xml:id="ctx0">
+      <inkml:inkSource xml:id="inkSrc0">
+        <inkml:traceFormat>
+          <inkml:channel name="X" type="integer" min="-2.14748E9" max="2.14748E9" units="cm"/>
+          <inkml:channel name="Y" type="integer" min="-2.14748E9" max="2.14748E9" units="cm"/>
+        </inkml:traceFormat>
+        <inkml:channelProperties>
+          <inkml:channelProperty channel="X" name="resolution" value="1000" units="1/cm"/>
+          <inkml:channelProperty channel="Y" name="resolution" value="1000" units="1/cm"/>
+        </inkml:channelProperties>
+      </inkml:inkSource>
+      <inkml:timestamp xml:id="ts0" timeString="2025-07-16T19:20:54.457"/>
+    </inkml:context>
+    <inkml:brush xml:id="br0">
+      <inkml:brushProperty name="width" value="0.05" units="cm"/>
+      <inkml:brushProperty name="height" value="0.05" units="cm"/>
+      <inkml:brushProperty name="color" value="#E71224"/>
+      <inkml:brushProperty name="ignorePressure" value="1"/>
+    </inkml:brush>
+  </inkml:definitions>
+  <inkml:trace contextRef="#ctx0" brushRef="#br0">1 1,'307'17,"-168"-6,966 39,-312-35,1308 35,-431-5,535 21,-1644-38,789 31,-1157-55</inkml:trace>
+</inkml:ink>
+</file>
+
+<file path=ppt/ink/ink26.xml><?xml version="1.0" encoding="utf-8"?>
 <inkml:ink xmlns:inkml="http://www.w3.org/2003/InkML">
   <inkml:definitions>
     <inkml:context xml:id="ctx0">
@@ -263,596 +688,6 @@
 </inkml:ink>
 </file>
 
-<file path=ppt/ink/ink102.xml><?xml version="1.0" encoding="utf-8"?>
-<inkml:ink xmlns:inkml="http://www.w3.org/2003/InkML">
-  <inkml:definitions>
-    <inkml:context xml:id="ctx0">
-      <inkml:inkSource xml:id="inkSrc0">
-        <inkml:traceFormat>
-          <inkml:channel name="X" type="integer" min="-2.14748E9" max="2.14748E9" units="cm"/>
-          <inkml:channel name="Y" type="integer" min="-2.14748E9" max="2.14748E9" units="cm"/>
-        </inkml:traceFormat>
-        <inkml:channelProperties>
-          <inkml:channelProperty channel="X" name="resolution" value="1000" units="1/cm"/>
-          <inkml:channelProperty channel="Y" name="resolution" value="1000" units="1/cm"/>
-        </inkml:channelProperties>
-      </inkml:inkSource>
-      <inkml:timestamp xml:id="ts0" timeString="2025-07-16T19:21:51.706"/>
-    </inkml:context>
-    <inkml:brush xml:id="br0">
-      <inkml:brushProperty name="width" value="0.05" units="cm"/>
-      <inkml:brushProperty name="height" value="0.05" units="cm"/>
-      <inkml:brushProperty name="color" value="#E71224"/>
-      <inkml:brushProperty name="ignorePressure" value="1"/>
-    </inkml:brush>
-  </inkml:definitions>
-  <inkml:trace contextRef="#ctx0" brushRef="#br0">1 1,'4'0,"7"0,5 0,9 0,5 0,2 0,0 0,3 0,1 0,-2 0,-2 0,3 0,-5 0,-7 0</inkml:trace>
-</inkml:ink>
-</file>
-
-<file path=ppt/ink/ink103.xml><?xml version="1.0" encoding="utf-8"?>
-<inkml:ink xmlns:inkml="http://www.w3.org/2003/InkML">
-  <inkml:definitions>
-    <inkml:context xml:id="ctx0">
-      <inkml:inkSource xml:id="inkSrc0">
-        <inkml:traceFormat>
-          <inkml:channel name="X" type="integer" min="-2.14748E9" max="2.14748E9" units="cm"/>
-          <inkml:channel name="Y" type="integer" min="-2.14748E9" max="2.14748E9" units="cm"/>
-        </inkml:traceFormat>
-        <inkml:channelProperties>
-          <inkml:channelProperty channel="X" name="resolution" value="1000" units="1/cm"/>
-          <inkml:channelProperty channel="Y" name="resolution" value="1000" units="1/cm"/>
-        </inkml:channelProperties>
-      </inkml:inkSource>
-      <inkml:timestamp xml:id="ts0" timeString="2025-07-16T19:22:07.771"/>
-    </inkml:context>
-    <inkml:brush xml:id="br0">
-      <inkml:brushProperty name="width" value="0.05" units="cm"/>
-      <inkml:brushProperty name="height" value="0.05" units="cm"/>
-      <inkml:brushProperty name="ignorePressure" value="1"/>
-    </inkml:brush>
-  </inkml:definitions>
-  <inkml:trace contextRef="#ctx0" brushRef="#br0">1 1,'553'0,"-512"2,55 9,32 2,-43-14,-50-1,0 2,42 5,-65-3,-1 1,1 1,0 0,11 6,-11-4,0-1,1-1,15 4,5-3,38 0,20 2,22 5,219-7,-181-7,675 2,-785-2,55-9,32-3,19 0,4 1,-115 10,43-8,30-2,-89 13</inkml:trace>
-</inkml:ink>
-</file>
-
-<file path=ppt/ink/ink104.xml><?xml version="1.0" encoding="utf-8"?>
-<inkml:ink xmlns:inkml="http://www.w3.org/2003/InkML">
-  <inkml:definitions>
-    <inkml:context xml:id="ctx0">
-      <inkml:inkSource xml:id="inkSrc0">
-        <inkml:traceFormat>
-          <inkml:channel name="X" type="integer" min="-2.14748E9" max="2.14748E9" units="cm"/>
-          <inkml:channel name="Y" type="integer" min="-2.14748E9" max="2.14748E9" units="cm"/>
-        </inkml:traceFormat>
-        <inkml:channelProperties>
-          <inkml:channelProperty channel="X" name="resolution" value="1000" units="1/cm"/>
-          <inkml:channelProperty channel="Y" name="resolution" value="1000" units="1/cm"/>
-        </inkml:channelProperties>
-      </inkml:inkSource>
-      <inkml:timestamp xml:id="ts0" timeString="2025-07-16T19:22:52.654"/>
-    </inkml:context>
-    <inkml:brush xml:id="br0">
-      <inkml:brushProperty name="width" value="0.05" units="cm"/>
-      <inkml:brushProperty name="height" value="0.05" units="cm"/>
-      <inkml:brushProperty name="ignorePressure" value="1"/>
-    </inkml:brush>
-  </inkml:definitions>
-  <inkml:trace contextRef="#ctx0" brushRef="#br0">1 0,'782'16,"-122"-5,-622-11,-8 0</inkml:trace>
-</inkml:ink>
-</file>
-
-<file path=ppt/ink/ink105.xml><?xml version="1.0" encoding="utf-8"?>
-<inkml:ink xmlns:inkml="http://www.w3.org/2003/InkML">
-  <inkml:definitions>
-    <inkml:context xml:id="ctx0">
-      <inkml:inkSource xml:id="inkSrc0">
-        <inkml:traceFormat>
-          <inkml:channel name="X" type="integer" min="-2.14748E9" max="2.14748E9" units="cm"/>
-          <inkml:channel name="Y" type="integer" min="-2.14748E9" max="2.14748E9" units="cm"/>
-        </inkml:traceFormat>
-        <inkml:channelProperties>
-          <inkml:channelProperty channel="X" name="resolution" value="1000" units="1/cm"/>
-          <inkml:channelProperty channel="Y" name="resolution" value="1000" units="1/cm"/>
-        </inkml:channelProperties>
-      </inkml:inkSource>
-      <inkml:timestamp xml:id="ts0" timeString="2025-07-16T19:22:21.037"/>
-    </inkml:context>
-    <inkml:brush xml:id="br0">
-      <inkml:brushProperty name="width" value="0.05" units="cm"/>
-      <inkml:brushProperty name="height" value="0.05" units="cm"/>
-      <inkml:brushProperty name="ignorePressure" value="1"/>
-    </inkml:brush>
-  </inkml:definitions>
-  <inkml:trace contextRef="#ctx0" brushRef="#br0">0 55,'4'3,"-1"-1,1 1,-1-1,1 0,0 0,0 0,0-1,0 1,7 1,45 6,-36-6,545 45,8-48,-260-3,1948 3,-2143-6,222-40,-40 2,289 7,-406 36,171 4,-192 10,61 1,-182-12,0 3,62 14,-55-9,62 4,158-13,17 0,-193 14,-49-6,6 4,-29-7</inkml:trace>
-</inkml:ink>
-</file>
-
-<file path=ppt/ink/ink106.xml><?xml version="1.0" encoding="utf-8"?>
-<inkml:ink xmlns:inkml="http://www.w3.org/2003/InkML">
-  <inkml:definitions>
-    <inkml:context xml:id="ctx0">
-      <inkml:inkSource xml:id="inkSrc0">
-        <inkml:traceFormat>
-          <inkml:channel name="X" type="integer" min="-2.14748E9" max="2.14748E9" units="cm"/>
-          <inkml:channel name="Y" type="integer" min="-2.14748E9" max="2.14748E9" units="cm"/>
-        </inkml:traceFormat>
-        <inkml:channelProperties>
-          <inkml:channelProperty channel="X" name="resolution" value="1000" units="1/cm"/>
-          <inkml:channelProperty channel="Y" name="resolution" value="1000" units="1/cm"/>
-        </inkml:channelProperties>
-      </inkml:inkSource>
-      <inkml:timestamp xml:id="ts0" timeString="2025-07-16T19:23:07.572"/>
-    </inkml:context>
-    <inkml:brush xml:id="br0">
-      <inkml:brushProperty name="width" value="0.05" units="cm"/>
-      <inkml:brushProperty name="height" value="0.05" units="cm"/>
-      <inkml:brushProperty name="ignorePressure" value="1"/>
-    </inkml:brush>
-  </inkml:definitions>
-  <inkml:trace contextRef="#ctx0" brushRef="#br0">1 48,'4'0,"7"-5,5-1,9 1,5 0,2 2,0 1,3 1,-4-4,-2-1,-3 1,-5 0</inkml:trace>
-</inkml:ink>
-</file>
-
-<file path=ppt/ink/ink11.xml><?xml version="1.0" encoding="utf-8"?>
-<inkml:ink xmlns:inkml="http://www.w3.org/2003/InkML">
-  <inkml:definitions>
-    <inkml:context xml:id="ctx0">
-      <inkml:inkSource xml:id="inkSrc0">
-        <inkml:traceFormat>
-          <inkml:channel name="X" type="integer" min="-2.14748E9" max="2.14748E9" units="cm"/>
-          <inkml:channel name="Y" type="integer" min="-2.14748E9" max="2.14748E9" units="cm"/>
-        </inkml:traceFormat>
-        <inkml:channelProperties>
-          <inkml:channelProperty channel="X" name="resolution" value="1000" units="1/cm"/>
-          <inkml:channelProperty channel="Y" name="resolution" value="1000" units="1/cm"/>
-        </inkml:channelProperties>
-      </inkml:inkSource>
-      <inkml:timestamp xml:id="ts0" timeString="2025-07-16T19:07:00.568"/>
-    </inkml:context>
-    <inkml:brush xml:id="br0">
-      <inkml:brushProperty name="width" value="0.05" units="cm"/>
-      <inkml:brushProperty name="height" value="0.05" units="cm"/>
-      <inkml:brushProperty name="color" value="#E71224"/>
-      <inkml:brushProperty name="ignorePressure" value="1"/>
-    </inkml:brush>
-  </inkml:definitions>
-  <inkml:trace contextRef="#ctx0" brushRef="#br0">0 0,'671'16,"-30"-3,-109-5,-438-4,426 29,110 21,-212-51,-55-2,11 26,-36-3,-99 5,-87-7,245 9,-114-18,37 0,-210-14,224 12,3 3,-113-9,-18 18,-14-1,35-15,85 7,-172-3,160-10,-140-3,754 2,-677-13,-32 1,-202 12,439-17,-16-10,-23 19,-97 6,-143-11,38-1,-133 13,-25 2,-1-2,1-1,75-16,-41 3,0 3,92-2,-60 6,116-3,-28 2,215-3,-164 8,-13-8,95-2,-309 14,55 0,1-3,89-15,-61 3,151-5,110 21,-147 1,10-1,439-12,-271-3,-210 10,4-8,55-1,-201 11,56-9,-18 1,-55 8</inkml:trace>
-</inkml:ink>
-</file>
-
-<file path=ppt/ink/ink12.xml><?xml version="1.0" encoding="utf-8"?>
-<inkml:ink xmlns:inkml="http://www.w3.org/2003/InkML">
-  <inkml:definitions>
-    <inkml:context xml:id="ctx0">
-      <inkml:inkSource xml:id="inkSrc0">
-        <inkml:traceFormat>
-          <inkml:channel name="X" type="integer" min="-2.14748E9" max="2.14748E9" units="cm"/>
-          <inkml:channel name="Y" type="integer" min="-2.14748E9" max="2.14748E9" units="cm"/>
-        </inkml:traceFormat>
-        <inkml:channelProperties>
-          <inkml:channelProperty channel="X" name="resolution" value="1000" units="1/cm"/>
-          <inkml:channelProperty channel="Y" name="resolution" value="1000" units="1/cm"/>
-        </inkml:channelProperties>
-      </inkml:inkSource>
-      <inkml:timestamp xml:id="ts0" timeString="2025-07-16T19:07:18.330"/>
-    </inkml:context>
-    <inkml:brush xml:id="br0">
-      <inkml:brushProperty name="width" value="0.05" units="cm"/>
-      <inkml:brushProperty name="height" value="0.05" units="cm"/>
-      <inkml:brushProperty name="color" value="#E71224"/>
-      <inkml:brushProperty name="ignorePressure" value="1"/>
-    </inkml:brush>
-  </inkml:definitions>
-  <inkml:trace contextRef="#ctx0" brushRef="#br0">3 722,'-2'-147,"5"-161,-3 305,0-1,0 1,1 0,0-1,0 1,0 0,0 0,0-1,0 1,1 0,0 0,-1 0,1 1,0-1,0 0,1 1,-1-1,1 1,-1 0,1 0,0 0,-1 0,1 0,0 1,0-1,0 1,4-2,4 1,0-1,-1 2,1-1,0 2,0-1,0 1,14 3,-21-3,0 0,-1 1,1-1,-1 1,1 0,0 0,-1 0,0 0,1 1,-1 0,0-1,0 1,0 0,0 1,0-1,0 0,-1 1,1 0,-1-1,0 1,1 0,-1 0,-1 1,3 2,-2 1,0-1,-1 1,0-1,0 1,0-1,-1 1,0-1,0 1,0-1,-1 1,0-1,-3 12,-28 133,23-108,9-41,-3 9,1 0,1 1,0-1,1 23,0-31,0 0,1-1,0 1,-1 0,1-1,0 1,0 0,0-1,1 1,-1-1,1 1,-1-1,1 0,0 0,0 0,0 0,0 0,0 0,0 0,1-1,-1 1,0-1,1 1,0-1,3 1,12 2,1 0,0-1,-1-1,1-1,0-1,0-1,22-3,16 1,-45 3,-1-1,1 0,-1 0,1-1,-1 0,0-1,13-5,-19 5,-1 1,1-1,-1 0,0 0,0 0,0 0,0-1,-1 0,0 0,1 0,-1 0,-1 0,1-1,-1 1,1-1,-1 0,-1 1,3-10,2-15,-2 0,-1-1,-2 1,0-1,-6-43,1-12,3 67,1 7,-1-1,2 1,1-16,-1 25,-1-1,1 1,-1 0,1-1,0 1,0 0,0-1,0 1,0 0,0 0,1 0,-1 0,1 0,0 0,-1 1,1-1,0 0,0 1,0 0,0-1,3 0,16-5,0 1,0 1,1 1,0 0,0 2,0 1,34 2,61-5,-103 1,1-1,-1 0,18-8,-23 8,-1 0,1 1,0 0,0 1,0 0,1 0,-1 1,0 0,1 0,15 2,-24-1,0 0,0 1,0-1,0 0,0 0,-1 1,1-1,0 1,0-1,0 0,0 1,0 0,-1-1,1 1,0 0,-1-1,1 1,0 0,-1-1,1 1,-1 0,1 0,-1 0,1 0,0 1,-1 0,0 0,0 0,0 0,0 1,0-1,0 0,-1 0,1 0,-1 0,1 0,-2 3,-4 6,1 0,-2 0,-9 13,13-19,-18 26,-25 51,-2-1,34-60,1 0,1 0,-14 37,22-48,2-4,0-1,0 1,1-1,-1 1,1 0,0 8,1-12,0 0,1-1,-1 1,0 0,1-1,0 1,-1 0,1-1,0 1,0-1,0 1,-1-1,2 0,-1 1,0-1,0 0,0 1,1-1,-1 0,0 0,1 0,-1 0,1-1,-1 1,1 0,2 0,5 2,1 1,0-2,0 0,0 0,0 0,14-1,65-4,-37 0,69 3,58-2,-176 1,1 1,-1 0,0-1,0 0,0 1,1-1,-1-1,0 1,0 0,-1-1,1 1,0-1,0 0,-1 0,1 0,-1 0,0-1,1 1,-1-1,0 1,0-1,-1 0,1 1,-1-1,1 0,-1 0,0 0,0 0,0-1,0-4,2-10,-2 1,0-1,-1 0,-4-28,1 8,1-23,-2 1,-14-61,15 109,1 3,0 0,1 0,-1 0,1-17,1 24,1 0,-1 0,0 0,1 0,-1 0,1 0,-1 0,1 0,0 1,0-1,0 0,0 0,0 1,0-1,0 1,1-1,-1 1,1-1,-1 1,1 0,-1 0,1 0,0 0,-1 0,1 0,0 0,0 0,3 0,2-1,0 0,0 1,1 0,-1 0,0 1,0 0,1 0,-1 1,0-1,1 2,9 2,-13-3,-1 1,1-1,-1 1,0 0,1 0,-1 0,0 1,0-1,0 1,0-1,-1 1,1 0,-1 0,0 0,0 1,0-1,0 0,0 1,-1 0,1-1,-1 1,0 0,1 5,1 23,0 1,-2 0,-5 54,-1-3,5-51,0-3</inkml:trace>
-</inkml:ink>
-</file>
-
-<file path=ppt/ink/ink13.xml><?xml version="1.0" encoding="utf-8"?>
-<inkml:ink xmlns:inkml="http://www.w3.org/2003/InkML">
-  <inkml:definitions>
-    <inkml:context xml:id="ctx0">
-      <inkml:inkSource xml:id="inkSrc0">
-        <inkml:traceFormat>
-          <inkml:channel name="X" type="integer" min="-2.14748E9" max="2.14748E9" units="cm"/>
-          <inkml:channel name="Y" type="integer" min="-2.14748E9" max="2.14748E9" units="cm"/>
-        </inkml:traceFormat>
-        <inkml:channelProperties>
-          <inkml:channelProperty channel="X" name="resolution" value="1000" units="1/cm"/>
-          <inkml:channelProperty channel="Y" name="resolution" value="1000" units="1/cm"/>
-        </inkml:channelProperties>
-      </inkml:inkSource>
-      <inkml:timestamp xml:id="ts0" timeString="2025-07-16T19:07:28.430"/>
-    </inkml:context>
-    <inkml:brush xml:id="br0">
-      <inkml:brushProperty name="width" value="0.05" units="cm"/>
-      <inkml:brushProperty name="height" value="0.05" units="cm"/>
-      <inkml:brushProperty name="color" value="#E71224"/>
-      <inkml:brushProperty name="ignorePressure" value="1"/>
-    </inkml:brush>
-  </inkml:definitions>
-  <inkml:trace contextRef="#ctx0" brushRef="#br0">0 358,'1'0,"0"0,0 1,0-1,0 0,-1 1,1-1,0 0,0 1,0-1,-1 1,1-1,0 1,0-1,-1 1,1 0,-1-1,1 1,0 0,-1 0,1-1,-1 1,0 0,1 0,-1 0,0 0,1-1,-1 2,6 31,-4-21,42 144,-24-95,11 71,8 139,-38-262,1-1,0 1,1-1,-1 1,2-1,-1 0,1 0,0 0,1-1,-1 0,2 1,6 7,-11-15,-1 0,0 1,1-1,-1 1,0-1,1 0,-1 0,1 1,-1-1,1 0,-1 0,1 0,-1 1,1-1,-1 0,1 0,-1 0,1 0,-1 0,1 0,-1 0,1 0,-1 0,1 0,-1 0,1 0,-1 0,1-1,-1 1,0 0,1 0,-1 0,1-1,6-17,-6-24,-21-141,-11-191,30 316,4-158,-2 207,0 1,1 0,0-1,0 1,1 0,4-8,-7 14,0 1,0 0,1 0,-1 0,1 0,-1 0,1 0,-1 0,1 0,0 0,0 0,-1 0,1 1,0-1,0 0,0 0,0 1,0-1,0 1,0-1,0 1,0-1,0 1,0-1,0 1,0 0,0 0,1 0,-1 0,0-1,0 1,0 1,0-1,0 0,1 0,-1 0,0 1,0-1,0 0,0 1,0-1,0 1,0-1,0 1,0 0,0-1,0 1,0 0,-1 0,1 0,0-1,0 1,0 2,12 15,-1 2,0-1,-2 2,0-1,10 35,-19-53,21 62,-3 1,-3 0,-2 2,-4 0,-2 0,-2 71,-6-130,1 0,0-1,0 1,0 0,1 0,0-1,1 1,3 7,-5-14,-1 1,1-1,0 1,0-1,0 1,-1-1,2 0,-1 1,0-1,0 0,0 0,0 0,1 0,-1 0,1 0,-1 0,1 0,-1-1,1 1,-1-1,1 1,-1-1,1 1,0-1,-1 0,1 0,0 0,-1 0,1 0,0 0,-1 0,1-1,0 1,-1 0,1-1,-1 1,1-1,-1 0,1 0,-1 0,1 1,2-3,11-10,-1 1,0-2,-1 0,0 0,-1-1,0-1,12-24,23-27,-16 21,-2-1,-2-1,-3-2,20-53,-13 28,-19 58,-12 17,0 0,0 0,0-1,1 1,-1 0,0 0,0 0,0 0,1 0,-1 0,0 0,0 0,1 1,-1-1,0 0,0 0,0 0,1 0,-1 0,0 0,0 0,0 0,0 0,1 1,-1-1,0 0,0 0,0 0,0 0,0 1,1-1,-1 0,0 0,0 0,0 1,0-1,0 0,0 0,0 0,0 1,0-1,0 0,4 38,-3 60,4 99,-2-163,1 0,2 0,18 57,-23-86,1 0,0 0,0 0,0-1,0 1,1-1,0 0,0 0,0 0,0 0,0 0,1-1,0 1,0-1,0 0,0 0,0 0,1-1,-1 0,1 0,-1 0,1 0,0 0,0-1,0 0,0 0,0-1,0 1,0-1,0 0,0 0,0-1,0 0,0 1,0-2,0 1,0-1,-1 1,1-1,0 0,4-4,6-3,0-1,-1-1,0 0,-1-1,-1-1,22-27,56-96,-18 23,-32 61,-21 29,-1-1,-1-1,-1 0,-1-1,12-30,-25 52,0-1,-1 0,0 0,0 0,0 0,0 0,-1 0,0-1,0 1,0 0,-1 0,1 0,-1 0,-1 0,1 0,-1 0,1 0,-1 1,-1-1,-2-4,0 3,1 0,-2 0,1 1,-1 0,1 0,-2 0,1 1,0 0,-1 0,0 0,0 1,-14-5,-21-5,-1 2,-1 2,-78-6,47 11,-108 9,175-4,0 1,0 0,0 0,0 1,1 0,-1 0,1 0,0 1,0 1,0-1,0 1,1 0,0 1,0-1,0 1,0 0,1 1,0-1,1 1,-5 10,-3 5,0 0,2 1,1 1,1 0,-6 32,3 13,4 0,2 1,7 111,1-76,-4-100,1 0,1 1,-1-1,1 0,0 1,0-1,0 0,1 0,0 0,0 0,0 0,0 0,1-1,0 1,0-1,0 0,1 0,-1 0,1 0,0 0,0-1,0 0,1 0,-1 0,1 0,0-1,-1 1,1-1,0 0,0-1,1 1,6 0,6 2,0-1,0-1,0-1,0 0,1-1,-1-1,0-1,0 0,0-2,0 0,0-1,-1 0,1-2,-2 0,1-1,-1 0,0-2,21-15,5-8,-2-2,-1-2,-1-1,-3-2,-1-1,42-66,-48 65,-26 40,0-1,0 1,0 0,0 0,0 0,0 0,1 0,-1 0,0 1,1-1,0 1,-1 0,6-2,-6 3,-1 0,0 1,0-1,0 1,0 0,0-1,0 1,0-1,-1 1,1 0,0 0,0 0,0 0,-1-1,1 1,0 0,-1 0,1 0,-1 0,1 1,-1-1,0 0,1 0,-1 0,0 0,0 0,0 0,0 1,0-1,0 0,0 1,2 41,-16 71,0 8,13 81,1-200,0 1,1 0,-1-1,1 1,0-1,0 1,0-1,1 0,-1 1,4 4,-5-7,1 0,0 0,0 0,0-1,0 1,0 0,0-1,0 1,0-1,1 1,-1-1,0 1,0-1,0 0,0 0,1 1,-1-1,0 0,0 0,0 0,1 0,-1-1,0 1,0 0,0 0,1-1,-1 1,0-1,0 1,0-1,0 1,0-1,0 0,2-1,6-4,1-1,-1 0,-1-1,1 1,-1-2,13-17,37-65,-25 37,34-59,55-126,-74 138,-26 59,1 0,48-64,-71 106,0 0,0 0,0-1,0 1,0 0,0 0,0 0,0-1,1 1,-1 0,0 0,0 0,0 0,0-1,1 1,-1 0,0 0,0 0,0 0,1 0,-1 0,0-1,0 1,1 0,-1 0,0 0,0 0,0 0,1 0,-1 0,0 0,0 0,1 0,-1 0,0 0,0 0,1 0,-1 0,0 1,0-1,0 0,1 0,-1 0,0 0,0 0,0 0,1 1,-1-1,0 0,0 0,0 0,0 1,1-1,4 20,-4 30,-1-49,-5 547,5-537,0-8,-1 1,1 0,0 0,0 0,0 0,1-1,-1 1,1 0,0 0,0-1,1 1,-1 0,1-1,1 4,-2-6,-1-1,1 0,-1 0,1 1,-1-1,1 0,-1 0,1 1,-1-1,1 0,-1 0,1 0,-1 0,1 0,-1 0,1 0,-1 0,1 0,-1 0,1 0,0 0,-1 0,1 0,-1 0,1 0,-1-1,1 1,-1 0,1 0,-1-1,0 1,1 0,-1-1,1 1,-1 0,0-1,1 1,-1-1,0 1,1-1,-1 1,0-1,0 1,1-1,-1 1,0-1,0 1,0-1,0 0,14-33,-12 26,213-491,-206 483,1 1,1 1,0 0,1 0,1 1,0 1,1 0,20-14,2-3,-34 27,1 0,0 0,0 0,1 0,-1 0,0 1,0-1,1 1,-1 0,1 0,-1 0,1 0,7 0,-9 1,0 0,0 1,0-1,0 1,0-1,0 1,0 0,0 0,0 0,0 0,0 0,0 0,-1 0,1 0,0 1,-1-1,1 1,-1-1,1 1,-1 0,0 0,0-1,0 1,0 0,1 4,8 21,-2 1,-1 0,5 41,-5-30,1 26,-2 0,-4 80,-2-140,0 0,1 0,-1 0,1 0,0 0,0 0,1 0,0-1,3 8,-4-11,-1 0,0 0,1-1,-1 1,1 0,0-1,-1 1,1-1,-1 1,1-1,0 1,-1-1,1 1,0-1,0 0,0 1,-1-1,1 0,0 1,0-1,0 0,-1 0,3 0,-1 0,-1-1,1 0,0 1,0-1,-1 0,1 0,-1 0,1 0,-1 0,1 0,-1-1,1 1,-1 0,0-1,2-2,5-9,-1 0,0 0,-1 0,0-1,-1 0,6-24,15-39,26-20,-32 63,17-39,-35 68,0-1,0 1,0 0,1 0,-1 0,1 1,0-1,1 1,-1-1,1 1,0 0,0 0,0 1,1-1,-1 1,1 0,0 0,0 1,0-1,0 1,0 0,1 1,-1-1,0 1,1 0,-1 0,1 1,10 0,-6 0,-1 1,1 0,0 0,0 1,-1 0,1 1,-1 0,0 1,0 0,0 0,0 1,-1 0,0 1,10 7,5 7,-1 1,-1 1,24 32,-34-42,1-1,0 1,0-2,16 11,17 14,-41-31,0-1,0 2,-1-1,0 0,1 1,-2-1,1 1,0 0,-1 0,0 0,0 0,0 1,1 8,-1 4,0 1,-2 32,2 17,-2-65,0-1,0 1,1-1,-1 1,1-1,0 1,0-1,0 0,0 1,0-1,0 0,0 0,1 0,-1 0,1 0,0 0,-1 0,1-1,0 1,0 0,0-1,0 0,0 1,1-1,-1 0,0 0,1 0,-1-1,0 1,1 0,-1-1,1 0,-1 1,1-1,-1 0,1 0,4-1,1 0,0-1,0 0,0 0,-1 0,1-1,-1 0,1-1,-1 0,0 0,10-8,14-12,-2-1,0-2,-2-1,-1-2,-1 0,23-38,-8 9,-24 36,0-1,15-32,-1-18,21-82,-45 135,0-1,2-29,-7 46,0-1,-1 0,0 0,0 0,0 0,-1 0,0 0,0 0,0 1,-1-1,0 0,0 1,-5-9,7 13,-1 0,0 0,0 0,0 1,0-1,0 0,0 0,0 1,0-1,0 0,0 1,0-1,0 1,0 0,0-1,-1 1,1 0,0-1,0 1,-1 0,1 0,0 0,0 0,0 0,-1 1,1-1,0 0,0 0,0 1,-1-1,1 1,0-1,-2 2,-2 1,0 0,0 0,1 1,-1-1,-6 8,0 1,1 1,1 0,0 0,0 1,-10 24,-26 79,13-28,11-36,2 1,3 0,-13 77,19-79,4-26,2 0,-2 43,6-66,1 1,0-1,0 0,0 1,0-1,0 0,1 0,-1 0,1 0,0 0,0-1,0 1,0-1,0 1,1-1,-1 1,1-1,-1 0,1 0,0-1,0 1,5 2,7 3,0 0,1-1,18 4,-2-3,0-2,1-1,-1-2,1-1,-1-2,1-1,43-8,-35 4</inkml:trace>
-</inkml:ink>
-</file>
-
-<file path=ppt/ink/ink14.xml><?xml version="1.0" encoding="utf-8"?>
-<inkml:ink xmlns:inkml="http://www.w3.org/2003/InkML">
-  <inkml:definitions>
-    <inkml:context xml:id="ctx0">
-      <inkml:inkSource xml:id="inkSrc0">
-        <inkml:traceFormat>
-          <inkml:channel name="X" type="integer" min="-2.14748E9" max="2.14748E9" units="cm"/>
-          <inkml:channel name="Y" type="integer" min="-2.14748E9" max="2.14748E9" units="cm"/>
-        </inkml:traceFormat>
-        <inkml:channelProperties>
-          <inkml:channelProperty channel="X" name="resolution" value="1000" units="1/cm"/>
-          <inkml:channelProperty channel="Y" name="resolution" value="1000" units="1/cm"/>
-        </inkml:channelProperties>
-      </inkml:inkSource>
-      <inkml:timestamp xml:id="ts0" timeString="2025-07-16T19:07:29.829"/>
-    </inkml:context>
-    <inkml:brush xml:id="br0">
-      <inkml:brushProperty name="width" value="0.05" units="cm"/>
-      <inkml:brushProperty name="height" value="0.05" units="cm"/>
-      <inkml:brushProperty name="color" value="#E71224"/>
-      <inkml:brushProperty name="ignorePressure" value="1"/>
-    </inkml:brush>
-  </inkml:definitions>
-  <inkml:trace contextRef="#ctx0" brushRef="#br0">662 0,'-11'14,"0"0,2 0,0 1,0 1,2-1,0 1,0 0,-5 25,-6 11,-39 118,-35 185,68-252,0 2,5 0,-9 163,27-248,0 2,2 36,0-51,0 0,1 0,-1-1,1 1,0 0,1-1,0 0,0 1,6 8,7 7,0 0,2-1,1-1,0 0,40 29,-35-31,-12-9,0 0,0-1,0-1,18 8,-11-8,0 0,0-2,0 0,1-1,0-1,0-1,0 0,29-3,-36 0,0-1,0 0,0-1,-1-1,1 0,-1 0,0-1,0-1,-1 0,1-1,-1 0,-1 0,18-17,-12 8,-1-1,-1 0,-1-1,-1-1,0 0,-1-1,-1 0,-1 0,-1-1,-1 0,8-39,26-71,-29 101,-2 0,-1-1,-1 0,5-47,-3-53,7-169,-15 216,-1 37,-6-85,2 120,1 0,-2 0,1 0,-2 1,0 0,0-1,-1 1,0 1,-1-1,0 1,0 1,-1-1,-1 1,-11-9,6 6,-1 0,0 2,0 0,-1 1,0 0,-1 1,0 1,-34-9,-43-2,0 4,-100-2,148 13,-46-3,-120 7,204 1,-1 0,1 0,-1 1,1 0,0 0,0 1,1 0,-1 0,1 1,0 0,0 0,0 1,1 0,0 0,0 1,0-1,-5 10,-3 3,1 1,1 1,1 0,1 1,-9 26,6 2,4-6</inkml:trace>
-</inkml:ink>
-</file>
-
-<file path=ppt/ink/ink15.xml><?xml version="1.0" encoding="utf-8"?>
-<inkml:ink xmlns:inkml="http://www.w3.org/2003/InkML">
-  <inkml:definitions>
-    <inkml:context xml:id="ctx0">
-      <inkml:inkSource xml:id="inkSrc0">
-        <inkml:traceFormat>
-          <inkml:channel name="X" type="integer" min="-2.14748E9" max="2.14748E9" units="cm"/>
-          <inkml:channel name="Y" type="integer" min="-2.14748E9" max="2.14748E9" units="cm"/>
-        </inkml:traceFormat>
-        <inkml:channelProperties>
-          <inkml:channelProperty channel="X" name="resolution" value="1000" units="1/cm"/>
-          <inkml:channelProperty channel="Y" name="resolution" value="1000" units="1/cm"/>
-        </inkml:channelProperties>
-      </inkml:inkSource>
-      <inkml:timestamp xml:id="ts0" timeString="2025-07-16T19:07:31.204"/>
-    </inkml:context>
-    <inkml:brush xml:id="br0">
-      <inkml:brushProperty name="width" value="0.05" units="cm"/>
-      <inkml:brushProperty name="height" value="0.05" units="cm"/>
-      <inkml:brushProperty name="color" value="#E71224"/>
-      <inkml:brushProperty name="ignorePressure" value="1"/>
-    </inkml:brush>
-  </inkml:definitions>
-  <inkml:trace contextRef="#ctx0" brushRef="#br0">583 58,'-48'119,"9"-20,-126 324,113-277,33-93,-47 113,40-109,-28 93,46-130,-1 1,0-1,-20 30,20-35,0-1,1 2,0-1,1 1,1 1,-6 23,14-172,-3 56,1 43,0-77,16-120,-11 194,1 1,2-1,2 1,1 1,2 0,1 1,26-45,-16 33,22-54,-26 52,30-52,-30 66,-2-1,26-70,-41 95,0-1,1 2,0-1,1 0,0 1,0 0,1 0,6-7,-8 10,1 1,-1 1,1-1,0 1,0-1,0 2,1-1,-1 0,1 1,-1 0,1 0,0 1,0 0,7-1,5-1,-1-1,35-11,-51 14,1 1,-1-1,0 1,1-1,-1 1,0 0,1-1,-1 1,0 0,1 0,-1 0,0 0,1 0,-1 0,0 0,1 1,-1-1,0 0,1 1,-1-1,0 1,0 0,1-1,-1 1,0 0,0-1,0 1,0 0,0 0,0 0,0 0,0 0,0 0,-1 1,1-1,0 0,-1 0,1 0,-1 1,1-1,-1 0,0 1,1 1,1 7,-1 1,0 0,-1 0,-1 18,0-10,-5 729,6-719</inkml:trace>
-</inkml:ink>
-</file>
-
-<file path=ppt/ink/ink16.xml><?xml version="1.0" encoding="utf-8"?>
-<inkml:ink xmlns:inkml="http://www.w3.org/2003/InkML">
-  <inkml:definitions>
-    <inkml:context xml:id="ctx0">
-      <inkml:inkSource xml:id="inkSrc0">
-        <inkml:traceFormat>
-          <inkml:channel name="X" type="integer" min="-2.14748E9" max="2.14748E9" units="cm"/>
-          <inkml:channel name="Y" type="integer" min="-2.14748E9" max="2.14748E9" units="cm"/>
-        </inkml:traceFormat>
-        <inkml:channelProperties>
-          <inkml:channelProperty channel="X" name="resolution" value="1000" units="1/cm"/>
-          <inkml:channelProperty channel="Y" name="resolution" value="1000" units="1/cm"/>
-        </inkml:channelProperties>
-      </inkml:inkSource>
-      <inkml:timestamp xml:id="ts0" timeString="2025-07-16T19:07:31.546"/>
-    </inkml:context>
-    <inkml:brush xml:id="br0">
-      <inkml:brushProperty name="width" value="0.05" units="cm"/>
-      <inkml:brushProperty name="height" value="0.05" units="cm"/>
-      <inkml:brushProperty name="color" value="#E71224"/>
-      <inkml:brushProperty name="ignorePressure" value="1"/>
-    </inkml:brush>
-  </inkml:definitions>
-  <inkml:trace contextRef="#ctx0" brushRef="#br0">1 1,'9'0,"8"0,5 0,3 0,7 0,2 0,0 0,-1 0,2 0,0 0,-1 0,-7 0</inkml:trace>
-</inkml:ink>
-</file>
-
-<file path=ppt/ink/ink17.xml><?xml version="1.0" encoding="utf-8"?>
-<inkml:ink xmlns:inkml="http://www.w3.org/2003/InkML">
-  <inkml:definitions>
-    <inkml:context xml:id="ctx0">
-      <inkml:inkSource xml:id="inkSrc0">
-        <inkml:traceFormat>
-          <inkml:channel name="X" type="integer" min="-2.14748E9" max="2.14748E9" units="cm"/>
-          <inkml:channel name="Y" type="integer" min="-2.14748E9" max="2.14748E9" units="cm"/>
-        </inkml:traceFormat>
-        <inkml:channelProperties>
-          <inkml:channelProperty channel="X" name="resolution" value="1000" units="1/cm"/>
-          <inkml:channelProperty channel="Y" name="resolution" value="1000" units="1/cm"/>
-        </inkml:channelProperties>
-      </inkml:inkSource>
-      <inkml:timestamp xml:id="ts0" timeString="2025-07-16T19:07:33.477"/>
-    </inkml:context>
-    <inkml:brush xml:id="br0">
-      <inkml:brushProperty name="width" value="0.05" units="cm"/>
-      <inkml:brushProperty name="height" value="0.05" units="cm"/>
-      <inkml:brushProperty name="color" value="#E71224"/>
-      <inkml:brushProperty name="ignorePressure" value="1"/>
-    </inkml:brush>
-  </inkml:definitions>
-  <inkml:trace contextRef="#ctx0" brushRef="#br0">0 56,'73'1,"-35"1,0-1,45-7,-70 3,-1 0,1-1,20-9,-20 7,-1 1,2 1,15-4,2 4,0 2,34 1,-39 1</inkml:trace>
-</inkml:ink>
-</file>
-
-<file path=ppt/ink/ink18.xml><?xml version="1.0" encoding="utf-8"?>
-<inkml:ink xmlns:inkml="http://www.w3.org/2003/InkML">
-  <inkml:definitions>
-    <inkml:context xml:id="ctx0">
-      <inkml:inkSource xml:id="inkSrc0">
-        <inkml:traceFormat>
-          <inkml:channel name="X" type="integer" min="-2.14748E9" max="2.14748E9" units="cm"/>
-          <inkml:channel name="Y" type="integer" min="-2.14748E9" max="2.14748E9" units="cm"/>
-        </inkml:traceFormat>
-        <inkml:channelProperties>
-          <inkml:channelProperty channel="X" name="resolution" value="1000" units="1/cm"/>
-          <inkml:channelProperty channel="Y" name="resolution" value="1000" units="1/cm"/>
-        </inkml:channelProperties>
-      </inkml:inkSource>
-      <inkml:timestamp xml:id="ts0" timeString="2025-07-16T19:07:38.213"/>
-    </inkml:context>
-    <inkml:brush xml:id="br0">
-      <inkml:brushProperty name="width" value="0.05" units="cm"/>
-      <inkml:brushProperty name="height" value="0.05" units="cm"/>
-      <inkml:brushProperty name="color" value="#E71224"/>
-      <inkml:brushProperty name="ignorePressure" value="1"/>
-    </inkml:brush>
-  </inkml:definitions>
-  <inkml:trace contextRef="#ctx0" brushRef="#br0">0 0,'1'35,"1"0,1 0,2-1,1 0,19 58,16 17,65 122,-91-199,-1 1,-2 0,-1 1,-1 1,4 35,-10-44,0 2,9 36,-11-57,0 0,1 0,0 0,0 0,0 0,1-1,0 1,0-1,1 0,5 5,6 2</inkml:trace>
-</inkml:ink>
-</file>
-
-<file path=ppt/ink/ink19.xml><?xml version="1.0" encoding="utf-8"?>
-<inkml:ink xmlns:inkml="http://www.w3.org/2003/InkML">
-  <inkml:definitions>
-    <inkml:context xml:id="ctx0">
-      <inkml:inkSource xml:id="inkSrc0">
-        <inkml:traceFormat>
-          <inkml:channel name="X" type="integer" min="-2.14748E9" max="2.14748E9" units="cm"/>
-          <inkml:channel name="Y" type="integer" min="-2.14748E9" max="2.14748E9" units="cm"/>
-        </inkml:traceFormat>
-        <inkml:channelProperties>
-          <inkml:channelProperty channel="X" name="resolution" value="1000" units="1/cm"/>
-          <inkml:channelProperty channel="Y" name="resolution" value="1000" units="1/cm"/>
-        </inkml:channelProperties>
-      </inkml:inkSource>
-      <inkml:timestamp xml:id="ts0" timeString="2025-07-16T19:07:38.838"/>
-    </inkml:context>
-    <inkml:brush xml:id="br0">
-      <inkml:brushProperty name="width" value="0.05" units="cm"/>
-      <inkml:brushProperty name="height" value="0.05" units="cm"/>
-      <inkml:brushProperty name="color" value="#E71224"/>
-      <inkml:brushProperty name="ignorePressure" value="1"/>
-    </inkml:brush>
-  </inkml:definitions>
-  <inkml:trace contextRef="#ctx0" brushRef="#br0">598 0,'-1'12,"0"0,0 0,-1 0,-1 0,0-1,0 1,-10 21,-4-1,-27 40,15-26,1-3,-2-2,-2-1,-2-1,-1-2,-64 52,23-18,-11 8,55-53,4-1</inkml:trace>
-</inkml:ink>
-</file>
-
-<file path=ppt/ink/ink2.xml><?xml version="1.0" encoding="utf-8"?>
-<inkml:ink xmlns:inkml="http://www.w3.org/2003/InkML">
-  <inkml:definitions>
-    <inkml:context xml:id="ctx0">
-      <inkml:inkSource xml:id="inkSrc0">
-        <inkml:traceFormat>
-          <inkml:channel name="X" type="integer" min="-2.14748E9" max="2.14748E9" units="cm"/>
-          <inkml:channel name="Y" type="integer" min="-2.14748E9" max="2.14748E9" units="cm"/>
-        </inkml:traceFormat>
-        <inkml:channelProperties>
-          <inkml:channelProperty channel="X" name="resolution" value="1000" units="1/cm"/>
-          <inkml:channelProperty channel="Y" name="resolution" value="1000" units="1/cm"/>
-        </inkml:channelProperties>
-      </inkml:inkSource>
-      <inkml:timestamp xml:id="ts0" timeString="2025-07-16T18:58:54.785"/>
-    </inkml:context>
-    <inkml:brush xml:id="br0">
-      <inkml:brushProperty name="width" value="0.05" units="cm"/>
-      <inkml:brushProperty name="height" value="0.05" units="cm"/>
-      <inkml:brushProperty name="color" value="#E71224"/>
-      <inkml:brushProperty name="ignorePressure" value="1"/>
-    </inkml:brush>
-  </inkml:definitions>
-  <inkml:trace contextRef="#ctx0" brushRef="#br0">1 29,'4'0,"7"0,5 0,9 0,5 0,2 0,0 0,3 0,1 0,-6-4,-4-3,-2 2,5 0,1 1,0 2,0 1,4 1,-5 0</inkml:trace>
-</inkml:ink>
-</file>
-
-<file path=ppt/ink/ink20.xml><?xml version="1.0" encoding="utf-8"?>
-<inkml:ink xmlns:inkml="http://www.w3.org/2003/InkML">
-  <inkml:definitions>
-    <inkml:context xml:id="ctx0">
-      <inkml:inkSource xml:id="inkSrc0">
-        <inkml:traceFormat>
-          <inkml:channel name="X" type="integer" min="-2.14748E9" max="2.14748E9" units="cm"/>
-          <inkml:channel name="Y" type="integer" min="-2.14748E9" max="2.14748E9" units="cm"/>
-        </inkml:traceFormat>
-        <inkml:channelProperties>
-          <inkml:channelProperty channel="X" name="resolution" value="1000" units="1/cm"/>
-          <inkml:channelProperty channel="Y" name="resolution" value="1000" units="1/cm"/>
-        </inkml:channelProperties>
-      </inkml:inkSource>
-      <inkml:timestamp xml:id="ts0" timeString="2025-07-16T19:07:39.388"/>
-    </inkml:context>
-    <inkml:brush xml:id="br0">
-      <inkml:brushProperty name="width" value="0.05" units="cm"/>
-      <inkml:brushProperty name="height" value="0.05" units="cm"/>
-      <inkml:brushProperty name="color" value="#E71224"/>
-      <inkml:brushProperty name="ignorePressure" value="1"/>
-    </inkml:brush>
-  </inkml:definitions>
-  <inkml:trace contextRef="#ctx0" brushRef="#br0">0 1,'0'675,"0"-646</inkml:trace>
-</inkml:ink>
-</file>
-
-<file path=ppt/ink/ink21.xml><?xml version="1.0" encoding="utf-8"?>
-<inkml:ink xmlns:inkml="http://www.w3.org/2003/InkML">
-  <inkml:definitions>
-    <inkml:context xml:id="ctx0">
-      <inkml:inkSource xml:id="inkSrc0">
-        <inkml:traceFormat>
-          <inkml:channel name="X" type="integer" min="-2.14748E9" max="2.14748E9" units="cm"/>
-          <inkml:channel name="Y" type="integer" min="-2.14748E9" max="2.14748E9" units="cm"/>
-        </inkml:traceFormat>
-        <inkml:channelProperties>
-          <inkml:channelProperty channel="X" name="resolution" value="1000" units="1/cm"/>
-          <inkml:channelProperty channel="Y" name="resolution" value="1000" units="1/cm"/>
-        </inkml:channelProperties>
-      </inkml:inkSource>
-      <inkml:timestamp xml:id="ts0" timeString="2025-07-16T19:07:40.525"/>
-    </inkml:context>
-    <inkml:brush xml:id="br0">
-      <inkml:brushProperty name="width" value="0.05" units="cm"/>
-      <inkml:brushProperty name="height" value="0.05" units="cm"/>
-      <inkml:brushProperty name="color" value="#E71224"/>
-      <inkml:brushProperty name="ignorePressure" value="1"/>
-    </inkml:brush>
-  </inkml:definitions>
-  <inkml:trace contextRef="#ctx0" brushRef="#br0">28 1,'-2'2,"0"1,0 0,0 0,1 0,-1 1,1-1,-1 0,1 0,0 1,1-1,-2 5,-3 43,5-38,-5 68,7 96,-1-174,-1 0,1 0,0 0,-1 0,1 1,1-1,-1 0,0-1,1 1,0 0,-1 0,1-1,0 1,1-1,-1 1,0-1,1 0,-1 0,1 0,-1 0,1-1,0 1,0-1,0 1,0-1,0 0,0 0,0 0,1-1,-1 1,5-1,12 2,0-1,0-1,40-5,-42 3,15-3,0-2,0-1,-1-1,0-2,0-1,-1-2,-1-1,38-25,-44 24,-1-1,-1-2,-1 0,-1-1,0-1,27-38,-33 37</inkml:trace>
-</inkml:ink>
-</file>
-
-<file path=ppt/ink/ink22.xml><?xml version="1.0" encoding="utf-8"?>
-<inkml:ink xmlns:inkml="http://www.w3.org/2003/InkML">
-  <inkml:definitions>
-    <inkml:context xml:id="ctx0">
-      <inkml:inkSource xml:id="inkSrc0">
-        <inkml:traceFormat>
-          <inkml:channel name="X" type="integer" min="-2.14748E9" max="2.14748E9" units="cm"/>
-          <inkml:channel name="Y" type="integer" min="-2.14748E9" max="2.14748E9" units="cm"/>
-        </inkml:traceFormat>
-        <inkml:channelProperties>
-          <inkml:channelProperty channel="X" name="resolution" value="1000" units="1/cm"/>
-          <inkml:channelProperty channel="Y" name="resolution" value="1000" units="1/cm"/>
-        </inkml:channelProperties>
-      </inkml:inkSource>
-      <inkml:timestamp xml:id="ts0" timeString="2025-07-16T19:07:41.163"/>
-    </inkml:context>
-    <inkml:brush xml:id="br0">
-      <inkml:brushProperty name="width" value="0.05" units="cm"/>
-      <inkml:brushProperty name="height" value="0.05" units="cm"/>
-      <inkml:brushProperty name="color" value="#E71224"/>
-      <inkml:brushProperty name="ignorePressure" value="1"/>
-    </inkml:brush>
-  </inkml:definitions>
-  <inkml:trace contextRef="#ctx0" brushRef="#br0">1 422,'1'-5,"1"0,0 0,0 1,0-1,0 1,1-1,0 1,0 0,0 0,0 0,1 0,7-6,-6 6,15-19,0-1,17-29,19-23,-39 57,-2 0,0-1,-2-1,0 0,11-26,-24 47,1-1,-1 0,1 0,-1 0,0 1,0-1,1 0,-1 0,0 0,0 0,0 1,0-1,0 0,0 0,0 0,0 0,-1 0,1 1,0-1,0 0,-1 0,1 0,0 1,-1-1,1 0,-1 1,1-1,-1 0,-1-1,1 1,-1 0,0 1,0-1,0 0,0 0,0 1,0-1,0 1,0 0,0 0,0-1,-3 1,-2 1,-1-1,0 1,0 0,1 1,-1 0,-7 3,-5 8,4 3</inkml:trace>
-</inkml:ink>
-</file>
-
-<file path=ppt/ink/ink23.xml><?xml version="1.0" encoding="utf-8"?>
-<inkml:ink xmlns:inkml="http://www.w3.org/2003/InkML">
-  <inkml:definitions>
-    <inkml:context xml:id="ctx0">
-      <inkml:inkSource xml:id="inkSrc0">
-        <inkml:traceFormat>
-          <inkml:channel name="X" type="integer" min="-2.14748E9" max="2.14748E9" units="cm"/>
-          <inkml:channel name="Y" type="integer" min="-2.14748E9" max="2.14748E9" units="cm"/>
-        </inkml:traceFormat>
-        <inkml:channelProperties>
-          <inkml:channelProperty channel="X" name="resolution" value="1000" units="1/cm"/>
-          <inkml:channelProperty channel="Y" name="resolution" value="1000" units="1/cm"/>
-        </inkml:channelProperties>
-      </inkml:inkSource>
-      <inkml:timestamp xml:id="ts0" timeString="2025-07-16T19:07:41.847"/>
-    </inkml:context>
-    <inkml:brush xml:id="br0">
-      <inkml:brushProperty name="width" value="0.05" units="cm"/>
-      <inkml:brushProperty name="height" value="0.05" units="cm"/>
-      <inkml:brushProperty name="color" value="#E71224"/>
-      <inkml:brushProperty name="ignorePressure" value="1"/>
-    </inkml:brush>
-  </inkml:definitions>
-  <inkml:trace contextRef="#ctx0" brushRef="#br0">1 509,'33'-18,"-1"-1,-1-1,-1-2,44-41,93-117,-161 171,-1 1,1-1,-1 0,-1-1,6-15,9-18,-18 41,1-1,-1 1,0-1,0 1,0-1,0 0,0 1,-1-1,1 0,-1 0,1 0,-1 1,0-1,-1-5,0 6,1 1,-1-1,0 1,0-1,0 1,0 0,0 0,0-1,-1 1,1 0,0 0,-1 0,1 0,-1 0,1 0,-1 1,1-1,-1 0,1 1,-1-1,0 1,1 0,-1-1,0 1,-2 0,-13-2,1 0,-1 1,0 1,1 1,-1 0,1 1,-22 5,30-4,0-1,0 1,0 1,0 0,1 0,-1 0,1 1,0 0,1 0,-1 1,1 0,0 0,0 1,1-1,-9 15,3-3,2-1,0 1,1 1,0 0,2 0,0 0,1 1,-4 36,8-25</inkml:trace>
-</inkml:ink>
-</file>
-
-<file path=ppt/ink/ink24.xml><?xml version="1.0" encoding="utf-8"?>
-<inkml:ink xmlns:inkml="http://www.w3.org/2003/InkML">
-  <inkml:definitions>
-    <inkml:context xml:id="ctx0">
-      <inkml:inkSource xml:id="inkSrc0">
-        <inkml:traceFormat>
-          <inkml:channel name="X" type="integer" min="-2.14748E9" max="2.14748E9" units="cm"/>
-          <inkml:channel name="Y" type="integer" min="-2.14748E9" max="2.14748E9" units="cm"/>
-        </inkml:traceFormat>
-        <inkml:channelProperties>
-          <inkml:channelProperty channel="X" name="resolution" value="1000" units="1/cm"/>
-          <inkml:channelProperty channel="Y" name="resolution" value="1000" units="1/cm"/>
-        </inkml:channelProperties>
-      </inkml:inkSource>
-      <inkml:timestamp xml:id="ts0" timeString="2025-07-16T19:07:43.638"/>
-    </inkml:context>
-    <inkml:brush xml:id="br0">
-      <inkml:brushProperty name="width" value="0.05" units="cm"/>
-      <inkml:brushProperty name="height" value="0.05" units="cm"/>
-      <inkml:brushProperty name="color" value="#E71224"/>
-      <inkml:brushProperty name="ignorePressure" value="1"/>
-    </inkml:brush>
-  </inkml:definitions>
-  <inkml:trace contextRef="#ctx0" brushRef="#br0">205 142,'-1'94,"3"109,-2-200,0 1,1-1,-1 1,1-1,0 0,0 1,0-1,0 0,0 1,1-1,-1 0,1 0,0 0,0-1,0 1,0 0,1-1,3 4,-2-3,0-1,0 0,0 0,0 0,1-1,-1 1,0-1,1 0,-1 0,1-1,-1 1,8-1,8-2,1 0,0-2,0 0,36-13,-36 10,-1-2,0 0,-1-1,0 0,0-2,-1-1,23-20,-19 16,5-6,32-32,48-44,-5 5,-94 85,-2 4,0-1,-1 0,0 0,0-1,4-7,-9 13,1 0,-1 0,1 0,-1 0,0 0,1 0,-1 0,0 0,0 0,0 0,0 0,0 0,0 0,0 0,0 0,0 0,-1 0,1 0,0 0,-1 0,1 0,0 0,-1 0,1 0,-1 0,0 0,1 1,-1-1,0 0,1 0,-1 1,0-1,0 0,0 1,0-1,1 1,-1-1,0 1,0-1,0 1,0 0,0-1,0 1,0 0,0 0,-2 0,-22-4,1 1,0 1,-1 2,1 0,-33 5,35-3,6 1,0 0,0 0,1 2,-1 0,1 1,0 0,1 1,0 1,0 0,0 1,1 1,0 0,1 0,0 2,-18 21,-72 78,-7 10,95-103,2 1,-16 30,-14 22,35-60,-29 43,33-50,0 1,1 0,0 0,0 0,0 0,0 0,1 0,-2 11,4-14,-1 0,0 0,1 0,-1 0,1 0,0 0,0 0,-1-1,1 1,0 0,1 0,-1-1,0 1,0-1,1 1,-1-1,1 1,-1-1,1 0,0 0,-1 0,1 0,0 0,0 0,0 0,0-1,0 1,0 0,0-1,0 0,2 1,11 1,0 0,-1-2,20 0,-22 0,50 0,11 1,88-11,-143 6,1-1,0-1,-1-1,0 0,-1-1,0-1,0-1,-1 0,0-1,-1-1,0-1,-1 0,19-22,-21 19,0-1,-1-1,-2 0,13-29,17-31,-29 68,-7 16,-6 23,-79 225,-8 29,74-229,-2-2,-33 69,22-58,17-38,-1-1,-1 0,-1-2,-2 1,-25 26,34-41,1-2,-1 1,-1-1,1 0,-1-1,0 0,0 0,0-1,-1 0,0-1,0 0,0 0,-19 1,-11 0,1-2,-53-5,31 1,29 2,1-2,-39-7,42 4</inkml:trace>
-</inkml:ink>
-</file>
-
-<file path=ppt/ink/ink25.xml><?xml version="1.0" encoding="utf-8"?>
-<inkml:ink xmlns:inkml="http://www.w3.org/2003/InkML">
-  <inkml:definitions>
-    <inkml:context xml:id="ctx0">
-      <inkml:inkSource xml:id="inkSrc0">
-        <inkml:traceFormat>
-          <inkml:channel name="X" type="integer" min="-2.14748E9" max="2.14748E9" units="cm"/>
-          <inkml:channel name="Y" type="integer" min="-2.14748E9" max="2.14748E9" units="cm"/>
-        </inkml:traceFormat>
-        <inkml:channelProperties>
-          <inkml:channelProperty channel="X" name="resolution" value="1000" units="1/cm"/>
-          <inkml:channelProperty channel="Y" name="resolution" value="1000" units="1/cm"/>
-        </inkml:channelProperties>
-      </inkml:inkSource>
-      <inkml:timestamp xml:id="ts0" timeString="2025-07-16T19:07:44.491"/>
-    </inkml:context>
-    <inkml:brush xml:id="br0">
-      <inkml:brushProperty name="width" value="0.05" units="cm"/>
-      <inkml:brushProperty name="height" value="0.05" units="cm"/>
-      <inkml:brushProperty name="color" value="#E71224"/>
-      <inkml:brushProperty name="ignorePressure" value="1"/>
-    </inkml:brush>
-  </inkml:definitions>
-  <inkml:trace contextRef="#ctx0" brushRef="#br0">1 772,'0'-3,"1"1,0 0,-1 0,1 0,0-1,0 1,0 0,0 0,1 1,-1-1,1 0,-1 0,1 0,-1 1,1-1,0 1,2-2,41-26,-30 20,132-102,-6 5,209-140,-297 208,-33 25,-1-2,0 0,-1-1,23-25,-16 15,-20 21,0 1,0-1,0-1,-1 1,0-1,0 0,4-6,-8 11,0 1,0-1,0 0,0 0,0 1,0-1,-1 0,1 1,0-1,0 0,0 1,-1-1,1 0,0 1,-1-1,1 1,0-1,-1 0,1 1,-1-1,1 1,-1-1,1 1,-1-1,1 1,-1 0,1-1,-1 1,0 0,1-1,-1 1,0 0,1 0,-1 0,0-1,1 1,-1 0,0 0,0 0,1 0,-2 0,-36-2,33 2,-4-1,-91 4,89-2,-1 1,1 0,-1 1,1 0,0 1,-16 7,-4 7,1 0,0 3,2 0,1 2,0 0,2 2,-26 32,41-44,1 1,0-1,-7 16,-8 15,11-23,2 1,0 1,2 0,0 0,2 1,0 0,-4 39,6-18,1-1,3 1,5 59,-4-99,0-1,1 0,0 0,0 1,0-1,1 0,-1 0,1 0,0-1,0 1,0 0,0-1,1 1,0-1,-1 1,1-1,0 0,1-1,-1 1,0 0,1-1,0 0,-1 0,1 0,0 0,0 0,0-1,0 0,6 1,11 2,1-2,-1 0,0-2,38-3,-15 1,3 2,-31 1,0 0,0-2,0 0,0 0,0-2,19-5,-9-3</inkml:trace>
-</inkml:ink>
-</file>
-
-<file path=ppt/ink/ink26.xml><?xml version="1.0" encoding="utf-8"?>
-<inkml:ink xmlns:inkml="http://www.w3.org/2003/InkML">
-  <inkml:definitions>
-    <inkml:context xml:id="ctx0">
-      <inkml:inkSource xml:id="inkSrc0">
-        <inkml:traceFormat>
-          <inkml:channel name="X" type="integer" min="-2.14748E9" max="2.14748E9" units="cm"/>
-          <inkml:channel name="Y" type="integer" min="-2.14748E9" max="2.14748E9" units="cm"/>
-        </inkml:traceFormat>
-        <inkml:channelProperties>
-          <inkml:channelProperty channel="X" name="resolution" value="1000" units="1/cm"/>
-          <inkml:channelProperty channel="Y" name="resolution" value="1000" units="1/cm"/>
-        </inkml:channelProperties>
-      </inkml:inkSource>
-      <inkml:timestamp xml:id="ts0" timeString="2025-07-16T19:07:45.686"/>
-    </inkml:context>
-    <inkml:brush xml:id="br0">
-      <inkml:brushProperty name="width" value="0.05" units="cm"/>
-      <inkml:brushProperty name="height" value="0.05" units="cm"/>
-      <inkml:brushProperty name="color" value="#E71224"/>
-      <inkml:brushProperty name="ignorePressure" value="1"/>
-    </inkml:brush>
-  </inkml:definitions>
-  <inkml:trace contextRef="#ctx0" brushRef="#br0">295 231,'-2'0,"0"1,-1 0,1 0,0 0,0 0,0 0,0 0,0 0,0 1,0-1,0 1,0 0,1-1,-1 1,1 0,-3 3,-24 38,25-37,-22 42,2 2,-24 74,11-25,-27 80,53-150,2 1,-8 56,18-156,-3 27,3 1,1-1,2 1,20-76,8 25,-14 44,12-53,-16 42,3 1,31-68,-46 118,1 0,0 1,1 0,0 0,0 0,0 0,1 1,0 0,1 0,0 1,7-6,-12 11,-1 0,0 1,0-1,0 1,0 0,1-1,-1 1,0 0,0 0,1 0,-1 0,0 0,0 0,1 0,-1 0,0 0,0 1,1-1,-1 0,0 1,0-1,0 1,1-1,-1 1,0 0,0-1,0 1,0 0,0 0,-1 0,1 0,0 0,0 0,0 0,-1 0,1 0,-1 0,1 0,-1 1,1-1,0 2,3 6,-1 1,1 0,2 17,-6-26,18 101,-14-69,1 0,2 0,2 0,0-1,27 58,-34-85,1-1,-1 0,1 0,0 0,1 0,-1 0,0-1,1 0,0 1,0-1,0-1,0 1,1 0,-1-1,1 0,-1 0,1-1,0 1,-1-1,10 2,14-1</inkml:trace>
-</inkml:ink>
-</file>
-
 <file path=ppt/ink/ink27.xml><?xml version="1.0" encoding="utf-8"?>
 <inkml:ink xmlns:inkml="http://www.w3.org/2003/InkML">
   <inkml:definitions>
@@ -867,70 +702,20 @@
           <inkml:channelProperty channel="Y" name="resolution" value="1000" units="1/cm"/>
         </inkml:channelProperties>
       </inkml:inkSource>
-      <inkml:timestamp xml:id="ts0" timeString="2025-07-16T19:07:46.705"/>
+      <inkml:timestamp xml:id="ts0" timeString="2025-10-29T15:45:53.482"/>
     </inkml:context>
     <inkml:brush xml:id="br0">
       <inkml:brushProperty name="width" value="0.05" units="cm"/>
       <inkml:brushProperty name="height" value="0.05" units="cm"/>
-      <inkml:brushProperty name="color" value="#E71224"/>
+      <inkml:brushProperty name="color" value="#0B868D"/>
       <inkml:brushProperty name="ignorePressure" value="1"/>
+      <inkml:brushProperty name="inkEffects" value="ocean"/>
+      <inkml:brushProperty name="anchorX" value="-19267.00977"/>
+      <inkml:brushProperty name="anchorY" value="-7361.91113"/>
+      <inkml:brushProperty name="scaleFactor" value="0.5"/>
     </inkml:brush>
   </inkml:definitions>
-  <inkml:trace contextRef="#ctx0" brushRef="#br0">0 298,'0'-5,"0"-5,5-7,1-8,9-5,1-2,4 0,-3-3,-4-1,1 7,-3 2,-2 7</inkml:trace>
-</inkml:ink>
-</file>
-
-<file path=ppt/ink/ink28.xml><?xml version="1.0" encoding="utf-8"?>
-<inkml:ink xmlns:inkml="http://www.w3.org/2003/InkML">
-  <inkml:definitions>
-    <inkml:context xml:id="ctx0">
-      <inkml:inkSource xml:id="inkSrc0">
-        <inkml:traceFormat>
-          <inkml:channel name="X" type="integer" min="-2.14748E9" max="2.14748E9" units="cm"/>
-          <inkml:channel name="Y" type="integer" min="-2.14748E9" max="2.14748E9" units="cm"/>
-        </inkml:traceFormat>
-        <inkml:channelProperties>
-          <inkml:channelProperty channel="X" name="resolution" value="1000" units="1/cm"/>
-          <inkml:channelProperty channel="Y" name="resolution" value="1000" units="1/cm"/>
-        </inkml:channelProperties>
-      </inkml:inkSource>
-      <inkml:timestamp xml:id="ts0" timeString="2025-07-16T19:07:47.435"/>
-    </inkml:context>
-    <inkml:brush xml:id="br0">
-      <inkml:brushProperty name="width" value="0.05" units="cm"/>
-      <inkml:brushProperty name="height" value="0.05" units="cm"/>
-      <inkml:brushProperty name="color" value="#E71224"/>
-      <inkml:brushProperty name="ignorePressure" value="1"/>
-    </inkml:brush>
-  </inkml:definitions>
-  <inkml:trace contextRef="#ctx0" brushRef="#br0">1 268,'9'-4,"7"-7,2-5,-3-9,1-5,-3-2,1 5,-1 2,-4-4,6 4,1 1,-3 4</inkml:trace>
-</inkml:ink>
-</file>
-
-<file path=ppt/ink/ink29.xml><?xml version="1.0" encoding="utf-8"?>
-<inkml:ink xmlns:inkml="http://www.w3.org/2003/InkML">
-  <inkml:definitions>
-    <inkml:context xml:id="ctx0">
-      <inkml:inkSource xml:id="inkSrc0">
-        <inkml:traceFormat>
-          <inkml:channel name="X" type="integer" min="-2.14748E9" max="2.14748E9" units="cm"/>
-          <inkml:channel name="Y" type="integer" min="-2.14748E9" max="2.14748E9" units="cm"/>
-        </inkml:traceFormat>
-        <inkml:channelProperties>
-          <inkml:channelProperty channel="X" name="resolution" value="1000" units="1/cm"/>
-          <inkml:channelProperty channel="Y" name="resolution" value="1000" units="1/cm"/>
-        </inkml:channelProperties>
-      </inkml:inkSource>
-      <inkml:timestamp xml:id="ts0" timeString="2025-07-16T19:07:50.971"/>
-    </inkml:context>
-    <inkml:brush xml:id="br0">
-      <inkml:brushProperty name="width" value="0.05" units="cm"/>
-      <inkml:brushProperty name="height" value="0.05" units="cm"/>
-      <inkml:brushProperty name="color" value="#E71224"/>
-      <inkml:brushProperty name="ignorePressure" value="1"/>
-    </inkml:brush>
-  </inkml:definitions>
-  <inkml:trace contextRef="#ctx0" brushRef="#br0">1 85,'18'0,"0"1,0 0,0 1,0 1,0 1,-1 0,0 1,1 1,27 14,-4-1,0-2,1-1,0-3,1-1,71 9,-17-11,146-4,-147-5,69-4,-160 2,0 0,0 0,1 0,-1-1,-1 0,1 0,0-1,0 1,-1-1,1 0,-1 0,0-1,0 1,0-1,-1 0,1 0,-1 0,0 0,0 0,3-6,5-12,-1 1,0-1,7-26,-12 31,4-9,-2 5</inkml:trace>
+  <inkml:trace contextRef="#ctx0" brushRef="#br0">1911 10877,'0'0,"5"4,6 8,21 4,15 10,20 3,10-3,17 0,18-1,22 11,30 0,30 11,33-1,36 3,36 6,24-4,37-4,26 5,25-6,24-3,23-1,24 2,25-4,19 8,26-3,15 8,22 1,22 6,19 1,20-6,16 4,17-1,2 3,-1-5,1 4,-5-7,-11-6,-15-7,-9 0,-13-10,-9-2,-7-8,-16-7,-13-5,-18-4,-15-3,-16-2,-14 0,-10 0,-19 0,-8 0,-14-5,-14-5,-8-5,-15-5,-13-8,-21-2,-14-7,-11-10,-16-4,-15-9,-17-1,-20-5,-21 1,-25-3,-19 3,-26-8,-22-3,-22 4,-18-2,-12 5,-14-1,-11 5,-6-3,-11 4,-8-2,-12 3,-4 7,-9-2,-1 3,-4-5,2 6,-3-4,3 1,-2 6,-3-4,-2 1,3-5,-7 5,-2-5,-1 2,-6-5,0 1,0-4,-4 2,2-3,6 2,-2-3,-5 3,7-3,-4 3,6-3,-4 3,2-2,-1 2,-4-2,1 2,1-3,-5 9,-3 2,-4-2,1 1,-1-4,-3-10,-6 1,-3-4,-6-1,5-2,-4-6,2-1,-4-5,-5 0,-3 2,-4-4,-1-8,-3-8,0-10,-6-6,-6-10,-5-14,-15-7,-8-5,-13-2,-5 4,-12-4,-11 1,-5-1,-7 6,-10 6,-10 1,-7-5,-7 2,-3-2,-8 0,-12-2,-6 4,-9-5,-13-2,-16 0,-21-12,-17 0,-15 0,-10 3,-12-3,-9 2,-16 3,-12 2,-12-4,-5 2,-8 1,-4 7,-5 7,-8 7,-2 5,-11 4,-5 3,-3 5,-3 7,4 11,1 9,0 3,-1 12,6 4,-2 8,0 12,-1 2,3 8,-1 7,-1 1,9 6,4 3,-2 3,9-3,1 1,6 2,12 6,5 1,9 7,12 5,12-6,9 4,7 1,10 5,14 2,11 3,16 1,7 2,11 1,1-1,5 1,4-1,3 1,-3-1,1 5,-10 1,-10-1,-3 5,-9-1,-10-1,-5-3,-9-1,-6-2,-5-1,-9 0,-3-2,-1 1,1 0,1-1,1 1,1 0,2 0,0 0,6 0,0 0,5-11,10-5,5-1,2-2,2-3,11 4,5-7,4-1,3 4,7-1,1 6,4 4,6 0,8 3,8 3,8-8,11 2,9 1,7 3,6 3,9 2,7 2,7 2,9-6,4 1,1 0,11 1,4 1,-1 1,7 1,1 1,7 0,0 0,5 0,9 0,-7 1,-3-1,1 0,-3 0,-3 0,-8 0,-7 5,-8 1,1 0,1-2,9 0,-3 3,-1 5,-5 4,-10 0,2 7,-8 3,-6 1,-6 2,-5 5,-4-1,-1 1,-13-3,0 5,-1-2,3-1,3-2,12 4,9-1,6-1,4 8,14 0,6 3,11 8,4 3,12 7,47-44,-23 36,-5 24,3 14,4 23,3 16,3 20,6 19,8 22,5 12,5 19,3 15,2 13,0 7,2 6,-1 13,5 6,16 7,5 2,15 7,7 0,10 0,3 9,11-2,9-1,4 7,12 2,10-3,9 2,18 0,11-4,13 6,16-4,8-9,11-10,1-15,6-14,10-21,2-24,7-16,7-17,4-12,10-14,-46-37</inkml:trace>
 </inkml:ink>
 </file>
 
@@ -948,286 +733,20 @@
           <inkml:channelProperty channel="Y" name="resolution" value="1000" units="1/cm"/>
         </inkml:channelProperties>
       </inkml:inkSource>
-      <inkml:timestamp xml:id="ts0" timeString="2025-07-16T18:58:50.487"/>
+      <inkml:timestamp xml:id="ts0" timeString="2025-10-29T15:29:57.677"/>
     </inkml:context>
     <inkml:brush xml:id="br0">
       <inkml:brushProperty name="width" value="0.05" units="cm"/>
       <inkml:brushProperty name="height" value="0.05" units="cm"/>
-      <inkml:brushProperty name="color" value="#E71224"/>
+      <inkml:brushProperty name="color" value="#0B868D"/>
       <inkml:brushProperty name="ignorePressure" value="1"/>
+      <inkml:brushProperty name="inkEffects" value="ocean"/>
+      <inkml:brushProperty name="anchorX" value="1820.4342"/>
+      <inkml:brushProperty name="anchorY" value="-757.75031"/>
+      <inkml:brushProperty name="scaleFactor" value="0.5"/>
     </inkml:brush>
   </inkml:definitions>
-  <inkml:trace contextRef="#ctx0" brushRef="#br0">0 0,'0'0</inkml:trace>
-</inkml:ink>
-</file>
-
-<file path=ppt/ink/ink30.xml><?xml version="1.0" encoding="utf-8"?>
-<inkml:ink xmlns:inkml="http://www.w3.org/2003/InkML">
-  <inkml:definitions>
-    <inkml:context xml:id="ctx0">
-      <inkml:inkSource xml:id="inkSrc0">
-        <inkml:traceFormat>
-          <inkml:channel name="X" type="integer" min="-2.14748E9" max="2.14748E9" units="cm"/>
-          <inkml:channel name="Y" type="integer" min="-2.14748E9" max="2.14748E9" units="cm"/>
-        </inkml:traceFormat>
-        <inkml:channelProperties>
-          <inkml:channelProperty channel="X" name="resolution" value="1000" units="1/cm"/>
-          <inkml:channelProperty channel="Y" name="resolution" value="1000" units="1/cm"/>
-        </inkml:channelProperties>
-      </inkml:inkSource>
-      <inkml:timestamp xml:id="ts0" timeString="2025-07-16T19:07:53.387"/>
-    </inkml:context>
-    <inkml:brush xml:id="br0">
-      <inkml:brushProperty name="width" value="0.05" units="cm"/>
-      <inkml:brushProperty name="height" value="0.05" units="cm"/>
-      <inkml:brushProperty name="color" value="#E71224"/>
-      <inkml:brushProperty name="ignorePressure" value="1"/>
-    </inkml:brush>
-  </inkml:definitions>
-  <inkml:trace contextRef="#ctx0" brushRef="#br0">1 0,'1'5,"1"-1,-1 1,1-1,0 1,0-1,1 0,5 7,2 7,-4-8,-1 0,1 0,0 0,1-1,1 0,-1 0,1-1,0 0,1-1,0 1,16 8,-13-9,0-1,1-1,-1 0,1-1,0-1,0 0,1 0,-1-1,24 0,293-3,-129 0,-189 1,0 0,0-1,1-1,-1 0,18-5,-24 5,-1 0,1-1,-1 0,0 0,0 0,0 0,0-1,-1 0,1 0,-1 0,0-1,0 1,4-7,-7 8,14-17,-2-1,18-38,-20 31</inkml:trace>
-</inkml:ink>
-</file>
-
-<file path=ppt/ink/ink31.xml><?xml version="1.0" encoding="utf-8"?>
-<inkml:ink xmlns:inkml="http://www.w3.org/2003/InkML">
-  <inkml:definitions>
-    <inkml:context xml:id="ctx0">
-      <inkml:inkSource xml:id="inkSrc0">
-        <inkml:traceFormat>
-          <inkml:channel name="X" type="integer" min="-2.14748E9" max="2.14748E9" units="cm"/>
-          <inkml:channel name="Y" type="integer" min="-2.14748E9" max="2.14748E9" units="cm"/>
-        </inkml:traceFormat>
-        <inkml:channelProperties>
-          <inkml:channelProperty channel="X" name="resolution" value="1000" units="1/cm"/>
-          <inkml:channelProperty channel="Y" name="resolution" value="1000" units="1/cm"/>
-        </inkml:channelProperties>
-      </inkml:inkSource>
-      <inkml:timestamp xml:id="ts0" timeString="2025-07-16T19:07:55.257"/>
-    </inkml:context>
-    <inkml:brush xml:id="br0">
-      <inkml:brushProperty name="width" value="0.05" units="cm"/>
-      <inkml:brushProperty name="height" value="0.05" units="cm"/>
-      <inkml:brushProperty name="color" value="#E71224"/>
-      <inkml:brushProperty name="ignorePressure" value="1"/>
-    </inkml:brush>
-  </inkml:definitions>
-  <inkml:trace contextRef="#ctx0" brushRef="#br0">0 283,'368'0,"-360"1,-1-2,0 1,0-1,1 0,-1 0,0-1,0 0,0 0,-1-1,1 0,0 0,-1-1,0 1,0-1,0-1,0 1,-1-1,0 0,0 0,0-1,0 1,-1-1,0 0,3-7,25-46,-24 46,0-1,-1-1,0 0,-1 0,8-29,-13 28,-6 13,-10 23,5 3</inkml:trace>
-</inkml:ink>
-</file>
-
-<file path=ppt/ink/ink32.xml><?xml version="1.0" encoding="utf-8"?>
-<inkml:ink xmlns:inkml="http://www.w3.org/2003/InkML">
-  <inkml:definitions>
-    <inkml:context xml:id="ctx0">
-      <inkml:inkSource xml:id="inkSrc0">
-        <inkml:traceFormat>
-          <inkml:channel name="X" type="integer" min="-2.14748E9" max="2.14748E9" units="cm"/>
-          <inkml:channel name="Y" type="integer" min="-2.14748E9" max="2.14748E9" units="cm"/>
-        </inkml:traceFormat>
-        <inkml:channelProperties>
-          <inkml:channelProperty channel="X" name="resolution" value="1000" units="1/cm"/>
-          <inkml:channelProperty channel="Y" name="resolution" value="1000" units="1/cm"/>
-        </inkml:channelProperties>
-      </inkml:inkSource>
-      <inkml:timestamp xml:id="ts0" timeString="2025-07-16T19:08:00.720"/>
-    </inkml:context>
-    <inkml:brush xml:id="br0">
-      <inkml:brushProperty name="width" value="0.05" units="cm"/>
-      <inkml:brushProperty name="height" value="0.05" units="cm"/>
-      <inkml:brushProperty name="color" value="#E71224"/>
-      <inkml:brushProperty name="ignorePressure" value="1"/>
-    </inkml:brush>
-  </inkml:definitions>
-  <inkml:trace contextRef="#ctx0" brushRef="#br0">1 1,'9'0,"7"0,10 0,1 0</inkml:trace>
-</inkml:ink>
-</file>
-
-<file path=ppt/ink/ink33.xml><?xml version="1.0" encoding="utf-8"?>
-<inkml:ink xmlns:inkml="http://www.w3.org/2003/InkML">
-  <inkml:definitions>
-    <inkml:context xml:id="ctx0">
-      <inkml:inkSource xml:id="inkSrc0">
-        <inkml:traceFormat>
-          <inkml:channel name="X" type="integer" min="-2.14748E9" max="2.14748E9" units="cm"/>
-          <inkml:channel name="Y" type="integer" min="-2.14748E9" max="2.14748E9" units="cm"/>
-        </inkml:traceFormat>
-        <inkml:channelProperties>
-          <inkml:channelProperty channel="X" name="resolution" value="1000" units="1/cm"/>
-          <inkml:channelProperty channel="Y" name="resolution" value="1000" units="1/cm"/>
-        </inkml:channelProperties>
-      </inkml:inkSource>
-      <inkml:timestamp xml:id="ts0" timeString="2025-07-16T19:08:01.951"/>
-    </inkml:context>
-    <inkml:brush xml:id="br0">
-      <inkml:brushProperty name="width" value="0.05" units="cm"/>
-      <inkml:brushProperty name="height" value="0.05" units="cm"/>
-      <inkml:brushProperty name="color" value="#E71224"/>
-      <inkml:brushProperty name="ignorePressure" value="1"/>
-    </inkml:brush>
-  </inkml:definitions>
-  <inkml:trace contextRef="#ctx0" brushRef="#br0">362 0,'-4'0,"-11"0,-7 0,-4 0,-3 0,-5 0,-1 0,1 0,1 0,-2 0,4 5,4 1,5 9,8 2</inkml:trace>
-</inkml:ink>
-</file>
-
-<file path=ppt/ink/ink34.xml><?xml version="1.0" encoding="utf-8"?>
-<inkml:ink xmlns:inkml="http://www.w3.org/2003/InkML">
-  <inkml:definitions>
-    <inkml:context xml:id="ctx0">
-      <inkml:inkSource xml:id="inkSrc0">
-        <inkml:traceFormat>
-          <inkml:channel name="X" type="integer" min="-2.14748E9" max="2.14748E9" units="cm"/>
-          <inkml:channel name="Y" type="integer" min="-2.14748E9" max="2.14748E9" units="cm"/>
-        </inkml:traceFormat>
-        <inkml:channelProperties>
-          <inkml:channelProperty channel="X" name="resolution" value="1000" units="1/cm"/>
-          <inkml:channelProperty channel="Y" name="resolution" value="1000" units="1/cm"/>
-        </inkml:channelProperties>
-      </inkml:inkSource>
-      <inkml:timestamp xml:id="ts0" timeString="2025-07-16T19:08:41.704"/>
-    </inkml:context>
-    <inkml:brush xml:id="br0">
-      <inkml:brushProperty name="width" value="0.05" units="cm"/>
-      <inkml:brushProperty name="height" value="0.05" units="cm"/>
-      <inkml:brushProperty name="color" value="#E71224"/>
-      <inkml:brushProperty name="ignorePressure" value="1"/>
-    </inkml:brush>
-  </inkml:definitions>
-  <inkml:trace contextRef="#ctx0" brushRef="#br0">8 56,'15'1,"-1"1,0 1,0 0,0 1,0 1,-1 0,26 13,26 10,93 14,-28-10,-119-28,-1-2,0 1,1-2,-1 1,1-1,15-1,-21 0,0-1,0 0,0 0,-1 0,1-1,0 1,-1-1,1 0,-1 0,0-1,0 1,1-1,-2 0,1 0,0-1,3-3,12-12,1 1,1 1,42-26,17-14,-65 40,-15 17,0 0,-1-1,1 1,0 0,-1 0,1 0,0-1,-1 1,1 0,0 0,-1 0,1 0,0 0,-1 0,1 0,-1 0,1 0,0 0,-1 0,1 0,0 0,-1 0,1 0,-1 0,1 0,0 1,-1-1,1 0,-1 0,-40 18,24-8,0 1,1 1,1 0,0 1,-25 30,5-6,-62 54,63-65,0-2,-2-2,-45 21,59-32,-2 0,1-2,-1-1,-1-1,-25 4,35-8,0-1,0-1,0 0,0-1,0-1,0 0,0-1,0-1,-24-7,35 8,1 1,0-1,0 0,1 0,-1 0,0 0,1 0,-1-1,1 1,0-1,-1 1,1-1,1 0,-1 0,0 0,1 0,-1 0,1-1,0 1,0 0,0-1,1 1,-1-5,-1-11,1 1,1-1,3-23,-2 11,-1-2,3-44,-3 72,0 1,1 0,0 0,0 0,0 0,0 1,1-1,0 0,0 0,0 1,0-1,0 1,1 0,4-6,-5 8,0-1,1 1,-1-1,1 1,-1 0,1 0,-1 0,1 0,0 1,-1-1,1 1,0-1,-1 1,1 0,4 1,16 2</inkml:trace>
-</inkml:ink>
-</file>
-
-<file path=ppt/ink/ink35.xml><?xml version="1.0" encoding="utf-8"?>
-<inkml:ink xmlns:inkml="http://www.w3.org/2003/InkML">
-  <inkml:definitions>
-    <inkml:context xml:id="ctx0">
-      <inkml:inkSource xml:id="inkSrc0">
-        <inkml:traceFormat>
-          <inkml:channel name="X" type="integer" min="-2.14748E9" max="2.14748E9" units="cm"/>
-          <inkml:channel name="Y" type="integer" min="-2.14748E9" max="2.14748E9" units="cm"/>
-        </inkml:traceFormat>
-        <inkml:channelProperties>
-          <inkml:channelProperty channel="X" name="resolution" value="1000" units="1/cm"/>
-          <inkml:channelProperty channel="Y" name="resolution" value="1000" units="1/cm"/>
-        </inkml:channelProperties>
-      </inkml:inkSource>
-      <inkml:timestamp xml:id="ts0" timeString="2025-07-16T19:07:08.224"/>
-    </inkml:context>
-    <inkml:brush xml:id="br0">
-      <inkml:brushProperty name="width" value="0.05" units="cm"/>
-      <inkml:brushProperty name="height" value="0.05" units="cm"/>
-      <inkml:brushProperty name="color" value="#E71224"/>
-      <inkml:brushProperty name="ignorePressure" value="1"/>
-    </inkml:brush>
-  </inkml:definitions>
-  <inkml:trace contextRef="#ctx0" brushRef="#br0">0 65,'5'0,"5"0,6 0,9 0,5 0,2 0,0 0,3 0,1 0,-2 0,-2 0,-6 0,1 0,-4-9,-1-2,-5-5,0 0,-4 4</inkml:trace>
-</inkml:ink>
-</file>
-
-<file path=ppt/ink/ink36.xml><?xml version="1.0" encoding="utf-8"?>
-<inkml:ink xmlns:inkml="http://www.w3.org/2003/InkML">
-  <inkml:definitions>
-    <inkml:context xml:id="ctx0">
-      <inkml:inkSource xml:id="inkSrc0">
-        <inkml:traceFormat>
-          <inkml:channel name="X" type="integer" min="-2.14748E9" max="2.14748E9" units="cm"/>
-          <inkml:channel name="Y" type="integer" min="-2.14748E9" max="2.14748E9" units="cm"/>
-        </inkml:traceFormat>
-        <inkml:channelProperties>
-          <inkml:channelProperty channel="X" name="resolution" value="1000" units="1/cm"/>
-          <inkml:channelProperty channel="Y" name="resolution" value="1000" units="1/cm"/>
-        </inkml:channelProperties>
-      </inkml:inkSource>
-      <inkml:timestamp xml:id="ts0" timeString="2025-07-16T19:07:10.014"/>
-    </inkml:context>
-    <inkml:brush xml:id="br0">
-      <inkml:brushProperty name="width" value="0.05" units="cm"/>
-      <inkml:brushProperty name="height" value="0.05" units="cm"/>
-      <inkml:brushProperty name="color" value="#E71224"/>
-      <inkml:brushProperty name="ignorePressure" value="1"/>
-    </inkml:brush>
-  </inkml:definitions>
-  <inkml:trace contextRef="#ctx0" brushRef="#br0">1 22,'4'0,"11"0,7 0,5 0,2 0,5 0,1 0,-1 0,-1 0,-7-5,2-1,-1 0,-8 1,-7 7,-11 2,-10 5,-3 1</inkml:trace>
-</inkml:ink>
-</file>
-
-<file path=ppt/ink/ink37.xml><?xml version="1.0" encoding="utf-8"?>
-<inkml:ink xmlns:inkml="http://www.w3.org/2003/InkML">
-  <inkml:definitions>
-    <inkml:context xml:id="ctx0">
-      <inkml:inkSource xml:id="inkSrc0">
-        <inkml:traceFormat>
-          <inkml:channel name="X" type="integer" min="-2.14748E9" max="2.14748E9" units="cm"/>
-          <inkml:channel name="Y" type="integer" min="-2.14748E9" max="2.14748E9" units="cm"/>
-        </inkml:traceFormat>
-        <inkml:channelProperties>
-          <inkml:channelProperty channel="X" name="resolution" value="1000" units="1/cm"/>
-          <inkml:channelProperty channel="Y" name="resolution" value="1000" units="1/cm"/>
-        </inkml:channelProperties>
-      </inkml:inkSource>
-      <inkml:timestamp xml:id="ts0" timeString="2025-07-16T19:08:53.728"/>
-    </inkml:context>
-    <inkml:brush xml:id="br0">
-      <inkml:brushProperty name="width" value="0.05" units="cm"/>
-      <inkml:brushProperty name="height" value="0.05" units="cm"/>
-      <inkml:brushProperty name="color" value="#E71224"/>
-      <inkml:brushProperty name="ignorePressure" value="1"/>
-    </inkml:brush>
-  </inkml:definitions>
-  <inkml:trace contextRef="#ctx0" brushRef="#br0">0 0,'7'1,"-1"0,0 0,0 1,0-1,0 1,0 1,-1-1,1 1,0 0,-1 0,0 1,0-1,5 6,10 8,28 34,-19-17,-1 2,30 53,36 84,-45-81,49 121,-57-118,-20-34,-17-47,1 0,0 0,12 23,-17-37,0 0,0 0,0 0,0 1,0-1,0 0,0 0,0 0,0 0,0 0,0 0,0 0,0 0,0 0,0 0,0 1,0-1,0 0,1 0,-1 0,0 0,0 0,0 0,0 0,0 0,0 0,0 0,0 0,0 0,0 0,0 0,0 0,1 0,-1 1,0-1,0 0,0 0,0 0,0 0,0 0,0 0,0 0,0 0,1 0,-1 0,0-1,0 1,0 0,0 0,0 0,0 0,0 0,0 0,0 0,0 0,0 0,1 0,-1 0,0 0,0 0,0 0,0 0,0 0,0 0,0-1,1-8,-2-13,-5-7</inkml:trace>
-</inkml:ink>
-</file>
-
-<file path=ppt/ink/ink38.xml><?xml version="1.0" encoding="utf-8"?>
-<inkml:ink xmlns:inkml="http://www.w3.org/2003/InkML">
-  <inkml:definitions>
-    <inkml:context xml:id="ctx0">
-      <inkml:inkSource xml:id="inkSrc0">
-        <inkml:traceFormat>
-          <inkml:channel name="X" type="integer" min="-2.14748E9" max="2.14748E9" units="cm"/>
-          <inkml:channel name="Y" type="integer" min="-2.14748E9" max="2.14748E9" units="cm"/>
-        </inkml:traceFormat>
-        <inkml:channelProperties>
-          <inkml:channelProperty channel="X" name="resolution" value="1000" units="1/cm"/>
-          <inkml:channelProperty channel="Y" name="resolution" value="1000" units="1/cm"/>
-        </inkml:channelProperties>
-      </inkml:inkSource>
-      <inkml:timestamp xml:id="ts0" timeString="2025-07-16T19:08:54.055"/>
-    </inkml:context>
-    <inkml:brush xml:id="br0">
-      <inkml:brushProperty name="width" value="0.05" units="cm"/>
-      <inkml:brushProperty name="height" value="0.05" units="cm"/>
-      <inkml:brushProperty name="color" value="#E71224"/>
-      <inkml:brushProperty name="ignorePressure" value="1"/>
-    </inkml:brush>
-  </inkml:definitions>
-  <inkml:trace contextRef="#ctx0" brushRef="#br0">0 1,'0'9,"0"12,0 7,0-1</inkml:trace>
-</inkml:ink>
-</file>
-
-<file path=ppt/ink/ink39.xml><?xml version="1.0" encoding="utf-8"?>
-<inkml:ink xmlns:inkml="http://www.w3.org/2003/InkML">
-  <inkml:definitions>
-    <inkml:context xml:id="ctx0">
-      <inkml:inkSource xml:id="inkSrc0">
-        <inkml:traceFormat>
-          <inkml:channel name="X" type="integer" min="-2.14748E9" max="2.14748E9" units="cm"/>
-          <inkml:channel name="Y" type="integer" min="-2.14748E9" max="2.14748E9" units="cm"/>
-        </inkml:traceFormat>
-        <inkml:channelProperties>
-          <inkml:channelProperty channel="X" name="resolution" value="1000" units="1/cm"/>
-          <inkml:channelProperty channel="Y" name="resolution" value="1000" units="1/cm"/>
-        </inkml:channelProperties>
-      </inkml:inkSource>
-      <inkml:timestamp xml:id="ts0" timeString="2025-07-16T19:08:54.581"/>
-    </inkml:context>
-    <inkml:brush xml:id="br0">
-      <inkml:brushProperty name="width" value="0.05" units="cm"/>
-      <inkml:brushProperty name="height" value="0.05" units="cm"/>
-      <inkml:brushProperty name="color" value="#E71224"/>
-      <inkml:brushProperty name="ignorePressure" value="1"/>
-    </inkml:brush>
-  </inkml:definitions>
-  <inkml:trace contextRef="#ctx0" brushRef="#br0">1 31,'2'34,"2"-1,1 1,13 45,-1-9,23 208,-16-85,-22-181,1 0,0 0,0-1,2 1,5 11,-9-21,0 1,0-1,1 0,-1 0,1 0,-1 0,1 0,0-1,0 1,0 0,0-1,0 1,4 1,-5-3,1 1,0-1,-1 0,1 0,0 0,-1 0,1 0,-1 0,1 0,0 0,-1-1,1 1,-1 0,1-1,0 0,-1 1,0-1,1 0,-1 0,1 0,-1 0,0 0,2-2,2-1,-1-1,0 1,0-1,0 0,0-1,-1 1,0-1,5-11,14-53,-12 35,4-19,9-62,11-47,-27 143,1 1,1 0,0 1,2 0,0 1,1 0,0 0,1 1,1 1,1 0,0 1,28-19,-21 18,0 0,1 1,0 2,2 1,-1 0,1 2,0 1,1 0,38-4,-55 11,-1 0,1 0,-1 1,15 1,-21 0,0-1,1 1,-1-1,0 1,0 0,1 0,-1 0,0 0,0 0,0 1,0-1,0 0,-1 1,1 0,0-1,-1 1,1 0,-1 0,1 0,-1 0,2 4,2 8,0 1,-1-1,0 1,-1 0,2 26,-3 81,-3-79,-1 84,4 113,3-195,15 55,-11-56,7 57,-16-87,1-6,-1-1,1 1,0 0,4 13,-5-20,0-1,0 1,1-1,-1 1,0-1,0 0,0 1,0-1,1 1,-1-1,0 0,0 1,1-1,-1 0,0 1,1-1,-1 0,0 0,1 1,-1-1,0 0,1 0,-1 1,1-1,-1 0,0 0,1 0,-1 0,1 0,-1 0,0 0,1 0,-1 0,1 0,-1 0,1 0,-1 0,1 0,-1 0,0 0,1 0,-1 0,1-1,-1 1,0 0,1 0,-1 0,0-1,1 1,-1 0,0-1,1 1,-1 0,0-1,0 1,1 0,-1-1,0 1,0-1,0 1,1-1,14-26,-14 25,12-29</inkml:trace>
+  <inkml:trace contextRef="#ctx0" brushRef="#br0">596 1244,'0'0,"4"0,18 0,10 0,16 0,16 0,11 0,11 0,4 0,0 0,3 0,10 0,8 0,12 0,8 0,14 0,8 0,-1 0,-1 0,-5 0,-5 0,-3 0,-3 0,-7 0,-12 0,-6 0,-5 0,-2-6,-5 1,-1-6,6-4,2 1,2-8,-4-3,-6-2,-1-2,-9-4,-4 4,-14 2,-8 0,0 1,-8 6,2-6,-5 1,-1-2,0 5,-5 0,-4-5,-5 4,1 4,-2 1,-1-1,-3 4,4-1,-1 3,0-8,-3 3,-5-2,2 4,1-1,-1 3,-4-2,-1 4,5 3,-10 3,-10 2,-10-8,-15 0,-12 1,-16-2,-7 1,-10-2,-1 2,-6 3,3-3,-3 3,3-9,-2 2,-2 2,-2-2,2 4,-1 2,-6 4,2-4,-5 3,-7-4,5 1,1 2,1-8,-4 2,0 1,6-2,1 3,6 3,1-3,5 2,-2 3,4-3,8 1,-8 2,-3 2,1-9,-4 2,3 0,-7 4,-8-4,-3 3,-6 2,-5 2,-5 2,4 1,-3 1,-1-4,-1 0,3 0,0 1,5 1,8 2,5 0,8 0,2 12,10 5,5 0,4 4,1 1,-5 8,5 2,5-5,-4-1,4 0,5 5,4-5,-6 0,2 0,3-1,-3-4,3 5,3 1,3 1,-3 1,6 5,2-6,2 6,0 9,-5 0,5-2,0-2,0 2,5-4,0 4,-5 2,3-1,0-3,4-4,-1 3,0 3,3-1,-7 2,4-2,3-2,0-3,3 2,9-8,5-26,0-1,-1 1,0-1,1 1,-1 0,1-1,-1 1,1-1,0 1,-1-1,1 0,2 3,15 16,17 0,10-5,11-4,20 1,18 8,15 4,12-3,13 1,10 1,13-5,5-3,-3 4,1-2,-7-4,-5 2,-6-4,-4-2,-3-3,-8-3,-1-1,-5-2,-16 0,-9-1,-14 1,-16-1,-4 1,-11 0,-7-6,-3 1,-4-1,-4-3,-3 0,4 2,-7 1</inkml:trace>
 </inkml:ink>
 </file>
 
@@ -1245,587 +764,24 @@
           <inkml:channelProperty channel="Y" name="resolution" value="1000" units="1/cm"/>
         </inkml:channelProperties>
       </inkml:inkSource>
-      <inkml:timestamp xml:id="ts0" timeString="2025-07-16T18:58:52.560"/>
+      <inkml:timestamp xml:id="ts0" timeString="2025-10-29T15:30:52.823"/>
     </inkml:context>
     <inkml:brush xml:id="br0">
       <inkml:brushProperty name="width" value="0.05" units="cm"/>
       <inkml:brushProperty name="height" value="0.05" units="cm"/>
-      <inkml:brushProperty name="color" value="#E71224"/>
+      <inkml:brushProperty name="color" value="#0B868D"/>
       <inkml:brushProperty name="ignorePressure" value="1"/>
+      <inkml:brushProperty name="inkEffects" value="ocean"/>
+      <inkml:brushProperty name="anchorX" value="833.69916"/>
+      <inkml:brushProperty name="anchorY" value="-1398.98376"/>
+      <inkml:brushProperty name="scaleFactor" value="0.5"/>
     </inkml:brush>
   </inkml:definitions>
-  <inkml:trace contextRef="#ctx0" brushRef="#br0">0 16,'5'0,"5"0,6 0,5 0,7 0,5 0,-1 0,-4-4,-3-2,-6 0</inkml:trace>
-</inkml:ink>
-</file>
-
-<file path=ppt/ink/ink40.xml><?xml version="1.0" encoding="utf-8"?>
-<inkml:ink xmlns:inkml="http://www.w3.org/2003/InkML">
-  <inkml:definitions>
-    <inkml:context xml:id="ctx0">
-      <inkml:inkSource xml:id="inkSrc0">
-        <inkml:traceFormat>
-          <inkml:channel name="X" type="integer" min="-2.14748E9" max="2.14748E9" units="cm"/>
-          <inkml:channel name="Y" type="integer" min="-2.14748E9" max="2.14748E9" units="cm"/>
-        </inkml:traceFormat>
-        <inkml:channelProperties>
-          <inkml:channelProperty channel="X" name="resolution" value="1000" units="1/cm"/>
-          <inkml:channelProperty channel="Y" name="resolution" value="1000" units="1/cm"/>
-        </inkml:channelProperties>
-      </inkml:inkSource>
-      <inkml:timestamp xml:id="ts0" timeString="2025-07-16T19:08:55.097"/>
-    </inkml:context>
-    <inkml:brush xml:id="br0">
-      <inkml:brushProperty name="width" value="0.05" units="cm"/>
-      <inkml:brushProperty name="height" value="0.05" units="cm"/>
-      <inkml:brushProperty name="color" value="#E71224"/>
-      <inkml:brushProperty name="ignorePressure" value="1"/>
-    </inkml:brush>
-  </inkml:definitions>
-  <inkml:trace contextRef="#ctx0" brushRef="#br0">222 1,'0'1357,"-1"-1397,-2 0,-2 1,-11-44,-39-115,35 131,-96-292,114 356,1-1,0 0,1 0,-1 0,0 0,1 0,0 0,0 0,0 0,1 0,-1 0,1 0,0 0,0 0,1 0,-1 1,1-1,-1 0,1 1,4-6,-1 4,-1 1,0 0,1 0,0 1,0-1,0 1,1 0,-1 0,1 1,0 0,-1 0,1 0,6-1,26-3,1 1,-1 2,74 4,17-1,-38-5,202-9,-239 14</inkml:trace>
-</inkml:ink>
-</file>
-
-<file path=ppt/ink/ink41.xml><?xml version="1.0" encoding="utf-8"?>
-<inkml:ink xmlns:inkml="http://www.w3.org/2003/InkML">
-  <inkml:definitions>
-    <inkml:context xml:id="ctx0">
-      <inkml:inkSource xml:id="inkSrc0">
-        <inkml:traceFormat>
-          <inkml:channel name="X" type="integer" min="-2.14748E9" max="2.14748E9" units="cm"/>
-          <inkml:channel name="Y" type="integer" min="-2.14748E9" max="2.14748E9" units="cm"/>
-        </inkml:traceFormat>
-        <inkml:channelProperties>
-          <inkml:channelProperty channel="X" name="resolution" value="1000" units="1/cm"/>
-          <inkml:channelProperty channel="Y" name="resolution" value="1000" units="1/cm"/>
-        </inkml:channelProperties>
-      </inkml:inkSource>
-      <inkml:timestamp xml:id="ts0" timeString="2025-07-16T19:08:57.339"/>
-    </inkml:context>
-    <inkml:brush xml:id="br0">
-      <inkml:brushProperty name="width" value="0.05" units="cm"/>
-      <inkml:brushProperty name="height" value="0.05" units="cm"/>
-      <inkml:brushProperty name="color" value="#E71224"/>
-      <inkml:brushProperty name="ignorePressure" value="1"/>
-    </inkml:brush>
-  </inkml:definitions>
-  <inkml:trace contextRef="#ctx0" brushRef="#br0">1 1,'683'0,"-656"0</inkml:trace>
-</inkml:ink>
-</file>
-
-<file path=ppt/ink/ink42.xml><?xml version="1.0" encoding="utf-8"?>
-<inkml:ink xmlns:inkml="http://www.w3.org/2003/InkML">
-  <inkml:definitions>
-    <inkml:context xml:id="ctx0">
-      <inkml:inkSource xml:id="inkSrc0">
-        <inkml:traceFormat>
-          <inkml:channel name="X" type="integer" min="-2.14748E9" max="2.14748E9" units="cm"/>
-          <inkml:channel name="Y" type="integer" min="-2.14748E9" max="2.14748E9" units="cm"/>
-        </inkml:traceFormat>
-        <inkml:channelProperties>
-          <inkml:channelProperty channel="X" name="resolution" value="1000" units="1/cm"/>
-          <inkml:channelProperty channel="Y" name="resolution" value="1000" units="1/cm"/>
-        </inkml:channelProperties>
-      </inkml:inkSource>
-      <inkml:timestamp xml:id="ts0" timeString="2025-07-16T19:08:57.713"/>
-    </inkml:context>
-    <inkml:brush xml:id="br0">
-      <inkml:brushProperty name="width" value="0.05" units="cm"/>
-      <inkml:brushProperty name="height" value="0.05" units="cm"/>
-      <inkml:brushProperty name="color" value="#E71224"/>
-      <inkml:brushProperty name="ignorePressure" value="1"/>
-    </inkml:brush>
-  </inkml:definitions>
-  <inkml:trace contextRef="#ctx0" brushRef="#br0">1 0,'1042'0,"-1011"0</inkml:trace>
-</inkml:ink>
-</file>
-
-<file path=ppt/ink/ink43.xml><?xml version="1.0" encoding="utf-8"?>
-<inkml:ink xmlns:inkml="http://www.w3.org/2003/InkML">
-  <inkml:definitions>
-    <inkml:context xml:id="ctx0">
-      <inkml:inkSource xml:id="inkSrc0">
-        <inkml:traceFormat>
-          <inkml:channel name="X" type="integer" min="-2.14748E9" max="2.14748E9" units="cm"/>
-          <inkml:channel name="Y" type="integer" min="-2.14748E9" max="2.14748E9" units="cm"/>
-        </inkml:traceFormat>
-        <inkml:channelProperties>
-          <inkml:channelProperty channel="X" name="resolution" value="1000" units="1/cm"/>
-          <inkml:channelProperty channel="Y" name="resolution" value="1000" units="1/cm"/>
-        </inkml:channelProperties>
-      </inkml:inkSource>
-      <inkml:timestamp xml:id="ts0" timeString="2025-07-16T19:08:58.584"/>
-    </inkml:context>
-    <inkml:brush xml:id="br0">
-      <inkml:brushProperty name="width" value="0.05" units="cm"/>
-      <inkml:brushProperty name="height" value="0.05" units="cm"/>
-      <inkml:brushProperty name="color" value="#E71224"/>
-      <inkml:brushProperty name="ignorePressure" value="1"/>
-    </inkml:brush>
-  </inkml:definitions>
-  <inkml:trace contextRef="#ctx0" brushRef="#br0">314 1,'-2'35,"-3"-1,-1 1,-1-1,-2 0,-15 37,6-14,11-36,-1 1,-1-1,-1-1,-1 0,-22 30,26-40,-1 1,-1-2,0 1,0-1,-1 0,0-1,0 0,-1-1,0 0,-1-1,-12 6,23-12,0 1,0 0,0-1,0 1,0-1,0 0,0 1,0-1,-1 0,1 0,0 0,0 1,0-1,0 0,0-1,-1 1,1 0,0 0,0 0,0-1,0 1,0 0,0-1,0 1,0-1,0 0,0 1,0-1,-1-1,1 1,1-1,0 1,0 0,0-1,0 1,0-1,0 1,0-1,0 1,1-1,-1 1,0 0,1-1,-1 1,1 0,0-1,-1 1,1 0,0 0,0 0,0-1,0 1,1-1,4-5,1 1,-1 0,1 0,1 0,-1 1,1 0,0 1,8-4,74-28,-73 30,22-5,0 2,1 1,-1 2,1 2,0 1,0 2,1 2,67 11,-90-9,1 1,-1 0,-1 2,1 0,-1 1,0 0,-1 2,21 13,-29-17,0 1,0 0,-1 1,1 0,-1 0,-1 0,1 1,-1 0,-1 0,1 1,-2 0,1 0,-1 0,0 0,-1 1,4 17,12 51,-14-61,0 1,-1 0,-1 0,1 24,-4-36,0 0,-1 0,1 0,-1 0,-1-1,1 1,-1 0,0 0,-1-1,1 1,-1-1,0 0,0 0,-1 0,1 0,-1 0,-6 4,-2 2,-2 0,0-1,0-1,-1 0,0-1,0 0,-1-1,-19 5,-135 30,-36-10,168-27,36-5,-6 1,-1 0,1 0,0-1,-13-1,19 1,0 0,0-1,0 1,0-1,1 1,-1-1,0 0,0 0,0 0,1 0,-1 0,0 0,1 0,-1-1,1 1,0-1,-1 1,1-1,0 1,0-1,0 0,0 0,-1-2,-5-18</inkml:trace>
-</inkml:ink>
-</file>
-
-<file path=ppt/ink/ink44.xml><?xml version="1.0" encoding="utf-8"?>
-<inkml:ink xmlns:inkml="http://www.w3.org/2003/InkML">
-  <inkml:definitions>
-    <inkml:context xml:id="ctx0">
-      <inkml:inkSource xml:id="inkSrc0">
-        <inkml:traceFormat>
-          <inkml:channel name="X" type="integer" min="-2.14748E9" max="2.14748E9" units="cm"/>
-          <inkml:channel name="Y" type="integer" min="-2.14748E9" max="2.14748E9" units="cm"/>
-        </inkml:traceFormat>
-        <inkml:channelProperties>
-          <inkml:channelProperty channel="X" name="resolution" value="1000" units="1/cm"/>
-          <inkml:channelProperty channel="Y" name="resolution" value="1000" units="1/cm"/>
-        </inkml:channelProperties>
-      </inkml:inkSource>
-      <inkml:timestamp xml:id="ts0" timeString="2025-07-16T19:08:58.912"/>
-    </inkml:context>
-    <inkml:brush xml:id="br0">
-      <inkml:brushProperty name="width" value="0.05" units="cm"/>
-      <inkml:brushProperty name="height" value="0.05" units="cm"/>
-      <inkml:brushProperty name="color" value="#E71224"/>
-      <inkml:brushProperty name="ignorePressure" value="1"/>
-    </inkml:brush>
-  </inkml:definitions>
-  <inkml:trace contextRef="#ctx0" brushRef="#br0">0 30,'0'-1,"0"0,1 1,-1-1,0 0,0 0,0 1,1-1,-1 0,1 1,-1-1,0 0,1 1,-1-1,1 1,-1-1,1 1,-1-1,1 1,0-1,-1 1,1-1,0 1,-1 0,1 0,0-1,-1 1,2 0,23-5,-21 4,105-7,148 8,-115 2,567-1,-663-1</inkml:trace>
-</inkml:ink>
-</file>
-
-<file path=ppt/ink/ink45.xml><?xml version="1.0" encoding="utf-8"?>
-<inkml:ink xmlns:inkml="http://www.w3.org/2003/InkML">
-  <inkml:definitions>
-    <inkml:context xml:id="ctx0">
-      <inkml:inkSource xml:id="inkSrc0">
-        <inkml:traceFormat>
-          <inkml:channel name="X" type="integer" min="-2.14748E9" max="2.14748E9" units="cm"/>
-          <inkml:channel name="Y" type="integer" min="-2.14748E9" max="2.14748E9" units="cm"/>
-        </inkml:traceFormat>
-        <inkml:channelProperties>
-          <inkml:channelProperty channel="X" name="resolution" value="1000" units="1/cm"/>
-          <inkml:channelProperty channel="Y" name="resolution" value="1000" units="1/cm"/>
-        </inkml:channelProperties>
-      </inkml:inkSource>
-      <inkml:timestamp xml:id="ts0" timeString="2025-07-16T19:08:59.285"/>
-    </inkml:context>
-    <inkml:brush xml:id="br0">
-      <inkml:brushProperty name="width" value="0.05" units="cm"/>
-      <inkml:brushProperty name="height" value="0.05" units="cm"/>
-      <inkml:brushProperty name="color" value="#E71224"/>
-      <inkml:brushProperty name="ignorePressure" value="1"/>
-    </inkml:brush>
-  </inkml:definitions>
-  <inkml:trace contextRef="#ctx0" brushRef="#br0">0 0,'0'14,"0"4</inkml:trace>
-</inkml:ink>
-</file>
-
-<file path=ppt/ink/ink46.xml><?xml version="1.0" encoding="utf-8"?>
-<inkml:ink xmlns:inkml="http://www.w3.org/2003/InkML">
-  <inkml:definitions>
-    <inkml:context xml:id="ctx0">
-      <inkml:inkSource xml:id="inkSrc0">
-        <inkml:traceFormat>
-          <inkml:channel name="X" type="integer" min="-2.14748E9" max="2.14748E9" units="cm"/>
-          <inkml:channel name="Y" type="integer" min="-2.14748E9" max="2.14748E9" units="cm"/>
-        </inkml:traceFormat>
-        <inkml:channelProperties>
-          <inkml:channelProperty channel="X" name="resolution" value="1000" units="1/cm"/>
-          <inkml:channelProperty channel="Y" name="resolution" value="1000" units="1/cm"/>
-        </inkml:channelProperties>
-      </inkml:inkSource>
-      <inkml:timestamp xml:id="ts0" timeString="2025-07-16T19:08:59.629"/>
-    </inkml:context>
-    <inkml:brush xml:id="br0">
-      <inkml:brushProperty name="width" value="0.05" units="cm"/>
-      <inkml:brushProperty name="height" value="0.05" units="cm"/>
-      <inkml:brushProperty name="color" value="#E71224"/>
-      <inkml:brushProperty name="ignorePressure" value="1"/>
-    </inkml:brush>
-  </inkml:definitions>
-  <inkml:trace contextRef="#ctx0" brushRef="#br0">437 1,'1'31,"10"54,1 12,-10-56,-1 0,-11 74,6-90,-1-1,-1 0,-2 0,0-1,-1 0,-14 23,-12 11,-2-2,-2-1,-3-3,-2-1,-82 72,59-63</inkml:trace>
-</inkml:ink>
-</file>
-
-<file path=ppt/ink/ink47.xml><?xml version="1.0" encoding="utf-8"?>
-<inkml:ink xmlns:inkml="http://www.w3.org/2003/InkML">
-  <inkml:definitions>
-    <inkml:context xml:id="ctx0">
-      <inkml:inkSource xml:id="inkSrc0">
-        <inkml:traceFormat>
-          <inkml:channel name="X" type="integer" min="-2.14748E9" max="2.14748E9" units="cm"/>
-          <inkml:channel name="Y" type="integer" min="-2.14748E9" max="2.14748E9" units="cm"/>
-        </inkml:traceFormat>
-        <inkml:channelProperties>
-          <inkml:channelProperty channel="X" name="resolution" value="1000" units="1/cm"/>
-          <inkml:channelProperty channel="Y" name="resolution" value="1000" units="1/cm"/>
-        </inkml:channelProperties>
-      </inkml:inkSource>
-      <inkml:timestamp xml:id="ts0" timeString="2025-07-16T19:06:05.102"/>
-    </inkml:context>
-    <inkml:brush xml:id="br0">
-      <inkml:brushProperty name="width" value="0.05" units="cm"/>
-      <inkml:brushProperty name="height" value="0.05" units="cm"/>
-      <inkml:brushProperty name="color" value="#E71224"/>
-      <inkml:brushProperty name="ignorePressure" value="1"/>
-    </inkml:brush>
-  </inkml:definitions>
-  <inkml:trace contextRef="#ctx0" brushRef="#br0">0 1,'761'0,"-743"1,0 1,1 1,-1 1,0 0,17 8,-14-5,0-1,42 6,228-8,-152-7,856 3,-964 0</inkml:trace>
-</inkml:ink>
-</file>
-
-<file path=ppt/ink/ink48.xml><?xml version="1.0" encoding="utf-8"?>
-<inkml:ink xmlns:inkml="http://www.w3.org/2003/InkML">
-  <inkml:definitions>
-    <inkml:context xml:id="ctx0">
-      <inkml:inkSource xml:id="inkSrc0">
-        <inkml:traceFormat>
-          <inkml:channel name="X" type="integer" min="-2.14748E9" max="2.14748E9" units="cm"/>
-          <inkml:channel name="Y" type="integer" min="-2.14748E9" max="2.14748E9" units="cm"/>
-        </inkml:traceFormat>
-        <inkml:channelProperties>
-          <inkml:channelProperty channel="X" name="resolution" value="1000" units="1/cm"/>
-          <inkml:channelProperty channel="Y" name="resolution" value="1000" units="1/cm"/>
-        </inkml:channelProperties>
-      </inkml:inkSource>
-      <inkml:timestamp xml:id="ts0" timeString="2025-07-16T19:06:06.520"/>
-    </inkml:context>
-    <inkml:brush xml:id="br0">
-      <inkml:brushProperty name="width" value="0.05" units="cm"/>
-      <inkml:brushProperty name="height" value="0.05" units="cm"/>
-      <inkml:brushProperty name="color" value="#E71224"/>
-      <inkml:brushProperty name="ignorePressure" value="1"/>
-    </inkml:brush>
-  </inkml:definitions>
-  <inkml:trace contextRef="#ctx0" brushRef="#br0">1 11,'991'0,"-979"0,0 0,22-5,-13-1</inkml:trace>
-</inkml:ink>
-</file>
-
-<file path=ppt/ink/ink49.xml><?xml version="1.0" encoding="utf-8"?>
-<inkml:ink xmlns:inkml="http://www.w3.org/2003/InkML">
-  <inkml:definitions>
-    <inkml:context xml:id="ctx0">
-      <inkml:inkSource xml:id="inkSrc0">
-        <inkml:traceFormat>
-          <inkml:channel name="X" type="integer" min="-2.14748E9" max="2.14748E9" units="cm"/>
-          <inkml:channel name="Y" type="integer" min="-2.14748E9" max="2.14748E9" units="cm"/>
-        </inkml:traceFormat>
-        <inkml:channelProperties>
-          <inkml:channelProperty channel="X" name="resolution" value="1000" units="1/cm"/>
-          <inkml:channelProperty channel="Y" name="resolution" value="1000" units="1/cm"/>
-        </inkml:channelProperties>
-      </inkml:inkSource>
-      <inkml:timestamp xml:id="ts0" timeString="2025-07-16T19:06:09.142"/>
-    </inkml:context>
-    <inkml:brush xml:id="br0">
-      <inkml:brushProperty name="width" value="0.05" units="cm"/>
-      <inkml:brushProperty name="height" value="0.05" units="cm"/>
-      <inkml:brushProperty name="color" value="#E71224"/>
-      <inkml:brushProperty name="ignorePressure" value="1"/>
-    </inkml:brush>
-  </inkml:definitions>
-  <inkml:trace contextRef="#ctx0" brushRef="#br0">270 664,'517'0,"-512"0,0 0,0 0,-1 0,1-1,0 0,0 0,-1 0,1-1,-1 0,1 1,7-6,-10 5,1 0,0-1,-1 1,0-1,1 1,-1-1,0 0,-1 0,1 0,0 0,-1 0,1-1,-1 1,0 0,0-1,-1 1,1-5,3-29,-3 0,-5-68,0 16,4 77,-2 0,1 0,-2 1,1-1,-2 1,-5-15,-36-67,16 36,26 52,0 0,-1 0,1 0,-1 1,0 0,-1-1,1 2,-1-1,1 0,-1 1,0 0,-1 0,1 0,0 1,-1 0,1 0,-1 0,0 0,-9 0,-13-2,1 1,-51 1,70 2,-425 3,427-3,0 0,0 0,0 0,0 1,0 0,0 1,0-1,0 1,-7 3,10-3,1 0,-1 0,1 0,-1 0,1 0,0 1,-1-1,1 1,1-1,-1 1,0 0,1 0,-1 0,1 0,0 0,0 0,0 0,0 0,0 5,-1 12,1 0,1 0,0 0,2 0,0 0,10 38,-6-28,5 61,-12-56,0 25,2-56,-1 0,1 0,-1 0,1 0,0 0,1 0,-1-1,1 1,-1 0,1-1,3 5,-2-5,-1-1,1 0,-1 0,1 0,0 0,0-1,0 1,0-1,0 1,0-1,0 0,1-1,-1 1,0 0,6-1,55 0,-47-1,403-4,-372 5</inkml:trace>
+  <inkml:trace contextRef="#ctx0" brushRef="#br0">27 1,'0'0,"0"9,-5 8,0 5,-1 3,2 7,1 2,1-1,1-1,0 5,6-3,1 0,5-8,-1-2,-1-6</inkml:trace>
 </inkml:ink>
 </file>
 
 <file path=ppt/ink/ink5.xml><?xml version="1.0" encoding="utf-8"?>
-<inkml:ink xmlns:inkml="http://www.w3.org/2003/InkML">
-  <inkml:definitions>
-    <inkml:context xml:id="ctx0">
-      <inkml:inkSource xml:id="inkSrc0">
-        <inkml:traceFormat>
-          <inkml:channel name="X" type="integer" min="-2.14748E9" max="2.14748E9" units="cm"/>
-          <inkml:channel name="Y" type="integer" min="-2.14748E9" max="2.14748E9" units="cm"/>
-        </inkml:traceFormat>
-        <inkml:channelProperties>
-          <inkml:channelProperty channel="X" name="resolution" value="1000" units="1/cm"/>
-          <inkml:channelProperty channel="Y" name="resolution" value="1000" units="1/cm"/>
-        </inkml:channelProperties>
-      </inkml:inkSource>
-      <inkml:timestamp xml:id="ts0" timeString="2025-07-16T18:58:58.867"/>
-    </inkml:context>
-    <inkml:brush xml:id="br0">
-      <inkml:brushProperty name="width" value="0.05" units="cm"/>
-      <inkml:brushProperty name="height" value="0.05" units="cm"/>
-      <inkml:brushProperty name="color" value="#E71224"/>
-      <inkml:brushProperty name="ignorePressure" value="1"/>
-    </inkml:brush>
-  </inkml:definitions>
-  <inkml:trace contextRef="#ctx0" brushRef="#br0">7 196,'21'1,"0"1,37 9,-9-1,149 20,-120-18,-43-6,53 2,276-8,-359 0,0-1,0 1,0-1,0 1,0-2,0 1,0 0,0-1,-1 0,1 0,0 0,-1-1,0 0,1 1,-1-2,0 1,-1 0,1-1,-1 0,1 1,-1-1,0-1,-1 1,1 0,-1-1,1 1,-1-1,-1 0,1 0,-1 0,0 1,0-1,1-10,-2 9,2-7,0-1,-2 0,0 1,-1-15,1 25,-1 0,1 0,-1 0,0 0,0 0,0 0,0 0,0 1,-1-1,1 0,-1 1,0-1,1 1,-1 0,-1-1,1 1,0 0,0 0,-1 0,1 1,-1-1,1 0,-1 1,-3-1,-11-3,-1 2,1 0,-1 1,0 1,0 1,0 0,-26 4,-14 0,-408-2,269-2,191-1,-1 1,1 1,0-1,0 1,0 0,0 0,0 1,0 0,-6 3,9-3,0-1,0 1,1 1,0-1,-1 0,1 0,0 1,0-1,0 1,0 0,1 0,-1 0,1-1,-1 1,1 1,0-1,0 0,1 0,-2 4,-2 55,5-31</inkml:trace>
-</inkml:ink>
-</file>
-
-<file path=ppt/ink/ink50.xml><?xml version="1.0" encoding="utf-8"?>
-<inkml:ink xmlns:inkml="http://www.w3.org/2003/InkML">
-  <inkml:definitions>
-    <inkml:context xml:id="ctx0">
-      <inkml:inkSource xml:id="inkSrc0">
-        <inkml:traceFormat>
-          <inkml:channel name="X" type="integer" min="-2.14748E9" max="2.14748E9" units="cm"/>
-          <inkml:channel name="Y" type="integer" min="-2.14748E9" max="2.14748E9" units="cm"/>
-        </inkml:traceFormat>
-        <inkml:channelProperties>
-          <inkml:channelProperty channel="X" name="resolution" value="1000" units="1/cm"/>
-          <inkml:channelProperty channel="Y" name="resolution" value="1000" units="1/cm"/>
-        </inkml:channelProperties>
-      </inkml:inkSource>
-      <inkml:timestamp xml:id="ts0" timeString="2025-07-16T19:06:21.231"/>
-    </inkml:context>
-    <inkml:brush xml:id="br0">
-      <inkml:brushProperty name="width" value="0.05" units="cm"/>
-      <inkml:brushProperty name="height" value="0.05" units="cm"/>
-      <inkml:brushProperty name="color" value="#E71224"/>
-      <inkml:brushProperty name="ignorePressure" value="1"/>
-    </inkml:brush>
-  </inkml:definitions>
-  <inkml:trace contextRef="#ctx0" brushRef="#br0">1 2170,'54'0,"14"-1,0 2,0 4,88 16,-37 8,142 28,21 11,-35-6,54 14,-107-24,-98-33,0-3,0-5,170-2,-102-8,130-4,-130-20,-143 20,-1-1,0-1,0-1,0-1,29-14,41-13,-26 13,104-49,-79 31,-42 19,74-43,-79 40,1 1,87-29,-16 7,86-29,-167 61,38-18,-41 16,49-15,-19 12,-6 4,-2-3,1-2,55-29,-68 29,0 1,66-17,25-11,-103 34,104-40,-110 45,0 0,0 1,0 2,30-2,-44 5,0 0,0-1,0 0,0 0,-1-1,1 0,-1 0,1-1,-1 0,0 0,0-1,0 0,0 0,-1 0,1-1,-1 0,0-1,-1 1,1-1,-1 0,5-8,1 0,-1-1,-1 0,0 0,-1-1,-1 0,0-1,6-27,14-46,11-47,-35 121,-2 1,0 0,-1-1,0 1,-1-1,-1 1,-1 0,0 0,-1 0,0 0,-1 0,-1 1,0 0,-1 0,-1 1,0-1,0 2,-2-1,-10-11,-24-25,-1 2,-3 1,-69-51,12 29,-2 5,-189-82,185 102,-2 5,-214-42,90 14,165 42,0 4,-80-13,91 24,-156-14,10-2,24 1,-249 18,274 8,136-2,1 1,0 0,0 2,0 1,1 0,-1 2,1 0,0 1,0 2,1 0,-28 17,16-7,-2-1,1-2,-2-1,0-2,-44 11,-56 23,58-16,-103 47,122-44,40-23,-1 0,-21 9,-242 97,224-98,-112 24,160-41,-8 2,1 2,0 0,-20 10,18-8,1 0,-29 8,1-5,-1-1,1 2,1 2,0 1,-46 25,-64 54,139-83,1 1,0 1,1 0,0 1,-20 28,3-4,17-23,0 1,1 0,1 1,0 0,2 1,0 0,0 1,2 0,-6 24,8-28,0 0,-12 24,11-27,1 1,0-1,0 1,-3 20,-8 165,9-151,3 0,2 92,3-113,2 0,2 0,0-1,1 1,1-1,21 46,3-10,52 79,-66-114,-3-4</inkml:trace>
-</inkml:ink>
-</file>
-
-<file path=ppt/ink/ink51.xml><?xml version="1.0" encoding="utf-8"?>
-<inkml:ink xmlns:inkml="http://www.w3.org/2003/InkML">
-  <inkml:definitions>
-    <inkml:context xml:id="ctx0">
-      <inkml:inkSource xml:id="inkSrc0">
-        <inkml:traceFormat>
-          <inkml:channel name="X" type="integer" min="-2.14748E9" max="2.14748E9" units="cm"/>
-          <inkml:channel name="Y" type="integer" min="-2.14748E9" max="2.14748E9" units="cm"/>
-        </inkml:traceFormat>
-        <inkml:channelProperties>
-          <inkml:channelProperty channel="X" name="resolution" value="1000" units="1/cm"/>
-          <inkml:channelProperty channel="Y" name="resolution" value="1000" units="1/cm"/>
-        </inkml:channelProperties>
-      </inkml:inkSource>
-      <inkml:timestamp xml:id="ts0" timeString="2025-07-16T19:06:24.836"/>
-    </inkml:context>
-    <inkml:brush xml:id="br0">
-      <inkml:brushProperty name="width" value="0.05" units="cm"/>
-      <inkml:brushProperty name="height" value="0.05" units="cm"/>
-      <inkml:brushProperty name="color" value="#E71224"/>
-      <inkml:brushProperty name="ignorePressure" value="1"/>
-    </inkml:brush>
-  </inkml:definitions>
-  <inkml:trace contextRef="#ctx0" brushRef="#br0">1 31,'28'-10,"0"-1,30 5,1 2,83 6,-42 0,1097-2,-1157 0</inkml:trace>
-</inkml:ink>
-</file>
-
-<file path=ppt/ink/ink52.xml><?xml version="1.0" encoding="utf-8"?>
-<inkml:ink xmlns:inkml="http://www.w3.org/2003/InkML">
-  <inkml:definitions>
-    <inkml:context xml:id="ctx0">
-      <inkml:inkSource xml:id="inkSrc0">
-        <inkml:traceFormat>
-          <inkml:channel name="X" type="integer" min="-2.14748E9" max="2.14748E9" units="cm"/>
-          <inkml:channel name="Y" type="integer" min="-2.14748E9" max="2.14748E9" units="cm"/>
-        </inkml:traceFormat>
-        <inkml:channelProperties>
-          <inkml:channelProperty channel="X" name="resolution" value="1000" units="1/cm"/>
-          <inkml:channelProperty channel="Y" name="resolution" value="1000" units="1/cm"/>
-        </inkml:channelProperties>
-      </inkml:inkSource>
-      <inkml:timestamp xml:id="ts0" timeString="2025-07-16T19:06:25.691"/>
-    </inkml:context>
-    <inkml:brush xml:id="br0">
-      <inkml:brushProperty name="width" value="0.05" units="cm"/>
-      <inkml:brushProperty name="height" value="0.05" units="cm"/>
-      <inkml:brushProperty name="color" value="#E71224"/>
-      <inkml:brushProperty name="ignorePressure" value="1"/>
-    </inkml:brush>
-  </inkml:definitions>
-  <inkml:trace contextRef="#ctx0" brushRef="#br0">1 1,'11'0,"0"2,-1-1,1 1,14 5,9 1,372 69,193 19,-212-41,184 15,-514-67</inkml:trace>
-</inkml:ink>
-</file>
-
-<file path=ppt/ink/ink53.xml><?xml version="1.0" encoding="utf-8"?>
-<inkml:ink xmlns:inkml="http://www.w3.org/2003/InkML">
-  <inkml:definitions>
-    <inkml:context xml:id="ctx0">
-      <inkml:inkSource xml:id="inkSrc0">
-        <inkml:traceFormat>
-          <inkml:channel name="X" type="integer" min="-2.14748E9" max="2.14748E9" units="cm"/>
-          <inkml:channel name="Y" type="integer" min="-2.14748E9" max="2.14748E9" units="cm"/>
-        </inkml:traceFormat>
-        <inkml:channelProperties>
-          <inkml:channelProperty channel="X" name="resolution" value="1000" units="1/cm"/>
-          <inkml:channelProperty channel="Y" name="resolution" value="1000" units="1/cm"/>
-        </inkml:channelProperties>
-      </inkml:inkSource>
-      <inkml:timestamp xml:id="ts0" timeString="2025-07-16T19:06:29.717"/>
-    </inkml:context>
-    <inkml:brush xml:id="br0">
-      <inkml:brushProperty name="width" value="0.05" units="cm"/>
-      <inkml:brushProperty name="height" value="0.05" units="cm"/>
-      <inkml:brushProperty name="color" value="#E71224"/>
-      <inkml:brushProperty name="ignorePressure" value="1"/>
-    </inkml:brush>
-  </inkml:definitions>
-  <inkml:trace contextRef="#ctx0" brushRef="#br0">0 29,'1'-1,"-1"0,0 1,1-1,-1 0,1 0,-1 0,1 1,0-1,-1 0,1 1,0-1,-1 0,1 1,0-1,0 1,-1-1,1 1,0-1,0 1,0 0,0-1,0 1,0 0,1 0,28-6,-29 6,85-8,144 8,-106 2,-9-2,-87 0</inkml:trace>
-</inkml:ink>
-</file>
-
-<file path=ppt/ink/ink54.xml><?xml version="1.0" encoding="utf-8"?>
-<inkml:ink xmlns:inkml="http://www.w3.org/2003/InkML">
-  <inkml:definitions>
-    <inkml:context xml:id="ctx0">
-      <inkml:inkSource xml:id="inkSrc0">
-        <inkml:traceFormat>
-          <inkml:channel name="X" type="integer" min="-2.14748E9" max="2.14748E9" units="cm"/>
-          <inkml:channel name="Y" type="integer" min="-2.14748E9" max="2.14748E9" units="cm"/>
-        </inkml:traceFormat>
-        <inkml:channelProperties>
-          <inkml:channelProperty channel="X" name="resolution" value="1000" units="1/cm"/>
-          <inkml:channelProperty channel="Y" name="resolution" value="1000" units="1/cm"/>
-        </inkml:channelProperties>
-      </inkml:inkSource>
-      <inkml:timestamp xml:id="ts0" timeString="2025-07-16T19:06:30.123"/>
-    </inkml:context>
-    <inkml:brush xml:id="br0">
-      <inkml:brushProperty name="width" value="0.05" units="cm"/>
-      <inkml:brushProperty name="height" value="0.05" units="cm"/>
-      <inkml:brushProperty name="color" value="#E71224"/>
-      <inkml:brushProperty name="ignorePressure" value="1"/>
-    </inkml:brush>
-  </inkml:definitions>
-  <inkml:trace contextRef="#ctx0" brushRef="#br0">1 0,'4'0,"7"0,14 0,7 0,4 0,8 0,1 0,-1 0,-5 0,4 0,0 0,-2 0,-1 0,-1 0,-3 0,-4 0,2 0,-4 0</inkml:trace>
-</inkml:ink>
-</file>
-
-<file path=ppt/ink/ink55.xml><?xml version="1.0" encoding="utf-8"?>
-<inkml:ink xmlns:inkml="http://www.w3.org/2003/InkML">
-  <inkml:definitions>
-    <inkml:context xml:id="ctx0">
-      <inkml:inkSource xml:id="inkSrc0">
-        <inkml:traceFormat>
-          <inkml:channel name="X" type="integer" min="-2.14748E9" max="2.14748E9" units="cm"/>
-          <inkml:channel name="Y" type="integer" min="-2.14748E9" max="2.14748E9" units="cm"/>
-        </inkml:traceFormat>
-        <inkml:channelProperties>
-          <inkml:channelProperty channel="X" name="resolution" value="1000" units="1/cm"/>
-          <inkml:channelProperty channel="Y" name="resolution" value="1000" units="1/cm"/>
-        </inkml:channelProperties>
-      </inkml:inkSource>
-      <inkml:timestamp xml:id="ts0" timeString="2025-07-16T19:06:30.686"/>
-    </inkml:context>
-    <inkml:brush xml:id="br0">
-      <inkml:brushProperty name="width" value="0.05" units="cm"/>
-      <inkml:brushProperty name="height" value="0.05" units="cm"/>
-      <inkml:brushProperty name="color" value="#E71224"/>
-      <inkml:brushProperty name="ignorePressure" value="1"/>
-    </inkml:brush>
-  </inkml:definitions>
-  <inkml:trace contextRef="#ctx0" brushRef="#br0">337 1,'-3'5,"-1"0,0 1,1 0,0-1,1 1,-1 0,-2 10,-4 9,-8 19,-3-2,-1 0,-2-1,-40 53,20-36,28-36,-1 0,-1-2,-24 24,24-33,17-11,-1 0,1 0,0 0,0 0,0 0,-1 0,1 0,0 0,0 0,-1 0,1 0,0 0,0 0,-1 0,1 0,0 0,0 0,0 0,-1 0,1 0,0 0,0-1,0 1,-1 0,1 0,0 0,0 0,0 0,-1-1,1 1,0 0,0 0,0 0,0-1,0 1,-1 0,1-2,1 0,-1 1,0-1,0 0,1 1,-1-1,1 0,-1 1,1-1,0 1,0-1,-1 1,1-1,0 1,0-1,1 1,0-2,23-22,32-28,2-1,79-78,-117 113</inkml:trace>
-</inkml:ink>
-</file>
-
-<file path=ppt/ink/ink56.xml><?xml version="1.0" encoding="utf-8"?>
-<inkml:ink xmlns:inkml="http://www.w3.org/2003/InkML">
-  <inkml:definitions>
-    <inkml:context xml:id="ctx0">
-      <inkml:inkSource xml:id="inkSrc0">
-        <inkml:traceFormat>
-          <inkml:channel name="X" type="integer" min="-2.14748E9" max="2.14748E9" units="cm"/>
-          <inkml:channel name="Y" type="integer" min="-2.14748E9" max="2.14748E9" units="cm"/>
-        </inkml:traceFormat>
-        <inkml:channelProperties>
-          <inkml:channelProperty channel="X" name="resolution" value="1000" units="1/cm"/>
-          <inkml:channelProperty channel="Y" name="resolution" value="1000" units="1/cm"/>
-        </inkml:channelProperties>
-      </inkml:inkSource>
-      <inkml:timestamp xml:id="ts0" timeString="2025-07-16T19:06:31.010"/>
-    </inkml:context>
-    <inkml:brush xml:id="br0">
-      <inkml:brushProperty name="width" value="0.05" units="cm"/>
-      <inkml:brushProperty name="height" value="0.05" units="cm"/>
-      <inkml:brushProperty name="color" value="#E71224"/>
-      <inkml:brushProperty name="ignorePressure" value="1"/>
-    </inkml:brush>
-  </inkml:definitions>
-  <inkml:trace contextRef="#ctx0" brushRef="#br0">169 1,'0'9,"0"7,0 6,0 4,0 5,0 3,0 0,-9-5,-8-9,-5-7,-3-5,-7-5,-2-3,5-1</inkml:trace>
-</inkml:ink>
-</file>
-
-<file path=ppt/ink/ink57.xml><?xml version="1.0" encoding="utf-8"?>
-<inkml:ink xmlns:inkml="http://www.w3.org/2003/InkML">
-  <inkml:definitions>
-    <inkml:context xml:id="ctx0">
-      <inkml:inkSource xml:id="inkSrc0">
-        <inkml:traceFormat>
-          <inkml:channel name="X" type="integer" min="-2.14748E9" max="2.14748E9" units="cm"/>
-          <inkml:channel name="Y" type="integer" min="-2.14748E9" max="2.14748E9" units="cm"/>
-        </inkml:traceFormat>
-        <inkml:channelProperties>
-          <inkml:channelProperty channel="X" name="resolution" value="1000" units="1/cm"/>
-          <inkml:channelProperty channel="Y" name="resolution" value="1000" units="1/cm"/>
-        </inkml:channelProperties>
-      </inkml:inkSource>
-      <inkml:timestamp xml:id="ts0" timeString="2025-07-16T19:06:31.568"/>
-    </inkml:context>
-    <inkml:brush xml:id="br0">
-      <inkml:brushProperty name="width" value="0.05" units="cm"/>
-      <inkml:brushProperty name="height" value="0.05" units="cm"/>
-      <inkml:brushProperty name="color" value="#E71224"/>
-      <inkml:brushProperty name="ignorePressure" value="1"/>
-    </inkml:brush>
-  </inkml:definitions>
-  <inkml:trace contextRef="#ctx0" brushRef="#br0">0 0,'5'0,"5"0,2 9,2 3,9 0,5-3,1-2,2-3,3-2,-3-1</inkml:trace>
-</inkml:ink>
-</file>
-
-<file path=ppt/ink/ink58.xml><?xml version="1.0" encoding="utf-8"?>
-<inkml:ink xmlns:inkml="http://www.w3.org/2003/InkML">
-  <inkml:definitions>
-    <inkml:context xml:id="ctx0">
-      <inkml:inkSource xml:id="inkSrc0">
-        <inkml:traceFormat>
-          <inkml:channel name="X" type="integer" min="-2.14748E9" max="2.14748E9" units="cm"/>
-          <inkml:channel name="Y" type="integer" min="-2.14748E9" max="2.14748E9" units="cm"/>
-        </inkml:traceFormat>
-        <inkml:channelProperties>
-          <inkml:channelProperty channel="X" name="resolution" value="1000" units="1/cm"/>
-          <inkml:channelProperty channel="Y" name="resolution" value="1000" units="1/cm"/>
-        </inkml:channelProperties>
-      </inkml:inkSource>
-      <inkml:timestamp xml:id="ts0" timeString="2025-07-16T19:06:32.789"/>
-    </inkml:context>
-    <inkml:brush xml:id="br0">
-      <inkml:brushProperty name="width" value="0.05" units="cm"/>
-      <inkml:brushProperty name="height" value="0.05" units="cm"/>
-      <inkml:brushProperty name="color" value="#E71224"/>
-      <inkml:brushProperty name="ignorePressure" value="1"/>
-    </inkml:brush>
-  </inkml:definitions>
-  <inkml:trace contextRef="#ctx0" brushRef="#br0">62 369,'-1'51,"-7"59,4-86,0-1,-2 0,0 0,-17 37,16-47,5-15,10-24,49-106,-40 88,33-63,-49 106,0-1,0 0,0 1,0-1,1 0,-1 1,0-1,1 1,-1 0,1-1,0 1,-1 0,1 0,0 0,0 0,2-1,-3 2,0 0,0 0,0 1,0-1,0 0,0 0,0 0,0 1,0-1,0 0,0 1,0-1,0 1,0-1,0 1,0 0,-1-1,1 1,0 0,0-1,-1 1,1 0,0 0,-1 0,1 0,-1 0,1 0,-1-1,0 1,1 0,-1 0,0 2,6 14,-3-10,-1 0,1 1,0-2,6 11,-7-14,0-1,0 1,0-1,1 0,-1 0,0 0,1 0,-1-1,1 1,0-1,0 1,-1-1,1 0,0 0,3 1,5 0,0-1,0 0,0 0,-1-1,1 0,0-1,0-1,0 1,-1-2,13-3,16-7,51-25,-51 20,62-25,-17 9,155-89,-204 101,-12 9,-1-2,0 0,-1-2,35-34,-54 49,-1 0,1 0,0 0,-1 0,1-1,-1 1,0-1,0 1,0-1,0 1,0-1,-1 0,1 1,-1-1,1-3,-2 5,1-1,0 1,-1 0,1 0,-1 0,1 0,-1 0,1 0,-1 0,0 1,1-1,-1 0,0 0,0 0,0 1,0-1,1 0,-1 1,0-1,0 1,0-1,0 1,-1-1,1 1,0 0,0 0,0-1,0 1,0 0,0 0,0 0,-1 0,1 0,0 0,0 1,0-1,-2 1,-11 1,-1 1,1 1,1 0,-1 1,0 0,1 1,0 0,1 2,-1-1,1 1,1 1,-14 13,-7 9,1 1,-45 61,29-34,29-39,1 1,1 0,-20 37,6-2,8-16,-30 78,48-106,0 1,1 0,0 0,1 0,0 0,1 0,1 0,0 1,1-1,4 24,-4-34,-1 1,1-1,0 0,0 1,1-1,-1 0,1 0,-1 0,1 0,0-1,0 1,0 0,1-1,-1 1,1-1,-1 0,1 0,0 0,4 2,0-1,0-1,0 0,0 0,0 0,1-1,-1-1,0 1,9-1,267-5,-241 4</inkml:trace>
-</inkml:ink>
-</file>
-
-<file path=ppt/ink/ink59.xml><?xml version="1.0" encoding="utf-8"?>
-<inkml:ink xmlns:inkml="http://www.w3.org/2003/InkML">
-  <inkml:definitions>
-    <inkml:context xml:id="ctx0">
-      <inkml:inkSource xml:id="inkSrc0">
-        <inkml:traceFormat>
-          <inkml:channel name="X" type="integer" min="-2.14748E9" max="2.14748E9" units="cm"/>
-          <inkml:channel name="Y" type="integer" min="-2.14748E9" max="2.14748E9" units="cm"/>
-        </inkml:traceFormat>
-        <inkml:channelProperties>
-          <inkml:channelProperty channel="X" name="resolution" value="1000" units="1/cm"/>
-          <inkml:channelProperty channel="Y" name="resolution" value="1000" units="1/cm"/>
-        </inkml:channelProperties>
-      </inkml:inkSource>
-      <inkml:timestamp xml:id="ts0" timeString="2025-07-16T19:06:33.582"/>
-    </inkml:context>
-    <inkml:brush xml:id="br0">
-      <inkml:brushProperty name="width" value="0.05" units="cm"/>
-      <inkml:brushProperty name="height" value="0.05" units="cm"/>
-      <inkml:brushProperty name="color" value="#E71224"/>
-      <inkml:brushProperty name="ignorePressure" value="1"/>
-    </inkml:brush>
-  </inkml:definitions>
-  <inkml:trace contextRef="#ctx0" brushRef="#br0">148 0,'-1'7,"-1"0,0 0,-1-1,1 0,-1 1,-1-1,1 0,-1 0,0-1,-5 7,-7 10,3 2,1 2,1-1,1 2,-12 50,6-19,11-46,0 4,7-14,6-8,91-83,34-27,-89 80,-18 15,0 1,29-18,-28 23</inkml:trace>
-</inkml:ink>
-</file>
-
-<file path=ppt/ink/ink6.xml><?xml version="1.0" encoding="utf-8"?>
 <inkml:ink xmlns:inkml="http://www.w3.org/2003/InkML">
   <inkml:definitions>
     <inkml:context xml:id="ctx0">
@@ -1852,277 +808,7 @@
 </inkml:ink>
 </file>
 
-<file path=ppt/ink/ink60.xml><?xml version="1.0" encoding="utf-8"?>
-<inkml:ink xmlns:inkml="http://www.w3.org/2003/InkML">
-  <inkml:definitions>
-    <inkml:context xml:id="ctx0">
-      <inkml:inkSource xml:id="inkSrc0">
-        <inkml:traceFormat>
-          <inkml:channel name="X" type="integer" min="-2.14748E9" max="2.14748E9" units="cm"/>
-          <inkml:channel name="Y" type="integer" min="-2.14748E9" max="2.14748E9" units="cm"/>
-        </inkml:traceFormat>
-        <inkml:channelProperties>
-          <inkml:channelProperty channel="X" name="resolution" value="1000" units="1/cm"/>
-          <inkml:channelProperty channel="Y" name="resolution" value="1000" units="1/cm"/>
-        </inkml:channelProperties>
-      </inkml:inkSource>
-      <inkml:timestamp xml:id="ts0" timeString="2025-07-16T19:06:33.939"/>
-    </inkml:context>
-    <inkml:brush xml:id="br0">
-      <inkml:brushProperty name="width" value="0.05" units="cm"/>
-      <inkml:brushProperty name="height" value="0.05" units="cm"/>
-      <inkml:brushProperty name="color" value="#E71224"/>
-      <inkml:brushProperty name="ignorePressure" value="1"/>
-    </inkml:brush>
-  </inkml:definitions>
-  <inkml:trace contextRef="#ctx0" brushRef="#br0">0 0,'0'5,"0"5,0 6,0 10,0 4,0 1,0 1,5-5,5-8,6-7,5-5,-1-4</inkml:trace>
-</inkml:ink>
-</file>
-
-<file path=ppt/ink/ink61.xml><?xml version="1.0" encoding="utf-8"?>
-<inkml:ink xmlns:inkml="http://www.w3.org/2003/InkML">
-  <inkml:definitions>
-    <inkml:context xml:id="ctx0">
-      <inkml:inkSource xml:id="inkSrc0">
-        <inkml:traceFormat>
-          <inkml:channel name="X" type="integer" min="-2.14748E9" max="2.14748E9" units="cm"/>
-          <inkml:channel name="Y" type="integer" min="-2.14748E9" max="2.14748E9" units="cm"/>
-        </inkml:traceFormat>
-        <inkml:channelProperties>
-          <inkml:channelProperty channel="X" name="resolution" value="1000" units="1/cm"/>
-          <inkml:channelProperty channel="Y" name="resolution" value="1000" units="1/cm"/>
-        </inkml:channelProperties>
-      </inkml:inkSource>
-      <inkml:timestamp xml:id="ts0" timeString="2025-07-16T19:06:35.543"/>
-    </inkml:context>
-    <inkml:brush xml:id="br0">
-      <inkml:brushProperty name="width" value="0.05" units="cm"/>
-      <inkml:brushProperty name="height" value="0.05" units="cm"/>
-      <inkml:brushProperty name="color" value="#E71224"/>
-      <inkml:brushProperty name="ignorePressure" value="1"/>
-    </inkml:brush>
-  </inkml:definitions>
-  <inkml:trace contextRef="#ctx0" brushRef="#br0">60 344,'0'-5,"1"-1,0 0,0 1,0-1,1 1,0 0,0-1,0 1,5-8,32-45,-18 30,23-24,-36 44,-1 0,1 0,-1 0,-1-1,0 0,0-1,0 1,6-18,-12 26,0 1,1-1,-1 1,0-1,0 0,0 1,0-1,1 1,-1-1,0 0,0 1,0-1,0 0,-1 1,1-1,0 1,0-1,0 0,0 1,-1-1,1 1,0-1,0 1,-1-1,1 1,0-1,-1 1,1-1,-1 1,0-1,0 0,0 1,0 0,-1 0,1 0,0-1,0 1,-1 0,1 0,0 1,0-1,-1 0,1 0,-2 1,-38 18,41-19,-11 8,0 0,0 1,1 0,1 1,-1 0,2 1,-1-1,-9 19,-6 5,14-20,1 0,0 1,2 0,-1 0,2 1,-5 17,10-31,0 0,1 0,0 0,-1 0,1 0,0 0,0 0,0 0,0 0,0 0,1 0,-1 0,1 0,-1 0,1 0,0 0,-1 0,1 0,0 0,0-1,1 1,-1 0,0-1,0 1,1-1,-1 1,1-1,0 0,-1 1,1-1,0 0,-1 0,1 0,0-1,0 1,0 0,0-1,0 1,0-1,2 1,12 1,-1 0,1-1,-1-1,22-2,-15 1,125 1,75-4,-214 3,-1 0,1-1,-1 0,0 0,1 0,-1-1,0 0,0-1,-1 1,1-1,-1 0,0-1,0 0,0 0,-1 0,1-1,5-7,6-11,0-1,-2-1,15-31,-1 0,-20 43,-4 6,0-1,0 1,-1-1,5-13,-8 21,-1 0,0 0,1 0,-1 0,0-1,0 1,1 0,-1 0,0-1,0 1,-1 0,1 0,0-1,0 1,0 0,-1 0,1 0,-1-1,1 1,-1 0,1 0,-1 0,0 0,1 0,-1 0,0 0,0 0,0 0,0 1,0-1,0 0,0 0,0 1,0-1,0 1,0-1,0 1,0-1,-1 1,1 0,-1-1,-2 1,-1-1,1 1,0 0,0 1,0-1,0 1,0-1,0 1,0 0,0 1,0-1,0 1,1-1,-1 1,1 0,-1 1,1-1,0 1,-1-1,1 1,-3 4,-3 2,1 0,0 1,1 0,0 1,-10 19,14-23,-31 74,31-72,0-1,1 1,0 0,1 0,0 0,0 0,1 13,1-19,-1 0,1 0,0 0,-1 0,1 0,1-1,-1 1,0 0,1-1,-1 1,1-1,0 0,0 1,0-1,0 0,0 0,1 0,-1 0,0-1,1 1,0-1,-1 1,1-1,0 0,-1 0,1 0,0 0,6 0,7 2,0-1,0-1,0-1,17-1,-20 0,23 1,-13 0,44-6,-60 5,1-1,-1 0,1 0,-1-1,0 0,0 0,-1-1,1 1,10-10,100-74,-61 47,79-74,-99 80,-36 34,0 0,0 0,0 0,0-1,0 1,0 0,1 0,-1 0,0 0,0 0,0 0,0 0,0 0,0 0,0 0,1 0,-1 0,0-1,0 1,0 0,0 0,0 0,0 0,1 0,-1 0,0 0,0 0,0 0,0 0,0 0,0 0,1 1,-1-1,0 0,0 0,0 0,0 0,0 0,0 0,0 0,0 0,1 0,-1 0,0 0,0 0,0 1,0-1,0 0,0 0,0 0,0 0,0 0,0 0,0 1,0-1,0 0,0 0,0 0,0 0,0 0,0 1,-1 13,-6 16,-2 1,1 1,2 0,1 0,1 1,2 0,3 44,-1-73,0-1,1 1,-1-1,1 0,0 0,0 1,0-1,0 0,0 0,1 0,-1 0,1 0,0 0,0 0,0-1,0 1,0-1,1 0,2 3,-1-3,0 1,1-2,-1 1,0 0,0-1,1 0,-1 0,1 0,-1-1,1 1,-1-1,1 0,6-1,11-1,0-1,0-1,-1-1,1-1,-1-1,22-10,-11 1,-2-1,0-1,31-25,12-11,99-57,-84 55,-89 56,1 0,0 1,0-1,0 1,-1-1,1 0,0 1,0-1,0 1,0-1,0 1,0-1,0 1,0-1,0 0,0 1,0-1,0 1,1-1,-1 1,0-1,0 0,0 1,1-1,-1 1,0-1,0 0,1 1,-1-1,0 0,1 1,-1-1,0 0,1 0,-1 1,0-1,1 0,-1 0,1 0,-1 1,0-1,1 0,-1 0,1 0,-1 0,1 0,-1 0,1 0,-1 0,0 0,1 0,-1 0,1 0,-1 0,1 0,-1-1,0 1,1 0,-1 0,1 0,-1-1,0 1,1 0,-1 0,0-1,1 1,-1 0,0-1,1 0,-10 36,0-20,0 0,-1 0,0-1,-2 0,1 0,-15 11,-25 32,7-15,27-28,0 2</inkml:trace>
-</inkml:ink>
-</file>
-
-<file path=ppt/ink/ink62.xml><?xml version="1.0" encoding="utf-8"?>
-<inkml:ink xmlns:inkml="http://www.w3.org/2003/InkML">
-  <inkml:definitions>
-    <inkml:context xml:id="ctx0">
-      <inkml:inkSource xml:id="inkSrc0">
-        <inkml:traceFormat>
-          <inkml:channel name="X" type="integer" min="-2.14748E9" max="2.14748E9" units="cm"/>
-          <inkml:channel name="Y" type="integer" min="-2.14748E9" max="2.14748E9" units="cm"/>
-        </inkml:traceFormat>
-        <inkml:channelProperties>
-          <inkml:channelProperty channel="X" name="resolution" value="1000" units="1/cm"/>
-          <inkml:channelProperty channel="Y" name="resolution" value="1000" units="1/cm"/>
-        </inkml:channelProperties>
-      </inkml:inkSource>
-      <inkml:timestamp xml:id="ts0" timeString="2025-07-16T19:06:35.868"/>
-    </inkml:context>
-    <inkml:brush xml:id="br0">
-      <inkml:brushProperty name="width" value="0.05" units="cm"/>
-      <inkml:brushProperty name="height" value="0.05" units="cm"/>
-      <inkml:brushProperty name="color" value="#E71224"/>
-      <inkml:brushProperty name="ignorePressure" value="1"/>
-    </inkml:brush>
-  </inkml:definitions>
-  <inkml:trace contextRef="#ctx0" brushRef="#br0">1 1,'44'0,"251"6,-229-1,1 2,92 25,65 46,-114-37,-55-21</inkml:trace>
-</inkml:ink>
-</file>
-
-<file path=ppt/ink/ink63.xml><?xml version="1.0" encoding="utf-8"?>
-<inkml:ink xmlns:inkml="http://www.w3.org/2003/InkML">
-  <inkml:definitions>
-    <inkml:context xml:id="ctx0">
-      <inkml:inkSource xml:id="inkSrc0">
-        <inkml:traceFormat>
-          <inkml:channel name="X" type="integer" min="-2.14748E9" max="2.14748E9" units="cm"/>
-          <inkml:channel name="Y" type="integer" min="-2.14748E9" max="2.14748E9" units="cm"/>
-        </inkml:traceFormat>
-        <inkml:channelProperties>
-          <inkml:channelProperty channel="X" name="resolution" value="1000" units="1/cm"/>
-          <inkml:channelProperty channel="Y" name="resolution" value="1000" units="1/cm"/>
-        </inkml:channelProperties>
-      </inkml:inkSource>
-      <inkml:timestamp xml:id="ts0" timeString="2025-07-16T19:06:37.082"/>
-    </inkml:context>
-    <inkml:brush xml:id="br0">
-      <inkml:brushProperty name="width" value="0.05" units="cm"/>
-      <inkml:brushProperty name="height" value="0.05" units="cm"/>
-      <inkml:brushProperty name="color" value="#E71224"/>
-      <inkml:brushProperty name="ignorePressure" value="1"/>
-    </inkml:brush>
-  </inkml:definitions>
-  <inkml:trace contextRef="#ctx0" brushRef="#br0">485 2,'-74'-1,"-85"3,150-1,-1 0,1 1,0 0,0 0,1 1,-1 0,0 1,1 0,0 0,0 1,0 0,-12 11,6-3,1 0,1 1,0 0,1 1,-14 24,18-25,1-1,0 1,1 0,1 1,0-1,1 1,1-1,0 1,1 0,1 17,0-15,1 1,1-1,1 0,0 1,1-1,1-1,0 1,11 21,-13-33,1 0,-1 0,1 0,0-1,0 1,0-1,1 0,0 0,0-1,0 0,9 5,7 3,39 11,-16-6,-1-1,1-3,0-1,0-2,66 4,-56-7,-15-1,-1-2,0-2,1-1,-1-2,1-1,-1-2,53-15,-74 15,0-2,0 0,0-1,-1-1,0 0,0-1,-1-1,-1 0,0-1,18-19,16-17,-29 28</inkml:trace>
-</inkml:ink>
-</file>
-
-<file path=ppt/ink/ink64.xml><?xml version="1.0" encoding="utf-8"?>
-<inkml:ink xmlns:inkml="http://www.w3.org/2003/InkML">
-  <inkml:definitions>
-    <inkml:context xml:id="ctx0">
-      <inkml:inkSource xml:id="inkSrc0">
-        <inkml:traceFormat>
-          <inkml:channel name="X" type="integer" min="-2.14748E9" max="2.14748E9" units="cm"/>
-          <inkml:channel name="Y" type="integer" min="-2.14748E9" max="2.14748E9" units="cm"/>
-        </inkml:traceFormat>
-        <inkml:channelProperties>
-          <inkml:channelProperty channel="X" name="resolution" value="1000" units="1/cm"/>
-          <inkml:channelProperty channel="Y" name="resolution" value="1000" units="1/cm"/>
-        </inkml:channelProperties>
-      </inkml:inkSource>
-      <inkml:timestamp xml:id="ts0" timeString="2025-07-16T19:06:37.793"/>
-    </inkml:context>
-    <inkml:brush xml:id="br0">
-      <inkml:brushProperty name="width" value="0.05" units="cm"/>
-      <inkml:brushProperty name="height" value="0.05" units="cm"/>
-      <inkml:brushProperty name="color" value="#E71224"/>
-      <inkml:brushProperty name="ignorePressure" value="1"/>
-    </inkml:brush>
-  </inkml:definitions>
-  <inkml:trace contextRef="#ctx0" brushRef="#br0">58 270,'11'1,"1"-1,-1 0,0-1,1 0,-1-1,0-1,0 1,0-2,0 1,0-2,-1 1,0-1,0-1,0 0,-1 0,0-1,0 0,0-1,9-11,-15 17,13-15,0 0,0-1,-2-1,24-41,-37 59,-1 0,1 0,-1 0,1 0,-1 0,0 0,0 0,1 0,-1-1,0 1,0 0,0 0,0 0,0 0,0 0,0-1,-1 1,1 0,0 0,-1 0,1 0,-1 0,1 0,-1 0,0-1,-1 0,1 1,-1-1,0 1,0 0,0 0,0-1,0 1,0 1,0-1,0 0,0 0,-3 0,-9-1,1 1,-1 0,-19 1,24 0,4 1,-15-2,0 2,1 1,-36 7,48-8,1 1,0 1,0-1,1 1,-1 0,1 0,-1 1,1-1,0 1,0 0,1 1,-1-1,1 1,0 0,0 0,-3 6,-2 7,0 0,1 1,2 0,-1 0,2 0,1 1,0 0,2 0,0 0,1 0,3 34,-1-51,-1 0,1 0,0 0,0 0,0 0,0 0,0-1,1 1,-1 0,1-1,0 1,0-1,0 0,0 0,0 1,0-1,1 0,-1-1,0 1,1 0,0-1,-1 0,1 1,0-1,0 0,0 0,0-1,0 1,0 0,3-1,13 2,1 0,-1-2,33-3,-25 1,169 1,42-2,-205-1,-3-2</inkml:trace>
-</inkml:ink>
-</file>
-
-<file path=ppt/ink/ink65.xml><?xml version="1.0" encoding="utf-8"?>
-<inkml:ink xmlns:inkml="http://www.w3.org/2003/InkML">
-  <inkml:definitions>
-    <inkml:context xml:id="ctx0">
-      <inkml:inkSource xml:id="inkSrc0">
-        <inkml:traceFormat>
-          <inkml:channel name="X" type="integer" min="-2.14748E9" max="2.14748E9" units="cm"/>
-          <inkml:channel name="Y" type="integer" min="-2.14748E9" max="2.14748E9" units="cm"/>
-        </inkml:traceFormat>
-        <inkml:channelProperties>
-          <inkml:channelProperty channel="X" name="resolution" value="1000" units="1/cm"/>
-          <inkml:channelProperty channel="Y" name="resolution" value="1000" units="1/cm"/>
-        </inkml:channelProperties>
-      </inkml:inkSource>
-      <inkml:timestamp xml:id="ts0" timeString="2025-07-16T19:06:38.525"/>
-    </inkml:context>
-    <inkml:brush xml:id="br0">
-      <inkml:brushProperty name="width" value="0.05" units="cm"/>
-      <inkml:brushProperty name="height" value="0.05" units="cm"/>
-      <inkml:brushProperty name="color" value="#E71224"/>
-      <inkml:brushProperty name="ignorePressure" value="1"/>
-    </inkml:brush>
-  </inkml:definitions>
-  <inkml:trace contextRef="#ctx0" brushRef="#br0">2 1,'0'299,"0"-346,-2 19,2 1,7-51,-6 74,1-1,0 1,-1 0,1 0,1-1,-1 2,1-1,-1 0,1 0,0 1,0 0,1-1,-1 1,1 1,-1-1,1 0,6-2,6-4,1 1,0 1,18-6,-26 10,0 1,1-1,-1 2,1-1,17 0,-23 2,-1 1,1-1,-1 0,0 1,1 0,-1 0,1 0,-1 0,0 0,0 1,0-1,0 1,0 0,0 0,0 0,-1 1,1-1,-1 0,5 6,5 10,-1 1,0 0,-1 0,14 42,-23-59,0 1,0 0,0-1,-1 1,1 0,-1 0,0 0,0-1,0 1,0 0,0 0,0 0,-1-1,1 1,-1 0,0 0,0-1,0 1,0-1,0 1,-1-1,1 1,-1-1,0 0,1 0,-1 1,0-1,0 0,-1-1,1 1,0 0,0-1,-1 1,1-1,-1 0,0 0,1 0,-1 0,0 0,-4 0,-12 3,0-1,-1-1,1-1,-34-3,40 2,-22-1,5 0</inkml:trace>
-</inkml:ink>
-</file>
-
-<file path=ppt/ink/ink66.xml><?xml version="1.0" encoding="utf-8"?>
-<inkml:ink xmlns:inkml="http://www.w3.org/2003/InkML">
-  <inkml:definitions>
-    <inkml:context xml:id="ctx0">
-      <inkml:inkSource xml:id="inkSrc0">
-        <inkml:traceFormat>
-          <inkml:channel name="X" type="integer" min="-2.14748E9" max="2.14748E9" units="cm"/>
-          <inkml:channel name="Y" type="integer" min="-2.14748E9" max="2.14748E9" units="cm"/>
-        </inkml:traceFormat>
-        <inkml:channelProperties>
-          <inkml:channelProperty channel="X" name="resolution" value="1000" units="1/cm"/>
-          <inkml:channelProperty channel="Y" name="resolution" value="1000" units="1/cm"/>
-        </inkml:channelProperties>
-      </inkml:inkSource>
-      <inkml:timestamp xml:id="ts0" timeString="2025-07-16T19:06:39.099"/>
-    </inkml:context>
-    <inkml:brush xml:id="br0">
-      <inkml:brushProperty name="width" value="0.05" units="cm"/>
-      <inkml:brushProperty name="height" value="0.05" units="cm"/>
-      <inkml:brushProperty name="color" value="#E71224"/>
-      <inkml:brushProperty name="ignorePressure" value="1"/>
-    </inkml:brush>
-  </inkml:definitions>
-  <inkml:trace contextRef="#ctx0" brushRef="#br0">30 1,'0'44,"1"12,-2 0,-15 90,14-134,-4 25,4-32,1-22,0-1,0 5,1 0,0 0,0 0,1 0,1 0,1 0,-1 0,2 0,8-20,-10 30,1-1,-1 1,1 0,0 0,0 1,0-1,1 1,-1 0,0-1,1 1,0 1,-1-1,1 0,0 1,0 0,0 0,0 0,4 0,12-1,1 0,27 2,-28 0,1501 72,-1516-72,33 3,76 15,-68-4</inkml:trace>
-</inkml:ink>
-</file>
-
-<file path=ppt/ink/ink67.xml><?xml version="1.0" encoding="utf-8"?>
-<inkml:ink xmlns:inkml="http://www.w3.org/2003/InkML">
-  <inkml:definitions>
-    <inkml:context xml:id="ctx0">
-      <inkml:inkSource xml:id="inkSrc0">
-        <inkml:traceFormat>
-          <inkml:channel name="X" type="integer" min="-2.14748E9" max="2.14748E9" units="cm"/>
-          <inkml:channel name="Y" type="integer" min="-2.14748E9" max="2.14748E9" units="cm"/>
-        </inkml:traceFormat>
-        <inkml:channelProperties>
-          <inkml:channelProperty channel="X" name="resolution" value="1000" units="1/cm"/>
-          <inkml:channelProperty channel="Y" name="resolution" value="1000" units="1/cm"/>
-        </inkml:channelProperties>
-      </inkml:inkSource>
-      <inkml:timestamp xml:id="ts0" timeString="2025-07-16T19:06:39.723"/>
-    </inkml:context>
-    <inkml:brush xml:id="br0">
-      <inkml:brushProperty name="width" value="0.05" units="cm"/>
-      <inkml:brushProperty name="height" value="0.05" units="cm"/>
-      <inkml:brushProperty name="color" value="#E71224"/>
-      <inkml:brushProperty name="ignorePressure" value="1"/>
-    </inkml:brush>
-  </inkml:definitions>
-  <inkml:trace contextRef="#ctx0" brushRef="#br0">83 459,'0'-1,"0"-1,1 1,-1 0,1-1,0 1,-1 0,1-1,0 1,0 0,0 0,0 0,0 0,0 0,0 0,0 0,0 0,1 0,-1 0,2 0,28-15,-28 14,25-10,159-80,-160 76,-1-1,0 0,-1-2,36-36,-56 49,1-1,-2 0,1 0,-1 0,0-1,0 1,-1-1,0 0,0 0,-1 0,2-13,-3 18,-1 0,1 0,-1 1,0-1,0 0,0 0,0 0,-1 0,1 1,-1-1,1 0,-1 0,0 1,0-1,0 0,-1 1,1-1,-1 1,1 0,-1-1,0 1,0 0,0 0,0 0,0 0,0 0,0 1,-1-1,1 1,-1-1,1 1,-1 0,0 0,1 0,-1 0,-4 0,-25-3,0 2,0 1,-52 5,6 0,62-4,0 1,0 0,1 1,-25 6,34-6,0 0,0 1,1 0,-1 0,1 0,0 1,-1-1,1 1,1 0,-1 1,1-1,0 1,0 0,-6 9,-1 4,1 0,0 1,-12 35,19-45,0 0,1 0,0 0,1 0,0 0,0 0,1 0,0 0,0 0,1 1,3 11,-3-18,1 0,-1 1,1-1,0 0,0 0,1 0,-1 0,1 0,-1 0,1-1,0 1,0-1,0 0,0 0,0 0,1 0,-1-1,1 1,-1-1,1 0,6 2,9 1,0-1,37 2,-47-4,291 0,-148-3,-134 0,1 0,-2-2,1 0,0-1,-1 0,0-2,21-10,-10 4</inkml:trace>
-</inkml:ink>
-</file>
-
-<file path=ppt/ink/ink68.xml><?xml version="1.0" encoding="utf-8"?>
-<inkml:ink xmlns:inkml="http://www.w3.org/2003/InkML">
-  <inkml:definitions>
-    <inkml:context xml:id="ctx0">
-      <inkml:inkSource xml:id="inkSrc0">
-        <inkml:traceFormat>
-          <inkml:channel name="X" type="integer" min="-2.14748E9" max="2.14748E9" units="cm"/>
-          <inkml:channel name="Y" type="integer" min="-2.14748E9" max="2.14748E9" units="cm"/>
-        </inkml:traceFormat>
-        <inkml:channelProperties>
-          <inkml:channelProperty channel="X" name="resolution" value="1000" units="1/cm"/>
-          <inkml:channelProperty channel="Y" name="resolution" value="1000" units="1/cm"/>
-        </inkml:channelProperties>
-      </inkml:inkSource>
-      <inkml:timestamp xml:id="ts0" timeString="2025-07-16T19:06:40.062"/>
-    </inkml:context>
-    <inkml:brush xml:id="br0">
-      <inkml:brushProperty name="width" value="0.05" units="cm"/>
-      <inkml:brushProperty name="height" value="0.05" units="cm"/>
-      <inkml:brushProperty name="color" value="#E71224"/>
-      <inkml:brushProperty name="ignorePressure" value="1"/>
-    </inkml:brush>
-  </inkml:definitions>
-  <inkml:trace contextRef="#ctx0" brushRef="#br0">84 1,'1'34,"-2"0,-2 1,-1-1,-1 0,-2-1,-15 44,18-66,-28 92,30-95,1 1,-1 0,1-1,1 1,0 0,0 0,0 0,1-1,4 16,-5-22,1 0,0-1,-1 1,1-1,0 1,0 0,0-1,0 1,0-1,1 0,-1 1,0-1,1 0,-1 0,0 0,1 0,-1 0,1 0,0 0,-1 0,1-1,0 1,0-1,-1 1,1-1,0 0,0 1,-1-1,1 0,0 0,0-1,0 1,0 0,-1 0,1-1,0 1,-1-1,1 0,2-1,10-3,-1-1,0-1,-1 0,12-10,-12 9,14-10,-2-2,44-45,-66 62,20-19</inkml:trace>
-</inkml:ink>
-</file>
-
-<file path=ppt/ink/ink69.xml><?xml version="1.0" encoding="utf-8"?>
-<inkml:ink xmlns:inkml="http://www.w3.org/2003/InkML">
-  <inkml:definitions>
-    <inkml:context xml:id="ctx0">
-      <inkml:inkSource xml:id="inkSrc0">
-        <inkml:traceFormat>
-          <inkml:channel name="X" type="integer" min="-2.14748E9" max="2.14748E9" units="cm"/>
-          <inkml:channel name="Y" type="integer" min="-2.14748E9" max="2.14748E9" units="cm"/>
-        </inkml:traceFormat>
-        <inkml:channelProperties>
-          <inkml:channelProperty channel="X" name="resolution" value="1000" units="1/cm"/>
-          <inkml:channelProperty channel="Y" name="resolution" value="1000" units="1/cm"/>
-        </inkml:channelProperties>
-      </inkml:inkSource>
-      <inkml:timestamp xml:id="ts0" timeString="2025-07-16T19:06:40.401"/>
-    </inkml:context>
-    <inkml:brush xml:id="br0">
-      <inkml:brushProperty name="width" value="0.05" units="cm"/>
-      <inkml:brushProperty name="height" value="0.05" units="cm"/>
-      <inkml:brushProperty name="color" value="#E71224"/>
-      <inkml:brushProperty name="ignorePressure" value="1"/>
-    </inkml:brush>
-  </inkml:definitions>
-  <inkml:trace contextRef="#ctx0" brushRef="#br0">0 1,'0'4,"0"11,0 7,0 5,0 2,0 4,0 3,0-2,0-1,0 2,0-9,0-14,0-12,0-17,0-4</inkml:trace>
-</inkml:ink>
-</file>
-
-<file path=ppt/ink/ink7.xml><?xml version="1.0" encoding="utf-8"?>
+<file path=ppt/ink/ink6.xml><?xml version="1.0" encoding="utf-8"?>
 <inkml:ink xmlns:inkml="http://www.w3.org/2003/InkML">
   <inkml:definitions>
     <inkml:context xml:id="ctx0">
@@ -2149,278 +835,7 @@
 </inkml:ink>
 </file>
 
-<file path=ppt/ink/ink70.xml><?xml version="1.0" encoding="utf-8"?>
-<inkml:ink xmlns:inkml="http://www.w3.org/2003/InkML">
-  <inkml:definitions>
-    <inkml:context xml:id="ctx0">
-      <inkml:inkSource xml:id="inkSrc0">
-        <inkml:traceFormat>
-          <inkml:channel name="X" type="integer" min="-2.14748E9" max="2.14748E9" units="cm"/>
-          <inkml:channel name="Y" type="integer" min="-2.14748E9" max="2.14748E9" units="cm"/>
-        </inkml:traceFormat>
-        <inkml:channelProperties>
-          <inkml:channelProperty channel="X" name="resolution" value="1000" units="1/cm"/>
-          <inkml:channelProperty channel="Y" name="resolution" value="1000" units="1/cm"/>
-        </inkml:channelProperties>
-      </inkml:inkSource>
-      <inkml:timestamp xml:id="ts0" timeString="2025-07-16T19:06:40.726"/>
-    </inkml:context>
-    <inkml:brush xml:id="br0">
-      <inkml:brushProperty name="width" value="0.05" units="cm"/>
-      <inkml:brushProperty name="height" value="0.05" units="cm"/>
-      <inkml:brushProperty name="color" value="#E71224"/>
-      <inkml:brushProperty name="ignorePressure" value="1"/>
-    </inkml:brush>
-  </inkml:definitions>
-  <inkml:trace contextRef="#ctx0" brushRef="#br0">0 1,'5'0,"14"0,9 4,14 11,3 8,3 3,3-2,6 0,7 4,1 2,8 0,5-4,-6-3,-11 4,-12-2,-4-2,-11 1,-10-5</inkml:trace>
-</inkml:ink>
-</file>
-
-<file path=ppt/ink/ink71.xml><?xml version="1.0" encoding="utf-8"?>
-<inkml:ink xmlns:inkml="http://www.w3.org/2003/InkML">
-  <inkml:definitions>
-    <inkml:context xml:id="ctx0">
-      <inkml:inkSource xml:id="inkSrc0">
-        <inkml:traceFormat>
-          <inkml:channel name="X" type="integer" min="-2.14748E9" max="2.14748E9" units="cm"/>
-          <inkml:channel name="Y" type="integer" min="-2.14748E9" max="2.14748E9" units="cm"/>
-        </inkml:traceFormat>
-        <inkml:channelProperties>
-          <inkml:channelProperty channel="X" name="resolution" value="1000" units="1/cm"/>
-          <inkml:channelProperty channel="Y" name="resolution" value="1000" units="1/cm"/>
-        </inkml:channelProperties>
-      </inkml:inkSource>
-      <inkml:timestamp xml:id="ts0" timeString="2025-07-16T19:12:59.856"/>
-    </inkml:context>
-    <inkml:brush xml:id="br0">
-      <inkml:brushProperty name="width" value="0.05" units="cm"/>
-      <inkml:brushProperty name="height" value="0.05" units="cm"/>
-      <inkml:brushProperty name="color" value="#E71224"/>
-      <inkml:brushProperty name="ignorePressure" value="1"/>
-    </inkml:brush>
-  </inkml:definitions>
-  <inkml:trace contextRef="#ctx0" brushRef="#br0">321 558,'-1'0,"0"0,0 1,0-1,0 1,0-1,0 1,0-1,0 1,0 0,0-1,1 1,-1 0,0 0,0-1,1 1,-1 0,0 0,1 0,-1 0,1 0,-1 0,1 0,0 0,-1 1,1-1,0 0,0 0,0 2,-5 38,5-34,-6 448,9-264,-1 28,-15 446,10-627,-2 0,-1 0,-2 0,-2-1,-1 0,-2-1,-1-1,-21 37,25-63,5-16,1-25,4 30,-2-184,-4-56,-8-30,-38-338,15 370,-10-302,47 532,0 1,0-1,0 0,3-15,-2 22,-1 1,1-1,0 1,-1 0,1 0,0-1,1 1,-1 0,0 0,1 0,-1 0,1 0,-1 1,1-1,0 0,0 1,0-1,0 1,4-2,5-1,0 2,0 0,0 0,1 1,-1 0,1 1,-1 1,0-1,18 5,-2-2,1334 63,415-55,-1260-13,2-7,824-121,-312-41,-814 141,409-3,-312 36,-303-3,-1 1,1 1,-1-1,1 2,-1-1,0 1,0 1,0-1,-1 1,12 8,9 7,41 35,-33-24,27 22,-3 2,-1 3,-4 2,-2 3,-2 2,-4 2,-2 3,60 122,26 74,61 135,-121-241,26 61,-77-165,-3-1,13 65,-30-115,0 0,-1 0,1 0,-1 0,0 0,0 0,0 0,-1 0,1 0,-1 0,-1 5,1-7,-1 0,1 0,0 0,-1 0,1 0,-1 0,0 0,0 0,1-1,-1 1,0-1,0 1,-1-1,1 0,0 0,0 1,-1-2,1 1,-4 1,-12 2,0 0,-1-1,1-1,-24 0,-80-6,81 1,-969-84,436 30,-694-66,-404-34,110 71,-311 56,1861 30,-202 6,154 0</inkml:trace>
-</inkml:ink>
-</file>
-
-<file path=ppt/ink/ink72.xml><?xml version="1.0" encoding="utf-8"?>
-<inkml:ink xmlns:inkml="http://www.w3.org/2003/InkML">
-  <inkml:definitions>
-    <inkml:context xml:id="ctx0">
-      <inkml:inkSource xml:id="inkSrc0">
-        <inkml:traceFormat>
-          <inkml:channel name="X" type="integer" min="-2.14748E9" max="2.14748E9" units="cm"/>
-          <inkml:channel name="Y" type="integer" min="-2.14748E9" max="2.14748E9" units="cm"/>
-        </inkml:traceFormat>
-        <inkml:channelProperties>
-          <inkml:channelProperty channel="X" name="resolution" value="1000" units="1/cm"/>
-          <inkml:channelProperty channel="Y" name="resolution" value="1000" units="1/cm"/>
-        </inkml:channelProperties>
-      </inkml:inkSource>
-      <inkml:timestamp xml:id="ts0" timeString="2025-07-16T19:13:01.361"/>
-    </inkml:context>
-    <inkml:brush xml:id="br0">
-      <inkml:brushProperty name="width" value="0.05" units="cm"/>
-      <inkml:brushProperty name="height" value="0.05" units="cm"/>
-      <inkml:brushProperty name="color" value="#E71224"/>
-      <inkml:brushProperty name="ignorePressure" value="1"/>
-    </inkml:brush>
-  </inkml:definitions>
-  <inkml:trace contextRef="#ctx0" brushRef="#br0">3808 1,'-7'0,"-1"2,1-1,0 1,0 0,0 1,0-1,0 1,0 1,-8 5,-12 5,-251 125,-100 46,269-136,-512 243,-213 124,122-107,342-155,264-98,80-40,-1-2,-1 0,-40 13,60-25,1 0,-1 0,0-1,0 0,1 0,-1-1,0 0,-13-2,19 2,-1-1,0 0,0 0,0 0,0 0,1 0,-1 0,0-1,1 1,0-1,-1 0,1 0,0 0,0 0,0 0,0 0,0 0,0-1,0 1,1-1,0 1,-1-1,1 0,0 0,-1-4,0-5,0-1,1 1,0 0,1 0,1-1,3-23,22-78,-18 81,23-80,5 1,5 3,4 1,6 2,69-109,-98 178,8-14,2 1,2 1,2 2,51-51,-59 70,-13 13,1 0,27-19,-42 33,0 0,0 0,0 1,0-1,0 0,1 1,-1-1,0 1,0 0,1-1,-1 1,0 0,0 0,1 0,-1-1,0 1,2 1,-2-1,0 0,0 1,-1-1,1 1,0-1,-1 0,1 1,0 0,-1-1,1 1,-1-1,1 1,-1 0,1-1,-1 1,1 0,-1 0,1-1,-1 1,0 1,2 5,-1 0,0 0,0 0,0 1,-2 7,1-5,1 132,-6-1,-36 214,-61 114,73-368,-4-1,-72 147,85-208,3-8,-15 43,31-72,0 0,0 0,1 0,-1 0,1 0,-1-1,1 1,0 0,0 0,0 0,0 0,0 0,0 0,0 0,1 0,-1 0,1 0,-1 0,1 0,0 0,0-1,0 1,0 0,0-1,0 1,0-1,1 1,-1-1,1 1,-1-1,1 0,-1 0,1 1,0-1,-1-1,1 1,0 0,2 1,7 1,0 0,0-1,0 0,1 0,18-1,76-2,196-29,-256 24,753-95,-605 78</inkml:trace>
-</inkml:ink>
-</file>
-
-<file path=ppt/ink/ink73.xml><?xml version="1.0" encoding="utf-8"?>
-<inkml:ink xmlns:inkml="http://www.w3.org/2003/InkML">
-  <inkml:definitions>
-    <inkml:context xml:id="ctx0">
-      <inkml:inkSource xml:id="inkSrc0">
-        <inkml:traceFormat>
-          <inkml:channel name="X" type="integer" min="-2.14748E9" max="2.14748E9" units="cm"/>
-          <inkml:channel name="Y" type="integer" min="-2.14748E9" max="2.14748E9" units="cm"/>
-        </inkml:traceFormat>
-        <inkml:channelProperties>
-          <inkml:channelProperty channel="X" name="resolution" value="1000" units="1/cm"/>
-          <inkml:channelProperty channel="Y" name="resolution" value="1000" units="1/cm"/>
-        </inkml:channelProperties>
-      </inkml:inkSource>
-      <inkml:timestamp xml:id="ts0" timeString="2025-07-16T19:09:37.581"/>
-    </inkml:context>
-    <inkml:brush xml:id="br0">
-      <inkml:brushProperty name="width" value="0.05" units="cm"/>
-      <inkml:brushProperty name="height" value="0.05" units="cm"/>
-      <inkml:brushProperty name="ignorePressure" value="1"/>
-    </inkml:brush>
-  </inkml:definitions>
-  <inkml:trace contextRef="#ctx0" brushRef="#br0">0 0,'565'16,"-287"-4,330 29,64 61,142 19,-439-74,400 40,-167-61,1-26,-265-2,-315 2</inkml:trace>
-</inkml:ink>
-</file>
-
-<file path=ppt/ink/ink74.xml><?xml version="1.0" encoding="utf-8"?>
-<inkml:ink xmlns:inkml="http://www.w3.org/2003/InkML">
-  <inkml:definitions>
-    <inkml:context xml:id="ctx0">
-      <inkml:inkSource xml:id="inkSrc0">
-        <inkml:traceFormat>
-          <inkml:channel name="X" type="integer" min="-2.14748E9" max="2.14748E9" units="cm"/>
-          <inkml:channel name="Y" type="integer" min="-2.14748E9" max="2.14748E9" units="cm"/>
-        </inkml:traceFormat>
-        <inkml:channelProperties>
-          <inkml:channelProperty channel="X" name="resolution" value="1000" units="1/cm"/>
-          <inkml:channelProperty channel="Y" name="resolution" value="1000" units="1/cm"/>
-        </inkml:channelProperties>
-      </inkml:inkSource>
-      <inkml:timestamp xml:id="ts0" timeString="2025-07-16T19:09:40.977"/>
-    </inkml:context>
-    <inkml:brush xml:id="br0">
-      <inkml:brushProperty name="width" value="0.05" units="cm"/>
-      <inkml:brushProperty name="height" value="0.05" units="cm"/>
-      <inkml:brushProperty name="ignorePressure" value="1"/>
-    </inkml:brush>
-  </inkml:definitions>
-  <inkml:trace contextRef="#ctx0" brushRef="#br0">1 44,'0'-1,"1"0,-1 0,0 0,1 1,-1-1,1 0,0 0,-1 1,1-1,-1 0,1 1,0-1,0 0,-1 1,1-1,0 1,0-1,0 1,0 0,-1-1,1 1,0 0,0 0,0-1,1 1,29-5,-27 4,95-6,134 6,-111 3,480-1,-508 3,168 32,-78-8,316 11,-344-26,-3 0,-74-13,140-18,-130 9,-1 4,98 7,-53 0,463-2,-584-1,0-1,0 0,0-1,-1 0,1-1,-1 0,0-1,20-10,-19 8,0 1,1 0,0 1,1 0,-1 1,20-3,56 5,-64 2,-1 0,1-2,28-5,49-18,-82 18</inkml:trace>
-</inkml:ink>
-</file>
-
-<file path=ppt/ink/ink75.xml><?xml version="1.0" encoding="utf-8"?>
-<inkml:ink xmlns:inkml="http://www.w3.org/2003/InkML">
-  <inkml:definitions>
-    <inkml:context xml:id="ctx0">
-      <inkml:inkSource xml:id="inkSrc0">
-        <inkml:traceFormat>
-          <inkml:channel name="X" type="integer" min="-2.14748E9" max="2.14748E9" units="cm"/>
-          <inkml:channel name="Y" type="integer" min="-2.14748E9" max="2.14748E9" units="cm"/>
-        </inkml:traceFormat>
-        <inkml:channelProperties>
-          <inkml:channelProperty channel="X" name="resolution" value="1000" units="1/cm"/>
-          <inkml:channelProperty channel="Y" name="resolution" value="1000" units="1/cm"/>
-        </inkml:channelProperties>
-      </inkml:inkSource>
-      <inkml:timestamp xml:id="ts0" timeString="2025-07-16T19:09:49.465"/>
-    </inkml:context>
-    <inkml:brush xml:id="br0">
-      <inkml:brushProperty name="width" value="0.05" units="cm"/>
-      <inkml:brushProperty name="height" value="0.05" units="cm"/>
-      <inkml:brushProperty name="ignorePressure" value="1"/>
-    </inkml:brush>
-  </inkml:definitions>
-  <inkml:trace contextRef="#ctx0" brushRef="#br0">152 741,'32'2,"56"9,13 2,-68-12,169 15,-120-8,-57-6,-1 0,0 1,0 1,27 10,-21-6,0-1,0-1,1-2,57 1,-34-2,38 9,-58-7,41 2,666-5,-358-4,81 2,-423-2,56-10,30-1,283 12,-193 2,-186-2,57-11,-55 6,46-1,-1 6,-33 2,-1-2,54-8,77-9,-18 3,-133 12,-1-1,0-1,0-1,0-1,-1-1,0-1,33-19,-48 23,-1 0,1 0,-1-1,0 1,0-1,-1-1,0 1,0-1,0 0,-1 0,0 0,0-1,-1 0,0 1,-1-1,4-17,-2-4,-1-1,-1 1,-3-42,1 45,0 17,-1 0,0 0,0 1,0-1,-1 1,-5-15,5 20,1-1,-1 1,0-1,0 1,-1 0,1 0,-1 0,1 0,-1 0,0 1,0-1,0 1,0 0,-1 0,1 0,-1 0,-5-1,-85-23,-2-1,51 14,0 2,-1 2,-83-6,95 11,-170-18,-65 1,176 13,44 5,1-2,-67-16,76 12,0 0,-1 3,0 1,-52 1,50 3,-55-10,-26-1,-123 13,-78-2,198-12,-39-1,-1058 15,1204 1,0 0,0 2,0 0,1 1,-31 13,-2-1,-50 10,-26 9,42-5,56-18,-1-1,0-2,-1-1,0-2,0-1,-40 3,52-8,-1 1,0 1,0 1,1 0,0 2,0 0,-22 11,37-16,1 0,0 1,0 0,1-1,-1 1,0 0,1 1,-1-1,1 0,-1 1,1-1,0 1,0 0,1 0,-1 0,0 0,1 0,0 0,-1 0,1 0,1 1,-1-1,0 0,1 0,-1 7,2-3,0-1,0 0,0 1,1-1,0 0,0 0,0 0,1 0,0-1,0 1,0-1,9 10,90 96,-25-31,-56-54,-8-11,28 26,-20-24</inkml:trace>
-</inkml:ink>
-</file>
-
-<file path=ppt/ink/ink76.xml><?xml version="1.0" encoding="utf-8"?>
-<inkml:ink xmlns:inkml="http://www.w3.org/2003/InkML">
-  <inkml:definitions>
-    <inkml:context xml:id="ctx0">
-      <inkml:inkSource xml:id="inkSrc0">
-        <inkml:traceFormat>
-          <inkml:channel name="X" type="integer" min="-2.14748E9" max="2.14748E9" units="cm"/>
-          <inkml:channel name="Y" type="integer" min="-2.14748E9" max="2.14748E9" units="cm"/>
-        </inkml:traceFormat>
-        <inkml:channelProperties>
-          <inkml:channelProperty channel="X" name="resolution" value="1000" units="1/cm"/>
-          <inkml:channelProperty channel="Y" name="resolution" value="1000" units="1/cm"/>
-        </inkml:channelProperties>
-      </inkml:inkSource>
-      <inkml:timestamp xml:id="ts0" timeString="2025-07-16T19:09:51.564"/>
-    </inkml:context>
-    <inkml:brush xml:id="br0">
-      <inkml:brushProperty name="width" value="0.5" units="cm"/>
-      <inkml:brushProperty name="height" value="1" units="cm"/>
-      <inkml:brushProperty name="color" value="#FFFC00"/>
-      <inkml:brushProperty name="tip" value="rectangle"/>
-      <inkml:brushProperty name="rasterOp" value="maskPen"/>
-      <inkml:brushProperty name="ignorePressure" value="1"/>
-    </inkml:brush>
-  </inkml:definitions>
-  <inkml:trace contextRef="#ctx0" brushRef="#br0">1 160,'5'-3,"-1"0,1 1,0-1,0 1,0 0,0 1,1-1,-1 1,0 0,1 0,-1 1,9-1,8-1,157-36,14-3,212 9,-210 21,105-3,1809 15,-2096 0,0 1,0 0,-1 1,1 0,0 1,15 7,-13-5,0-1,0 0,32 5,243-6,-150-7,90 3,-204 0</inkml:trace>
-</inkml:ink>
-</file>
-
-<file path=ppt/ink/ink77.xml><?xml version="1.0" encoding="utf-8"?>
-<inkml:ink xmlns:inkml="http://www.w3.org/2003/InkML">
-  <inkml:definitions>
-    <inkml:context xml:id="ctx0">
-      <inkml:inkSource xml:id="inkSrc0">
-        <inkml:traceFormat>
-          <inkml:channel name="X" type="integer" min="-2.14748E9" max="2.14748E9" units="cm"/>
-          <inkml:channel name="Y" type="integer" min="-2.14748E9" max="2.14748E9" units="cm"/>
-        </inkml:traceFormat>
-        <inkml:channelProperties>
-          <inkml:channelProperty channel="X" name="resolution" value="1000" units="1/cm"/>
-          <inkml:channelProperty channel="Y" name="resolution" value="1000" units="1/cm"/>
-        </inkml:channelProperties>
-      </inkml:inkSource>
-      <inkml:timestamp xml:id="ts0" timeString="2025-07-16T19:09:57.502"/>
-    </inkml:context>
-    <inkml:brush xml:id="br0">
-      <inkml:brushProperty name="width" value="0.5" units="cm"/>
-      <inkml:brushProperty name="height" value="1" units="cm"/>
-      <inkml:brushProperty name="color" value="#FF2500"/>
-      <inkml:brushProperty name="tip" value="rectangle"/>
-      <inkml:brushProperty name="rasterOp" value="maskPen"/>
-      <inkml:brushProperty name="ignorePressure" value="1"/>
-    </inkml:brush>
-  </inkml:definitions>
-  <inkml:trace contextRef="#ctx0" brushRef="#br0">5908 83,'-338'0,"316"-2,0 0,1-1,-1-2,-25-8,20 5,-48-6,-65 8,93 6,-80-11,27-1,0 5,-141 8,90 1,-1272-2,1384 2,-60 10,-28 2,-544-13,322-3,-969 2,1286-1,-61-12,59 7,-48-2,-48 8,99 0</inkml:trace>
-</inkml:ink>
-</file>
-
-<file path=ppt/ink/ink78.xml><?xml version="1.0" encoding="utf-8"?>
-<inkml:ink xmlns:inkml="http://www.w3.org/2003/InkML">
-  <inkml:definitions>
-    <inkml:context xml:id="ctx0">
-      <inkml:inkSource xml:id="inkSrc0">
-        <inkml:traceFormat>
-          <inkml:channel name="X" type="integer" min="-2.14748E9" max="2.14748E9" units="cm"/>
-          <inkml:channel name="Y" type="integer" min="-2.14748E9" max="2.14748E9" units="cm"/>
-        </inkml:traceFormat>
-        <inkml:channelProperties>
-          <inkml:channelProperty channel="X" name="resolution" value="1000" units="1/cm"/>
-          <inkml:channelProperty channel="Y" name="resolution" value="1000" units="1/cm"/>
-        </inkml:channelProperties>
-      </inkml:inkSource>
-      <inkml:timestamp xml:id="ts0" timeString="2025-07-16T19:10:12.163"/>
-    </inkml:context>
-    <inkml:brush xml:id="br0">
-      <inkml:brushProperty name="width" value="0.05" units="cm"/>
-      <inkml:brushProperty name="height" value="0.05" units="cm"/>
-      <inkml:brushProperty name="color" value="#E71224"/>
-      <inkml:brushProperty name="ignorePressure" value="1"/>
-    </inkml:brush>
-  </inkml:definitions>
-  <inkml:trace contextRef="#ctx0" brushRef="#br0">1 1326,'5'-2,"-1"-1,0 0,1-1,-1 1,0-1,-1 1,1-1,0-1,-1 1,5-8,25-55,-13 24,75-111,-53 81,70-92,65-57,-165 207,58-66,122-109,-87 86,-43 40,-11 3,-42 48,-8 13,-1-1,1 1,-1-1,0 1,1-1,-1 1,0-1,1 1,-1-1,0 1,0-1,1 1,-1-1,0 1,0-1,0 0,0 1,0-1,0 1,0-1,0 0,0 1,0-1,0 1,0-1,-1 1,1-1,0 0,-16-7,-31 5,41 3,-89 0,-261 5,297-2,0 3,0 2,-75 22,133-28,10 0,16 0,458-2,-195-2,-287 2,8 0,0 0,0 1,0-1,0 2,16 3,-23-4,-1-1,1 1,-1 0,1 0,-1 0,1-1,-1 1,1 1,-1-1,0 0,0 0,0 0,1 1,-1-1,0 0,-1 1,1-1,0 1,0 0,-1-1,1 1,0-1,-1 1,0 0,1-1,-1 1,0 0,0 0,0-1,0 1,0 0,0-1,-1 1,1 0,-1 0,1-1,-2 4,-7 16,-1-1,0 1,-1-2,-2 0,0 0,-26 28,3-1,1-1,8-11,-41 67,12-7,27-47,-32 69,-5 16,42-88</inkml:trace>
-</inkml:ink>
-</file>
-
-<file path=ppt/ink/ink79.xml><?xml version="1.0" encoding="utf-8"?>
-<inkml:ink xmlns:inkml="http://www.w3.org/2003/InkML">
-  <inkml:definitions>
-    <inkml:context xml:id="ctx0">
-      <inkml:inkSource xml:id="inkSrc0">
-        <inkml:traceFormat>
-          <inkml:channel name="X" type="integer" min="-2.14748E9" max="2.14748E9" units="cm"/>
-          <inkml:channel name="Y" type="integer" min="-2.14748E9" max="2.14748E9" units="cm"/>
-        </inkml:traceFormat>
-        <inkml:channelProperties>
-          <inkml:channelProperty channel="X" name="resolution" value="1000" units="1/cm"/>
-          <inkml:channelProperty channel="Y" name="resolution" value="1000" units="1/cm"/>
-        </inkml:channelProperties>
-      </inkml:inkSource>
-      <inkml:timestamp xml:id="ts0" timeString="2025-07-16T19:10:16.400"/>
-    </inkml:context>
-    <inkml:brush xml:id="br0">
-      <inkml:brushProperty name="width" value="0.05" units="cm"/>
-      <inkml:brushProperty name="height" value="0.05" units="cm"/>
-      <inkml:brushProperty name="color" value="#E71224"/>
-      <inkml:brushProperty name="ignorePressure" value="1"/>
-    </inkml:brush>
-  </inkml:definitions>
-  <inkml:trace contextRef="#ctx0" brushRef="#br0">0 0,'0'0</inkml:trace>
-</inkml:ink>
-</file>
-
-<file path=ppt/ink/ink8.xml><?xml version="1.0" encoding="utf-8"?>
+<file path=ppt/ink/ink7.xml><?xml version="1.0" encoding="utf-8"?>
 <inkml:ink xmlns:inkml="http://www.w3.org/2003/InkML">
   <inkml:definitions>
     <inkml:context xml:id="ctx0">
@@ -2447,277 +862,7 @@
 </inkml:ink>
 </file>
 
-<file path=ppt/ink/ink80.xml><?xml version="1.0" encoding="utf-8"?>
-<inkml:ink xmlns:inkml="http://www.w3.org/2003/InkML">
-  <inkml:definitions>
-    <inkml:context xml:id="ctx0">
-      <inkml:inkSource xml:id="inkSrc0">
-        <inkml:traceFormat>
-          <inkml:channel name="X" type="integer" min="-2.14748E9" max="2.14748E9" units="cm"/>
-          <inkml:channel name="Y" type="integer" min="-2.14748E9" max="2.14748E9" units="cm"/>
-        </inkml:traceFormat>
-        <inkml:channelProperties>
-          <inkml:channelProperty channel="X" name="resolution" value="1000" units="1/cm"/>
-          <inkml:channelProperty channel="Y" name="resolution" value="1000" units="1/cm"/>
-        </inkml:channelProperties>
-      </inkml:inkSource>
-      <inkml:timestamp xml:id="ts0" timeString="2025-07-16T19:10:16.073"/>
-    </inkml:context>
-    <inkml:brush xml:id="br0">
-      <inkml:brushProperty name="width" value="0.05" units="cm"/>
-      <inkml:brushProperty name="height" value="0.05" units="cm"/>
-      <inkml:brushProperty name="color" value="#E71224"/>
-      <inkml:brushProperty name="ignorePressure" value="1"/>
-    </inkml:brush>
-  </inkml:definitions>
-  <inkml:trace contextRef="#ctx0" brushRef="#br0">45 1,'0'5,"-5"5,-1 7,0 3,1 14,2 4,1 0,0 4,-2-3,-2-1,0-9</inkml:trace>
-</inkml:ink>
-</file>
-
-<file path=ppt/ink/ink81.xml><?xml version="1.0" encoding="utf-8"?>
-<inkml:ink xmlns:inkml="http://www.w3.org/2003/InkML">
-  <inkml:definitions>
-    <inkml:context xml:id="ctx0">
-      <inkml:inkSource xml:id="inkSrc0">
-        <inkml:traceFormat>
-          <inkml:channel name="X" type="integer" min="-2.14748E9" max="2.14748E9" units="cm"/>
-          <inkml:channel name="Y" type="integer" min="-2.14748E9" max="2.14748E9" units="cm"/>
-        </inkml:traceFormat>
-        <inkml:channelProperties>
-          <inkml:channelProperty channel="X" name="resolution" value="1000" units="1/cm"/>
-          <inkml:channelProperty channel="Y" name="resolution" value="1000" units="1/cm"/>
-        </inkml:channelProperties>
-      </inkml:inkSource>
-      <inkml:timestamp xml:id="ts0" timeString="2025-07-16T19:10:16.901"/>
-    </inkml:context>
-    <inkml:brush xml:id="br0">
-      <inkml:brushProperty name="width" value="0.05" units="cm"/>
-      <inkml:brushProperty name="height" value="0.05" units="cm"/>
-      <inkml:brushProperty name="color" value="#E71224"/>
-      <inkml:brushProperty name="ignorePressure" value="1"/>
-    </inkml:brush>
-  </inkml:definitions>
-  <inkml:trace contextRef="#ctx0" brushRef="#br0">1 1,'13'197,"1"-22,-14-166,0-1,1 0,0 1,1-1,5 15,-7-22,0 0,1 0,-1 0,1 0,0 0,-1 0,1 0,0 0,-1 0,1 0,0 0,0 0,0-1,0 1,0 0,0 0,0-1,0 1,2 0,-1-1,-1 0,1 0,-1 0,1-1,-1 1,1 0,-1-1,0 1,1-1,-1 1,1-1,-1 0,0 1,1-1,-1 0,0 0,0 0,0 0,0 0,2-2,8-9,-3 4,0 0,0 1,0 0,16-10,-22 16,0 0,0 0,0 0,0 0,0 0,0 1,0-1,0 0,0 1,0 0,1 0,-1-1,0 1,0 1,0-1,1 0,-1 0,0 1,0-1,0 1,0 0,0 0,0 0,0 0,0 0,0 0,0 0,0 0,1 3,11 12</inkml:trace>
-</inkml:ink>
-</file>
-
-<file path=ppt/ink/ink82.xml><?xml version="1.0" encoding="utf-8"?>
-<inkml:ink xmlns:inkml="http://www.w3.org/2003/InkML">
-  <inkml:definitions>
-    <inkml:context xml:id="ctx0">
-      <inkml:inkSource xml:id="inkSrc0">
-        <inkml:traceFormat>
-          <inkml:channel name="X" type="integer" min="-2.14748E9" max="2.14748E9" units="cm"/>
-          <inkml:channel name="Y" type="integer" min="-2.14748E9" max="2.14748E9" units="cm"/>
-        </inkml:traceFormat>
-        <inkml:channelProperties>
-          <inkml:channelProperty channel="X" name="resolution" value="1000" units="1/cm"/>
-          <inkml:channelProperty channel="Y" name="resolution" value="1000" units="1/cm"/>
-        </inkml:channelProperties>
-      </inkml:inkSource>
-      <inkml:timestamp xml:id="ts0" timeString="2025-07-16T19:10:22.691"/>
-    </inkml:context>
-    <inkml:brush xml:id="br0">
-      <inkml:brushProperty name="width" value="0.05" units="cm"/>
-      <inkml:brushProperty name="height" value="0.05" units="cm"/>
-      <inkml:brushProperty name="color" value="#E71224"/>
-      <inkml:brushProperty name="ignorePressure" value="1"/>
-    </inkml:brush>
-  </inkml:definitions>
-  <inkml:trace contextRef="#ctx0" brushRef="#br0">14388 3800,'18'1,"0"1,0 1,0 1,-1 0,1 1,-1 1,0 1,-1 0,0 1,27 18,9 10,80 72,-39-23,-4 3,-3 5,-4 3,-5 3,-4 4,-5 3,97 204,-154-287,74 183,-74-172,-1 1,-2 0,-1 1,3 41,-8-40,-1 1,-2 0,-5 37,4-60,-1-1,-1 1,0-1,-1 0,0 0,-1 0,0-1,-1 0,-1 0,-16 19,2-7,-2-2,-1-1,0 0,-2-2,0-1,-43 21,15-12,-2-2,-93 28,-1040 229,417-137,1-1,-3-25,-290-33,-166-77,830-12,-1249-92,679 2,863 82,-790-94,182-4,-435-105,477-19,583 193,0-5,3-3,2-4,3-4,-82-70,95 64,3-4,2-2,4-3,-83-122,98 120,2-1,4-3,3-1,4-2,-35-120,-67-164,27 88,44 99,27 79,4-2,-25-123,16 54,28 122,1-1,3 0,-4-53,0-65,-44-211,34 237,5-1,7-1,6-142,7-1026,0 1302,-4-43,-6 32,9 18,-1 0,1-1,-1 1,1 0,-1-1,0 1,1 0,-1 0,1 0,-1 0,0 0,1 0,-1 0,1 0,-1 0,0 0,1 0,-1 0,0 0,1 0,-1 0,1 1,-1-1,1 0,-1 0,0 1,1-1,-1 1,-27 18,1 2,1 0,0 2,2 1,-25 31,-33 33,43-51,-2-3,-1-1,-1-2,-77 41,-56 31,175-102,0-1,0 1,0 0,0-1,-1 1,1 0,0-1,-1 0,1 1,0-1,-1 0,1 0,0 1,-1-1,1 0,0 0,-1-1,1 1,-1 0,1 0,-2-1,2 0,0 0,0 0,1 0,-1 0,1 0,-1 0,1 0,-1 0,1 0,-1 0,1 0,0 0,0 0,-1 0,1 0,0 0,0 0,0 0,0 0,1-2,1-10,0 1,1 0,7-20,-6 23,13-38,2 1,3 1,1 0,2 2,2 1,51-61,-28 46,2 3,2 2,105-77,-121 104,77-37,-14 9,-97 50,0 1,0 0,0 0,0 0,1 0,-1 1,0-1,1 1,-1 0,1 1,7-1,-9 1,0 1,0-1,0 1,0 0,0 0,0 1,0-1,-1 0,1 1,0 0,-1-1,1 1,-1 0,0 0,1 1,-1-1,2 4,9 13,-1 1,-1 0,-1 0,-1 1,12 39,5 11,208 410,-228-469,2 0,-1 0,15 16,-1-8</inkml:trace>
-</inkml:ink>
-</file>
-
-<file path=ppt/ink/ink83.xml><?xml version="1.0" encoding="utf-8"?>
-<inkml:ink xmlns:inkml="http://www.w3.org/2003/InkML">
-  <inkml:definitions>
-    <inkml:context xml:id="ctx0">
-      <inkml:inkSource xml:id="inkSrc0">
-        <inkml:traceFormat>
-          <inkml:channel name="X" type="integer" min="-2.14748E9" max="2.14748E9" units="cm"/>
-          <inkml:channel name="Y" type="integer" min="-2.14748E9" max="2.14748E9" units="cm"/>
-        </inkml:traceFormat>
-        <inkml:channelProperties>
-          <inkml:channelProperty channel="X" name="resolution" value="1000" units="1/cm"/>
-          <inkml:channelProperty channel="Y" name="resolution" value="1000" units="1/cm"/>
-        </inkml:channelProperties>
-      </inkml:inkSource>
-      <inkml:timestamp xml:id="ts0" timeString="2025-07-16T19:10:30.854"/>
-    </inkml:context>
-    <inkml:brush xml:id="br0">
-      <inkml:brushProperty name="width" value="0.05" units="cm"/>
-      <inkml:brushProperty name="height" value="0.05" units="cm"/>
-      <inkml:brushProperty name="color" value="#E71224"/>
-      <inkml:brushProperty name="ignorePressure" value="1"/>
-    </inkml:brush>
-  </inkml:definitions>
-  <inkml:trace contextRef="#ctx0" brushRef="#br0">30245 0,'0'17,"-2"0,0-1,-1 0,-1 1,0-1,-1-1,-1 1,-14 26,-8 7,-41 57,30-50,20-31,0-2,-1 0,-2-2,-31 26,-119 80,41-32,19-11,-140 79,131-84,7-4,103-68,-29 18,-2-2,0-2,-86 31,-21 2,-3 2,-51 13,-37 12,-296 43,347-92,-443 62,-102-50,157-6,375-20,71-7,-493 27,162-25,-82 1,-3323-13,1858-3,408-45,236-7,816 46,-166-4,647 9,-1088-53,-28 8,937 43,-1192-2,831 9,-1684-2,1659-13,19-1,-626 15,1050 7,-197 36,90-8,277-34,-478 61,305-34,-86 19,235-35,-17 3,39-11,-1 2,1 0,0 1,-28 14,-32 12,59-25,0 1,1 1,0 1,1 1,0 1,-34 29,-99 114,131-130,-90 88,66-70,2 3,-42 56,65-72,0 1,3 1,1 1,-20 53,-4 44,37-119,0 0,-1-1,0 0,-1 0,0 0,-1-1,-17 19,-15 24,-69 99,94-134,-29 25,-3 6,44-46,0 0,-1-1,1 0,-1 1,1-1,-1-1,0 1,0 0,0-1,-1 0,1 0,-1 0,-6 1,8-2,0-1,0 0,-1 0,1 0,0 0,0-1,0 1,0-1,0 0,0 0,0 0,0 0,1 0,-1 0,0-1,1 0,-1 1,1-1,-1 0,1 0,0-1,-4-3,-8-12,1-1,1-1,-14-29,-2-3,-80-167,89 176,-6-17,2-1,-28-116,42 133,2-1,2 0,2 0,6-88,-4 132,1-1,0 1,0 0,0-1,1 1,-1 0,0 0,0-1,1 1,-1 0,1-1,-1 1,1 0,-1 0,1 0,0 0,0 0,-1 0,1 0,0 0,1-1,-1 2,0 0,0 0,0 0,0 0,0 0,0 0,-1 1,1-1,0 0,0 1,0-1,-1 0,1 1,0-1,0 1,-1-1,1 1,0 0,-1-1,1 1,-1 0,2 1,4 7,1 0,-1 1,7 15,-3 0,-1 0,-1 0,-1 1,-2 0,0 0,1 37,-7 166,-3-100,4-99,-1-14,0 1,2-1,0 1,1-1,7 30,-7-43,-1 1,1-1,0 0,0 0,0-1,1 1,-1 0,0-1,1 1,0-1,0 0,0 0,0 0,0 0,0 0,0-1,0 0,6 2,8 3,1-2,26 4,-25-5,283 65,-236-52,110 12,70-9,-232-18,19 1,-15-2,0 1,26 5,-39-5,0 0,0 1,0-1,-1 1,1 0,-1 0,1 1,-1-1,0 1,0 0,0 0,-1 1,6 5,6 13</inkml:trace>
-</inkml:ink>
-</file>
-
-<file path=ppt/ink/ink84.xml><?xml version="1.0" encoding="utf-8"?>
-<inkml:ink xmlns:inkml="http://www.w3.org/2003/InkML">
-  <inkml:definitions>
-    <inkml:context xml:id="ctx0">
-      <inkml:inkSource xml:id="inkSrc0">
-        <inkml:traceFormat>
-          <inkml:channel name="X" type="integer" min="-2.14748E9" max="2.14748E9" units="cm"/>
-          <inkml:channel name="Y" type="integer" min="-2.14748E9" max="2.14748E9" units="cm"/>
-        </inkml:traceFormat>
-        <inkml:channelProperties>
-          <inkml:channelProperty channel="X" name="resolution" value="1000" units="1/cm"/>
-          <inkml:channelProperty channel="Y" name="resolution" value="1000" units="1/cm"/>
-        </inkml:channelProperties>
-      </inkml:inkSource>
-      <inkml:timestamp xml:id="ts0" timeString="2025-07-16T19:10:35.077"/>
-    </inkml:context>
-    <inkml:brush xml:id="br0">
-      <inkml:brushProperty name="width" value="0.05" units="cm"/>
-      <inkml:brushProperty name="height" value="0.05" units="cm"/>
-      <inkml:brushProperty name="color" value="#E71224"/>
-      <inkml:brushProperty name="ignorePressure" value="1"/>
-    </inkml:brush>
-  </inkml:definitions>
-  <inkml:trace contextRef="#ctx0" brushRef="#br0">427 4404,'-2'-5,"0"0,0-1,0 1,-1 0,1 0,-1 1,-5-7,-1-2,-9-14,-37-43,1 2,3 2,34 45,1 0,0-1,2-1,0 0,-15-36,-1-12,21 54,1 0,1-1,1 0,0 0,1-1,-3-30,-3-73,-6-152,16 200,-1 32,8-75,-4 107,0-1,1 1,0 0,1 0,0 0,10-16,40-54,-23 37,-9 14,2 2,1 0,42-34,-31 28,36-41,-7 7,-41 44,28-34,-20 20,59-52,-25 26,95-79,-7 6,-114 94,-23 23,1 1,1 0,0 2,2 0,36-23,10 3,-17 8,99-39,-124 56,0-1,0-1,-1-1,32-25,10-6,127-85,-176 118,8-8,0 0,-2-2,26-31,-8-4,-34 46,0 0,1 0,0 1,0 0,1 0,17-13,-19 18,-1 0,0-1,0 0,0 0,0 0,-1-1,0 0,-1 0,1 0,-2 0,1-1,-1 1,3-11,0-6,-1 0,-1 0,0-28,-3 42,10-78,-5 51,0-41,-6 23,-1 40,0-1,1 1,1 0,0-1,1 1,1 0,0 0,10-25,-3 17,-6 11,1 0,1 0,0 1,0 0,1 0,0 0,1 1,0 0,19-16,129-92,-22-2,-76 68,-41 35,1 0,1 2,32-21,-46 35,-9 7,-9 8,-245 225,207-188,23-25,-25 33,34-37,-33 29,-9 10,-8 12,43-49,-28 36,-49 51,82-85,-32 38,-80 76,124-131,1 0,-1 1,2 0,0 0,0 0,-7 14,12-20,0-1,0 1,1 0,-1 0,1 0,0 0,0 0,0 0,0 0,1 0,0 0,-1 0,2 0,-1 0,0 1,1-1,0 0,0 0,0 0,0 0,4 6,-4-8,0-1,0 0,1 0,-1 0,0 0,1 0,-1 0,0 0,1 0,0-1,-1 1,1-1,-1 1,1-1,-1 1,1-1,0 0,-1 0,1 0,0 0,-1 0,1 0,0 0,-1-1,1 1,0 0,-1-1,1 0,-1 1,1-1,-1 0,1 0,1-1,5-3,0 0,0 0,0-1,8-8,12-15,-1 0,-2-2,0-1,24-46,2-24,-3 4,12-12,-70 127,-12 23,-40 55,-104 146,65-48,75-151,-102 158,88-143,-51 68,-25 20,-78 65,186-202,-1 0,0-1,0 0,-20 11,19-12,0 0,0 1,0 0,-11 12,0 0,-1-1,-1 0,-1-2,0-1,-2-1,-29 13,-11 6,51-26,0-1,1-1,-25 6,28-9,0 1,0 0,0 1,1 0,-1 0,1 1,0 1,-17 12,1 8,0 1,2 2,-23 34,-1 1,30-37,1 0,1 1,2 1,-18 48,-14 30,36-83,1 0,1 1,2 1,-7 39,-2 13,7-37,6-30,0 0,0 0,-1 0,0 0,-8 17,-3-8</inkml:trace>
-</inkml:ink>
-</file>
-
-<file path=ppt/ink/ink85.xml><?xml version="1.0" encoding="utf-8"?>
-<inkml:ink xmlns:inkml="http://www.w3.org/2003/InkML">
-  <inkml:definitions>
-    <inkml:context xml:id="ctx0">
-      <inkml:inkSource xml:id="inkSrc0">
-        <inkml:traceFormat>
-          <inkml:channel name="X" type="integer" min="-2.14748E9" max="2.14748E9" units="cm"/>
-          <inkml:channel name="Y" type="integer" min="-2.14748E9" max="2.14748E9" units="cm"/>
-        </inkml:traceFormat>
-        <inkml:channelProperties>
-          <inkml:channelProperty channel="X" name="resolution" value="1000" units="1/cm"/>
-          <inkml:channelProperty channel="Y" name="resolution" value="1000" units="1/cm"/>
-        </inkml:channelProperties>
-      </inkml:inkSource>
-      <inkml:timestamp xml:id="ts0" timeString="2025-07-16T19:10:42.311"/>
-    </inkml:context>
-    <inkml:brush xml:id="br0">
-      <inkml:brushProperty name="width" value="0.05" units="cm"/>
-      <inkml:brushProperty name="height" value="0.05" units="cm"/>
-      <inkml:brushProperty name="color" value="#E71224"/>
-      <inkml:brushProperty name="ignorePressure" value="1"/>
-    </inkml:brush>
-  </inkml:definitions>
-  <inkml:trace contextRef="#ctx0" brushRef="#br0">0 21,'5115'0,"-5089"2,0 1,-1 1,0 2,39 13,26 5,-1-10,105 5,-104-12,541 4,-386-13,484 2,-713-2,-1 1,1-2,0 0,-1-1,21-8,-14 5,39-9,65-9,-79 13,1 3,61-4,-80 10,38-8,-52 8,10-1</inkml:trace>
-</inkml:ink>
-</file>
-
-<file path=ppt/ink/ink86.xml><?xml version="1.0" encoding="utf-8"?>
-<inkml:ink xmlns:inkml="http://www.w3.org/2003/InkML">
-  <inkml:definitions>
-    <inkml:context xml:id="ctx0">
-      <inkml:inkSource xml:id="inkSrc0">
-        <inkml:traceFormat>
-          <inkml:channel name="X" type="integer" min="-2.14748E9" max="2.14748E9" units="cm"/>
-          <inkml:channel name="Y" type="integer" min="-2.14748E9" max="2.14748E9" units="cm"/>
-        </inkml:traceFormat>
-        <inkml:channelProperties>
-          <inkml:channelProperty channel="X" name="resolution" value="1000" units="1/cm"/>
-          <inkml:channelProperty channel="Y" name="resolution" value="1000" units="1/cm"/>
-        </inkml:channelProperties>
-      </inkml:inkSource>
-      <inkml:timestamp xml:id="ts0" timeString="2025-07-16T19:12:04.856"/>
-    </inkml:context>
-    <inkml:brush xml:id="br0">
-      <inkml:brushProperty name="width" value="0.05" units="cm"/>
-      <inkml:brushProperty name="height" value="0.05" units="cm"/>
-      <inkml:brushProperty name="color" value="#E71224"/>
-      <inkml:brushProperty name="ignorePressure" value="1"/>
-    </inkml:brush>
-  </inkml:definitions>
-  <inkml:trace contextRef="#ctx0" brushRef="#br0">84 1250,'919'0,"-877"2,54 10,31 1,172-13,-136-1,-150 0,0 0,0-2,0 1,0-2,-1 0,19-8,31-9,-54 19,13-2,0-2,-1 0,0-1,29-15,-43 18,0 0,-1 0,1 0,-1-1,0 1,0-1,0-1,-1 1,0-1,0 1,0-1,-1 0,1-1,-2 1,1-1,-1 1,3-14,7-38,-3-1,-3 0,-1-67,-3 108,0 0,1 0,0 1,2-1,6-18,-4 15,0-1,5-41,-7-16,-10-139,5 212,0 0,-1 0,1 1,-2-1,1 0,0 1,-1-1,0 1,0 0,-1 0,0-1,0 2,0-1,0 0,-1 0,1 1,-1 0,0 0,-1 0,1 0,-1 1,1 0,-1 0,0 0,-1 0,-7-3,-47-21,-71-29,112 50,-1 0,0 1,0 1,-1 1,-21 0,19 2,-46-1,1 2,-71 10,95-1,-50 17,2-1,47-12,0 2,-83 41,93-39,-4-2,-1-1,-42 9,63-18,7-2,-7 1,-1 2,1 1,-24 11,18-9,1 0,-1-2,0 0,0-2,-40 4,-26 5,4 1,55-11,-1 1,-55 18,73-15,-1 0,1 0,0 2,1 0,0 0,1 2,0-1,-17 21,25-25,1 0,0 0,0 0,0 0,1 0,0 1,0 0,1-1,0 1,0 0,0 14,0 11,4 53,0-40,0 418,-2-436</inkml:trace>
-</inkml:ink>
-</file>
-
-<file path=ppt/ink/ink87.xml><?xml version="1.0" encoding="utf-8"?>
-<inkml:ink xmlns:inkml="http://www.w3.org/2003/InkML">
-  <inkml:definitions>
-    <inkml:context xml:id="ctx0">
-      <inkml:inkSource xml:id="inkSrc0">
-        <inkml:traceFormat>
-          <inkml:channel name="X" type="integer" min="-2.14748E9" max="2.14748E9" units="cm"/>
-          <inkml:channel name="Y" type="integer" min="-2.14748E9" max="2.14748E9" units="cm"/>
-        </inkml:traceFormat>
-        <inkml:channelProperties>
-          <inkml:channelProperty channel="X" name="resolution" value="1000" units="1/cm"/>
-          <inkml:channelProperty channel="Y" name="resolution" value="1000" units="1/cm"/>
-        </inkml:channelProperties>
-      </inkml:inkSource>
-      <inkml:timestamp xml:id="ts0" timeString="2025-07-16T19:18:04.653"/>
-    </inkml:context>
-    <inkml:brush xml:id="br0">
-      <inkml:brushProperty name="width" value="0.05" units="cm"/>
-      <inkml:brushProperty name="height" value="0.05" units="cm"/>
-      <inkml:brushProperty name="color" value="#E71224"/>
-      <inkml:brushProperty name="ignorePressure" value="1"/>
-    </inkml:brush>
-  </inkml:definitions>
-  <inkml:trace contextRef="#ctx0" brushRef="#br0">1 54,'7'0,"0"-1,0 0,0 0,9-4,19-3,502-29,641 38,-1035-1</inkml:trace>
-</inkml:ink>
-</file>
-
-<file path=ppt/ink/ink88.xml><?xml version="1.0" encoding="utf-8"?>
-<inkml:ink xmlns:inkml="http://www.w3.org/2003/InkML">
-  <inkml:definitions>
-    <inkml:context xml:id="ctx0">
-      <inkml:inkSource xml:id="inkSrc0">
-        <inkml:traceFormat>
-          <inkml:channel name="X" type="integer" min="-2.14748E9" max="2.14748E9" units="cm"/>
-          <inkml:channel name="Y" type="integer" min="-2.14748E9" max="2.14748E9" units="cm"/>
-        </inkml:traceFormat>
-        <inkml:channelProperties>
-          <inkml:channelProperty channel="X" name="resolution" value="1000" units="1/cm"/>
-          <inkml:channelProperty channel="Y" name="resolution" value="1000" units="1/cm"/>
-        </inkml:channelProperties>
-      </inkml:inkSource>
-      <inkml:timestamp xml:id="ts0" timeString="2025-07-16T19:18:05.505"/>
-    </inkml:context>
-    <inkml:brush xml:id="br0">
-      <inkml:brushProperty name="width" value="0.05" units="cm"/>
-      <inkml:brushProperty name="height" value="0.05" units="cm"/>
-      <inkml:brushProperty name="color" value="#E71224"/>
-      <inkml:brushProperty name="ignorePressure" value="1"/>
-    </inkml:brush>
-  </inkml:definitions>
-  <inkml:trace contextRef="#ctx0" brushRef="#br0">0 1,'102'0,"754"25,752 58,-1345-84,-159 0</inkml:trace>
-</inkml:ink>
-</file>
-
-<file path=ppt/ink/ink89.xml><?xml version="1.0" encoding="utf-8"?>
-<inkml:ink xmlns:inkml="http://www.w3.org/2003/InkML">
-  <inkml:definitions>
-    <inkml:context xml:id="ctx0">
-      <inkml:inkSource xml:id="inkSrc0">
-        <inkml:traceFormat>
-          <inkml:channel name="X" type="integer" min="-2.14748E9" max="2.14748E9" units="cm"/>
-          <inkml:channel name="Y" type="integer" min="-2.14748E9" max="2.14748E9" units="cm"/>
-        </inkml:traceFormat>
-        <inkml:channelProperties>
-          <inkml:channelProperty channel="X" name="resolution" value="1000" units="1/cm"/>
-          <inkml:channelProperty channel="Y" name="resolution" value="1000" units="1/cm"/>
-        </inkml:channelProperties>
-      </inkml:inkSource>
-      <inkml:timestamp xml:id="ts0" timeString="2025-07-16T19:18:14.417"/>
-    </inkml:context>
-    <inkml:brush xml:id="br0">
-      <inkml:brushProperty name="width" value="0.05" units="cm"/>
-      <inkml:brushProperty name="height" value="0.05" units="cm"/>
-      <inkml:brushProperty name="color" value="#E71224"/>
-      <inkml:brushProperty name="ignorePressure" value="1"/>
-    </inkml:brush>
-  </inkml:definitions>
-  <inkml:trace contextRef="#ctx0" brushRef="#br0">0 267,'10'-1,"0"0,-1 0,18-5,8-2,662-41,-259 28,-345 14,1257-95,-1050 69,59-3,-294 34</inkml:trace>
-</inkml:ink>
-</file>
-
-<file path=ppt/ink/ink9.xml><?xml version="1.0" encoding="utf-8"?>
+<file path=ppt/ink/ink8.xml><?xml version="1.0" encoding="utf-8"?>
 <inkml:ink xmlns:inkml="http://www.w3.org/2003/InkML">
   <inkml:definitions>
     <inkml:context xml:id="ctx0">
@@ -2744,7 +889,7 @@
 </inkml:ink>
 </file>
 
-<file path=ppt/ink/ink90.xml><?xml version="1.0" encoding="utf-8"?>
+<file path=ppt/ink/ink9.xml><?xml version="1.0" encoding="utf-8"?>
 <inkml:ink xmlns:inkml="http://www.w3.org/2003/InkML">
   <inkml:definitions>
     <inkml:context xml:id="ctx0">
@@ -2758,59 +903,7 @@
           <inkml:channelProperty channel="Y" name="resolution" value="1000" units="1/cm"/>
         </inkml:channelProperties>
       </inkml:inkSource>
-      <inkml:timestamp xml:id="ts0" timeString="2025-07-16T19:18:22.314"/>
-    </inkml:context>
-    <inkml:brush xml:id="br0">
-      <inkml:brushProperty name="width" value="0.05" units="cm"/>
-      <inkml:brushProperty name="height" value="0.05" units="cm"/>
-      <inkml:brushProperty name="ignorePressure" value="1"/>
-    </inkml:brush>
-  </inkml:definitions>
-  <inkml:trace contextRef="#ctx0" brushRef="#br0">0 48,'549'0,"-538"-1,0 0,-1-1,1 0,0-1,-1 0,20-9,13-4,-19 9</inkml:trace>
-</inkml:ink>
-</file>
-
-<file path=ppt/ink/ink91.xml><?xml version="1.0" encoding="utf-8"?>
-<inkml:ink xmlns:inkml="http://www.w3.org/2003/InkML">
-  <inkml:definitions>
-    <inkml:context xml:id="ctx0">
-      <inkml:inkSource xml:id="inkSrc0">
-        <inkml:traceFormat>
-          <inkml:channel name="X" type="integer" min="-2.14748E9" max="2.14748E9" units="cm"/>
-          <inkml:channel name="Y" type="integer" min="-2.14748E9" max="2.14748E9" units="cm"/>
-        </inkml:traceFormat>
-        <inkml:channelProperties>
-          <inkml:channelProperty channel="X" name="resolution" value="1000" units="1/cm"/>
-          <inkml:channelProperty channel="Y" name="resolution" value="1000" units="1/cm"/>
-        </inkml:channelProperties>
-      </inkml:inkSource>
-      <inkml:timestamp xml:id="ts0" timeString="2025-07-16T19:18:23.592"/>
-    </inkml:context>
-    <inkml:brush xml:id="br0">
-      <inkml:brushProperty name="width" value="0.05" units="cm"/>
-      <inkml:brushProperty name="height" value="0.05" units="cm"/>
-      <inkml:brushProperty name="ignorePressure" value="1"/>
-    </inkml:brush>
-  </inkml:definitions>
-  <inkml:trace contextRef="#ctx0" brushRef="#br0">0 2,'110'-1,"120"3,-149 11,5-1,-56-11</inkml:trace>
-</inkml:ink>
-</file>
-
-<file path=ppt/ink/ink92.xml><?xml version="1.0" encoding="utf-8"?>
-<inkml:ink xmlns:inkml="http://www.w3.org/2003/InkML">
-  <inkml:definitions>
-    <inkml:context xml:id="ctx0">
-      <inkml:inkSource xml:id="inkSrc0">
-        <inkml:traceFormat>
-          <inkml:channel name="X" type="integer" min="-2.14748E9" max="2.14748E9" units="cm"/>
-          <inkml:channel name="Y" type="integer" min="-2.14748E9" max="2.14748E9" units="cm"/>
-        </inkml:traceFormat>
-        <inkml:channelProperties>
-          <inkml:channelProperty channel="X" name="resolution" value="1000" units="1/cm"/>
-          <inkml:channelProperty channel="Y" name="resolution" value="1000" units="1/cm"/>
-        </inkml:channelProperties>
-      </inkml:inkSource>
-      <inkml:timestamp xml:id="ts0" timeString="2025-07-16T19:20:22.631"/>
+      <inkml:timestamp xml:id="ts0" timeString="2025-07-16T19:05:18.214"/>
     </inkml:context>
     <inkml:brush xml:id="br0">
       <inkml:brushProperty name="width" value="0.05" units="cm"/>
@@ -2819,196 +912,7 @@
       <inkml:brushProperty name="ignorePressure" value="1"/>
     </inkml:brush>
   </inkml:definitions>
-  <inkml:trace contextRef="#ctx0" brushRef="#br0">0 100,'496'0,"-465"-2,0-1,0-2,35-10,11-1,-58 12,64-10,120-7,-44 5,-127 12</inkml:trace>
-</inkml:ink>
-</file>
-
-<file path=ppt/ink/ink93.xml><?xml version="1.0" encoding="utf-8"?>
-<inkml:ink xmlns:inkml="http://www.w3.org/2003/InkML">
-  <inkml:definitions>
-    <inkml:context xml:id="ctx0">
-      <inkml:inkSource xml:id="inkSrc0">
-        <inkml:traceFormat>
-          <inkml:channel name="X" type="integer" min="-2.14748E9" max="2.14748E9" units="cm"/>
-          <inkml:channel name="Y" type="integer" min="-2.14748E9" max="2.14748E9" units="cm"/>
-        </inkml:traceFormat>
-        <inkml:channelProperties>
-          <inkml:channelProperty channel="X" name="resolution" value="1000" units="1/cm"/>
-          <inkml:channelProperty channel="Y" name="resolution" value="1000" units="1/cm"/>
-        </inkml:channelProperties>
-      </inkml:inkSource>
-      <inkml:timestamp xml:id="ts0" timeString="2025-07-16T19:20:25.163"/>
-    </inkml:context>
-    <inkml:brush xml:id="br0">
-      <inkml:brushProperty name="width" value="0.05" units="cm"/>
-      <inkml:brushProperty name="height" value="0.05" units="cm"/>
-      <inkml:brushProperty name="color" value="#E71224"/>
-      <inkml:brushProperty name="ignorePressure" value="1"/>
-    </inkml:brush>
-  </inkml:definitions>
-  <inkml:trace contextRef="#ctx0" brushRef="#br0">1 0,'86'5,"0"3,144 34,-25-3,50 0,362 52,4-33,636-45,-821-16,1629 3,-1902-4,-1-7,-1-8,175-41,-292 48,-11 1</inkml:trace>
-</inkml:ink>
-</file>
-
-<file path=ppt/ink/ink94.xml><?xml version="1.0" encoding="utf-8"?>
-<inkml:ink xmlns:inkml="http://www.w3.org/2003/InkML">
-  <inkml:definitions>
-    <inkml:context xml:id="ctx0">
-      <inkml:inkSource xml:id="inkSrc0">
-        <inkml:traceFormat>
-          <inkml:channel name="X" type="integer" min="-2.14748E9" max="2.14748E9" units="cm"/>
-          <inkml:channel name="Y" type="integer" min="-2.14748E9" max="2.14748E9" units="cm"/>
-        </inkml:traceFormat>
-        <inkml:channelProperties>
-          <inkml:channelProperty channel="X" name="resolution" value="1000" units="1/cm"/>
-          <inkml:channelProperty channel="Y" name="resolution" value="1000" units="1/cm"/>
-        </inkml:channelProperties>
-      </inkml:inkSource>
-      <inkml:timestamp xml:id="ts0" timeString="2025-07-16T19:20:27.310"/>
-    </inkml:context>
-    <inkml:brush xml:id="br0">
-      <inkml:brushProperty name="width" value="0.05" units="cm"/>
-      <inkml:brushProperty name="height" value="0.05" units="cm"/>
-      <inkml:brushProperty name="color" value="#E71224"/>
-      <inkml:brushProperty name="ignorePressure" value="1"/>
-    </inkml:brush>
-  </inkml:definitions>
-  <inkml:trace contextRef="#ctx0" brushRef="#br0">1 72,'1850'0,"-1778"-3,0-3,1-3,83-21,-153 29,16-4,-19 5,1 0,-1 0,1 0,-1-1,0 1,1 0,-1 0,1 0,-1-1,1 1,-1 0,0-1,1 1,-1 0,0 0,1-1,-1 1,0-1,1 1,-1 0,0-1,0 1,0-1,1 1,-1-1,0 1,0-1,0 1,0 0,0-2,-6-5</inkml:trace>
-</inkml:ink>
-</file>
-
-<file path=ppt/ink/ink95.xml><?xml version="1.0" encoding="utf-8"?>
-<inkml:ink xmlns:inkml="http://www.w3.org/2003/InkML">
-  <inkml:definitions>
-    <inkml:context xml:id="ctx0">
-      <inkml:inkSource xml:id="inkSrc0">
-        <inkml:traceFormat>
-          <inkml:channel name="X" type="integer" min="-2.14748E9" max="2.14748E9" units="cm"/>
-          <inkml:channel name="Y" type="integer" min="-2.14748E9" max="2.14748E9" units="cm"/>
-        </inkml:traceFormat>
-        <inkml:channelProperties>
-          <inkml:channelProperty channel="X" name="resolution" value="1000" units="1/cm"/>
-          <inkml:channelProperty channel="Y" name="resolution" value="1000" units="1/cm"/>
-        </inkml:channelProperties>
-      </inkml:inkSource>
-      <inkml:timestamp xml:id="ts0" timeString="2025-07-16T19:20:28.080"/>
-    </inkml:context>
-    <inkml:brush xml:id="br0">
-      <inkml:brushProperty name="width" value="0.05" units="cm"/>
-      <inkml:brushProperty name="height" value="0.05" units="cm"/>
-      <inkml:brushProperty name="color" value="#E71224"/>
-      <inkml:brushProperty name="ignorePressure" value="1"/>
-    </inkml:brush>
-  </inkml:definitions>
-  <inkml:trace contextRef="#ctx0" brushRef="#br0">0 259,'35'0,"20"1,1-2,0-3,68-14,-82 9,86-19,158-57,-118 30,-36 13,-130 41,0 1,0-1,0 0,-1 0,1 0,-1 0,1 0,0 0,-1 0,3-3,-6 0,-14 5,-14 10,-1 0,1 2,1 1,-45 29,67-38,-301 208,17 28,241-199,-86 88,134-128,-1 1,0 0,1 0,0 0,0 0,0 0,-3 6,5-8,0 0,0 0,0 0,0 0,0 0,0 0,0-1,0 1,0 0,0 0,0 0,1 0,-1 0,0 0,0-1,1 1,-1 0,1 0,-1-1,1 1,-1 0,1 0,0-1,-1 1,1-1,0 1,-1 0,1-1,0 0,0 1,-1-1,1 1,0-1,0 0,0 1,0-1,-1 0,1 0,1 0,24 6,1-2,-1-1,1-1,0-1,34-3,-12 1,591-5,-567 3,117-21,-14 0,-143 22</inkml:trace>
-</inkml:ink>
-</file>
-
-<file path=ppt/ink/ink96.xml><?xml version="1.0" encoding="utf-8"?>
-<inkml:ink xmlns:inkml="http://www.w3.org/2003/InkML">
-  <inkml:definitions>
-    <inkml:context xml:id="ctx0">
-      <inkml:inkSource xml:id="inkSrc0">
-        <inkml:traceFormat>
-          <inkml:channel name="X" type="integer" min="-2.14748E9" max="2.14748E9" units="cm"/>
-          <inkml:channel name="Y" type="integer" min="-2.14748E9" max="2.14748E9" units="cm"/>
-        </inkml:traceFormat>
-        <inkml:channelProperties>
-          <inkml:channelProperty channel="X" name="resolution" value="1000" units="1/cm"/>
-          <inkml:channelProperty channel="Y" name="resolution" value="1000" units="1/cm"/>
-        </inkml:channelProperties>
-      </inkml:inkSource>
-      <inkml:timestamp xml:id="ts0" timeString="2025-07-16T19:20:31.025"/>
-    </inkml:context>
-    <inkml:brush xml:id="br0">
-      <inkml:brushProperty name="width" value="0.05" units="cm"/>
-      <inkml:brushProperty name="height" value="0.05" units="cm"/>
-      <inkml:brushProperty name="color" value="#E71224"/>
-      <inkml:brushProperty name="ignorePressure" value="1"/>
-    </inkml:brush>
-  </inkml:definitions>
-  <inkml:trace contextRef="#ctx0" brushRef="#br0">11023 1059,'-2'0,"0"-1,0 1,1-1,-1 0,1 0,-1 0,1 0,-1 0,1 0,-1 0,1-1,0 1,0 0,-2-3,-7-5,-18-11,-1 1,-1 2,-62-27,49 24,-33-13,-1 3,-105-26,117 35,45 13,1 2,-41-8,29 10,-189-22,-208-24,238 12,-13-3,-329-53,399 70,-200-9,100 14,-266-50,181 22,-996-110,1017 130,-436-32,-733 28,-744 32,2013-15,19 1,-482 14,652-1,-1-1,0 1,0 1,0 0,-12 2,20-2,-1-1,1 0,-1 1,1-1,0 1,0-1,-1 1,1 0,0-1,0 1,0 0,-1 0,1 0,0 0,0 0,1 0,-1 0,0 0,0 0,0 0,1 1,-1-1,0 0,1 0,0 1,-1-1,1 0,0 1,-1-1,1 1,0-1,0 0,0 1,0-1,1 2,2 8,1-1,0 0,0 0,1 0,1 0,0-1,0 0,1 0,10 11,2 3,-9-12,0 0,1-1,0 0,1 0,0-2,0 1,1-1,0-1,20 8,12 3,71 17,115 11,-153-33,145 43,162 58,-238-69,1 0,-46-25,-42-9,76 24,-76-19,1-3,114 11,-110-19,100-6,-175 0,0-1,1-1,-1 0,1 0,0-1,0 0,-17-10,23 12,-28-16,-41-33,56 37,-1 2,0 0,0 1,-2 0,1 2,-1 0,-39-12,41 17,-8-1,-35-13,69 13,-1 1,1 0,-1 0,19-4,-15 3,13-3,0 0,0 2,46-5,-60 9,0 2,0-1,0 2,0-1,0 1,0 1,0 0,-1 1,1 0,-1 0,16 8,-22-9,0 1,0 0,-1 0,1 0,-1 1,0-1,0 1,0 0,0 0,-1 0,1 0,-1 0,0 0,-1 1,1-1,-1 1,1-1,-1 1,-1 0,1-1,-1 1,0 0,0 0,0-1,-1 7,-1 4,-1 0,0 0,-1 0,-1-1,0 1,-11 20,1-2,2 2,-14 53,-8 22,21-77,-3-2,-23 37,15-29,21-32,-1-1,-1 1,1-1,-1-1,0 1,0-1,-1 0,1 0,-13 5,0 0,-1-1,-27 9,-8-4,0-2,-1-3,-67 2,112-10,-179 8,132-8</inkml:trace>
-</inkml:ink>
-</file>
-
-<file path=ppt/ink/ink97.xml><?xml version="1.0" encoding="utf-8"?>
-<inkml:ink xmlns:inkml="http://www.w3.org/2003/InkML">
-  <inkml:definitions>
-    <inkml:context xml:id="ctx0">
-      <inkml:inkSource xml:id="inkSrc0">
-        <inkml:traceFormat>
-          <inkml:channel name="X" type="integer" min="-2.14748E9" max="2.14748E9" units="cm"/>
-          <inkml:channel name="Y" type="integer" min="-2.14748E9" max="2.14748E9" units="cm"/>
-        </inkml:traceFormat>
-        <inkml:channelProperties>
-          <inkml:channelProperty channel="X" name="resolution" value="1000" units="1/cm"/>
-          <inkml:channelProperty channel="Y" name="resolution" value="1000" units="1/cm"/>
-        </inkml:channelProperties>
-      </inkml:inkSource>
-      <inkml:timestamp xml:id="ts0" timeString="2025-07-16T19:20:54.457"/>
-    </inkml:context>
-    <inkml:brush xml:id="br0">
-      <inkml:brushProperty name="width" value="0.05" units="cm"/>
-      <inkml:brushProperty name="height" value="0.05" units="cm"/>
-      <inkml:brushProperty name="color" value="#E71224"/>
-      <inkml:brushProperty name="ignorePressure" value="1"/>
-    </inkml:brush>
-  </inkml:definitions>
-  <inkml:trace contextRef="#ctx0" brushRef="#br0">1 1,'307'17,"-168"-6,966 39,-312-35,1308 35,-431-5,535 21,-1644-38,789 31,-1157-55</inkml:trace>
-</inkml:ink>
-</file>
-
-<file path=ppt/ink/ink98.xml><?xml version="1.0" encoding="utf-8"?>
-<inkml:ink xmlns:inkml="http://www.w3.org/2003/InkML">
-  <inkml:definitions>
-    <inkml:context xml:id="ctx0">
-      <inkml:inkSource xml:id="inkSrc0">
-        <inkml:traceFormat>
-          <inkml:channel name="X" type="integer" min="-2.14748E9" max="2.14748E9" units="cm"/>
-          <inkml:channel name="Y" type="integer" min="-2.14748E9" max="2.14748E9" units="cm"/>
-        </inkml:traceFormat>
-        <inkml:channelProperties>
-          <inkml:channelProperty channel="X" name="resolution" value="1000" units="1/cm"/>
-          <inkml:channelProperty channel="Y" name="resolution" value="1000" units="1/cm"/>
-        </inkml:channelProperties>
-      </inkml:inkSource>
-      <inkml:timestamp xml:id="ts0" timeString="2025-07-16T19:21:02.523"/>
-    </inkml:context>
-    <inkml:brush xml:id="br0">
-      <inkml:brushProperty name="width" value="0.05" units="cm"/>
-      <inkml:brushProperty name="height" value="0.05" units="cm"/>
-      <inkml:brushProperty name="color" value="#E71224"/>
-      <inkml:brushProperty name="ignorePressure" value="1"/>
-    </inkml:brush>
-  </inkml:definitions>
-  <inkml:trace contextRef="#ctx0" brushRef="#br0">317 2,'158'0,"-286"-2,-151 5,275-3,-32 3,34-3,0 1,0-1,1 0,-1 1,0-1,0 1,1-1,-1 1,0 0,1 0,-1 0,1 0,-1 0,-1 2,3-3,1 1,-1-1,1 1,-1 0,1-1,-1 0,1 1,0-1,-1 1,1-1,-1 0,1 1,0-1,0 0,-1 0,1 1,0-1,-1 0,1 0,0 0,0 0,-1 0,2 0,22 3,331-2,-250-2,-350 1,639 17,-239-5,-713-13,588 21,-11-13,-1-1,1-1,0-1,28 3,82 0,14 1,2 7,-411-30,152 6,-129 5,388 5,-111-1</inkml:trace>
-</inkml:ink>
-</file>
-
-<file path=ppt/ink/ink99.xml><?xml version="1.0" encoding="utf-8"?>
-<inkml:ink xmlns:inkml="http://www.w3.org/2003/InkML">
-  <inkml:definitions>
-    <inkml:context xml:id="ctx0">
-      <inkml:inkSource xml:id="inkSrc0">
-        <inkml:traceFormat>
-          <inkml:channel name="X" type="integer" min="-2.14748E9" max="2.14748E9" units="cm"/>
-          <inkml:channel name="Y" type="integer" min="-2.14748E9" max="2.14748E9" units="cm"/>
-        </inkml:traceFormat>
-        <inkml:channelProperties>
-          <inkml:channelProperty channel="X" name="resolution" value="1000" units="1/cm"/>
-          <inkml:channelProperty channel="Y" name="resolution" value="1000" units="1/cm"/>
-        </inkml:channelProperties>
-      </inkml:inkSource>
-      <inkml:timestamp xml:id="ts0" timeString="2025-07-16T19:21:05.117"/>
-    </inkml:context>
-    <inkml:brush xml:id="br0">
-      <inkml:brushProperty name="width" value="0.05" units="cm"/>
-      <inkml:brushProperty name="height" value="0.05" units="cm"/>
-      <inkml:brushProperty name="color" value="#E71224"/>
-      <inkml:brushProperty name="ignorePressure" value="1"/>
-    </inkml:brush>
-  </inkml:definitions>
-  <inkml:trace contextRef="#ctx0" brushRef="#br0">732 1,'-6'0,"1"1,-1 0,1 0,-1 1,1 0,-1-1,1 2,0-1,0 1,0 0,0 0,1 0,-1 1,1-1,-1 1,1 0,1 1,-5 4,-8 12,1 1,-19 38,26-46,-70 154,27-53,21-50,16-33,0 0,-3-2,0 1,-44 54,41-63,10-12,0 2,0 0,-9 15,-50 76,69-102,0-1,0 1,-1-1,1 0,0 1,0-1,-1 1,1-1,0 0,0 1,-1-1,1 0,0 1,-1-1,1 0,-1 0,1 1,0-1,-1 0,1 0,-1 0,1 1,0-1,-1 0,1 0,-1 0,1 0,-1 0,1 0,-1 0,1 0,-1 0,-6-15,5-31,2 42,0-40,-5-108,3 134,-1 0,0 1,-2-1,0 1,-1 0,-12-23,-2-1,-24-41,35 72,8 20,11 22,14 18,52 82,-2-7,-73-122,1 0,0 0,-1 0,1 0,1 0,-1 0,0-1,1 1,-1-1,1 0,0 1,-1-1,1 0,0-1,0 1,6 2,-4-3,1 0,-1 0,1-1,0 0,-1 0,1 0,-1 0,1-1,9-2,15-5,48-20,-41 13,8-1</inkml:trace>
+  <inkml:trace contextRef="#ctx0" brushRef="#br0">1 1,'0'0</inkml:trace>
 </inkml:ink>
 </file>
 
@@ -3094,7 +998,7 @@
           <a:p>
             <a:fld id="{DD81528B-9B6F-4248-9BF4-341C8496BA36}" type="datetimeFigureOut">
               <a:rPr lang="uk-UA" smtClean="0"/>
-              <a:t>30.07.2025</a:t>
+              <a:t>29.10.2025</a:t>
             </a:fld>
             <a:endParaRPr lang="uk-UA"/>
           </a:p>
@@ -3595,7 +1499,7 @@
           <a:p>
             <a:fld id="{F1E3972C-1D59-4812-9879-0ADA85AB86FA}" type="datetimeFigureOut">
               <a:rPr lang="uk-UA" smtClean="0"/>
-              <a:t>30.07.2025</a:t>
+              <a:t>29.10.2025</a:t>
             </a:fld>
             <a:endParaRPr lang="uk-UA"/>
           </a:p>
@@ -3795,7 +1699,7 @@
           <a:p>
             <a:fld id="{F1E3972C-1D59-4812-9879-0ADA85AB86FA}" type="datetimeFigureOut">
               <a:rPr lang="uk-UA" smtClean="0"/>
-              <a:t>30.07.2025</a:t>
+              <a:t>29.10.2025</a:t>
             </a:fld>
             <a:endParaRPr lang="uk-UA"/>
           </a:p>
@@ -4005,7 +1909,7 @@
           <a:p>
             <a:fld id="{F1E3972C-1D59-4812-9879-0ADA85AB86FA}" type="datetimeFigureOut">
               <a:rPr lang="uk-UA" smtClean="0"/>
-              <a:t>30.07.2025</a:t>
+              <a:t>29.10.2025</a:t>
             </a:fld>
             <a:endParaRPr lang="uk-UA"/>
           </a:p>
@@ -4205,7 +2109,7 @@
           <a:p>
             <a:fld id="{F1E3972C-1D59-4812-9879-0ADA85AB86FA}" type="datetimeFigureOut">
               <a:rPr lang="uk-UA" smtClean="0"/>
-              <a:t>30.07.2025</a:t>
+              <a:t>29.10.2025</a:t>
             </a:fld>
             <a:endParaRPr lang="uk-UA"/>
           </a:p>
@@ -4481,7 +2385,7 @@
           <a:p>
             <a:fld id="{F1E3972C-1D59-4812-9879-0ADA85AB86FA}" type="datetimeFigureOut">
               <a:rPr lang="uk-UA" smtClean="0"/>
-              <a:t>30.07.2025</a:t>
+              <a:t>29.10.2025</a:t>
             </a:fld>
             <a:endParaRPr lang="uk-UA"/>
           </a:p>
@@ -4749,7 +2653,7 @@
           <a:p>
             <a:fld id="{F1E3972C-1D59-4812-9879-0ADA85AB86FA}" type="datetimeFigureOut">
               <a:rPr lang="uk-UA" smtClean="0"/>
-              <a:t>30.07.2025</a:t>
+              <a:t>29.10.2025</a:t>
             </a:fld>
             <a:endParaRPr lang="uk-UA"/>
           </a:p>
@@ -5164,7 +3068,7 @@
           <a:p>
             <a:fld id="{F1E3972C-1D59-4812-9879-0ADA85AB86FA}" type="datetimeFigureOut">
               <a:rPr lang="uk-UA" smtClean="0"/>
-              <a:t>30.07.2025</a:t>
+              <a:t>29.10.2025</a:t>
             </a:fld>
             <a:endParaRPr lang="uk-UA"/>
           </a:p>
@@ -5306,7 +3210,7 @@
           <a:p>
             <a:fld id="{F1E3972C-1D59-4812-9879-0ADA85AB86FA}" type="datetimeFigureOut">
               <a:rPr lang="uk-UA" smtClean="0"/>
-              <a:t>30.07.2025</a:t>
+              <a:t>29.10.2025</a:t>
             </a:fld>
             <a:endParaRPr lang="uk-UA"/>
           </a:p>
@@ -5419,7 +3323,7 @@
           <a:p>
             <a:fld id="{F1E3972C-1D59-4812-9879-0ADA85AB86FA}" type="datetimeFigureOut">
               <a:rPr lang="uk-UA" smtClean="0"/>
-              <a:t>30.07.2025</a:t>
+              <a:t>29.10.2025</a:t>
             </a:fld>
             <a:endParaRPr lang="uk-UA"/>
           </a:p>
@@ -5732,7 +3636,7 @@
           <a:p>
             <a:fld id="{F1E3972C-1D59-4812-9879-0ADA85AB86FA}" type="datetimeFigureOut">
               <a:rPr lang="uk-UA" smtClean="0"/>
-              <a:t>30.07.2025</a:t>
+              <a:t>29.10.2025</a:t>
             </a:fld>
             <a:endParaRPr lang="uk-UA"/>
           </a:p>
@@ -6021,7 +3925,7 @@
           <a:p>
             <a:fld id="{F1E3972C-1D59-4812-9879-0ADA85AB86FA}" type="datetimeFigureOut">
               <a:rPr lang="uk-UA" smtClean="0"/>
-              <a:t>30.07.2025</a:t>
+              <a:t>29.10.2025</a:t>
             </a:fld>
             <a:endParaRPr lang="uk-UA"/>
           </a:p>
@@ -6264,7 +4168,7 @@
           <a:p>
             <a:fld id="{F1E3972C-1D59-4812-9879-0ADA85AB86FA}" type="datetimeFigureOut">
               <a:rPr lang="uk-UA" smtClean="0"/>
-              <a:t>30.07.2025</a:t>
+              <a:t>29.10.2025</a:t>
             </a:fld>
             <a:endParaRPr lang="uk-UA"/>
           </a:p>
@@ -9028,14 +6932,14 @@
           </a:prstGeom>
         </p:spPr>
       </p:pic>
-      <mc:AlternateContent xmlns:mc="http://schemas.openxmlformats.org/markup-compatibility/2006" xmlns:p14="http://schemas.microsoft.com/office/powerpoint/2010/main">
-        <mc:Choice Requires="p14">
+      <mc:AlternateContent xmlns:mc="http://schemas.openxmlformats.org/markup-compatibility/2006">
+        <mc:Choice xmlns:p14="http://schemas.microsoft.com/office/powerpoint/2010/main" xmlns:aink="http://schemas.microsoft.com/office/drawing/2016/ink" Requires="p14 aink">
           <p:contentPart p14:bwMode="auto" r:id="rId3">
             <p14:nvContentPartPr>
-              <p14:cNvPr id="35" name="Рукописні дані 34">
+              <p14:cNvPr id="5" name="Рукописні дані 4">
                 <a:extLst>
                   <a:ext uri="{FF2B5EF4-FFF2-40B4-BE49-F238E27FC236}">
-                    <a16:creationId xmlns:a16="http://schemas.microsoft.com/office/drawing/2014/main" id="{AB91E4C9-292F-4313-82C4-ED006D1CBE6F}"/>
+                    <a16:creationId xmlns:a16="http://schemas.microsoft.com/office/drawing/2014/main" id="{2A58176D-421B-483C-B7FD-66C54F0799D9}"/>
                   </a:ext>
                 </a:extLst>
               </p14:cNvPr>
@@ -9043,18 +6947,18 @@
               <p14:nvPr/>
             </p14:nvContentPartPr>
             <p14:xfrm>
-              <a:off x="1723710" y="4980750"/>
-              <a:ext cx="174600" cy="10800"/>
+              <a:off x="1771230" y="4028910"/>
+              <a:ext cx="14760" cy="136080"/>
             </p14:xfrm>
           </p:contentPart>
         </mc:Choice>
-        <mc:Fallback xmlns="">
+        <mc:Fallback>
           <p:pic>
             <p:nvPicPr>
-              <p:cNvPr id="35" name="Рукописні дані 34">
+              <p:cNvPr id="5" name="Рукописні дані 4">
                 <a:extLst>
                   <a:ext uri="{FF2B5EF4-FFF2-40B4-BE49-F238E27FC236}">
-                    <a16:creationId xmlns:a16="http://schemas.microsoft.com/office/drawing/2014/main" id="{AB91E4C9-292F-4313-82C4-ED006D1CBE6F}"/>
+                    <a16:creationId xmlns:a16="http://schemas.microsoft.com/office/drawing/2014/main" id="{2A58176D-421B-483C-B7FD-66C54F0799D9}"/>
                   </a:ext>
                 </a:extLst>
               </p:cNvPr>
@@ -9069,8 +6973,8 @@
             </p:blipFill>
             <p:spPr>
               <a:xfrm>
-                <a:off x="1715070" y="4972110"/>
-                <a:ext cx="192240" cy="28440"/>
+                <a:off x="1762230" y="4020270"/>
+                <a:ext cx="32400" cy="153720"/>
               </a:xfrm>
               <a:prstGeom prst="rect">
                 <a:avLst/>
@@ -9079,180 +6983,6 @@
           </p:pic>
         </mc:Fallback>
       </mc:AlternateContent>
-      <p:grpSp>
-        <p:nvGrpSpPr>
-          <p:cNvPr id="37" name="Групувати 36">
-            <a:extLst>
-              <a:ext uri="{FF2B5EF4-FFF2-40B4-BE49-F238E27FC236}">
-                <a16:creationId xmlns:a16="http://schemas.microsoft.com/office/drawing/2014/main" id="{DDB0AA37-F130-4B53-9B3F-84AC31C9DD97}"/>
-              </a:ext>
-            </a:extLst>
-          </p:cNvPr>
-          <p:cNvGrpSpPr/>
-          <p:nvPr/>
-        </p:nvGrpSpPr>
-        <p:grpSpPr>
-          <a:xfrm>
-            <a:off x="1759710" y="4423470"/>
-            <a:ext cx="375840" cy="120600"/>
-            <a:chOff x="1759710" y="4423470"/>
-            <a:chExt cx="375840" cy="120600"/>
-          </a:xfrm>
-        </p:grpSpPr>
-        <mc:AlternateContent xmlns:mc="http://schemas.openxmlformats.org/markup-compatibility/2006" xmlns:p14="http://schemas.microsoft.com/office/powerpoint/2010/main">
-          <mc:Choice Requires="p14">
-            <p:contentPart p14:bwMode="auto" r:id="rId5">
-              <p14:nvContentPartPr>
-                <p14:cNvPr id="32" name="Рукописні дані 31">
-                  <a:extLst>
-                    <a:ext uri="{FF2B5EF4-FFF2-40B4-BE49-F238E27FC236}">
-                      <a16:creationId xmlns:a16="http://schemas.microsoft.com/office/drawing/2014/main" id="{964E47D6-FBAF-4AFA-96BD-E475B2D7065B}"/>
-                    </a:ext>
-                  </a:extLst>
-                </p14:cNvPr>
-                <p14:cNvContentPartPr/>
-                <p14:nvPr/>
-              </p14:nvContentPartPr>
-              <p14:xfrm>
-                <a:off x="1838190" y="4438590"/>
-                <a:ext cx="360" cy="360"/>
-              </p14:xfrm>
-            </p:contentPart>
-          </mc:Choice>
-          <mc:Fallback xmlns="">
-            <p:pic>
-              <p:nvPicPr>
-                <p:cNvPr id="32" name="Рукописні дані 31">
-                  <a:extLst>
-                    <a:ext uri="{FF2B5EF4-FFF2-40B4-BE49-F238E27FC236}">
-                      <a16:creationId xmlns:a16="http://schemas.microsoft.com/office/drawing/2014/main" id="{964E47D6-FBAF-4AFA-96BD-E475B2D7065B}"/>
-                    </a:ext>
-                  </a:extLst>
-                </p:cNvPr>
-                <p:cNvPicPr/>
-                <p:nvPr/>
-              </p:nvPicPr>
-              <p:blipFill>
-                <a:blip r:embed="rId6"/>
-                <a:stretch>
-                  <a:fillRect/>
-                </a:stretch>
-              </p:blipFill>
-              <p:spPr>
-                <a:xfrm>
-                  <a:off x="1829190" y="4429590"/>
-                  <a:ext cx="18000" cy="18000"/>
-                </a:xfrm>
-                <a:prstGeom prst="rect">
-                  <a:avLst/>
-                </a:prstGeom>
-              </p:spPr>
-            </p:pic>
-          </mc:Fallback>
-        </mc:AlternateContent>
-        <mc:AlternateContent xmlns:mc="http://schemas.openxmlformats.org/markup-compatibility/2006" xmlns:p14="http://schemas.microsoft.com/office/powerpoint/2010/main">
-          <mc:Choice Requires="p14">
-            <p:contentPart p14:bwMode="auto" r:id="rId7">
-              <p14:nvContentPartPr>
-                <p14:cNvPr id="33" name="Рукописні дані 32">
-                  <a:extLst>
-                    <a:ext uri="{FF2B5EF4-FFF2-40B4-BE49-F238E27FC236}">
-                      <a16:creationId xmlns:a16="http://schemas.microsoft.com/office/drawing/2014/main" id="{4A99259E-DA40-4833-ADF0-7AE1FC4F3B60}"/>
-                    </a:ext>
-                  </a:extLst>
-                </p14:cNvPr>
-                <p14:cNvContentPartPr/>
-                <p14:nvPr/>
-              </p14:nvContentPartPr>
-              <p14:xfrm>
-                <a:off x="1809750" y="4423470"/>
-                <a:ext cx="78480" cy="6120"/>
-              </p14:xfrm>
-            </p:contentPart>
-          </mc:Choice>
-          <mc:Fallback xmlns="">
-            <p:pic>
-              <p:nvPicPr>
-                <p:cNvPr id="33" name="Рукописні дані 32">
-                  <a:extLst>
-                    <a:ext uri="{FF2B5EF4-FFF2-40B4-BE49-F238E27FC236}">
-                      <a16:creationId xmlns:a16="http://schemas.microsoft.com/office/drawing/2014/main" id="{4A99259E-DA40-4833-ADF0-7AE1FC4F3B60}"/>
-                    </a:ext>
-                  </a:extLst>
-                </p:cNvPr>
-                <p:cNvPicPr/>
-                <p:nvPr/>
-              </p:nvPicPr>
-              <p:blipFill>
-                <a:blip r:embed="rId8"/>
-                <a:stretch>
-                  <a:fillRect/>
-                </a:stretch>
-              </p:blipFill>
-              <p:spPr>
-                <a:xfrm>
-                  <a:off x="1800750" y="4414470"/>
-                  <a:ext cx="96120" cy="23760"/>
-                </a:xfrm>
-                <a:prstGeom prst="rect">
-                  <a:avLst/>
-                </a:prstGeom>
-              </p:spPr>
-            </p:pic>
-          </mc:Fallback>
-        </mc:AlternateContent>
-        <mc:AlternateContent xmlns:mc="http://schemas.openxmlformats.org/markup-compatibility/2006" xmlns:p14="http://schemas.microsoft.com/office/powerpoint/2010/main">
-          <mc:Choice Requires="p14">
-            <p:contentPart p14:bwMode="auto" r:id="rId9">
-              <p14:nvContentPartPr>
-                <p14:cNvPr id="36" name="Рукописні дані 35">
-                  <a:extLst>
-                    <a:ext uri="{FF2B5EF4-FFF2-40B4-BE49-F238E27FC236}">
-                      <a16:creationId xmlns:a16="http://schemas.microsoft.com/office/drawing/2014/main" id="{82CB56E6-DB7A-4B36-9548-F8B8977B094C}"/>
-                    </a:ext>
-                  </a:extLst>
-                </p14:cNvPr>
-                <p14:cNvContentPartPr/>
-                <p14:nvPr/>
-              </p14:nvContentPartPr>
-              <p14:xfrm>
-                <a:off x="1759710" y="4444350"/>
-                <a:ext cx="375840" cy="99720"/>
-              </p14:xfrm>
-            </p:contentPart>
-          </mc:Choice>
-          <mc:Fallback xmlns="">
-            <p:pic>
-              <p:nvPicPr>
-                <p:cNvPr id="36" name="Рукописні дані 35">
-                  <a:extLst>
-                    <a:ext uri="{FF2B5EF4-FFF2-40B4-BE49-F238E27FC236}">
-                      <a16:creationId xmlns:a16="http://schemas.microsoft.com/office/drawing/2014/main" id="{82CB56E6-DB7A-4B36-9548-F8B8977B094C}"/>
-                    </a:ext>
-                  </a:extLst>
-                </p:cNvPr>
-                <p:cNvPicPr/>
-                <p:nvPr/>
-              </p:nvPicPr>
-              <p:blipFill>
-                <a:blip r:embed="rId10"/>
-                <a:stretch>
-                  <a:fillRect/>
-                </a:stretch>
-              </p:blipFill>
-              <p:spPr>
-                <a:xfrm>
-                  <a:off x="1750710" y="4435710"/>
-                  <a:ext cx="393480" cy="117360"/>
-                </a:xfrm>
-                <a:prstGeom prst="rect">
-                  <a:avLst/>
-                </a:prstGeom>
-              </p:spPr>
-            </p:pic>
-          </mc:Fallback>
-        </mc:AlternateContent>
-      </p:grpSp>
     </p:spTree>
     <p:extLst>
       <p:ext uri="{BB962C8B-B14F-4D97-AF65-F5344CB8AC3E}">
@@ -14984,14 +12714,14 @@
           </a:p>
         </p:txBody>
       </p:sp>
-      <mc:AlternateContent xmlns:mc="http://schemas.openxmlformats.org/markup-compatibility/2006" xmlns:p14="http://schemas.microsoft.com/office/powerpoint/2010/main">
-        <mc:Choice Requires="p14">
+      <mc:AlternateContent xmlns:mc="http://schemas.openxmlformats.org/markup-compatibility/2006">
+        <mc:Choice xmlns:p14="http://schemas.microsoft.com/office/powerpoint/2010/main" Requires="p14">
           <p:contentPart p14:bwMode="auto" r:id="rId2">
             <p14:nvContentPartPr>
-              <p14:cNvPr id="3" name="Рукописні дані 2">
+              <p14:cNvPr id="43" name="Рукописні дані 42">
                 <a:extLst>
                   <a:ext uri="{FF2B5EF4-FFF2-40B4-BE49-F238E27FC236}">
-                    <a16:creationId xmlns:a16="http://schemas.microsoft.com/office/drawing/2014/main" id="{59343103-7CEA-4B7A-8F0A-F5C9165BD074}"/>
+                    <a16:creationId xmlns:a16="http://schemas.microsoft.com/office/drawing/2014/main" id="{2A63C681-5361-4DD5-B6D7-604BDE7883BE}"/>
                   </a:ext>
                 </a:extLst>
               </p14:cNvPr>
@@ -14999,18 +12729,18 @@
               <p14:nvPr/>
             </p14:nvContentPartPr>
             <p14:xfrm>
-              <a:off x="1676190" y="3429180"/>
-              <a:ext cx="6360840" cy="143640"/>
+              <a:off x="2819190" y="5647860"/>
+              <a:ext cx="360" cy="30960"/>
             </p14:xfrm>
           </p:contentPart>
         </mc:Choice>
-        <mc:Fallback xmlns="">
+        <mc:Fallback>
           <p:pic>
             <p:nvPicPr>
-              <p:cNvPr id="3" name="Рукописні дані 2">
+              <p:cNvPr id="43" name="Рукописні дані 42">
                 <a:extLst>
                   <a:ext uri="{FF2B5EF4-FFF2-40B4-BE49-F238E27FC236}">
-                    <a16:creationId xmlns:a16="http://schemas.microsoft.com/office/drawing/2014/main" id="{59343103-7CEA-4B7A-8F0A-F5C9165BD074}"/>
+                    <a16:creationId xmlns:a16="http://schemas.microsoft.com/office/drawing/2014/main" id="{2A63C681-5361-4DD5-B6D7-604BDE7883BE}"/>
                   </a:ext>
                 </a:extLst>
               </p:cNvPr>
@@ -15025,8 +12755,8 @@
             </p:blipFill>
             <p:spPr>
               <a:xfrm>
-                <a:off x="1667190" y="3420180"/>
-                <a:ext cx="6378480" cy="161280"/>
+                <a:off x="2810190" y="5638860"/>
+                <a:ext cx="18000" cy="48600"/>
               </a:xfrm>
               <a:prstGeom prst="rect">
                 <a:avLst/>
@@ -15035,1875 +12765,6 @@
           </p:pic>
         </mc:Fallback>
       </mc:AlternateContent>
-      <mc:AlternateContent xmlns:mc="http://schemas.openxmlformats.org/markup-compatibility/2006" xmlns:p14="http://schemas.microsoft.com/office/powerpoint/2010/main">
-        <mc:Choice Requires="p14">
-          <p:contentPart p14:bwMode="auto" r:id="rId4">
-            <p14:nvContentPartPr>
-              <p14:cNvPr id="8" name="Рукописні дані 7">
-                <a:extLst>
-                  <a:ext uri="{FF2B5EF4-FFF2-40B4-BE49-F238E27FC236}">
-                    <a16:creationId xmlns:a16="http://schemas.microsoft.com/office/drawing/2014/main" id="{AD06AD8F-8E8D-4545-8D44-C0AF6EEF5DC9}"/>
-                  </a:ext>
-                </a:extLst>
-              </p14:cNvPr>
-              <p14:cNvContentPartPr/>
-              <p14:nvPr/>
-            </p14:nvContentPartPr>
-            <p14:xfrm>
-              <a:off x="3037350" y="5969700"/>
-              <a:ext cx="632880" cy="259920"/>
-            </p14:xfrm>
-          </p:contentPart>
-        </mc:Choice>
-        <mc:Fallback xmlns="">
-          <p:pic>
-            <p:nvPicPr>
-              <p:cNvPr id="8" name="Рукописні дані 7">
-                <a:extLst>
-                  <a:ext uri="{FF2B5EF4-FFF2-40B4-BE49-F238E27FC236}">
-                    <a16:creationId xmlns:a16="http://schemas.microsoft.com/office/drawing/2014/main" id="{AD06AD8F-8E8D-4545-8D44-C0AF6EEF5DC9}"/>
-                  </a:ext>
-                </a:extLst>
-              </p:cNvPr>
-              <p:cNvPicPr/>
-              <p:nvPr/>
-            </p:nvPicPr>
-            <p:blipFill>
-              <a:blip r:embed="rId5"/>
-              <a:stretch>
-                <a:fillRect/>
-              </a:stretch>
-            </p:blipFill>
-            <p:spPr>
-              <a:xfrm>
-                <a:off x="3028710" y="5961060"/>
-                <a:ext cx="650520" cy="277560"/>
-              </a:xfrm>
-              <a:prstGeom prst="rect">
-                <a:avLst/>
-              </a:prstGeom>
-            </p:spPr>
-          </p:pic>
-        </mc:Fallback>
-      </mc:AlternateContent>
-      <p:grpSp>
-        <p:nvGrpSpPr>
-          <p:cNvPr id="41" name="Групувати 40">
-            <a:extLst>
-              <a:ext uri="{FF2B5EF4-FFF2-40B4-BE49-F238E27FC236}">
-                <a16:creationId xmlns:a16="http://schemas.microsoft.com/office/drawing/2014/main" id="{DDCF19F7-13AE-46F5-A244-CBE456A68D76}"/>
-              </a:ext>
-            </a:extLst>
-          </p:cNvPr>
-          <p:cNvGrpSpPr/>
-          <p:nvPr/>
-        </p:nvGrpSpPr>
-        <p:grpSpPr>
-          <a:xfrm>
-            <a:off x="4047870" y="5467140"/>
-            <a:ext cx="3975480" cy="934560"/>
-            <a:chOff x="4047870" y="5467140"/>
-            <a:chExt cx="3975480" cy="934560"/>
-          </a:xfrm>
-        </p:grpSpPr>
-        <mc:AlternateContent xmlns:mc="http://schemas.openxmlformats.org/markup-compatibility/2006" xmlns:p14="http://schemas.microsoft.com/office/powerpoint/2010/main">
-          <mc:Choice Requires="p14">
-            <p:contentPart p14:bwMode="auto" r:id="rId6">
-              <p14:nvContentPartPr>
-                <p14:cNvPr id="11" name="Рукописні дані 10">
-                  <a:extLst>
-                    <a:ext uri="{FF2B5EF4-FFF2-40B4-BE49-F238E27FC236}">
-                      <a16:creationId xmlns:a16="http://schemas.microsoft.com/office/drawing/2014/main" id="{679D8870-E646-4DCD-8D87-68486BBD597C}"/>
-                    </a:ext>
-                  </a:extLst>
-                </p14:cNvPr>
-                <p14:cNvContentPartPr/>
-                <p14:nvPr/>
-              </p14:nvContentPartPr>
-              <p14:xfrm>
-                <a:off x="4190790" y="5852700"/>
-                <a:ext cx="1504800" cy="416520"/>
-              </p14:xfrm>
-            </p:contentPart>
-          </mc:Choice>
-          <mc:Fallback xmlns="">
-            <p:pic>
-              <p:nvPicPr>
-                <p:cNvPr id="11" name="Рукописні дані 10">
-                  <a:extLst>
-                    <a:ext uri="{FF2B5EF4-FFF2-40B4-BE49-F238E27FC236}">
-                      <a16:creationId xmlns:a16="http://schemas.microsoft.com/office/drawing/2014/main" id="{679D8870-E646-4DCD-8D87-68486BBD597C}"/>
-                    </a:ext>
-                  </a:extLst>
-                </p:cNvPr>
-                <p:cNvPicPr/>
-                <p:nvPr/>
-              </p:nvPicPr>
-              <p:blipFill>
-                <a:blip r:embed="rId7"/>
-                <a:stretch>
-                  <a:fillRect/>
-                </a:stretch>
-              </p:blipFill>
-              <p:spPr>
-                <a:xfrm>
-                  <a:off x="4181790" y="5843700"/>
-                  <a:ext cx="1522440" cy="434160"/>
-                </a:xfrm>
-                <a:prstGeom prst="rect">
-                  <a:avLst/>
-                </a:prstGeom>
-              </p:spPr>
-            </p:pic>
-          </mc:Fallback>
-        </mc:AlternateContent>
-        <mc:AlternateContent xmlns:mc="http://schemas.openxmlformats.org/markup-compatibility/2006" xmlns:p14="http://schemas.microsoft.com/office/powerpoint/2010/main">
-          <mc:Choice Requires="p14">
-            <p:contentPart p14:bwMode="auto" r:id="rId8">
-              <p14:nvContentPartPr>
-                <p14:cNvPr id="12" name="Рукописні дані 11">
-                  <a:extLst>
-                    <a:ext uri="{FF2B5EF4-FFF2-40B4-BE49-F238E27FC236}">
-                      <a16:creationId xmlns:a16="http://schemas.microsoft.com/office/drawing/2014/main" id="{D453C5A2-2759-4878-A64E-990AD6C3345F}"/>
-                    </a:ext>
-                  </a:extLst>
-                </p14:cNvPr>
-                <p14:cNvContentPartPr/>
-                <p14:nvPr/>
-              </p14:nvContentPartPr>
-              <p14:xfrm>
-                <a:off x="5600550" y="5467140"/>
-                <a:ext cx="449640" cy="629640"/>
-              </p14:xfrm>
-            </p:contentPart>
-          </mc:Choice>
-          <mc:Fallback xmlns="">
-            <p:pic>
-              <p:nvPicPr>
-                <p:cNvPr id="12" name="Рукописні дані 11">
-                  <a:extLst>
-                    <a:ext uri="{FF2B5EF4-FFF2-40B4-BE49-F238E27FC236}">
-                      <a16:creationId xmlns:a16="http://schemas.microsoft.com/office/drawing/2014/main" id="{D453C5A2-2759-4878-A64E-990AD6C3345F}"/>
-                    </a:ext>
-                  </a:extLst>
-                </p:cNvPr>
-                <p:cNvPicPr/>
-                <p:nvPr/>
-              </p:nvPicPr>
-              <p:blipFill>
-                <a:blip r:embed="rId9"/>
-                <a:stretch>
-                  <a:fillRect/>
-                </a:stretch>
-              </p:blipFill>
-              <p:spPr>
-                <a:xfrm>
-                  <a:off x="5591550" y="5458140"/>
-                  <a:ext cx="467280" cy="647280"/>
-                </a:xfrm>
-                <a:prstGeom prst="rect">
-                  <a:avLst/>
-                </a:prstGeom>
-              </p:spPr>
-            </p:pic>
-          </mc:Fallback>
-        </mc:AlternateContent>
-        <mc:AlternateContent xmlns:mc="http://schemas.openxmlformats.org/markup-compatibility/2006" xmlns:p14="http://schemas.microsoft.com/office/powerpoint/2010/main">
-          <mc:Choice Requires="p14">
-            <p:contentPart p14:bwMode="auto" r:id="rId10">
-              <p14:nvContentPartPr>
-                <p14:cNvPr id="13" name="Рукописні дані 12">
-                  <a:extLst>
-                    <a:ext uri="{FF2B5EF4-FFF2-40B4-BE49-F238E27FC236}">
-                      <a16:creationId xmlns:a16="http://schemas.microsoft.com/office/drawing/2014/main" id="{77550224-F0C3-44CB-A807-B967A4CD982E}"/>
-                    </a:ext>
-                  </a:extLst>
-                </p14:cNvPr>
-                <p14:cNvContentPartPr/>
-                <p14:nvPr/>
-              </p14:nvContentPartPr>
-              <p14:xfrm>
-                <a:off x="6067110" y="5522940"/>
-                <a:ext cx="222480" cy="545400"/>
-              </p14:xfrm>
-            </p:contentPart>
-          </mc:Choice>
-          <mc:Fallback xmlns="">
-            <p:pic>
-              <p:nvPicPr>
-                <p:cNvPr id="13" name="Рукописні дані 12">
-                  <a:extLst>
-                    <a:ext uri="{FF2B5EF4-FFF2-40B4-BE49-F238E27FC236}">
-                      <a16:creationId xmlns:a16="http://schemas.microsoft.com/office/drawing/2014/main" id="{77550224-F0C3-44CB-A807-B967A4CD982E}"/>
-                    </a:ext>
-                  </a:extLst>
-                </p:cNvPr>
-                <p:cNvPicPr/>
-                <p:nvPr/>
-              </p:nvPicPr>
-              <p:blipFill>
-                <a:blip r:embed="rId11"/>
-                <a:stretch>
-                  <a:fillRect/>
-                </a:stretch>
-              </p:blipFill>
-              <p:spPr>
-                <a:xfrm>
-                  <a:off x="6058110" y="5514300"/>
-                  <a:ext cx="240120" cy="563040"/>
-                </a:xfrm>
-                <a:prstGeom prst="rect">
-                  <a:avLst/>
-                </a:prstGeom>
-              </p:spPr>
-            </p:pic>
-          </mc:Fallback>
-        </mc:AlternateContent>
-        <mc:AlternateContent xmlns:mc="http://schemas.openxmlformats.org/markup-compatibility/2006" xmlns:p14="http://schemas.microsoft.com/office/powerpoint/2010/main">
-          <mc:Choice Requires="p14">
-            <p:contentPart p14:bwMode="auto" r:id="rId12">
-              <p14:nvContentPartPr>
-                <p14:cNvPr id="14" name="Рукописні дані 13">
-                  <a:extLst>
-                    <a:ext uri="{FF2B5EF4-FFF2-40B4-BE49-F238E27FC236}">
-                      <a16:creationId xmlns:a16="http://schemas.microsoft.com/office/drawing/2014/main" id="{8F0CE770-6319-48B4-8AA7-280E27C0AA1A}"/>
-                    </a:ext>
-                  </a:extLst>
-                </p14:cNvPr>
-                <p14:cNvContentPartPr/>
-                <p14:nvPr/>
-              </p14:nvContentPartPr>
-              <p14:xfrm>
-                <a:off x="6009870" y="5876460"/>
-                <a:ext cx="121680" cy="360"/>
-              </p14:xfrm>
-            </p:contentPart>
-          </mc:Choice>
-          <mc:Fallback xmlns="">
-            <p:pic>
-              <p:nvPicPr>
-                <p:cNvPr id="14" name="Рукописні дані 13">
-                  <a:extLst>
-                    <a:ext uri="{FF2B5EF4-FFF2-40B4-BE49-F238E27FC236}">
-                      <a16:creationId xmlns:a16="http://schemas.microsoft.com/office/drawing/2014/main" id="{8F0CE770-6319-48B4-8AA7-280E27C0AA1A}"/>
-                    </a:ext>
-                  </a:extLst>
-                </p:cNvPr>
-                <p:cNvPicPr/>
-                <p:nvPr/>
-              </p:nvPicPr>
-              <p:blipFill>
-                <a:blip r:embed="rId13"/>
-                <a:stretch>
-                  <a:fillRect/>
-                </a:stretch>
-              </p:blipFill>
-              <p:spPr>
-                <a:xfrm>
-                  <a:off x="6001230" y="5867820"/>
-                  <a:ext cx="139320" cy="18000"/>
-                </a:xfrm>
-                <a:prstGeom prst="rect">
-                  <a:avLst/>
-                </a:prstGeom>
-              </p:spPr>
-            </p:pic>
-          </mc:Fallback>
-        </mc:AlternateContent>
-        <mc:AlternateContent xmlns:mc="http://schemas.openxmlformats.org/markup-compatibility/2006" xmlns:p14="http://schemas.microsoft.com/office/powerpoint/2010/main">
-          <mc:Choice Requires="p14">
-            <p:contentPart p14:bwMode="auto" r:id="rId14">
-              <p14:nvContentPartPr>
-                <p14:cNvPr id="16" name="Рукописні дані 15">
-                  <a:extLst>
-                    <a:ext uri="{FF2B5EF4-FFF2-40B4-BE49-F238E27FC236}">
-                      <a16:creationId xmlns:a16="http://schemas.microsoft.com/office/drawing/2014/main" id="{DC1B62FA-D66B-4976-9DDF-B6CF9CF74042}"/>
-                    </a:ext>
-                  </a:extLst>
-                </p14:cNvPr>
-                <p14:cNvContentPartPr/>
-                <p14:nvPr/>
-              </p14:nvContentPartPr>
-              <p14:xfrm>
-                <a:off x="6048390" y="5847300"/>
-                <a:ext cx="189000" cy="21600"/>
-              </p14:xfrm>
-            </p:contentPart>
-          </mc:Choice>
-          <mc:Fallback xmlns="">
-            <p:pic>
-              <p:nvPicPr>
-                <p:cNvPr id="16" name="Рукописні дані 15">
-                  <a:extLst>
-                    <a:ext uri="{FF2B5EF4-FFF2-40B4-BE49-F238E27FC236}">
-                      <a16:creationId xmlns:a16="http://schemas.microsoft.com/office/drawing/2014/main" id="{DC1B62FA-D66B-4976-9DDF-B6CF9CF74042}"/>
-                    </a:ext>
-                  </a:extLst>
-                </p:cNvPr>
-                <p:cNvPicPr/>
-                <p:nvPr/>
-              </p:nvPicPr>
-              <p:blipFill>
-                <a:blip r:embed="rId15"/>
-                <a:stretch>
-                  <a:fillRect/>
-                </a:stretch>
-              </p:blipFill>
-              <p:spPr>
-                <a:xfrm>
-                  <a:off x="6039390" y="5838660"/>
-                  <a:ext cx="206640" cy="39240"/>
-                </a:xfrm>
-                <a:prstGeom prst="rect">
-                  <a:avLst/>
-                </a:prstGeom>
-              </p:spPr>
-            </p:pic>
-          </mc:Fallback>
-        </mc:AlternateContent>
-        <mc:AlternateContent xmlns:mc="http://schemas.openxmlformats.org/markup-compatibility/2006" xmlns:p14="http://schemas.microsoft.com/office/powerpoint/2010/main">
-          <mc:Choice Requires="p14">
-            <p:contentPart p14:bwMode="auto" r:id="rId16">
-              <p14:nvContentPartPr>
-                <p14:cNvPr id="18" name="Рукописні дані 17">
-                  <a:extLst>
-                    <a:ext uri="{FF2B5EF4-FFF2-40B4-BE49-F238E27FC236}">
-                      <a16:creationId xmlns:a16="http://schemas.microsoft.com/office/drawing/2014/main" id="{0A09E515-2C76-40A6-B707-990965312475}"/>
-                    </a:ext>
-                  </a:extLst>
-                </p14:cNvPr>
-                <p14:cNvContentPartPr/>
-                <p14:nvPr/>
-              </p14:nvContentPartPr>
-              <p14:xfrm>
-                <a:off x="6381750" y="5495940"/>
-                <a:ext cx="124200" cy="378720"/>
-              </p14:xfrm>
-            </p:contentPart>
-          </mc:Choice>
-          <mc:Fallback xmlns="">
-            <p:pic>
-              <p:nvPicPr>
-                <p:cNvPr id="18" name="Рукописні дані 17">
-                  <a:extLst>
-                    <a:ext uri="{FF2B5EF4-FFF2-40B4-BE49-F238E27FC236}">
-                      <a16:creationId xmlns:a16="http://schemas.microsoft.com/office/drawing/2014/main" id="{0A09E515-2C76-40A6-B707-990965312475}"/>
-                    </a:ext>
-                  </a:extLst>
-                </p:cNvPr>
-                <p:cNvPicPr/>
-                <p:nvPr/>
-              </p:nvPicPr>
-              <p:blipFill>
-                <a:blip r:embed="rId17"/>
-                <a:stretch>
-                  <a:fillRect/>
-                </a:stretch>
-              </p:blipFill>
-              <p:spPr>
-                <a:xfrm>
-                  <a:off x="6372750" y="5486940"/>
-                  <a:ext cx="141840" cy="396360"/>
-                </a:xfrm>
-                <a:prstGeom prst="rect">
-                  <a:avLst/>
-                </a:prstGeom>
-              </p:spPr>
-            </p:pic>
-          </mc:Fallback>
-        </mc:AlternateContent>
-        <mc:AlternateContent xmlns:mc="http://schemas.openxmlformats.org/markup-compatibility/2006" xmlns:p14="http://schemas.microsoft.com/office/powerpoint/2010/main">
-          <mc:Choice Requires="p14">
-            <p:contentPart p14:bwMode="auto" r:id="rId18">
-              <p14:nvContentPartPr>
-                <p14:cNvPr id="19" name="Рукописні дані 18">
-                  <a:extLst>
-                    <a:ext uri="{FF2B5EF4-FFF2-40B4-BE49-F238E27FC236}">
-                      <a16:creationId xmlns:a16="http://schemas.microsoft.com/office/drawing/2014/main" id="{16E57509-BCD2-4442-85F4-5FDF9974D565}"/>
-                    </a:ext>
-                  </a:extLst>
-                </p14:cNvPr>
-                <p14:cNvContentPartPr/>
-                <p14:nvPr/>
-              </p14:nvContentPartPr>
-              <p14:xfrm>
-                <a:off x="6604590" y="5562540"/>
-                <a:ext cx="215280" cy="272160"/>
-              </p14:xfrm>
-            </p:contentPart>
-          </mc:Choice>
-          <mc:Fallback xmlns="">
-            <p:pic>
-              <p:nvPicPr>
-                <p:cNvPr id="19" name="Рукописні дані 18">
-                  <a:extLst>
-                    <a:ext uri="{FF2B5EF4-FFF2-40B4-BE49-F238E27FC236}">
-                      <a16:creationId xmlns:a16="http://schemas.microsoft.com/office/drawing/2014/main" id="{16E57509-BCD2-4442-85F4-5FDF9974D565}"/>
-                    </a:ext>
-                  </a:extLst>
-                </p:cNvPr>
-                <p:cNvPicPr/>
-                <p:nvPr/>
-              </p:nvPicPr>
-              <p:blipFill>
-                <a:blip r:embed="rId19"/>
-                <a:stretch>
-                  <a:fillRect/>
-                </a:stretch>
-              </p:blipFill>
-              <p:spPr>
-                <a:xfrm>
-                  <a:off x="6595590" y="5553540"/>
-                  <a:ext cx="232920" cy="289800"/>
-                </a:xfrm>
-                <a:prstGeom prst="rect">
-                  <a:avLst/>
-                </a:prstGeom>
-              </p:spPr>
-            </p:pic>
-          </mc:Fallback>
-        </mc:AlternateContent>
-        <mc:AlternateContent xmlns:mc="http://schemas.openxmlformats.org/markup-compatibility/2006" xmlns:p14="http://schemas.microsoft.com/office/powerpoint/2010/main">
-          <mc:Choice Requires="p14">
-            <p:contentPart p14:bwMode="auto" r:id="rId20">
-              <p14:nvContentPartPr>
-                <p14:cNvPr id="20" name="Рукописні дані 19">
-                  <a:extLst>
-                    <a:ext uri="{FF2B5EF4-FFF2-40B4-BE49-F238E27FC236}">
-                      <a16:creationId xmlns:a16="http://schemas.microsoft.com/office/drawing/2014/main" id="{DBFBB673-C865-4A32-A987-0895C8E1DF81}"/>
-                    </a:ext>
-                  </a:extLst>
-                </p14:cNvPr>
-                <p14:cNvContentPartPr/>
-                <p14:nvPr/>
-              </p14:nvContentPartPr>
-              <p14:xfrm>
-                <a:off x="6476790" y="5876460"/>
-                <a:ext cx="360" cy="253800"/>
-              </p14:xfrm>
-            </p:contentPart>
-          </mc:Choice>
-          <mc:Fallback xmlns="">
-            <p:pic>
-              <p:nvPicPr>
-                <p:cNvPr id="20" name="Рукописні дані 19">
-                  <a:extLst>
-                    <a:ext uri="{FF2B5EF4-FFF2-40B4-BE49-F238E27FC236}">
-                      <a16:creationId xmlns:a16="http://schemas.microsoft.com/office/drawing/2014/main" id="{DBFBB673-C865-4A32-A987-0895C8E1DF81}"/>
-                    </a:ext>
-                  </a:extLst>
-                </p:cNvPr>
-                <p:cNvPicPr/>
-                <p:nvPr/>
-              </p:nvPicPr>
-              <p:blipFill>
-                <a:blip r:embed="rId21"/>
-                <a:stretch>
-                  <a:fillRect/>
-                </a:stretch>
-              </p:blipFill>
-              <p:spPr>
-                <a:xfrm>
-                  <a:off x="6467790" y="5867820"/>
-                  <a:ext cx="18000" cy="271440"/>
-                </a:xfrm>
-                <a:prstGeom prst="rect">
-                  <a:avLst/>
-                </a:prstGeom>
-              </p:spPr>
-            </p:pic>
-          </mc:Fallback>
-        </mc:AlternateContent>
-        <mc:AlternateContent xmlns:mc="http://schemas.openxmlformats.org/markup-compatibility/2006" xmlns:p14="http://schemas.microsoft.com/office/powerpoint/2010/main">
-          <mc:Choice Requires="p14">
-            <p:contentPart p14:bwMode="auto" r:id="rId22">
-              <p14:nvContentPartPr>
-                <p14:cNvPr id="21" name="Рукописні дані 20">
-                  <a:extLst>
-                    <a:ext uri="{FF2B5EF4-FFF2-40B4-BE49-F238E27FC236}">
-                      <a16:creationId xmlns:a16="http://schemas.microsoft.com/office/drawing/2014/main" id="{ABA4FCDC-B9A0-404D-8A02-482D57B25F02}"/>
-                    </a:ext>
-                  </a:extLst>
-                </p14:cNvPr>
-                <p14:cNvContentPartPr/>
-                <p14:nvPr/>
-              </p14:nvContentPartPr>
-              <p14:xfrm>
-                <a:off x="6666870" y="5962500"/>
-                <a:ext cx="262440" cy="156600"/>
-              </p14:xfrm>
-            </p:contentPart>
-          </mc:Choice>
-          <mc:Fallback xmlns="">
-            <p:pic>
-              <p:nvPicPr>
-                <p:cNvPr id="21" name="Рукописні дані 20">
-                  <a:extLst>
-                    <a:ext uri="{FF2B5EF4-FFF2-40B4-BE49-F238E27FC236}">
-                      <a16:creationId xmlns:a16="http://schemas.microsoft.com/office/drawing/2014/main" id="{ABA4FCDC-B9A0-404D-8A02-482D57B25F02}"/>
-                    </a:ext>
-                  </a:extLst>
-                </p:cNvPr>
-                <p:cNvPicPr/>
-                <p:nvPr/>
-              </p:nvPicPr>
-              <p:blipFill>
-                <a:blip r:embed="rId23"/>
-                <a:stretch>
-                  <a:fillRect/>
-                </a:stretch>
-              </p:blipFill>
-              <p:spPr>
-                <a:xfrm>
-                  <a:off x="6657870" y="5953860"/>
-                  <a:ext cx="280080" cy="174240"/>
-                </a:xfrm>
-                <a:prstGeom prst="rect">
-                  <a:avLst/>
-                </a:prstGeom>
-              </p:spPr>
-            </p:pic>
-          </mc:Fallback>
-        </mc:AlternateContent>
-        <mc:AlternateContent xmlns:mc="http://schemas.openxmlformats.org/markup-compatibility/2006" xmlns:p14="http://schemas.microsoft.com/office/powerpoint/2010/main">
-          <mc:Choice Requires="p14">
-            <p:contentPart p14:bwMode="auto" r:id="rId24">
-              <p14:nvContentPartPr>
-                <p14:cNvPr id="22" name="Рукописні дані 21">
-                  <a:extLst>
-                    <a:ext uri="{FF2B5EF4-FFF2-40B4-BE49-F238E27FC236}">
-                      <a16:creationId xmlns:a16="http://schemas.microsoft.com/office/drawing/2014/main" id="{B047B52A-866E-401B-B04E-35D9575E4E0E}"/>
-                    </a:ext>
-                  </a:extLst>
-                </p14:cNvPr>
-                <p14:cNvContentPartPr/>
-                <p14:nvPr/>
-              </p14:nvContentPartPr>
-              <p14:xfrm>
-                <a:off x="6619710" y="5915700"/>
-                <a:ext cx="100800" cy="151920"/>
-              </p14:xfrm>
-            </p:contentPart>
-          </mc:Choice>
-          <mc:Fallback xmlns="">
-            <p:pic>
-              <p:nvPicPr>
-                <p:cNvPr id="22" name="Рукописні дані 21">
-                  <a:extLst>
-                    <a:ext uri="{FF2B5EF4-FFF2-40B4-BE49-F238E27FC236}">
-                      <a16:creationId xmlns:a16="http://schemas.microsoft.com/office/drawing/2014/main" id="{B047B52A-866E-401B-B04E-35D9575E4E0E}"/>
-                    </a:ext>
-                  </a:extLst>
-                </p:cNvPr>
-                <p:cNvPicPr/>
-                <p:nvPr/>
-              </p:nvPicPr>
-              <p:blipFill>
-                <a:blip r:embed="rId25"/>
-                <a:stretch>
-                  <a:fillRect/>
-                </a:stretch>
-              </p:blipFill>
-              <p:spPr>
-                <a:xfrm>
-                  <a:off x="6611070" y="5906700"/>
-                  <a:ext cx="118440" cy="169560"/>
-                </a:xfrm>
-                <a:prstGeom prst="rect">
-                  <a:avLst/>
-                </a:prstGeom>
-              </p:spPr>
-            </p:pic>
-          </mc:Fallback>
-        </mc:AlternateContent>
-        <mc:AlternateContent xmlns:mc="http://schemas.openxmlformats.org/markup-compatibility/2006" xmlns:p14="http://schemas.microsoft.com/office/powerpoint/2010/main">
-          <mc:Choice Requires="p14">
-            <p:contentPart p14:bwMode="auto" r:id="rId26">
-              <p14:nvContentPartPr>
-                <p14:cNvPr id="23" name="Рукописні дані 22">
-                  <a:extLst>
-                    <a:ext uri="{FF2B5EF4-FFF2-40B4-BE49-F238E27FC236}">
-                      <a16:creationId xmlns:a16="http://schemas.microsoft.com/office/drawing/2014/main" id="{DA448050-5588-44A4-8E27-12C4C405B19D}"/>
-                    </a:ext>
-                  </a:extLst>
-                </p14:cNvPr>
-                <p14:cNvContentPartPr/>
-                <p14:nvPr/>
-              </p14:nvContentPartPr>
-              <p14:xfrm>
-                <a:off x="6629070" y="5864940"/>
-                <a:ext cx="156240" cy="183600"/>
-              </p14:xfrm>
-            </p:contentPart>
-          </mc:Choice>
-          <mc:Fallback xmlns="">
-            <p:pic>
-              <p:nvPicPr>
-                <p:cNvPr id="23" name="Рукописні дані 22">
-                  <a:extLst>
-                    <a:ext uri="{FF2B5EF4-FFF2-40B4-BE49-F238E27FC236}">
-                      <a16:creationId xmlns:a16="http://schemas.microsoft.com/office/drawing/2014/main" id="{DA448050-5588-44A4-8E27-12C4C405B19D}"/>
-                    </a:ext>
-                  </a:extLst>
-                </p:cNvPr>
-                <p:cNvPicPr/>
-                <p:nvPr/>
-              </p:nvPicPr>
-              <p:blipFill>
-                <a:blip r:embed="rId27"/>
-                <a:stretch>
-                  <a:fillRect/>
-                </a:stretch>
-              </p:blipFill>
-              <p:spPr>
-                <a:xfrm>
-                  <a:off x="6620430" y="5855940"/>
-                  <a:ext cx="173880" cy="201240"/>
-                </a:xfrm>
-                <a:prstGeom prst="rect">
-                  <a:avLst/>
-                </a:prstGeom>
-              </p:spPr>
-            </p:pic>
-          </mc:Fallback>
-        </mc:AlternateContent>
-        <mc:AlternateContent xmlns:mc="http://schemas.openxmlformats.org/markup-compatibility/2006" xmlns:p14="http://schemas.microsoft.com/office/powerpoint/2010/main">
-          <mc:Choice Requires="p14">
-            <p:contentPart p14:bwMode="auto" r:id="rId28">
-              <p14:nvContentPartPr>
-                <p14:cNvPr id="24" name="Рукописні дані 23">
-                  <a:extLst>
-                    <a:ext uri="{FF2B5EF4-FFF2-40B4-BE49-F238E27FC236}">
-                      <a16:creationId xmlns:a16="http://schemas.microsoft.com/office/drawing/2014/main" id="{FEDD4B4A-DDB8-45D2-A7B8-160F68049847}"/>
-                    </a:ext>
-                  </a:extLst>
-                </p14:cNvPr>
-                <p14:cNvContentPartPr/>
-                <p14:nvPr/>
-              </p14:nvContentPartPr>
-              <p14:xfrm>
-                <a:off x="6927150" y="5816340"/>
-                <a:ext cx="352800" cy="519480"/>
-              </p14:xfrm>
-            </p:contentPart>
-          </mc:Choice>
-          <mc:Fallback xmlns="">
-            <p:pic>
-              <p:nvPicPr>
-                <p:cNvPr id="24" name="Рукописні дані 23">
-                  <a:extLst>
-                    <a:ext uri="{FF2B5EF4-FFF2-40B4-BE49-F238E27FC236}">
-                      <a16:creationId xmlns:a16="http://schemas.microsoft.com/office/drawing/2014/main" id="{FEDD4B4A-DDB8-45D2-A7B8-160F68049847}"/>
-                    </a:ext>
-                  </a:extLst>
-                </p:cNvPr>
-                <p:cNvPicPr/>
-                <p:nvPr/>
-              </p:nvPicPr>
-              <p:blipFill>
-                <a:blip r:embed="rId29"/>
-                <a:stretch>
-                  <a:fillRect/>
-                </a:stretch>
-              </p:blipFill>
-              <p:spPr>
-                <a:xfrm>
-                  <a:off x="6918150" y="5807700"/>
-                  <a:ext cx="370440" cy="537120"/>
-                </a:xfrm>
-                <a:prstGeom prst="rect">
-                  <a:avLst/>
-                </a:prstGeom>
-              </p:spPr>
-            </p:pic>
-          </mc:Fallback>
-        </mc:AlternateContent>
-        <mc:AlternateContent xmlns:mc="http://schemas.openxmlformats.org/markup-compatibility/2006" xmlns:p14="http://schemas.microsoft.com/office/powerpoint/2010/main">
-          <mc:Choice Requires="p14">
-            <p:contentPart p14:bwMode="auto" r:id="rId30">
-              <p14:nvContentPartPr>
-                <p14:cNvPr id="25" name="Рукописні дані 24">
-                  <a:extLst>
-                    <a:ext uri="{FF2B5EF4-FFF2-40B4-BE49-F238E27FC236}">
-                      <a16:creationId xmlns:a16="http://schemas.microsoft.com/office/drawing/2014/main" id="{7A873ABB-121E-4DD4-B40A-980C0C436488}"/>
-                    </a:ext>
-                  </a:extLst>
-                </p14:cNvPr>
-                <p14:cNvContentPartPr/>
-                <p14:nvPr/>
-              </p14:nvContentPartPr>
-              <p14:xfrm>
-                <a:off x="7343670" y="5780340"/>
-                <a:ext cx="344880" cy="327960"/>
-              </p14:xfrm>
-            </p:contentPart>
-          </mc:Choice>
-          <mc:Fallback xmlns="">
-            <p:pic>
-              <p:nvPicPr>
-                <p:cNvPr id="25" name="Рукописні дані 24">
-                  <a:extLst>
-                    <a:ext uri="{FF2B5EF4-FFF2-40B4-BE49-F238E27FC236}">
-                      <a16:creationId xmlns:a16="http://schemas.microsoft.com/office/drawing/2014/main" id="{7A873ABB-121E-4DD4-B40A-980C0C436488}"/>
-                    </a:ext>
-                  </a:extLst>
-                </p:cNvPr>
-                <p:cNvPicPr/>
-                <p:nvPr/>
-              </p:nvPicPr>
-              <p:blipFill>
-                <a:blip r:embed="rId31"/>
-                <a:stretch>
-                  <a:fillRect/>
-                </a:stretch>
-              </p:blipFill>
-              <p:spPr>
-                <a:xfrm>
-                  <a:off x="7335030" y="5771340"/>
-                  <a:ext cx="362520" cy="345600"/>
-                </a:xfrm>
-                <a:prstGeom prst="rect">
-                  <a:avLst/>
-                </a:prstGeom>
-              </p:spPr>
-            </p:pic>
-          </mc:Fallback>
-        </mc:AlternateContent>
-        <mc:AlternateContent xmlns:mc="http://schemas.openxmlformats.org/markup-compatibility/2006" xmlns:p14="http://schemas.microsoft.com/office/powerpoint/2010/main">
-          <mc:Choice Requires="p14">
-            <p:contentPart p14:bwMode="auto" r:id="rId32">
-              <p14:nvContentPartPr>
-                <p14:cNvPr id="26" name="Рукописні дані 25">
-                  <a:extLst>
-                    <a:ext uri="{FF2B5EF4-FFF2-40B4-BE49-F238E27FC236}">
-                      <a16:creationId xmlns:a16="http://schemas.microsoft.com/office/drawing/2014/main" id="{A1915F2A-F30B-410B-86D3-B09172D4A446}"/>
-                    </a:ext>
-                  </a:extLst>
-                </p14:cNvPr>
-                <p14:cNvContentPartPr/>
-                <p14:nvPr/>
-              </p14:nvContentPartPr>
-              <p14:xfrm>
-                <a:off x="7770990" y="5689260"/>
-                <a:ext cx="194040" cy="342360"/>
-              </p14:xfrm>
-            </p:contentPart>
-          </mc:Choice>
-          <mc:Fallback xmlns="">
-            <p:pic>
-              <p:nvPicPr>
-                <p:cNvPr id="26" name="Рукописні дані 25">
-                  <a:extLst>
-                    <a:ext uri="{FF2B5EF4-FFF2-40B4-BE49-F238E27FC236}">
-                      <a16:creationId xmlns:a16="http://schemas.microsoft.com/office/drawing/2014/main" id="{A1915F2A-F30B-410B-86D3-B09172D4A446}"/>
-                    </a:ext>
-                  </a:extLst>
-                </p:cNvPr>
-                <p:cNvPicPr/>
-                <p:nvPr/>
-              </p:nvPicPr>
-              <p:blipFill>
-                <a:blip r:embed="rId33"/>
-                <a:stretch>
-                  <a:fillRect/>
-                </a:stretch>
-              </p:blipFill>
-              <p:spPr>
-                <a:xfrm>
-                  <a:off x="7762350" y="5680620"/>
-                  <a:ext cx="211680" cy="360000"/>
-                </a:xfrm>
-                <a:prstGeom prst="rect">
-                  <a:avLst/>
-                </a:prstGeom>
-              </p:spPr>
-            </p:pic>
-          </mc:Fallback>
-        </mc:AlternateContent>
-        <mc:AlternateContent xmlns:mc="http://schemas.openxmlformats.org/markup-compatibility/2006" xmlns:p14="http://schemas.microsoft.com/office/powerpoint/2010/main">
-          <mc:Choice Requires="p14">
-            <p:contentPart p14:bwMode="auto" r:id="rId34">
-              <p14:nvContentPartPr>
-                <p14:cNvPr id="28" name="Рукописні дані 27">
-                  <a:extLst>
-                    <a:ext uri="{FF2B5EF4-FFF2-40B4-BE49-F238E27FC236}">
-                      <a16:creationId xmlns:a16="http://schemas.microsoft.com/office/drawing/2014/main" id="{7E9CEEDF-D794-4C62-9477-E74C1E5FF569}"/>
-                    </a:ext>
-                  </a:extLst>
-                </p14:cNvPr>
-                <p14:cNvContentPartPr/>
-                <p14:nvPr/>
-              </p14:nvContentPartPr>
-              <p14:xfrm>
-                <a:off x="7953150" y="5788980"/>
-                <a:ext cx="45360" cy="107280"/>
-              </p14:xfrm>
-            </p:contentPart>
-          </mc:Choice>
-          <mc:Fallback xmlns="">
-            <p:pic>
-              <p:nvPicPr>
-                <p:cNvPr id="28" name="Рукописні дані 27">
-                  <a:extLst>
-                    <a:ext uri="{FF2B5EF4-FFF2-40B4-BE49-F238E27FC236}">
-                      <a16:creationId xmlns:a16="http://schemas.microsoft.com/office/drawing/2014/main" id="{7E9CEEDF-D794-4C62-9477-E74C1E5FF569}"/>
-                    </a:ext>
-                  </a:extLst>
-                </p:cNvPr>
-                <p:cNvPicPr/>
-                <p:nvPr/>
-              </p:nvPicPr>
-              <p:blipFill>
-                <a:blip r:embed="rId35"/>
-                <a:stretch>
-                  <a:fillRect/>
-                </a:stretch>
-              </p:blipFill>
-              <p:spPr>
-                <a:xfrm>
-                  <a:off x="7944150" y="5779980"/>
-                  <a:ext cx="63000" cy="124920"/>
-                </a:xfrm>
-                <a:prstGeom prst="rect">
-                  <a:avLst/>
-                </a:prstGeom>
-              </p:spPr>
-            </p:pic>
-          </mc:Fallback>
-        </mc:AlternateContent>
-        <mc:AlternateContent xmlns:mc="http://schemas.openxmlformats.org/markup-compatibility/2006" xmlns:p14="http://schemas.microsoft.com/office/powerpoint/2010/main">
-          <mc:Choice Requires="p14">
-            <p:contentPart p14:bwMode="auto" r:id="rId36">
-              <p14:nvContentPartPr>
-                <p14:cNvPr id="29" name="Рукописні дані 28">
-                  <a:extLst>
-                    <a:ext uri="{FF2B5EF4-FFF2-40B4-BE49-F238E27FC236}">
-                      <a16:creationId xmlns:a16="http://schemas.microsoft.com/office/drawing/2014/main" id="{7F2B6D48-C458-443E-A501-ABC5D69F0C43}"/>
-                    </a:ext>
-                  </a:extLst>
-                </p14:cNvPr>
-                <p14:cNvContentPartPr/>
-                <p14:nvPr/>
-              </p14:nvContentPartPr>
-              <p14:xfrm>
-                <a:off x="7962510" y="5751900"/>
-                <a:ext cx="60840" cy="96840"/>
-              </p14:xfrm>
-            </p:contentPart>
-          </mc:Choice>
-          <mc:Fallback xmlns="">
-            <p:pic>
-              <p:nvPicPr>
-                <p:cNvPr id="29" name="Рукописні дані 28">
-                  <a:extLst>
-                    <a:ext uri="{FF2B5EF4-FFF2-40B4-BE49-F238E27FC236}">
-                      <a16:creationId xmlns:a16="http://schemas.microsoft.com/office/drawing/2014/main" id="{7F2B6D48-C458-443E-A501-ABC5D69F0C43}"/>
-                    </a:ext>
-                  </a:extLst>
-                </p:cNvPr>
-                <p:cNvPicPr/>
-                <p:nvPr/>
-              </p:nvPicPr>
-              <p:blipFill>
-                <a:blip r:embed="rId37"/>
-                <a:stretch>
-                  <a:fillRect/>
-                </a:stretch>
-              </p:blipFill>
-              <p:spPr>
-                <a:xfrm>
-                  <a:off x="7953870" y="5742900"/>
-                  <a:ext cx="78480" cy="114480"/>
-                </a:xfrm>
-                <a:prstGeom prst="rect">
-                  <a:avLst/>
-                </a:prstGeom>
-              </p:spPr>
-            </p:pic>
-          </mc:Fallback>
-        </mc:AlternateContent>
-        <mc:AlternateContent xmlns:mc="http://schemas.openxmlformats.org/markup-compatibility/2006" xmlns:p14="http://schemas.microsoft.com/office/powerpoint/2010/main">
-          <mc:Choice Requires="p14">
-            <p:contentPart p14:bwMode="auto" r:id="rId38">
-              <p14:nvContentPartPr>
-                <p14:cNvPr id="31" name="Рукописні дані 30">
-                  <a:extLst>
-                    <a:ext uri="{FF2B5EF4-FFF2-40B4-BE49-F238E27FC236}">
-                      <a16:creationId xmlns:a16="http://schemas.microsoft.com/office/drawing/2014/main" id="{AFEBB7DD-0B73-4A65-901F-DA31290CBF2C}"/>
-                    </a:ext>
-                  </a:extLst>
-                </p14:cNvPr>
-                <p14:cNvContentPartPr/>
-                <p14:nvPr/>
-              </p14:nvContentPartPr>
-              <p14:xfrm>
-                <a:off x="4047870" y="6313140"/>
-                <a:ext cx="464760" cy="88560"/>
-              </p14:xfrm>
-            </p:contentPart>
-          </mc:Choice>
-          <mc:Fallback xmlns="">
-            <p:pic>
-              <p:nvPicPr>
-                <p:cNvPr id="31" name="Рукописні дані 30">
-                  <a:extLst>
-                    <a:ext uri="{FF2B5EF4-FFF2-40B4-BE49-F238E27FC236}">
-                      <a16:creationId xmlns:a16="http://schemas.microsoft.com/office/drawing/2014/main" id="{AFEBB7DD-0B73-4A65-901F-DA31290CBF2C}"/>
-                    </a:ext>
-                  </a:extLst>
-                </p:cNvPr>
-                <p:cNvPicPr/>
-                <p:nvPr/>
-              </p:nvPicPr>
-              <p:blipFill>
-                <a:blip r:embed="rId39"/>
-                <a:stretch>
-                  <a:fillRect/>
-                </a:stretch>
-              </p:blipFill>
-              <p:spPr>
-                <a:xfrm>
-                  <a:off x="4039230" y="6304500"/>
-                  <a:ext cx="482400" cy="106200"/>
-                </a:xfrm>
-                <a:prstGeom prst="rect">
-                  <a:avLst/>
-                </a:prstGeom>
-              </p:spPr>
-            </p:pic>
-          </mc:Fallback>
-        </mc:AlternateContent>
-        <mc:AlternateContent xmlns:mc="http://schemas.openxmlformats.org/markup-compatibility/2006" xmlns:p14="http://schemas.microsoft.com/office/powerpoint/2010/main">
-          <mc:Choice Requires="p14">
-            <p:contentPart p14:bwMode="auto" r:id="rId40">
-              <p14:nvContentPartPr>
-                <p14:cNvPr id="32" name="Рукописні дані 31">
-                  <a:extLst>
-                    <a:ext uri="{FF2B5EF4-FFF2-40B4-BE49-F238E27FC236}">
-                      <a16:creationId xmlns:a16="http://schemas.microsoft.com/office/drawing/2014/main" id="{0C0C3500-FD71-4C10-A689-EA9A38CD43D3}"/>
-                    </a:ext>
-                  </a:extLst>
-                </p14:cNvPr>
-                <p14:cNvContentPartPr/>
-                <p14:nvPr/>
-              </p14:nvContentPartPr>
-              <p14:xfrm>
-                <a:off x="5648070" y="6181740"/>
-                <a:ext cx="378720" cy="77040"/>
-              </p14:xfrm>
-            </p:contentPart>
-          </mc:Choice>
-          <mc:Fallback xmlns="">
-            <p:pic>
-              <p:nvPicPr>
-                <p:cNvPr id="32" name="Рукописні дані 31">
-                  <a:extLst>
-                    <a:ext uri="{FF2B5EF4-FFF2-40B4-BE49-F238E27FC236}">
-                      <a16:creationId xmlns:a16="http://schemas.microsoft.com/office/drawing/2014/main" id="{0C0C3500-FD71-4C10-A689-EA9A38CD43D3}"/>
-                    </a:ext>
-                  </a:extLst>
-                </p:cNvPr>
-                <p:cNvPicPr/>
-                <p:nvPr/>
-              </p:nvPicPr>
-              <p:blipFill>
-                <a:blip r:embed="rId41"/>
-                <a:stretch>
-                  <a:fillRect/>
-                </a:stretch>
-              </p:blipFill>
-              <p:spPr>
-                <a:xfrm>
-                  <a:off x="5639430" y="6172740"/>
-                  <a:ext cx="396360" cy="94680"/>
-                </a:xfrm>
-                <a:prstGeom prst="rect">
-                  <a:avLst/>
-                </a:prstGeom>
-              </p:spPr>
-            </p:pic>
-          </mc:Fallback>
-        </mc:AlternateContent>
-        <mc:AlternateContent xmlns:mc="http://schemas.openxmlformats.org/markup-compatibility/2006" xmlns:p14="http://schemas.microsoft.com/office/powerpoint/2010/main">
-          <mc:Choice Requires="p14">
-            <p:contentPart p14:bwMode="auto" r:id="rId42">
-              <p14:nvContentPartPr>
-                <p14:cNvPr id="34" name="Рукописні дані 33">
-                  <a:extLst>
-                    <a:ext uri="{FF2B5EF4-FFF2-40B4-BE49-F238E27FC236}">
-                      <a16:creationId xmlns:a16="http://schemas.microsoft.com/office/drawing/2014/main" id="{56015460-173D-49F2-B0C9-15BF9D081664}"/>
-                    </a:ext>
-                  </a:extLst>
-                </p14:cNvPr>
-                <p14:cNvContentPartPr/>
-                <p14:nvPr/>
-              </p14:nvContentPartPr>
-              <p14:xfrm>
-                <a:off x="6381750" y="6146460"/>
-                <a:ext cx="218160" cy="102240"/>
-              </p14:xfrm>
-            </p:contentPart>
-          </mc:Choice>
-          <mc:Fallback xmlns="">
-            <p:pic>
-              <p:nvPicPr>
-                <p:cNvPr id="34" name="Рукописні дані 33">
-                  <a:extLst>
-                    <a:ext uri="{FF2B5EF4-FFF2-40B4-BE49-F238E27FC236}">
-                      <a16:creationId xmlns:a16="http://schemas.microsoft.com/office/drawing/2014/main" id="{56015460-173D-49F2-B0C9-15BF9D081664}"/>
-                    </a:ext>
-                  </a:extLst>
-                </p:cNvPr>
-                <p:cNvPicPr/>
-                <p:nvPr/>
-              </p:nvPicPr>
-              <p:blipFill>
-                <a:blip r:embed="rId43"/>
-                <a:stretch>
-                  <a:fillRect/>
-                </a:stretch>
-              </p:blipFill>
-              <p:spPr>
-                <a:xfrm>
-                  <a:off x="6372750" y="6137460"/>
-                  <a:ext cx="235800" cy="119880"/>
-                </a:xfrm>
-                <a:prstGeom prst="rect">
-                  <a:avLst/>
-                </a:prstGeom>
-              </p:spPr>
-            </p:pic>
-          </mc:Fallback>
-        </mc:AlternateContent>
-        <mc:AlternateContent xmlns:mc="http://schemas.openxmlformats.org/markup-compatibility/2006" xmlns:p14="http://schemas.microsoft.com/office/powerpoint/2010/main">
-          <mc:Choice Requires="p14">
-            <p:contentPart p14:bwMode="auto" r:id="rId44">
-              <p14:nvContentPartPr>
-                <p14:cNvPr id="36" name="Рукописні дані 35">
-                  <a:extLst>
-                    <a:ext uri="{FF2B5EF4-FFF2-40B4-BE49-F238E27FC236}">
-                      <a16:creationId xmlns:a16="http://schemas.microsoft.com/office/drawing/2014/main" id="{38E689A2-BB05-452E-8235-1CD1C1DD9363}"/>
-                    </a:ext>
-                  </a:extLst>
-                </p14:cNvPr>
-                <p14:cNvContentPartPr/>
-                <p14:nvPr/>
-              </p14:nvContentPartPr>
-              <p14:xfrm>
-                <a:off x="6486510" y="5876460"/>
-                <a:ext cx="28440" cy="360"/>
-              </p14:xfrm>
-            </p:contentPart>
-          </mc:Choice>
-          <mc:Fallback xmlns="">
-            <p:pic>
-              <p:nvPicPr>
-                <p:cNvPr id="36" name="Рукописні дані 35">
-                  <a:extLst>
-                    <a:ext uri="{FF2B5EF4-FFF2-40B4-BE49-F238E27FC236}">
-                      <a16:creationId xmlns:a16="http://schemas.microsoft.com/office/drawing/2014/main" id="{38E689A2-BB05-452E-8235-1CD1C1DD9363}"/>
-                    </a:ext>
-                  </a:extLst>
-                </p:cNvPr>
-                <p:cNvPicPr/>
-                <p:nvPr/>
-              </p:nvPicPr>
-              <p:blipFill>
-                <a:blip r:embed="rId45"/>
-                <a:stretch>
-                  <a:fillRect/>
-                </a:stretch>
-              </p:blipFill>
-              <p:spPr>
-                <a:xfrm>
-                  <a:off x="6477870" y="5867820"/>
-                  <a:ext cx="46080" cy="18000"/>
-                </a:xfrm>
-                <a:prstGeom prst="rect">
-                  <a:avLst/>
-                </a:prstGeom>
-              </p:spPr>
-            </p:pic>
-          </mc:Fallback>
-        </mc:AlternateContent>
-        <mc:AlternateContent xmlns:mc="http://schemas.openxmlformats.org/markup-compatibility/2006" xmlns:p14="http://schemas.microsoft.com/office/powerpoint/2010/main">
-          <mc:Choice Requires="p14">
-            <p:contentPart p14:bwMode="auto" r:id="rId46">
-              <p14:nvContentPartPr>
-                <p14:cNvPr id="38" name="Рукописні дані 37">
-                  <a:extLst>
-                    <a:ext uri="{FF2B5EF4-FFF2-40B4-BE49-F238E27FC236}">
-                      <a16:creationId xmlns:a16="http://schemas.microsoft.com/office/drawing/2014/main" id="{CF090C56-D70A-41A0-A442-5FBFF2D1CB25}"/>
-                    </a:ext>
-                  </a:extLst>
-                </p14:cNvPr>
-                <p14:cNvContentPartPr/>
-                <p14:nvPr/>
-              </p14:nvContentPartPr>
-              <p14:xfrm>
-                <a:off x="6451230" y="5819580"/>
-                <a:ext cx="130680" cy="15480"/>
-              </p14:xfrm>
-            </p:contentPart>
-          </mc:Choice>
-          <mc:Fallback xmlns="">
-            <p:pic>
-              <p:nvPicPr>
-                <p:cNvPr id="38" name="Рукописні дані 37">
-                  <a:extLst>
-                    <a:ext uri="{FF2B5EF4-FFF2-40B4-BE49-F238E27FC236}">
-                      <a16:creationId xmlns:a16="http://schemas.microsoft.com/office/drawing/2014/main" id="{CF090C56-D70A-41A0-A442-5FBFF2D1CB25}"/>
-                    </a:ext>
-                  </a:extLst>
-                </p:cNvPr>
-                <p:cNvPicPr/>
-                <p:nvPr/>
-              </p:nvPicPr>
-              <p:blipFill>
-                <a:blip r:embed="rId47"/>
-                <a:stretch>
-                  <a:fillRect/>
-                </a:stretch>
-              </p:blipFill>
-              <p:spPr>
-                <a:xfrm>
-                  <a:off x="6442590" y="5810580"/>
-                  <a:ext cx="148320" cy="33120"/>
-                </a:xfrm>
-                <a:prstGeom prst="rect">
-                  <a:avLst/>
-                </a:prstGeom>
-              </p:spPr>
-            </p:pic>
-          </mc:Fallback>
-        </mc:AlternateContent>
-        <mc:AlternateContent xmlns:mc="http://schemas.openxmlformats.org/markup-compatibility/2006" xmlns:p14="http://schemas.microsoft.com/office/powerpoint/2010/main">
-          <mc:Choice Requires="p14">
-            <p:contentPart p14:bwMode="auto" r:id="rId48">
-              <p14:nvContentPartPr>
-                <p14:cNvPr id="40" name="Рукописні дані 39">
-                  <a:extLst>
-                    <a:ext uri="{FF2B5EF4-FFF2-40B4-BE49-F238E27FC236}">
-                      <a16:creationId xmlns:a16="http://schemas.microsoft.com/office/drawing/2014/main" id="{B82B6F50-E3CF-46B2-AE19-EC9EE2D6B795}"/>
-                    </a:ext>
-                  </a:extLst>
-                </p14:cNvPr>
-                <p14:cNvContentPartPr/>
-                <p14:nvPr/>
-              </p14:nvContentPartPr>
-              <p14:xfrm>
-                <a:off x="5664270" y="6180660"/>
-                <a:ext cx="317880" cy="154080"/>
-              </p14:xfrm>
-            </p:contentPart>
-          </mc:Choice>
-          <mc:Fallback xmlns="">
-            <p:pic>
-              <p:nvPicPr>
-                <p:cNvPr id="40" name="Рукописні дані 39">
-                  <a:extLst>
-                    <a:ext uri="{FF2B5EF4-FFF2-40B4-BE49-F238E27FC236}">
-                      <a16:creationId xmlns:a16="http://schemas.microsoft.com/office/drawing/2014/main" id="{B82B6F50-E3CF-46B2-AE19-EC9EE2D6B795}"/>
-                    </a:ext>
-                  </a:extLst>
-                </p:cNvPr>
-                <p:cNvPicPr/>
-                <p:nvPr/>
-              </p:nvPicPr>
-              <p:blipFill>
-                <a:blip r:embed="rId49"/>
-                <a:stretch>
-                  <a:fillRect/>
-                </a:stretch>
-              </p:blipFill>
-              <p:spPr>
-                <a:xfrm>
-                  <a:off x="5655630" y="6172020"/>
-                  <a:ext cx="335520" cy="171720"/>
-                </a:xfrm>
-                <a:prstGeom prst="rect">
-                  <a:avLst/>
-                </a:prstGeom>
-              </p:spPr>
-            </p:pic>
-          </mc:Fallback>
-        </mc:AlternateContent>
-      </p:grpSp>
-      <p:grpSp>
-        <p:nvGrpSpPr>
-          <p:cNvPr id="46" name="Групувати 45">
-            <a:extLst>
-              <a:ext uri="{FF2B5EF4-FFF2-40B4-BE49-F238E27FC236}">
-                <a16:creationId xmlns:a16="http://schemas.microsoft.com/office/drawing/2014/main" id="{708E3EA7-93F9-43A8-AFB7-501ACDABDE71}"/>
-              </a:ext>
-            </a:extLst>
-          </p:cNvPr>
-          <p:cNvGrpSpPr/>
-          <p:nvPr/>
-        </p:nvGrpSpPr>
-        <p:grpSpPr>
-          <a:xfrm>
-            <a:off x="2724150" y="5647860"/>
-            <a:ext cx="1184040" cy="623160"/>
-            <a:chOff x="2724150" y="5647860"/>
-            <a:chExt cx="1184040" cy="623160"/>
-          </a:xfrm>
-        </p:grpSpPr>
-        <mc:AlternateContent xmlns:mc="http://schemas.openxmlformats.org/markup-compatibility/2006" xmlns:p14="http://schemas.microsoft.com/office/powerpoint/2010/main">
-          <mc:Choice Requires="p14">
-            <p:contentPart p14:bwMode="auto" r:id="rId50">
-              <p14:nvContentPartPr>
-                <p14:cNvPr id="4" name="Рукописні дані 3">
-                  <a:extLst>
-                    <a:ext uri="{FF2B5EF4-FFF2-40B4-BE49-F238E27FC236}">
-                      <a16:creationId xmlns:a16="http://schemas.microsoft.com/office/drawing/2014/main" id="{B6C2E2ED-9F56-4861-97C6-222E82AA77CB}"/>
-                    </a:ext>
-                  </a:extLst>
-                </p14:cNvPr>
-                <p14:cNvContentPartPr/>
-                <p14:nvPr/>
-              </p14:nvContentPartPr>
-              <p14:xfrm>
-                <a:off x="2886150" y="6224940"/>
-                <a:ext cx="155880" cy="23760"/>
-              </p14:xfrm>
-            </p:contentPart>
-          </mc:Choice>
-          <mc:Fallback xmlns="">
-            <p:pic>
-              <p:nvPicPr>
-                <p:cNvPr id="4" name="Рукописні дані 3">
-                  <a:extLst>
-                    <a:ext uri="{FF2B5EF4-FFF2-40B4-BE49-F238E27FC236}">
-                      <a16:creationId xmlns:a16="http://schemas.microsoft.com/office/drawing/2014/main" id="{B6C2E2ED-9F56-4861-97C6-222E82AA77CB}"/>
-                    </a:ext>
-                  </a:extLst>
-                </p:cNvPr>
-                <p:cNvPicPr/>
-                <p:nvPr/>
-              </p:nvPicPr>
-              <p:blipFill>
-                <a:blip r:embed="rId51"/>
-                <a:stretch>
-                  <a:fillRect/>
-                </a:stretch>
-              </p:blipFill>
-              <p:spPr>
-                <a:xfrm>
-                  <a:off x="2877150" y="6216300"/>
-                  <a:ext cx="173520" cy="41400"/>
-                </a:xfrm>
-                <a:prstGeom prst="rect">
-                  <a:avLst/>
-                </a:prstGeom>
-              </p:spPr>
-            </p:pic>
-          </mc:Fallback>
-        </mc:AlternateContent>
-        <mc:AlternateContent xmlns:mc="http://schemas.openxmlformats.org/markup-compatibility/2006" xmlns:p14="http://schemas.microsoft.com/office/powerpoint/2010/main">
-          <mc:Choice Requires="p14">
-            <p:contentPart p14:bwMode="auto" r:id="rId52">
-              <p14:nvContentPartPr>
-                <p14:cNvPr id="5" name="Рукописні дані 4">
-                  <a:extLst>
-                    <a:ext uri="{FF2B5EF4-FFF2-40B4-BE49-F238E27FC236}">
-                      <a16:creationId xmlns:a16="http://schemas.microsoft.com/office/drawing/2014/main" id="{1D517A6B-A461-45BB-8A69-216C11780005}"/>
-                    </a:ext>
-                  </a:extLst>
-                </p14:cNvPr>
-                <p14:cNvContentPartPr/>
-                <p14:nvPr/>
-              </p14:nvContentPartPr>
-              <p14:xfrm>
-                <a:off x="2904870" y="6221700"/>
-                <a:ext cx="124920" cy="9360"/>
-              </p14:xfrm>
-            </p:contentPart>
-          </mc:Choice>
-          <mc:Fallback xmlns="">
-            <p:pic>
-              <p:nvPicPr>
-                <p:cNvPr id="5" name="Рукописні дані 4">
-                  <a:extLst>
-                    <a:ext uri="{FF2B5EF4-FFF2-40B4-BE49-F238E27FC236}">
-                      <a16:creationId xmlns:a16="http://schemas.microsoft.com/office/drawing/2014/main" id="{1D517A6B-A461-45BB-8A69-216C11780005}"/>
-                    </a:ext>
-                  </a:extLst>
-                </p:cNvPr>
-                <p:cNvPicPr/>
-                <p:nvPr/>
-              </p:nvPicPr>
-              <p:blipFill>
-                <a:blip r:embed="rId53"/>
-                <a:stretch>
-                  <a:fillRect/>
-                </a:stretch>
-              </p:blipFill>
-              <p:spPr>
-                <a:xfrm>
-                  <a:off x="2896230" y="6212700"/>
-                  <a:ext cx="142560" cy="27000"/>
-                </a:xfrm>
-                <a:prstGeom prst="rect">
-                  <a:avLst/>
-                </a:prstGeom>
-              </p:spPr>
-            </p:pic>
-          </mc:Fallback>
-        </mc:AlternateContent>
-        <mc:AlternateContent xmlns:mc="http://schemas.openxmlformats.org/markup-compatibility/2006" xmlns:p14="http://schemas.microsoft.com/office/powerpoint/2010/main">
-          <mc:Choice Requires="p14">
-            <p:contentPart p14:bwMode="auto" r:id="rId54">
-              <p14:nvContentPartPr>
-                <p14:cNvPr id="42" name="Рукописні дані 41">
-                  <a:extLst>
-                    <a:ext uri="{FF2B5EF4-FFF2-40B4-BE49-F238E27FC236}">
-                      <a16:creationId xmlns:a16="http://schemas.microsoft.com/office/drawing/2014/main" id="{96B043AE-A055-416C-A6C9-59E42FD6571F}"/>
-                    </a:ext>
-                  </a:extLst>
-                </p14:cNvPr>
-                <p14:cNvContentPartPr/>
-                <p14:nvPr/>
-              </p14:nvContentPartPr>
-              <p14:xfrm>
-                <a:off x="2724150" y="5886540"/>
-                <a:ext cx="218880" cy="353160"/>
-              </p14:xfrm>
-            </p:contentPart>
-          </mc:Choice>
-          <mc:Fallback xmlns="">
-            <p:pic>
-              <p:nvPicPr>
-                <p:cNvPr id="42" name="Рукописні дані 41">
-                  <a:extLst>
-                    <a:ext uri="{FF2B5EF4-FFF2-40B4-BE49-F238E27FC236}">
-                      <a16:creationId xmlns:a16="http://schemas.microsoft.com/office/drawing/2014/main" id="{96B043AE-A055-416C-A6C9-59E42FD6571F}"/>
-                    </a:ext>
-                  </a:extLst>
-                </p:cNvPr>
-                <p:cNvPicPr/>
-                <p:nvPr/>
-              </p:nvPicPr>
-              <p:blipFill>
-                <a:blip r:embed="rId55"/>
-                <a:stretch>
-                  <a:fillRect/>
-                </a:stretch>
-              </p:blipFill>
-              <p:spPr>
-                <a:xfrm>
-                  <a:off x="2715150" y="5877540"/>
-                  <a:ext cx="236520" cy="370800"/>
-                </a:xfrm>
-                <a:prstGeom prst="rect">
-                  <a:avLst/>
-                </a:prstGeom>
-              </p:spPr>
-            </p:pic>
-          </mc:Fallback>
-        </mc:AlternateContent>
-        <mc:AlternateContent xmlns:mc="http://schemas.openxmlformats.org/markup-compatibility/2006" xmlns:p14="http://schemas.microsoft.com/office/powerpoint/2010/main">
-          <mc:Choice Requires="p14">
-            <p:contentPart p14:bwMode="auto" r:id="rId56">
-              <p14:nvContentPartPr>
-                <p14:cNvPr id="43" name="Рукописні дані 42">
-                  <a:extLst>
-                    <a:ext uri="{FF2B5EF4-FFF2-40B4-BE49-F238E27FC236}">
-                      <a16:creationId xmlns:a16="http://schemas.microsoft.com/office/drawing/2014/main" id="{2A63C681-5361-4DD5-B6D7-604BDE7883BE}"/>
-                    </a:ext>
-                  </a:extLst>
-                </p14:cNvPr>
-                <p14:cNvContentPartPr/>
-                <p14:nvPr/>
-              </p14:nvContentPartPr>
-              <p14:xfrm>
-                <a:off x="2819190" y="5647860"/>
-                <a:ext cx="360" cy="30960"/>
-              </p14:xfrm>
-            </p:contentPart>
-          </mc:Choice>
-          <mc:Fallback xmlns="">
-            <p:pic>
-              <p:nvPicPr>
-                <p:cNvPr id="43" name="Рукописні дані 42">
-                  <a:extLst>
-                    <a:ext uri="{FF2B5EF4-FFF2-40B4-BE49-F238E27FC236}">
-                      <a16:creationId xmlns:a16="http://schemas.microsoft.com/office/drawing/2014/main" id="{2A63C681-5361-4DD5-B6D7-604BDE7883BE}"/>
-                    </a:ext>
-                  </a:extLst>
-                </p:cNvPr>
-                <p:cNvPicPr/>
-                <p:nvPr/>
-              </p:nvPicPr>
-              <p:blipFill>
-                <a:blip r:embed="rId57"/>
-                <a:stretch>
-                  <a:fillRect/>
-                </a:stretch>
-              </p:blipFill>
-              <p:spPr>
-                <a:xfrm>
-                  <a:off x="2810190" y="5639220"/>
-                  <a:ext cx="18000" cy="48600"/>
-                </a:xfrm>
-                <a:prstGeom prst="rect">
-                  <a:avLst/>
-                </a:prstGeom>
-              </p:spPr>
-            </p:pic>
-          </mc:Fallback>
-        </mc:AlternateContent>
-        <mc:AlternateContent xmlns:mc="http://schemas.openxmlformats.org/markup-compatibility/2006" xmlns:p14="http://schemas.microsoft.com/office/powerpoint/2010/main">
-          <mc:Choice Requires="p14">
-            <p:contentPart p14:bwMode="auto" r:id="rId58">
-              <p14:nvContentPartPr>
-                <p14:cNvPr id="44" name="Рукописні дані 43">
-                  <a:extLst>
-                    <a:ext uri="{FF2B5EF4-FFF2-40B4-BE49-F238E27FC236}">
-                      <a16:creationId xmlns:a16="http://schemas.microsoft.com/office/drawing/2014/main" id="{DBF27B31-2113-417D-83FA-AEB72BFCBA80}"/>
-                    </a:ext>
-                  </a:extLst>
-                </p14:cNvPr>
-                <p14:cNvContentPartPr/>
-                <p14:nvPr/>
-              </p14:nvContentPartPr>
-              <p14:xfrm>
-                <a:off x="3200070" y="5894460"/>
-                <a:ext cx="373320" cy="376560"/>
-              </p14:xfrm>
-            </p:contentPart>
-          </mc:Choice>
-          <mc:Fallback xmlns="">
-            <p:pic>
-              <p:nvPicPr>
-                <p:cNvPr id="44" name="Рукописні дані 43">
-                  <a:extLst>
-                    <a:ext uri="{FF2B5EF4-FFF2-40B4-BE49-F238E27FC236}">
-                      <a16:creationId xmlns:a16="http://schemas.microsoft.com/office/drawing/2014/main" id="{DBF27B31-2113-417D-83FA-AEB72BFCBA80}"/>
-                    </a:ext>
-                  </a:extLst>
-                </p:cNvPr>
-                <p:cNvPicPr/>
-                <p:nvPr/>
-              </p:nvPicPr>
-              <p:blipFill>
-                <a:blip r:embed="rId59"/>
-                <a:stretch>
-                  <a:fillRect/>
-                </a:stretch>
-              </p:blipFill>
-              <p:spPr>
-                <a:xfrm>
-                  <a:off x="3191430" y="5885460"/>
-                  <a:ext cx="390960" cy="394200"/>
-                </a:xfrm>
-                <a:prstGeom prst="rect">
-                  <a:avLst/>
-                </a:prstGeom>
-              </p:spPr>
-            </p:pic>
-          </mc:Fallback>
-        </mc:AlternateContent>
-        <mc:AlternateContent xmlns:mc="http://schemas.openxmlformats.org/markup-compatibility/2006" xmlns:p14="http://schemas.microsoft.com/office/powerpoint/2010/main">
-          <mc:Choice Requires="p14">
-            <p:contentPart p14:bwMode="auto" r:id="rId60">
-              <p14:nvContentPartPr>
-                <p14:cNvPr id="45" name="Рукописні дані 44">
-                  <a:extLst>
-                    <a:ext uri="{FF2B5EF4-FFF2-40B4-BE49-F238E27FC236}">
-                      <a16:creationId xmlns:a16="http://schemas.microsoft.com/office/drawing/2014/main" id="{4121FB35-44B7-4091-9B28-5EC174C855D3}"/>
-                    </a:ext>
-                  </a:extLst>
-                </p14:cNvPr>
-                <p14:cNvContentPartPr/>
-                <p14:nvPr/>
-              </p14:nvContentPartPr>
-              <p14:xfrm>
-                <a:off x="3587070" y="5667300"/>
-                <a:ext cx="321120" cy="489240"/>
-              </p14:xfrm>
-            </p:contentPart>
-          </mc:Choice>
-          <mc:Fallback xmlns="">
-            <p:pic>
-              <p:nvPicPr>
-                <p:cNvPr id="45" name="Рукописні дані 44">
-                  <a:extLst>
-                    <a:ext uri="{FF2B5EF4-FFF2-40B4-BE49-F238E27FC236}">
-                      <a16:creationId xmlns:a16="http://schemas.microsoft.com/office/drawing/2014/main" id="{4121FB35-44B7-4091-9B28-5EC174C855D3}"/>
-                    </a:ext>
-                  </a:extLst>
-                </p:cNvPr>
-                <p:cNvPicPr/>
-                <p:nvPr/>
-              </p:nvPicPr>
-              <p:blipFill>
-                <a:blip r:embed="rId61"/>
-                <a:stretch>
-                  <a:fillRect/>
-                </a:stretch>
-              </p:blipFill>
-              <p:spPr>
-                <a:xfrm>
-                  <a:off x="3578070" y="5658660"/>
-                  <a:ext cx="338760" cy="506880"/>
-                </a:xfrm>
-                <a:prstGeom prst="rect">
-                  <a:avLst/>
-                </a:prstGeom>
-              </p:spPr>
-            </p:pic>
-          </mc:Fallback>
-        </mc:AlternateContent>
-      </p:grpSp>
-      <p:grpSp>
-        <p:nvGrpSpPr>
-          <p:cNvPr id="54" name="Групувати 53">
-            <a:extLst>
-              <a:ext uri="{FF2B5EF4-FFF2-40B4-BE49-F238E27FC236}">
-                <a16:creationId xmlns:a16="http://schemas.microsoft.com/office/drawing/2014/main" id="{CA39A3D8-DCB3-4DD0-B17A-8733EF580ACE}"/>
-              </a:ext>
-            </a:extLst>
-          </p:cNvPr>
-          <p:cNvGrpSpPr/>
-          <p:nvPr/>
-        </p:nvGrpSpPr>
-        <p:grpSpPr>
-          <a:xfrm>
-            <a:off x="8353110" y="5838660"/>
-            <a:ext cx="424800" cy="114840"/>
-            <a:chOff x="8353110" y="5838660"/>
-            <a:chExt cx="424800" cy="114840"/>
-          </a:xfrm>
-        </p:grpSpPr>
-        <mc:AlternateContent xmlns:mc="http://schemas.openxmlformats.org/markup-compatibility/2006" xmlns:p14="http://schemas.microsoft.com/office/powerpoint/2010/main">
-          <mc:Choice Requires="p14">
-            <p:contentPart p14:bwMode="auto" r:id="rId62">
-              <p14:nvContentPartPr>
-                <p14:cNvPr id="47" name="Рукописні дані 46">
-                  <a:extLst>
-                    <a:ext uri="{FF2B5EF4-FFF2-40B4-BE49-F238E27FC236}">
-                      <a16:creationId xmlns:a16="http://schemas.microsoft.com/office/drawing/2014/main" id="{209B24BD-E34E-4C65-87C7-CCEE7C4BD05E}"/>
-                    </a:ext>
-                  </a:extLst>
-                </p14:cNvPr>
-                <p14:cNvContentPartPr/>
-                <p14:nvPr/>
-              </p14:nvContentPartPr>
-              <p14:xfrm>
-                <a:off x="8353110" y="5838660"/>
-                <a:ext cx="255960" cy="360"/>
-              </p14:xfrm>
-            </p:contentPart>
-          </mc:Choice>
-          <mc:Fallback xmlns="">
-            <p:pic>
-              <p:nvPicPr>
-                <p:cNvPr id="47" name="Рукописні дані 46">
-                  <a:extLst>
-                    <a:ext uri="{FF2B5EF4-FFF2-40B4-BE49-F238E27FC236}">
-                      <a16:creationId xmlns:a16="http://schemas.microsoft.com/office/drawing/2014/main" id="{209B24BD-E34E-4C65-87C7-CCEE7C4BD05E}"/>
-                    </a:ext>
-                  </a:extLst>
-                </p:cNvPr>
-                <p:cNvPicPr/>
-                <p:nvPr/>
-              </p:nvPicPr>
-              <p:blipFill>
-                <a:blip r:embed="rId63"/>
-                <a:stretch>
-                  <a:fillRect/>
-                </a:stretch>
-              </p:blipFill>
-              <p:spPr>
-                <a:xfrm>
-                  <a:off x="8344470" y="5830020"/>
-                  <a:ext cx="273600" cy="18000"/>
-                </a:xfrm>
-                <a:prstGeom prst="rect">
-                  <a:avLst/>
-                </a:prstGeom>
-              </p:spPr>
-            </p:pic>
-          </mc:Fallback>
-        </mc:AlternateContent>
-        <mc:AlternateContent xmlns:mc="http://schemas.openxmlformats.org/markup-compatibility/2006" xmlns:p14="http://schemas.microsoft.com/office/powerpoint/2010/main">
-          <mc:Choice Requires="p14">
-            <p:contentPart p14:bwMode="auto" r:id="rId64">
-              <p14:nvContentPartPr>
-                <p14:cNvPr id="48" name="Рукописні дані 47">
-                  <a:extLst>
-                    <a:ext uri="{FF2B5EF4-FFF2-40B4-BE49-F238E27FC236}">
-                      <a16:creationId xmlns:a16="http://schemas.microsoft.com/office/drawing/2014/main" id="{71771BF4-5E07-42B2-8086-E860DA3E4D5D}"/>
-                    </a:ext>
-                  </a:extLst>
-                </p14:cNvPr>
-                <p14:cNvContentPartPr/>
-                <p14:nvPr/>
-              </p14:nvContentPartPr>
-              <p14:xfrm>
-                <a:off x="8391270" y="5953140"/>
-                <a:ext cx="386640" cy="360"/>
-              </p14:xfrm>
-            </p:contentPart>
-          </mc:Choice>
-          <mc:Fallback xmlns="">
-            <p:pic>
-              <p:nvPicPr>
-                <p:cNvPr id="48" name="Рукописні дані 47">
-                  <a:extLst>
-                    <a:ext uri="{FF2B5EF4-FFF2-40B4-BE49-F238E27FC236}">
-                      <a16:creationId xmlns:a16="http://schemas.microsoft.com/office/drawing/2014/main" id="{71771BF4-5E07-42B2-8086-E860DA3E4D5D}"/>
-                    </a:ext>
-                  </a:extLst>
-                </p:cNvPr>
-                <p:cNvPicPr/>
-                <p:nvPr/>
-              </p:nvPicPr>
-              <p:blipFill>
-                <a:blip r:embed="rId65"/>
-                <a:stretch>
-                  <a:fillRect/>
-                </a:stretch>
-              </p:blipFill>
-              <p:spPr>
-                <a:xfrm>
-                  <a:off x="8382630" y="5944140"/>
-                  <a:ext cx="404280" cy="18000"/>
-                </a:xfrm>
-                <a:prstGeom prst="rect">
-                  <a:avLst/>
-                </a:prstGeom>
-              </p:spPr>
-            </p:pic>
-          </mc:Fallback>
-        </mc:AlternateContent>
-      </p:grpSp>
-      <p:grpSp>
-        <p:nvGrpSpPr>
-          <p:cNvPr id="53" name="Групувати 52">
-            <a:extLst>
-              <a:ext uri="{FF2B5EF4-FFF2-40B4-BE49-F238E27FC236}">
-                <a16:creationId xmlns:a16="http://schemas.microsoft.com/office/drawing/2014/main" id="{22D1D23C-CAD8-4052-851B-1BE5CDB2C51F}"/>
-              </a:ext>
-            </a:extLst>
-          </p:cNvPr>
-          <p:cNvGrpSpPr/>
-          <p:nvPr/>
-        </p:nvGrpSpPr>
-        <p:grpSpPr>
-          <a:xfrm>
-            <a:off x="9211710" y="5599620"/>
-            <a:ext cx="637200" cy="778320"/>
-            <a:chOff x="9211710" y="5599620"/>
-            <a:chExt cx="637200" cy="778320"/>
-          </a:xfrm>
-        </p:grpSpPr>
-        <mc:AlternateContent xmlns:mc="http://schemas.openxmlformats.org/markup-compatibility/2006" xmlns:p14="http://schemas.microsoft.com/office/powerpoint/2010/main">
-          <mc:Choice Requires="p14">
-            <p:contentPart p14:bwMode="auto" r:id="rId66">
-              <p14:nvContentPartPr>
-                <p14:cNvPr id="49" name="Рукописні дані 48">
-                  <a:extLst>
-                    <a:ext uri="{FF2B5EF4-FFF2-40B4-BE49-F238E27FC236}">
-                      <a16:creationId xmlns:a16="http://schemas.microsoft.com/office/drawing/2014/main" id="{719221D7-EF5D-40B7-A1AD-43DC226C81AF}"/>
-                    </a:ext>
-                  </a:extLst>
-                </p14:cNvPr>
-                <p14:cNvContentPartPr/>
-                <p14:nvPr/>
-              </p14:nvContentPartPr>
-              <p14:xfrm>
-                <a:off x="9211710" y="5667300"/>
-                <a:ext cx="338040" cy="389520"/>
-              </p14:xfrm>
-            </p:contentPart>
-          </mc:Choice>
-          <mc:Fallback xmlns="">
-            <p:pic>
-              <p:nvPicPr>
-                <p:cNvPr id="49" name="Рукописні дані 48">
-                  <a:extLst>
-                    <a:ext uri="{FF2B5EF4-FFF2-40B4-BE49-F238E27FC236}">
-                      <a16:creationId xmlns:a16="http://schemas.microsoft.com/office/drawing/2014/main" id="{719221D7-EF5D-40B7-A1AD-43DC226C81AF}"/>
-                    </a:ext>
-                  </a:extLst>
-                </p:cNvPr>
-                <p:cNvPicPr/>
-                <p:nvPr/>
-              </p:nvPicPr>
-              <p:blipFill>
-                <a:blip r:embed="rId67"/>
-                <a:stretch>
-                  <a:fillRect/>
-                </a:stretch>
-              </p:blipFill>
-              <p:spPr>
-                <a:xfrm>
-                  <a:off x="9203070" y="5658660"/>
-                  <a:ext cx="355680" cy="407160"/>
-                </a:xfrm>
-                <a:prstGeom prst="rect">
-                  <a:avLst/>
-                </a:prstGeom>
-              </p:spPr>
-            </p:pic>
-          </mc:Fallback>
-        </mc:AlternateContent>
-        <mc:AlternateContent xmlns:mc="http://schemas.openxmlformats.org/markup-compatibility/2006" xmlns:p14="http://schemas.microsoft.com/office/powerpoint/2010/main">
-          <mc:Choice Requires="p14">
-            <p:contentPart p14:bwMode="auto" r:id="rId68">
-              <p14:nvContentPartPr>
-                <p14:cNvPr id="50" name="Рукописні дані 49">
-                  <a:extLst>
-                    <a:ext uri="{FF2B5EF4-FFF2-40B4-BE49-F238E27FC236}">
-                      <a16:creationId xmlns:a16="http://schemas.microsoft.com/office/drawing/2014/main" id="{25218A9B-F960-4F41-BAF5-D9E2AE3651B0}"/>
-                    </a:ext>
-                  </a:extLst>
-                </p14:cNvPr>
-                <p14:cNvContentPartPr/>
-                <p14:nvPr/>
-              </p14:nvContentPartPr>
-              <p14:xfrm>
-                <a:off x="9219990" y="5599620"/>
-                <a:ext cx="470520" cy="10800"/>
-              </p14:xfrm>
-            </p:contentPart>
-          </mc:Choice>
-          <mc:Fallback xmlns="">
-            <p:pic>
-              <p:nvPicPr>
-                <p:cNvPr id="50" name="Рукописні дані 49">
-                  <a:extLst>
-                    <a:ext uri="{FF2B5EF4-FFF2-40B4-BE49-F238E27FC236}">
-                      <a16:creationId xmlns:a16="http://schemas.microsoft.com/office/drawing/2014/main" id="{25218A9B-F960-4F41-BAF5-D9E2AE3651B0}"/>
-                    </a:ext>
-                  </a:extLst>
-                </p:cNvPr>
-                <p:cNvPicPr/>
-                <p:nvPr/>
-              </p:nvPicPr>
-              <p:blipFill>
-                <a:blip r:embed="rId69"/>
-                <a:stretch>
-                  <a:fillRect/>
-                </a:stretch>
-              </p:blipFill>
-              <p:spPr>
-                <a:xfrm>
-                  <a:off x="9210990" y="5590980"/>
-                  <a:ext cx="488160" cy="28440"/>
-                </a:xfrm>
-                <a:prstGeom prst="rect">
-                  <a:avLst/>
-                </a:prstGeom>
-              </p:spPr>
-            </p:pic>
-          </mc:Fallback>
-        </mc:AlternateContent>
-        <mc:AlternateContent xmlns:mc="http://schemas.openxmlformats.org/markup-compatibility/2006" xmlns:p14="http://schemas.microsoft.com/office/powerpoint/2010/main">
-          <mc:Choice Requires="p14">
-            <p:contentPart p14:bwMode="auto" r:id="rId70">
-              <p14:nvContentPartPr>
-                <p14:cNvPr id="51" name="Рукописні дані 50">
-                  <a:extLst>
-                    <a:ext uri="{FF2B5EF4-FFF2-40B4-BE49-F238E27FC236}">
-                      <a16:creationId xmlns:a16="http://schemas.microsoft.com/office/drawing/2014/main" id="{BE8E9E83-D1C2-4EB2-997B-7CCCDCBC7231}"/>
-                    </a:ext>
-                  </a:extLst>
-                </p14:cNvPr>
-                <p14:cNvContentPartPr/>
-                <p14:nvPr/>
-              </p14:nvContentPartPr>
-              <p14:xfrm>
-                <a:off x="9848550" y="5686380"/>
-                <a:ext cx="360" cy="11880"/>
-              </p14:xfrm>
-            </p:contentPart>
-          </mc:Choice>
-          <mc:Fallback xmlns="">
-            <p:pic>
-              <p:nvPicPr>
-                <p:cNvPr id="51" name="Рукописні дані 50">
-                  <a:extLst>
-                    <a:ext uri="{FF2B5EF4-FFF2-40B4-BE49-F238E27FC236}">
-                      <a16:creationId xmlns:a16="http://schemas.microsoft.com/office/drawing/2014/main" id="{BE8E9E83-D1C2-4EB2-997B-7CCCDCBC7231}"/>
-                    </a:ext>
-                  </a:extLst>
-                </p:cNvPr>
-                <p:cNvPicPr/>
-                <p:nvPr/>
-              </p:nvPicPr>
-              <p:blipFill>
-                <a:blip r:embed="rId71"/>
-                <a:stretch>
-                  <a:fillRect/>
-                </a:stretch>
-              </p:blipFill>
-              <p:spPr>
-                <a:xfrm>
-                  <a:off x="9839550" y="5677380"/>
-                  <a:ext cx="18000" cy="29520"/>
-                </a:xfrm>
-                <a:prstGeom prst="rect">
-                  <a:avLst/>
-                </a:prstGeom>
-              </p:spPr>
-            </p:pic>
-          </mc:Fallback>
-        </mc:AlternateContent>
-        <mc:AlternateContent xmlns:mc="http://schemas.openxmlformats.org/markup-compatibility/2006" xmlns:p14="http://schemas.microsoft.com/office/powerpoint/2010/main">
-          <mc:Choice Requires="p14">
-            <p:contentPart p14:bwMode="auto" r:id="rId72">
-              <p14:nvContentPartPr>
-                <p14:cNvPr id="52" name="Рукописні дані 51">
-                  <a:extLst>
-                    <a:ext uri="{FF2B5EF4-FFF2-40B4-BE49-F238E27FC236}">
-                      <a16:creationId xmlns:a16="http://schemas.microsoft.com/office/drawing/2014/main" id="{7E8897AC-65DA-4593-93F0-3DD66AC72415}"/>
-                    </a:ext>
-                  </a:extLst>
-                </p14:cNvPr>
-                <p14:cNvContentPartPr/>
-                <p14:nvPr/>
-              </p14:nvContentPartPr>
-              <p14:xfrm>
-                <a:off x="9634350" y="6000660"/>
-                <a:ext cx="167040" cy="377280"/>
-              </p14:xfrm>
-            </p:contentPart>
-          </mc:Choice>
-          <mc:Fallback xmlns="">
-            <p:pic>
-              <p:nvPicPr>
-                <p:cNvPr id="52" name="Рукописні дані 51">
-                  <a:extLst>
-                    <a:ext uri="{FF2B5EF4-FFF2-40B4-BE49-F238E27FC236}">
-                      <a16:creationId xmlns:a16="http://schemas.microsoft.com/office/drawing/2014/main" id="{7E8897AC-65DA-4593-93F0-3DD66AC72415}"/>
-                    </a:ext>
-                  </a:extLst>
-                </p:cNvPr>
-                <p:cNvPicPr/>
-                <p:nvPr/>
-              </p:nvPicPr>
-              <p:blipFill>
-                <a:blip r:embed="rId73"/>
-                <a:stretch>
-                  <a:fillRect/>
-                </a:stretch>
-              </p:blipFill>
-              <p:spPr>
-                <a:xfrm>
-                  <a:off x="9625710" y="5992020"/>
-                  <a:ext cx="184680" cy="394920"/>
-                </a:xfrm>
-                <a:prstGeom prst="rect">
-                  <a:avLst/>
-                </a:prstGeom>
-              </p:spPr>
-            </p:pic>
-          </mc:Fallback>
-        </mc:AlternateContent>
-      </p:grpSp>
     </p:spTree>
     <p:extLst>
       <p:ext uri="{BB962C8B-B14F-4D97-AF65-F5344CB8AC3E}">
@@ -17896,188 +13757,14 @@
           </a:p>
         </p:txBody>
       </p:sp>
-      <p:grpSp>
-        <p:nvGrpSpPr>
-          <p:cNvPr id="7" name="Групувати 6">
-            <a:extLst>
-              <a:ext uri="{FF2B5EF4-FFF2-40B4-BE49-F238E27FC236}">
-                <a16:creationId xmlns:a16="http://schemas.microsoft.com/office/drawing/2014/main" id="{AF4D040F-EE79-46AA-B032-E261691069DF}"/>
-              </a:ext>
-            </a:extLst>
-          </p:cNvPr>
-          <p:cNvGrpSpPr/>
-          <p:nvPr/>
-        </p:nvGrpSpPr>
-        <p:grpSpPr>
-          <a:xfrm>
-            <a:off x="704550" y="2151540"/>
-            <a:ext cx="1822680" cy="268920"/>
-            <a:chOff x="704550" y="2151540"/>
-            <a:chExt cx="1822680" cy="268920"/>
-          </a:xfrm>
-        </p:grpSpPr>
-        <mc:AlternateContent xmlns:mc="http://schemas.openxmlformats.org/markup-compatibility/2006" xmlns:p14="http://schemas.microsoft.com/office/powerpoint/2010/main">
-          <mc:Choice Requires="p14">
-            <p:contentPart p14:bwMode="auto" r:id="rId2">
-              <p14:nvContentPartPr>
-                <p14:cNvPr id="3" name="Рукописні дані 2">
-                  <a:extLst>
-                    <a:ext uri="{FF2B5EF4-FFF2-40B4-BE49-F238E27FC236}">
-                      <a16:creationId xmlns:a16="http://schemas.microsoft.com/office/drawing/2014/main" id="{6399BE15-489A-4FFA-A72E-838F26E1B893}"/>
-                    </a:ext>
-                  </a:extLst>
-                </p14:cNvPr>
-                <p14:cNvContentPartPr/>
-                <p14:nvPr/>
-              </p14:nvContentPartPr>
-              <p14:xfrm>
-                <a:off x="704550" y="2400300"/>
-                <a:ext cx="881280" cy="20160"/>
-              </p14:xfrm>
-            </p:contentPart>
-          </mc:Choice>
-          <mc:Fallback xmlns="">
-            <p:pic>
-              <p:nvPicPr>
-                <p:cNvPr id="3" name="Рукописні дані 2">
-                  <a:extLst>
-                    <a:ext uri="{FF2B5EF4-FFF2-40B4-BE49-F238E27FC236}">
-                      <a16:creationId xmlns:a16="http://schemas.microsoft.com/office/drawing/2014/main" id="{6399BE15-489A-4FFA-A72E-838F26E1B893}"/>
-                    </a:ext>
-                  </a:extLst>
-                </p:cNvPr>
-                <p:cNvPicPr/>
-                <p:nvPr/>
-              </p:nvPicPr>
-              <p:blipFill>
-                <a:blip r:embed="rId3"/>
-                <a:stretch>
-                  <a:fillRect/>
-                </a:stretch>
-              </p:blipFill>
-              <p:spPr>
-                <a:xfrm>
-                  <a:off x="695550" y="2391660"/>
-                  <a:ext cx="898920" cy="37800"/>
-                </a:xfrm>
-                <a:prstGeom prst="rect">
-                  <a:avLst/>
-                </a:prstGeom>
-              </p:spPr>
-            </p:pic>
-          </mc:Fallback>
-        </mc:AlternateContent>
-        <mc:AlternateContent xmlns:mc="http://schemas.openxmlformats.org/markup-compatibility/2006" xmlns:p14="http://schemas.microsoft.com/office/powerpoint/2010/main">
-          <mc:Choice Requires="p14">
-            <p:contentPart p14:bwMode="auto" r:id="rId4">
-              <p14:nvContentPartPr>
-                <p14:cNvPr id="4" name="Рукописні дані 3">
-                  <a:extLst>
-                    <a:ext uri="{FF2B5EF4-FFF2-40B4-BE49-F238E27FC236}">
-                      <a16:creationId xmlns:a16="http://schemas.microsoft.com/office/drawing/2014/main" id="{40F3ABB8-EC62-4CE2-9012-182D2AB4A452}"/>
-                    </a:ext>
-                  </a:extLst>
-                </p14:cNvPr>
-                <p14:cNvContentPartPr/>
-                <p14:nvPr/>
-              </p14:nvContentPartPr>
-              <p14:xfrm>
-                <a:off x="1752510" y="2406060"/>
-                <a:ext cx="385560" cy="3960"/>
-              </p14:xfrm>
-            </p:contentPart>
-          </mc:Choice>
-          <mc:Fallback xmlns="">
-            <p:pic>
-              <p:nvPicPr>
-                <p:cNvPr id="4" name="Рукописні дані 3">
-                  <a:extLst>
-                    <a:ext uri="{FF2B5EF4-FFF2-40B4-BE49-F238E27FC236}">
-                      <a16:creationId xmlns:a16="http://schemas.microsoft.com/office/drawing/2014/main" id="{40F3ABB8-EC62-4CE2-9012-182D2AB4A452}"/>
-                    </a:ext>
-                  </a:extLst>
-                </p:cNvPr>
-                <p:cNvPicPr/>
-                <p:nvPr/>
-              </p:nvPicPr>
-              <p:blipFill>
-                <a:blip r:embed="rId5"/>
-                <a:stretch>
-                  <a:fillRect/>
-                </a:stretch>
-              </p:blipFill>
-              <p:spPr>
-                <a:xfrm>
-                  <a:off x="1743870" y="2397060"/>
-                  <a:ext cx="403200" cy="21600"/>
-                </a:xfrm>
-                <a:prstGeom prst="rect">
-                  <a:avLst/>
-                </a:prstGeom>
-              </p:spPr>
-            </p:pic>
-          </mc:Fallback>
-        </mc:AlternateContent>
-        <mc:AlternateContent xmlns:mc="http://schemas.openxmlformats.org/markup-compatibility/2006" xmlns:p14="http://schemas.microsoft.com/office/powerpoint/2010/main">
-          <mc:Choice Requires="p14">
-            <p:contentPart p14:bwMode="auto" r:id="rId6">
-              <p14:nvContentPartPr>
-                <p14:cNvPr id="5" name="Рукописні дані 4">
-                  <a:extLst>
-                    <a:ext uri="{FF2B5EF4-FFF2-40B4-BE49-F238E27FC236}">
-                      <a16:creationId xmlns:a16="http://schemas.microsoft.com/office/drawing/2014/main" id="{BCF1BF96-9A23-47B7-BEC8-B8665BD03797}"/>
-                    </a:ext>
-                  </a:extLst>
-                </p14:cNvPr>
-                <p14:cNvContentPartPr/>
-                <p14:nvPr/>
-              </p14:nvContentPartPr>
-              <p14:xfrm>
-                <a:off x="2207550" y="2151540"/>
-                <a:ext cx="319680" cy="239400"/>
-              </p14:xfrm>
-            </p:contentPart>
-          </mc:Choice>
-          <mc:Fallback xmlns="">
-            <p:pic>
-              <p:nvPicPr>
-                <p:cNvPr id="5" name="Рукописні дані 4">
-                  <a:extLst>
-                    <a:ext uri="{FF2B5EF4-FFF2-40B4-BE49-F238E27FC236}">
-                      <a16:creationId xmlns:a16="http://schemas.microsoft.com/office/drawing/2014/main" id="{BCF1BF96-9A23-47B7-BEC8-B8665BD03797}"/>
-                    </a:ext>
-                  </a:extLst>
-                </p:cNvPr>
-                <p:cNvPicPr/>
-                <p:nvPr/>
-              </p:nvPicPr>
-              <p:blipFill>
-                <a:blip r:embed="rId7"/>
-                <a:stretch>
-                  <a:fillRect/>
-                </a:stretch>
-              </p:blipFill>
-              <p:spPr>
-                <a:xfrm>
-                  <a:off x="2198910" y="2142540"/>
-                  <a:ext cx="337320" cy="257040"/>
-                </a:xfrm>
-                <a:prstGeom prst="rect">
-                  <a:avLst/>
-                </a:prstGeom>
-              </p:spPr>
-            </p:pic>
-          </mc:Fallback>
-        </mc:AlternateContent>
-      </p:grpSp>
-      <mc:AlternateContent xmlns:mc="http://schemas.openxmlformats.org/markup-compatibility/2006" xmlns:p14="http://schemas.microsoft.com/office/powerpoint/2010/main">
-        <mc:Choice Requires="p14">
-          <p:contentPart p14:bwMode="auto" r:id="rId8">
+      <mc:AlternateContent xmlns:mc="http://schemas.openxmlformats.org/markup-compatibility/2006">
+        <mc:Choice xmlns:p14="http://schemas.microsoft.com/office/powerpoint/2010/main" Requires="p14">
+          <p:contentPart p14:bwMode="auto" r:id="rId2">
             <p14:nvContentPartPr>
-              <p14:cNvPr id="8" name="Рукописні дані 7">
+              <p14:cNvPr id="31" name="Рукописні дані 30">
                 <a:extLst>
                   <a:ext uri="{FF2B5EF4-FFF2-40B4-BE49-F238E27FC236}">
-                    <a16:creationId xmlns:a16="http://schemas.microsoft.com/office/drawing/2014/main" id="{66D5C189-3C0C-48EE-9A33-4ABFB1E419CE}"/>
+                    <a16:creationId xmlns:a16="http://schemas.microsoft.com/office/drawing/2014/main" id="{79B5EEC6-FBC0-4835-85F8-2DD917A0F7DF}"/>
                   </a:ext>
                 </a:extLst>
               </p14:cNvPr>
@@ -18085,18 +13772,18 @@
               <p14:nvPr/>
             </p14:nvContentPartPr>
             <p14:xfrm>
-              <a:off x="542910" y="4752540"/>
-              <a:ext cx="2055960" cy="934920"/>
+              <a:off x="4486350" y="5676660"/>
+              <a:ext cx="360" cy="110880"/>
             </p14:xfrm>
           </p:contentPart>
         </mc:Choice>
-        <mc:Fallback xmlns="">
+        <mc:Fallback>
           <p:pic>
             <p:nvPicPr>
-              <p:cNvPr id="8" name="Рукописні дані 7">
+              <p:cNvPr id="31" name="Рукописні дані 30">
                 <a:extLst>
                   <a:ext uri="{FF2B5EF4-FFF2-40B4-BE49-F238E27FC236}">
-                    <a16:creationId xmlns:a16="http://schemas.microsoft.com/office/drawing/2014/main" id="{66D5C189-3C0C-48EE-9A33-4ABFB1E419CE}"/>
+                    <a16:creationId xmlns:a16="http://schemas.microsoft.com/office/drawing/2014/main" id="{79B5EEC6-FBC0-4835-85F8-2DD917A0F7DF}"/>
                   </a:ext>
                 </a:extLst>
               </p:cNvPr>
@@ -18104,15 +13791,15 @@
               <p:nvPr/>
             </p:nvPicPr>
             <p:blipFill>
-              <a:blip r:embed="rId9"/>
+              <a:blip r:embed="rId3"/>
               <a:stretch>
                 <a:fillRect/>
               </a:stretch>
             </p:blipFill>
             <p:spPr>
               <a:xfrm>
-                <a:off x="534270" y="4743540"/>
-                <a:ext cx="2073600" cy="952560"/>
+                <a:off x="4477350" y="5667631"/>
+                <a:ext cx="18000" cy="128577"/>
               </a:xfrm>
               <a:prstGeom prst="rect">
                 <a:avLst/>
@@ -18121,1170 +13808,6 @@
           </p:pic>
         </mc:Fallback>
       </mc:AlternateContent>
-      <p:grpSp>
-        <p:nvGrpSpPr>
-          <p:cNvPr id="33" name="Групувати 32">
-            <a:extLst>
-              <a:ext uri="{FF2B5EF4-FFF2-40B4-BE49-F238E27FC236}">
-                <a16:creationId xmlns:a16="http://schemas.microsoft.com/office/drawing/2014/main" id="{657FCBD5-DD7A-4E6C-9FC7-9F9E1968DAA1}"/>
-              </a:ext>
-            </a:extLst>
-          </p:cNvPr>
-          <p:cNvGrpSpPr/>
-          <p:nvPr/>
-        </p:nvGrpSpPr>
-        <p:grpSpPr>
-          <a:xfrm>
-            <a:off x="1685910" y="4895460"/>
-            <a:ext cx="3177360" cy="892080"/>
-            <a:chOff x="1685910" y="4895460"/>
-            <a:chExt cx="3177360" cy="892080"/>
-          </a:xfrm>
-        </p:grpSpPr>
-        <mc:AlternateContent xmlns:mc="http://schemas.openxmlformats.org/markup-compatibility/2006" xmlns:p14="http://schemas.microsoft.com/office/powerpoint/2010/main">
-          <mc:Choice Requires="p14">
-            <p:contentPart p14:bwMode="auto" r:id="rId10">
-              <p14:nvContentPartPr>
-                <p14:cNvPr id="10" name="Рукописні дані 9">
-                  <a:extLst>
-                    <a:ext uri="{FF2B5EF4-FFF2-40B4-BE49-F238E27FC236}">
-                      <a16:creationId xmlns:a16="http://schemas.microsoft.com/office/drawing/2014/main" id="{7C6C89D1-3DCC-400D-87E5-05D1118460DA}"/>
-                    </a:ext>
-                  </a:extLst>
-                </p14:cNvPr>
-                <p14:cNvContentPartPr/>
-                <p14:nvPr/>
-              </p14:nvContentPartPr>
-              <p14:xfrm>
-                <a:off x="1685910" y="5199300"/>
-                <a:ext cx="595440" cy="11160"/>
-              </p14:xfrm>
-            </p:contentPart>
-          </mc:Choice>
-          <mc:Fallback xmlns="">
-            <p:pic>
-              <p:nvPicPr>
-                <p:cNvPr id="10" name="Рукописні дані 9">
-                  <a:extLst>
-                    <a:ext uri="{FF2B5EF4-FFF2-40B4-BE49-F238E27FC236}">
-                      <a16:creationId xmlns:a16="http://schemas.microsoft.com/office/drawing/2014/main" id="{7C6C89D1-3DCC-400D-87E5-05D1118460DA}"/>
-                    </a:ext>
-                  </a:extLst>
-                </p:cNvPr>
-                <p:cNvPicPr/>
-                <p:nvPr/>
-              </p:nvPicPr>
-              <p:blipFill>
-                <a:blip r:embed="rId11"/>
-                <a:stretch>
-                  <a:fillRect/>
-                </a:stretch>
-              </p:blipFill>
-              <p:spPr>
-                <a:xfrm>
-                  <a:off x="1677270" y="5190300"/>
-                  <a:ext cx="613080" cy="28800"/>
-                </a:xfrm>
-                <a:prstGeom prst="rect">
-                  <a:avLst/>
-                </a:prstGeom>
-              </p:spPr>
-            </p:pic>
-          </mc:Fallback>
-        </mc:AlternateContent>
-        <mc:AlternateContent xmlns:mc="http://schemas.openxmlformats.org/markup-compatibility/2006" xmlns:p14="http://schemas.microsoft.com/office/powerpoint/2010/main">
-          <mc:Choice Requires="p14">
-            <p:contentPart p14:bwMode="auto" r:id="rId12">
-              <p14:nvContentPartPr>
-                <p14:cNvPr id="12" name="Рукописні дані 11">
-                  <a:extLst>
-                    <a:ext uri="{FF2B5EF4-FFF2-40B4-BE49-F238E27FC236}">
-                      <a16:creationId xmlns:a16="http://schemas.microsoft.com/office/drawing/2014/main" id="{24F93178-26D6-4617-9091-7F06538429EC}"/>
-                    </a:ext>
-                  </a:extLst>
-                </p14:cNvPr>
-                <p14:cNvContentPartPr/>
-                <p14:nvPr/>
-              </p14:nvContentPartPr>
-              <p14:xfrm>
-                <a:off x="1733070" y="5514660"/>
-                <a:ext cx="764280" cy="115920"/>
-              </p14:xfrm>
-            </p:contentPart>
-          </mc:Choice>
-          <mc:Fallback xmlns="">
-            <p:pic>
-              <p:nvPicPr>
-                <p:cNvPr id="12" name="Рукописні дані 11">
-                  <a:extLst>
-                    <a:ext uri="{FF2B5EF4-FFF2-40B4-BE49-F238E27FC236}">
-                      <a16:creationId xmlns:a16="http://schemas.microsoft.com/office/drawing/2014/main" id="{24F93178-26D6-4617-9091-7F06538429EC}"/>
-                    </a:ext>
-                  </a:extLst>
-                </p:cNvPr>
-                <p:cNvPicPr/>
-                <p:nvPr/>
-              </p:nvPicPr>
-              <p:blipFill>
-                <a:blip r:embed="rId13"/>
-                <a:stretch>
-                  <a:fillRect/>
-                </a:stretch>
-              </p:blipFill>
-              <p:spPr>
-                <a:xfrm>
-                  <a:off x="1724430" y="5506020"/>
-                  <a:ext cx="781920" cy="133560"/>
-                </a:xfrm>
-                <a:prstGeom prst="rect">
-                  <a:avLst/>
-                </a:prstGeom>
-              </p:spPr>
-            </p:pic>
-          </mc:Fallback>
-        </mc:AlternateContent>
-        <mc:AlternateContent xmlns:mc="http://schemas.openxmlformats.org/markup-compatibility/2006" xmlns:p14="http://schemas.microsoft.com/office/powerpoint/2010/main">
-          <mc:Choice Requires="p14">
-            <p:contentPart p14:bwMode="auto" r:id="rId14">
-              <p14:nvContentPartPr>
-                <p14:cNvPr id="13" name="Рукописні дані 12">
-                  <a:extLst>
-                    <a:ext uri="{FF2B5EF4-FFF2-40B4-BE49-F238E27FC236}">
-                      <a16:creationId xmlns:a16="http://schemas.microsoft.com/office/drawing/2014/main" id="{77F9D964-8A4F-4185-AEE6-C7DE309235F7}"/>
-                    </a:ext>
-                  </a:extLst>
-                </p14:cNvPr>
-                <p14:cNvContentPartPr/>
-                <p14:nvPr/>
-              </p14:nvContentPartPr>
-              <p14:xfrm>
-                <a:off x="2533350" y="5152140"/>
-                <a:ext cx="228240" cy="10800"/>
-              </p14:xfrm>
-            </p:contentPart>
-          </mc:Choice>
-          <mc:Fallback xmlns="">
-            <p:pic>
-              <p:nvPicPr>
-                <p:cNvPr id="13" name="Рукописні дані 12">
-                  <a:extLst>
-                    <a:ext uri="{FF2B5EF4-FFF2-40B4-BE49-F238E27FC236}">
-                      <a16:creationId xmlns:a16="http://schemas.microsoft.com/office/drawing/2014/main" id="{77F9D964-8A4F-4185-AEE6-C7DE309235F7}"/>
-                    </a:ext>
-                  </a:extLst>
-                </p:cNvPr>
-                <p:cNvPicPr/>
-                <p:nvPr/>
-              </p:nvPicPr>
-              <p:blipFill>
-                <a:blip r:embed="rId15"/>
-                <a:stretch>
-                  <a:fillRect/>
-                </a:stretch>
-              </p:blipFill>
-              <p:spPr>
-                <a:xfrm>
-                  <a:off x="2524350" y="5143500"/>
-                  <a:ext cx="245880" cy="28440"/>
-                </a:xfrm>
-                <a:prstGeom prst="rect">
-                  <a:avLst/>
-                </a:prstGeom>
-              </p:spPr>
-            </p:pic>
-          </mc:Fallback>
-        </mc:AlternateContent>
-        <mc:AlternateContent xmlns:mc="http://schemas.openxmlformats.org/markup-compatibility/2006" xmlns:p14="http://schemas.microsoft.com/office/powerpoint/2010/main">
-          <mc:Choice Requires="p14">
-            <p:contentPart p14:bwMode="auto" r:id="rId16">
-              <p14:nvContentPartPr>
-                <p14:cNvPr id="14" name="Рукописні дані 13">
-                  <a:extLst>
-                    <a:ext uri="{FF2B5EF4-FFF2-40B4-BE49-F238E27FC236}">
-                      <a16:creationId xmlns:a16="http://schemas.microsoft.com/office/drawing/2014/main" id="{BC99C8DB-FD26-4170-8764-49D05C6C4D8F}"/>
-                    </a:ext>
-                  </a:extLst>
-                </p14:cNvPr>
-                <p14:cNvContentPartPr/>
-                <p14:nvPr/>
-              </p14:nvContentPartPr>
-              <p14:xfrm>
-                <a:off x="2600310" y="5257980"/>
-                <a:ext cx="222840" cy="360"/>
-              </p14:xfrm>
-            </p:contentPart>
-          </mc:Choice>
-          <mc:Fallback xmlns="">
-            <p:pic>
-              <p:nvPicPr>
-                <p:cNvPr id="14" name="Рукописні дані 13">
-                  <a:extLst>
-                    <a:ext uri="{FF2B5EF4-FFF2-40B4-BE49-F238E27FC236}">
-                      <a16:creationId xmlns:a16="http://schemas.microsoft.com/office/drawing/2014/main" id="{BC99C8DB-FD26-4170-8764-49D05C6C4D8F}"/>
-                    </a:ext>
-                  </a:extLst>
-                </p:cNvPr>
-                <p:cNvPicPr/>
-                <p:nvPr/>
-              </p:nvPicPr>
-              <p:blipFill>
-                <a:blip r:embed="rId17"/>
-                <a:stretch>
-                  <a:fillRect/>
-                </a:stretch>
-              </p:blipFill>
-              <p:spPr>
-                <a:xfrm>
-                  <a:off x="2591670" y="5248980"/>
-                  <a:ext cx="240480" cy="18000"/>
-                </a:xfrm>
-                <a:prstGeom prst="rect">
-                  <a:avLst/>
-                </a:prstGeom>
-              </p:spPr>
-            </p:pic>
-          </mc:Fallback>
-        </mc:AlternateContent>
-        <mc:AlternateContent xmlns:mc="http://schemas.openxmlformats.org/markup-compatibility/2006" xmlns:p14="http://schemas.microsoft.com/office/powerpoint/2010/main">
-          <mc:Choice Requires="p14">
-            <p:contentPart p14:bwMode="auto" r:id="rId18">
-              <p14:nvContentPartPr>
-                <p14:cNvPr id="16" name="Рукописні дані 15">
-                  <a:extLst>
-                    <a:ext uri="{FF2B5EF4-FFF2-40B4-BE49-F238E27FC236}">
-                      <a16:creationId xmlns:a16="http://schemas.microsoft.com/office/drawing/2014/main" id="{76E68CCC-F6AF-426D-B8BD-02854DE14E4E}"/>
-                    </a:ext>
-                  </a:extLst>
-                </p14:cNvPr>
-                <p14:cNvContentPartPr/>
-                <p14:nvPr/>
-              </p14:nvContentPartPr>
-              <p14:xfrm>
-                <a:off x="3060030" y="4962060"/>
-                <a:ext cx="121680" cy="187560"/>
-              </p14:xfrm>
-            </p:contentPart>
-          </mc:Choice>
-          <mc:Fallback xmlns="">
-            <p:pic>
-              <p:nvPicPr>
-                <p:cNvPr id="16" name="Рукописні дані 15">
-                  <a:extLst>
-                    <a:ext uri="{FF2B5EF4-FFF2-40B4-BE49-F238E27FC236}">
-                      <a16:creationId xmlns:a16="http://schemas.microsoft.com/office/drawing/2014/main" id="{76E68CCC-F6AF-426D-B8BD-02854DE14E4E}"/>
-                    </a:ext>
-                  </a:extLst>
-                </p:cNvPr>
-                <p:cNvPicPr/>
-                <p:nvPr/>
-              </p:nvPicPr>
-              <p:blipFill>
-                <a:blip r:embed="rId19"/>
-                <a:stretch>
-                  <a:fillRect/>
-                </a:stretch>
-              </p:blipFill>
-              <p:spPr>
-                <a:xfrm>
-                  <a:off x="3051030" y="4953420"/>
-                  <a:ext cx="139320" cy="205200"/>
-                </a:xfrm>
-                <a:prstGeom prst="rect">
-                  <a:avLst/>
-                </a:prstGeom>
-              </p:spPr>
-            </p:pic>
-          </mc:Fallback>
-        </mc:AlternateContent>
-        <mc:AlternateContent xmlns:mc="http://schemas.openxmlformats.org/markup-compatibility/2006" xmlns:p14="http://schemas.microsoft.com/office/powerpoint/2010/main">
-          <mc:Choice Requires="p14">
-            <p:contentPart p14:bwMode="auto" r:id="rId20">
-              <p14:nvContentPartPr>
-                <p14:cNvPr id="17" name="Рукописні дані 16">
-                  <a:extLst>
-                    <a:ext uri="{FF2B5EF4-FFF2-40B4-BE49-F238E27FC236}">
-                      <a16:creationId xmlns:a16="http://schemas.microsoft.com/office/drawing/2014/main" id="{AA848621-C7CE-4D82-A075-8ABECC11F055}"/>
-                    </a:ext>
-                  </a:extLst>
-                </p14:cNvPr>
-                <p14:cNvContentPartPr/>
-                <p14:nvPr/>
-              </p14:nvContentPartPr>
-              <p14:xfrm>
-                <a:off x="3130230" y="5114700"/>
-                <a:ext cx="60840" cy="88920"/>
-              </p14:xfrm>
-            </p:contentPart>
-          </mc:Choice>
-          <mc:Fallback xmlns="">
-            <p:pic>
-              <p:nvPicPr>
-                <p:cNvPr id="17" name="Рукописні дані 16">
-                  <a:extLst>
-                    <a:ext uri="{FF2B5EF4-FFF2-40B4-BE49-F238E27FC236}">
-                      <a16:creationId xmlns:a16="http://schemas.microsoft.com/office/drawing/2014/main" id="{AA848621-C7CE-4D82-A075-8ABECC11F055}"/>
-                    </a:ext>
-                  </a:extLst>
-                </p:cNvPr>
-                <p:cNvPicPr/>
-                <p:nvPr/>
-              </p:nvPicPr>
-              <p:blipFill>
-                <a:blip r:embed="rId21"/>
-                <a:stretch>
-                  <a:fillRect/>
-                </a:stretch>
-              </p:blipFill>
-              <p:spPr>
-                <a:xfrm>
-                  <a:off x="3121590" y="5106060"/>
-                  <a:ext cx="78480" cy="106560"/>
-                </a:xfrm>
-                <a:prstGeom prst="rect">
-                  <a:avLst/>
-                </a:prstGeom>
-              </p:spPr>
-            </p:pic>
-          </mc:Fallback>
-        </mc:AlternateContent>
-        <mc:AlternateContent xmlns:mc="http://schemas.openxmlformats.org/markup-compatibility/2006" xmlns:p14="http://schemas.microsoft.com/office/powerpoint/2010/main">
-          <mc:Choice Requires="p14">
-            <p:contentPart p14:bwMode="auto" r:id="rId22">
-              <p14:nvContentPartPr>
-                <p14:cNvPr id="18" name="Рукописні дані 17">
-                  <a:extLst>
-                    <a:ext uri="{FF2B5EF4-FFF2-40B4-BE49-F238E27FC236}">
-                      <a16:creationId xmlns:a16="http://schemas.microsoft.com/office/drawing/2014/main" id="{1887D3BF-EED2-4259-BC0F-F7817AFE4864}"/>
-                    </a:ext>
-                  </a:extLst>
-                </p14:cNvPr>
-                <p14:cNvContentPartPr/>
-                <p14:nvPr/>
-              </p14:nvContentPartPr>
-              <p14:xfrm>
-                <a:off x="3076590" y="5067180"/>
-                <a:ext cx="78120" cy="20520"/>
-              </p14:xfrm>
-            </p:contentPart>
-          </mc:Choice>
-          <mc:Fallback xmlns="">
-            <p:pic>
-              <p:nvPicPr>
-                <p:cNvPr id="18" name="Рукописні дані 17">
-                  <a:extLst>
-                    <a:ext uri="{FF2B5EF4-FFF2-40B4-BE49-F238E27FC236}">
-                      <a16:creationId xmlns:a16="http://schemas.microsoft.com/office/drawing/2014/main" id="{1887D3BF-EED2-4259-BC0F-F7817AFE4864}"/>
-                    </a:ext>
-                  </a:extLst>
-                </p:cNvPr>
-                <p:cNvPicPr/>
-                <p:nvPr/>
-              </p:nvPicPr>
-              <p:blipFill>
-                <a:blip r:embed="rId23"/>
-                <a:stretch>
-                  <a:fillRect/>
-                </a:stretch>
-              </p:blipFill>
-              <p:spPr>
-                <a:xfrm>
-                  <a:off x="3067590" y="5058180"/>
-                  <a:ext cx="95760" cy="38160"/>
-                </a:xfrm>
-                <a:prstGeom prst="rect">
-                  <a:avLst/>
-                </a:prstGeom>
-              </p:spPr>
-            </p:pic>
-          </mc:Fallback>
-        </mc:AlternateContent>
-        <mc:AlternateContent xmlns:mc="http://schemas.openxmlformats.org/markup-compatibility/2006" xmlns:p14="http://schemas.microsoft.com/office/powerpoint/2010/main">
-          <mc:Choice Requires="p14">
-            <p:contentPart p14:bwMode="auto" r:id="rId24">
-              <p14:nvContentPartPr>
-                <p14:cNvPr id="19" name="Рукописні дані 18">
-                  <a:extLst>
-                    <a:ext uri="{FF2B5EF4-FFF2-40B4-BE49-F238E27FC236}">
-                      <a16:creationId xmlns:a16="http://schemas.microsoft.com/office/drawing/2014/main" id="{448EAC67-93CE-4E6E-A6F8-E7402021F4DF}"/>
-                    </a:ext>
-                  </a:extLst>
-                </p14:cNvPr>
-                <p14:cNvContentPartPr/>
-                <p14:nvPr/>
-              </p14:nvContentPartPr>
-              <p14:xfrm>
-                <a:off x="3244710" y="4934340"/>
-                <a:ext cx="422640" cy="316080"/>
-              </p14:xfrm>
-            </p:contentPart>
-          </mc:Choice>
-          <mc:Fallback xmlns="">
-            <p:pic>
-              <p:nvPicPr>
-                <p:cNvPr id="19" name="Рукописні дані 18">
-                  <a:extLst>
-                    <a:ext uri="{FF2B5EF4-FFF2-40B4-BE49-F238E27FC236}">
-                      <a16:creationId xmlns:a16="http://schemas.microsoft.com/office/drawing/2014/main" id="{448EAC67-93CE-4E6E-A6F8-E7402021F4DF}"/>
-                    </a:ext>
-                  </a:extLst>
-                </p:cNvPr>
-                <p:cNvPicPr/>
-                <p:nvPr/>
-              </p:nvPicPr>
-              <p:blipFill>
-                <a:blip r:embed="rId25"/>
-                <a:stretch>
-                  <a:fillRect/>
-                </a:stretch>
-              </p:blipFill>
-              <p:spPr>
-                <a:xfrm>
-                  <a:off x="3236070" y="4925340"/>
-                  <a:ext cx="440280" cy="333720"/>
-                </a:xfrm>
-                <a:prstGeom prst="rect">
-                  <a:avLst/>
-                </a:prstGeom>
-              </p:spPr>
-            </p:pic>
-          </mc:Fallback>
-        </mc:AlternateContent>
-        <mc:AlternateContent xmlns:mc="http://schemas.openxmlformats.org/markup-compatibility/2006" xmlns:p14="http://schemas.microsoft.com/office/powerpoint/2010/main">
-          <mc:Choice Requires="p14">
-            <p:contentPart p14:bwMode="auto" r:id="rId26">
-              <p14:nvContentPartPr>
-                <p14:cNvPr id="20" name="Рукописні дані 19">
-                  <a:extLst>
-                    <a:ext uri="{FF2B5EF4-FFF2-40B4-BE49-F238E27FC236}">
-                      <a16:creationId xmlns:a16="http://schemas.microsoft.com/office/drawing/2014/main" id="{657D6330-2CC3-4B99-A737-02AB434DEF4A}"/>
-                    </a:ext>
-                  </a:extLst>
-                </p14:cNvPr>
-                <p14:cNvContentPartPr/>
-                <p14:nvPr/>
-              </p14:nvContentPartPr>
-              <p14:xfrm>
-                <a:off x="3718470" y="5009940"/>
-                <a:ext cx="151560" cy="131040"/>
-              </p14:xfrm>
-            </p:contentPart>
-          </mc:Choice>
-          <mc:Fallback xmlns="">
-            <p:pic>
-              <p:nvPicPr>
-                <p:cNvPr id="20" name="Рукописні дані 19">
-                  <a:extLst>
-                    <a:ext uri="{FF2B5EF4-FFF2-40B4-BE49-F238E27FC236}">
-                      <a16:creationId xmlns:a16="http://schemas.microsoft.com/office/drawing/2014/main" id="{657D6330-2CC3-4B99-A737-02AB434DEF4A}"/>
-                    </a:ext>
-                  </a:extLst>
-                </p:cNvPr>
-                <p:cNvPicPr/>
-                <p:nvPr/>
-              </p:nvPicPr>
-              <p:blipFill>
-                <a:blip r:embed="rId27"/>
-                <a:stretch>
-                  <a:fillRect/>
-                </a:stretch>
-              </p:blipFill>
-              <p:spPr>
-                <a:xfrm>
-                  <a:off x="3709830" y="5000940"/>
-                  <a:ext cx="169200" cy="148680"/>
-                </a:xfrm>
-                <a:prstGeom prst="rect">
-                  <a:avLst/>
-                </a:prstGeom>
-              </p:spPr>
-            </p:pic>
-          </mc:Fallback>
-        </mc:AlternateContent>
-        <mc:AlternateContent xmlns:mc="http://schemas.openxmlformats.org/markup-compatibility/2006" xmlns:p14="http://schemas.microsoft.com/office/powerpoint/2010/main">
-          <mc:Choice Requires="p14">
-            <p:contentPart p14:bwMode="auto" r:id="rId28">
-              <p14:nvContentPartPr>
-                <p14:cNvPr id="21" name="Рукописні дані 20">
-                  <a:extLst>
-                    <a:ext uri="{FF2B5EF4-FFF2-40B4-BE49-F238E27FC236}">
-                      <a16:creationId xmlns:a16="http://schemas.microsoft.com/office/drawing/2014/main" id="{0BD0E684-1C64-48E7-8F40-EEFC9F229833}"/>
-                    </a:ext>
-                  </a:extLst>
-                </p14:cNvPr>
-                <p14:cNvContentPartPr/>
-                <p14:nvPr/>
-              </p14:nvContentPartPr>
-              <p14:xfrm>
-                <a:off x="3828990" y="5038740"/>
-                <a:ext cx="26280" cy="78480"/>
-              </p14:xfrm>
-            </p:contentPart>
-          </mc:Choice>
-          <mc:Fallback xmlns="">
-            <p:pic>
-              <p:nvPicPr>
-                <p:cNvPr id="21" name="Рукописні дані 20">
-                  <a:extLst>
-                    <a:ext uri="{FF2B5EF4-FFF2-40B4-BE49-F238E27FC236}">
-                      <a16:creationId xmlns:a16="http://schemas.microsoft.com/office/drawing/2014/main" id="{0BD0E684-1C64-48E7-8F40-EEFC9F229833}"/>
-                    </a:ext>
-                  </a:extLst>
-                </p:cNvPr>
-                <p:cNvPicPr/>
-                <p:nvPr/>
-              </p:nvPicPr>
-              <p:blipFill>
-                <a:blip r:embed="rId29"/>
-                <a:stretch>
-                  <a:fillRect/>
-                </a:stretch>
-              </p:blipFill>
-              <p:spPr>
-                <a:xfrm>
-                  <a:off x="3819990" y="5029740"/>
-                  <a:ext cx="43920" cy="96120"/>
-                </a:xfrm>
-                <a:prstGeom prst="rect">
-                  <a:avLst/>
-                </a:prstGeom>
-              </p:spPr>
-            </p:pic>
-          </mc:Fallback>
-        </mc:AlternateContent>
-        <mc:AlternateContent xmlns:mc="http://schemas.openxmlformats.org/markup-compatibility/2006" xmlns:p14="http://schemas.microsoft.com/office/powerpoint/2010/main">
-          <mc:Choice Requires="p14">
-            <p:contentPart p14:bwMode="auto" r:id="rId30">
-              <p14:nvContentPartPr>
-                <p14:cNvPr id="22" name="Рукописні дані 21">
-                  <a:extLst>
-                    <a:ext uri="{FF2B5EF4-FFF2-40B4-BE49-F238E27FC236}">
-                      <a16:creationId xmlns:a16="http://schemas.microsoft.com/office/drawing/2014/main" id="{FB70D564-745C-4C49-82F9-1A3EC56B4847}"/>
-                    </a:ext>
-                  </a:extLst>
-                </p14:cNvPr>
-                <p14:cNvContentPartPr/>
-                <p14:nvPr/>
-              </p14:nvContentPartPr>
-              <p14:xfrm>
-                <a:off x="3988470" y="4981500"/>
-                <a:ext cx="738000" cy="153000"/>
-              </p14:xfrm>
-            </p:contentPart>
-          </mc:Choice>
-          <mc:Fallback xmlns="">
-            <p:pic>
-              <p:nvPicPr>
-                <p:cNvPr id="22" name="Рукописні дані 21">
-                  <a:extLst>
-                    <a:ext uri="{FF2B5EF4-FFF2-40B4-BE49-F238E27FC236}">
-                      <a16:creationId xmlns:a16="http://schemas.microsoft.com/office/drawing/2014/main" id="{FB70D564-745C-4C49-82F9-1A3EC56B4847}"/>
-                    </a:ext>
-                  </a:extLst>
-                </p:cNvPr>
-                <p:cNvPicPr/>
-                <p:nvPr/>
-              </p:nvPicPr>
-              <p:blipFill>
-                <a:blip r:embed="rId31"/>
-                <a:stretch>
-                  <a:fillRect/>
-                </a:stretch>
-              </p:blipFill>
-              <p:spPr>
-                <a:xfrm>
-                  <a:off x="3979830" y="4972500"/>
-                  <a:ext cx="755640" cy="170640"/>
-                </a:xfrm>
-                <a:prstGeom prst="rect">
-                  <a:avLst/>
-                </a:prstGeom>
-              </p:spPr>
-            </p:pic>
-          </mc:Fallback>
-        </mc:AlternateContent>
-        <mc:AlternateContent xmlns:mc="http://schemas.openxmlformats.org/markup-compatibility/2006" xmlns:p14="http://schemas.microsoft.com/office/powerpoint/2010/main">
-          <mc:Choice Requires="p14">
-            <p:contentPart p14:bwMode="auto" r:id="rId32">
-              <p14:nvContentPartPr>
-                <p14:cNvPr id="23" name="Рукописні дані 22">
-                  <a:extLst>
-                    <a:ext uri="{FF2B5EF4-FFF2-40B4-BE49-F238E27FC236}">
-                      <a16:creationId xmlns:a16="http://schemas.microsoft.com/office/drawing/2014/main" id="{CC9C0E73-E7DB-44F3-BE3C-13B60B25D03E}"/>
-                    </a:ext>
-                  </a:extLst>
-                </p14:cNvPr>
-                <p14:cNvContentPartPr/>
-                <p14:nvPr/>
-              </p14:nvContentPartPr>
-              <p14:xfrm>
-                <a:off x="4495710" y="4895460"/>
-                <a:ext cx="367560" cy="68400"/>
-              </p14:xfrm>
-            </p:contentPart>
-          </mc:Choice>
-          <mc:Fallback xmlns="">
-            <p:pic>
-              <p:nvPicPr>
-                <p:cNvPr id="23" name="Рукописні дані 22">
-                  <a:extLst>
-                    <a:ext uri="{FF2B5EF4-FFF2-40B4-BE49-F238E27FC236}">
-                      <a16:creationId xmlns:a16="http://schemas.microsoft.com/office/drawing/2014/main" id="{CC9C0E73-E7DB-44F3-BE3C-13B60B25D03E}"/>
-                    </a:ext>
-                  </a:extLst>
-                </p:cNvPr>
-                <p:cNvPicPr/>
-                <p:nvPr/>
-              </p:nvPicPr>
-              <p:blipFill>
-                <a:blip r:embed="rId33"/>
-                <a:stretch>
-                  <a:fillRect/>
-                </a:stretch>
-              </p:blipFill>
-              <p:spPr>
-                <a:xfrm>
-                  <a:off x="4487070" y="4886820"/>
-                  <a:ext cx="385200" cy="86040"/>
-                </a:xfrm>
-                <a:prstGeom prst="rect">
-                  <a:avLst/>
-                </a:prstGeom>
-              </p:spPr>
-            </p:pic>
-          </mc:Fallback>
-        </mc:AlternateContent>
-        <mc:AlternateContent xmlns:mc="http://schemas.openxmlformats.org/markup-compatibility/2006" xmlns:p14="http://schemas.microsoft.com/office/powerpoint/2010/main">
-          <mc:Choice Requires="p14">
-            <p:contentPart p14:bwMode="auto" r:id="rId34">
-              <p14:nvContentPartPr>
-                <p14:cNvPr id="25" name="Рукописні дані 24">
-                  <a:extLst>
-                    <a:ext uri="{FF2B5EF4-FFF2-40B4-BE49-F238E27FC236}">
-                      <a16:creationId xmlns:a16="http://schemas.microsoft.com/office/drawing/2014/main" id="{4E9810CA-8112-44E8-9D60-7F6BD67E12F7}"/>
-                    </a:ext>
-                  </a:extLst>
-                </p14:cNvPr>
-                <p14:cNvContentPartPr/>
-                <p14:nvPr/>
-              </p14:nvContentPartPr>
-              <p14:xfrm>
-                <a:off x="2692470" y="5418900"/>
-                <a:ext cx="425520" cy="249120"/>
-              </p14:xfrm>
-            </p:contentPart>
-          </mc:Choice>
-          <mc:Fallback xmlns="">
-            <p:pic>
-              <p:nvPicPr>
-                <p:cNvPr id="25" name="Рукописні дані 24">
-                  <a:extLst>
-                    <a:ext uri="{FF2B5EF4-FFF2-40B4-BE49-F238E27FC236}">
-                      <a16:creationId xmlns:a16="http://schemas.microsoft.com/office/drawing/2014/main" id="{4E9810CA-8112-44E8-9D60-7F6BD67E12F7}"/>
-                    </a:ext>
-                  </a:extLst>
-                </p:cNvPr>
-                <p:cNvPicPr/>
-                <p:nvPr/>
-              </p:nvPicPr>
-              <p:blipFill>
-                <a:blip r:embed="rId35"/>
-                <a:stretch>
-                  <a:fillRect/>
-                </a:stretch>
-              </p:blipFill>
-              <p:spPr>
-                <a:xfrm>
-                  <a:off x="2683830" y="5410260"/>
-                  <a:ext cx="443160" cy="266760"/>
-                </a:xfrm>
-                <a:prstGeom prst="rect">
-                  <a:avLst/>
-                </a:prstGeom>
-              </p:spPr>
-            </p:pic>
-          </mc:Fallback>
-        </mc:AlternateContent>
-        <mc:AlternateContent xmlns:mc="http://schemas.openxmlformats.org/markup-compatibility/2006" xmlns:p14="http://schemas.microsoft.com/office/powerpoint/2010/main">
-          <mc:Choice Requires="p14">
-            <p:contentPart p14:bwMode="auto" r:id="rId36">
-              <p14:nvContentPartPr>
-                <p14:cNvPr id="26" name="Рукописні дані 25">
-                  <a:extLst>
-                    <a:ext uri="{FF2B5EF4-FFF2-40B4-BE49-F238E27FC236}">
-                      <a16:creationId xmlns:a16="http://schemas.microsoft.com/office/drawing/2014/main" id="{F21EBFDD-7082-4054-A949-1AFDF78E18F6}"/>
-                    </a:ext>
-                  </a:extLst>
-                </p14:cNvPr>
-                <p14:cNvContentPartPr/>
-                <p14:nvPr/>
-              </p14:nvContentPartPr>
-              <p14:xfrm>
-                <a:off x="3046350" y="5493780"/>
-                <a:ext cx="252720" cy="147960"/>
-              </p14:xfrm>
-            </p:contentPart>
-          </mc:Choice>
-          <mc:Fallback xmlns="">
-            <p:pic>
-              <p:nvPicPr>
-                <p:cNvPr id="26" name="Рукописні дані 25">
-                  <a:extLst>
-                    <a:ext uri="{FF2B5EF4-FFF2-40B4-BE49-F238E27FC236}">
-                      <a16:creationId xmlns:a16="http://schemas.microsoft.com/office/drawing/2014/main" id="{F21EBFDD-7082-4054-A949-1AFDF78E18F6}"/>
-                    </a:ext>
-                  </a:extLst>
-                </p:cNvPr>
-                <p:cNvPicPr/>
-                <p:nvPr/>
-              </p:nvPicPr>
-              <p:blipFill>
-                <a:blip r:embed="rId37"/>
-                <a:stretch>
-                  <a:fillRect/>
-                </a:stretch>
-              </p:blipFill>
-              <p:spPr>
-                <a:xfrm>
-                  <a:off x="3037350" y="5485140"/>
-                  <a:ext cx="270360" cy="165600"/>
-                </a:xfrm>
-                <a:prstGeom prst="rect">
-                  <a:avLst/>
-                </a:prstGeom>
-              </p:spPr>
-            </p:pic>
-          </mc:Fallback>
-        </mc:AlternateContent>
-        <mc:AlternateContent xmlns:mc="http://schemas.openxmlformats.org/markup-compatibility/2006" xmlns:p14="http://schemas.microsoft.com/office/powerpoint/2010/main">
-          <mc:Choice Requires="p14">
-            <p:contentPart p14:bwMode="auto" r:id="rId38">
-              <p14:nvContentPartPr>
-                <p14:cNvPr id="27" name="Рукописні дані 26">
-                  <a:extLst>
-                    <a:ext uri="{FF2B5EF4-FFF2-40B4-BE49-F238E27FC236}">
-                      <a16:creationId xmlns:a16="http://schemas.microsoft.com/office/drawing/2014/main" id="{BA9ED4E8-1494-4652-B2BD-F5FB29441EDB}"/>
-                    </a:ext>
-                  </a:extLst>
-                </p14:cNvPr>
-                <p14:cNvContentPartPr/>
-                <p14:nvPr/>
-              </p14:nvContentPartPr>
-              <p14:xfrm>
-                <a:off x="3380430" y="5514660"/>
-                <a:ext cx="129960" cy="108000"/>
-              </p14:xfrm>
-            </p:contentPart>
-          </mc:Choice>
-          <mc:Fallback xmlns="">
-            <p:pic>
-              <p:nvPicPr>
-                <p:cNvPr id="27" name="Рукописні дані 26">
-                  <a:extLst>
-                    <a:ext uri="{FF2B5EF4-FFF2-40B4-BE49-F238E27FC236}">
-                      <a16:creationId xmlns:a16="http://schemas.microsoft.com/office/drawing/2014/main" id="{BA9ED4E8-1494-4652-B2BD-F5FB29441EDB}"/>
-                    </a:ext>
-                  </a:extLst>
-                </p:cNvPr>
-                <p:cNvPicPr/>
-                <p:nvPr/>
-              </p:nvPicPr>
-              <p:blipFill>
-                <a:blip r:embed="rId39"/>
-                <a:stretch>
-                  <a:fillRect/>
-                </a:stretch>
-              </p:blipFill>
-              <p:spPr>
-                <a:xfrm>
-                  <a:off x="3371430" y="5506020"/>
-                  <a:ext cx="147600" cy="125640"/>
-                </a:xfrm>
-                <a:prstGeom prst="rect">
-                  <a:avLst/>
-                </a:prstGeom>
-              </p:spPr>
-            </p:pic>
-          </mc:Fallback>
-        </mc:AlternateContent>
-        <mc:AlternateContent xmlns:mc="http://schemas.openxmlformats.org/markup-compatibility/2006" xmlns:p14="http://schemas.microsoft.com/office/powerpoint/2010/main">
-          <mc:Choice Requires="p14">
-            <p:contentPart p14:bwMode="auto" r:id="rId40">
-              <p14:nvContentPartPr>
-                <p14:cNvPr id="28" name="Рукописні дані 27">
-                  <a:extLst>
-                    <a:ext uri="{FF2B5EF4-FFF2-40B4-BE49-F238E27FC236}">
-                      <a16:creationId xmlns:a16="http://schemas.microsoft.com/office/drawing/2014/main" id="{1116337F-C14D-4D10-AAA8-CF586FE74445}"/>
-                    </a:ext>
-                  </a:extLst>
-                </p14:cNvPr>
-                <p14:cNvContentPartPr/>
-                <p14:nvPr/>
-              </p14:nvContentPartPr>
-              <p14:xfrm>
-                <a:off x="3646830" y="5514660"/>
-                <a:ext cx="693360" cy="128520"/>
-              </p14:xfrm>
-            </p:contentPart>
-          </mc:Choice>
-          <mc:Fallback xmlns="">
-            <p:pic>
-              <p:nvPicPr>
-                <p:cNvPr id="28" name="Рукописні дані 27">
-                  <a:extLst>
-                    <a:ext uri="{FF2B5EF4-FFF2-40B4-BE49-F238E27FC236}">
-                      <a16:creationId xmlns:a16="http://schemas.microsoft.com/office/drawing/2014/main" id="{1116337F-C14D-4D10-AAA8-CF586FE74445}"/>
-                    </a:ext>
-                  </a:extLst>
-                </p:cNvPr>
-                <p:cNvPicPr/>
-                <p:nvPr/>
-              </p:nvPicPr>
-              <p:blipFill>
-                <a:blip r:embed="rId41"/>
-                <a:stretch>
-                  <a:fillRect/>
-                </a:stretch>
-              </p:blipFill>
-              <p:spPr>
-                <a:xfrm>
-                  <a:off x="3638190" y="5506020"/>
-                  <a:ext cx="711000" cy="146160"/>
-                </a:xfrm>
-                <a:prstGeom prst="rect">
-                  <a:avLst/>
-                </a:prstGeom>
-              </p:spPr>
-            </p:pic>
-          </mc:Fallback>
-        </mc:AlternateContent>
-        <mc:AlternateContent xmlns:mc="http://schemas.openxmlformats.org/markup-compatibility/2006" xmlns:p14="http://schemas.microsoft.com/office/powerpoint/2010/main">
-          <mc:Choice Requires="p14">
-            <p:contentPart p14:bwMode="auto" r:id="rId42">
-              <p14:nvContentPartPr>
-                <p14:cNvPr id="29" name="Рукописні дані 28">
-                  <a:extLst>
-                    <a:ext uri="{FF2B5EF4-FFF2-40B4-BE49-F238E27FC236}">
-                      <a16:creationId xmlns:a16="http://schemas.microsoft.com/office/drawing/2014/main" id="{0512AF5F-62F5-429B-93AE-516CCDF1D964}"/>
-                    </a:ext>
-                  </a:extLst>
-                </p14:cNvPr>
-                <p14:cNvContentPartPr/>
-                <p14:nvPr/>
-              </p14:nvContentPartPr>
-              <p14:xfrm>
-                <a:off x="3980190" y="5587740"/>
-                <a:ext cx="294120" cy="165600"/>
-              </p14:xfrm>
-            </p:contentPart>
-          </mc:Choice>
-          <mc:Fallback xmlns="">
-            <p:pic>
-              <p:nvPicPr>
-                <p:cNvPr id="29" name="Рукописні дані 28">
-                  <a:extLst>
-                    <a:ext uri="{FF2B5EF4-FFF2-40B4-BE49-F238E27FC236}">
-                      <a16:creationId xmlns:a16="http://schemas.microsoft.com/office/drawing/2014/main" id="{0512AF5F-62F5-429B-93AE-516CCDF1D964}"/>
-                    </a:ext>
-                  </a:extLst>
-                </p:cNvPr>
-                <p:cNvPicPr/>
-                <p:nvPr/>
-              </p:nvPicPr>
-              <p:blipFill>
-                <a:blip r:embed="rId43"/>
-                <a:stretch>
-                  <a:fillRect/>
-                </a:stretch>
-              </p:blipFill>
-              <p:spPr>
-                <a:xfrm>
-                  <a:off x="3971550" y="5578740"/>
-                  <a:ext cx="311760" cy="183240"/>
-                </a:xfrm>
-                <a:prstGeom prst="rect">
-                  <a:avLst/>
-                </a:prstGeom>
-              </p:spPr>
-            </p:pic>
-          </mc:Fallback>
-        </mc:AlternateContent>
-        <mc:AlternateContent xmlns:mc="http://schemas.openxmlformats.org/markup-compatibility/2006" xmlns:p14="http://schemas.microsoft.com/office/powerpoint/2010/main">
-          <mc:Choice Requires="p14">
-            <p:contentPart p14:bwMode="auto" r:id="rId44">
-              <p14:nvContentPartPr>
-                <p14:cNvPr id="30" name="Рукописні дані 29">
-                  <a:extLst>
-                    <a:ext uri="{FF2B5EF4-FFF2-40B4-BE49-F238E27FC236}">
-                      <a16:creationId xmlns:a16="http://schemas.microsoft.com/office/drawing/2014/main" id="{BA21C7D0-6463-4BA6-B6C5-99316EB72D1B}"/>
-                    </a:ext>
-                  </a:extLst>
-                </p14:cNvPr>
-                <p14:cNvContentPartPr/>
-                <p14:nvPr/>
-              </p14:nvContentPartPr>
-              <p14:xfrm>
-                <a:off x="4360710" y="5581260"/>
-                <a:ext cx="106920" cy="190440"/>
-              </p14:xfrm>
-            </p:contentPart>
-          </mc:Choice>
-          <mc:Fallback xmlns="">
-            <p:pic>
-              <p:nvPicPr>
-                <p:cNvPr id="30" name="Рукописні дані 29">
-                  <a:extLst>
-                    <a:ext uri="{FF2B5EF4-FFF2-40B4-BE49-F238E27FC236}">
-                      <a16:creationId xmlns:a16="http://schemas.microsoft.com/office/drawing/2014/main" id="{BA21C7D0-6463-4BA6-B6C5-99316EB72D1B}"/>
-                    </a:ext>
-                  </a:extLst>
-                </p:cNvPr>
-                <p:cNvPicPr/>
-                <p:nvPr/>
-              </p:nvPicPr>
-              <p:blipFill>
-                <a:blip r:embed="rId45"/>
-                <a:stretch>
-                  <a:fillRect/>
-                </a:stretch>
-              </p:blipFill>
-              <p:spPr>
-                <a:xfrm>
-                  <a:off x="4352070" y="5572620"/>
-                  <a:ext cx="124560" cy="208080"/>
-                </a:xfrm>
-                <a:prstGeom prst="rect">
-                  <a:avLst/>
-                </a:prstGeom>
-              </p:spPr>
-            </p:pic>
-          </mc:Fallback>
-        </mc:AlternateContent>
-        <mc:AlternateContent xmlns:mc="http://schemas.openxmlformats.org/markup-compatibility/2006" xmlns:p14="http://schemas.microsoft.com/office/powerpoint/2010/main">
-          <mc:Choice Requires="p14">
-            <p:contentPart p14:bwMode="auto" r:id="rId46">
-              <p14:nvContentPartPr>
-                <p14:cNvPr id="31" name="Рукописні дані 30">
-                  <a:extLst>
-                    <a:ext uri="{FF2B5EF4-FFF2-40B4-BE49-F238E27FC236}">
-                      <a16:creationId xmlns:a16="http://schemas.microsoft.com/office/drawing/2014/main" id="{79B5EEC6-FBC0-4835-85F8-2DD917A0F7DF}"/>
-                    </a:ext>
-                  </a:extLst>
-                </p14:cNvPr>
-                <p14:cNvContentPartPr/>
-                <p14:nvPr/>
-              </p14:nvContentPartPr>
-              <p14:xfrm>
-                <a:off x="4486350" y="5676660"/>
-                <a:ext cx="360" cy="110880"/>
-              </p14:xfrm>
-            </p:contentPart>
-          </mc:Choice>
-          <mc:Fallback xmlns="">
-            <p:pic>
-              <p:nvPicPr>
-                <p:cNvPr id="31" name="Рукописні дані 30">
-                  <a:extLst>
-                    <a:ext uri="{FF2B5EF4-FFF2-40B4-BE49-F238E27FC236}">
-                      <a16:creationId xmlns:a16="http://schemas.microsoft.com/office/drawing/2014/main" id="{79B5EEC6-FBC0-4835-85F8-2DD917A0F7DF}"/>
-                    </a:ext>
-                  </a:extLst>
-                </p:cNvPr>
-                <p:cNvPicPr/>
-                <p:nvPr/>
-              </p:nvPicPr>
-              <p:blipFill>
-                <a:blip r:embed="rId47"/>
-                <a:stretch>
-                  <a:fillRect/>
-                </a:stretch>
-              </p:blipFill>
-              <p:spPr>
-                <a:xfrm>
-                  <a:off x="4477350" y="5668020"/>
-                  <a:ext cx="18000" cy="128520"/>
-                </a:xfrm>
-                <a:prstGeom prst="rect">
-                  <a:avLst/>
-                </a:prstGeom>
-              </p:spPr>
-            </p:pic>
-          </mc:Fallback>
-        </mc:AlternateContent>
-        <mc:AlternateContent xmlns:mc="http://schemas.openxmlformats.org/markup-compatibility/2006" xmlns:p14="http://schemas.microsoft.com/office/powerpoint/2010/main">
-          <mc:Choice Requires="p14">
-            <p:contentPart p14:bwMode="auto" r:id="rId48">
-              <p14:nvContentPartPr>
-                <p14:cNvPr id="32" name="Рукописні дані 31">
-                  <a:extLst>
-                    <a:ext uri="{FF2B5EF4-FFF2-40B4-BE49-F238E27FC236}">
-                      <a16:creationId xmlns:a16="http://schemas.microsoft.com/office/drawing/2014/main" id="{DAF2FBCF-9880-445B-A711-4E49099F64A6}"/>
-                    </a:ext>
-                  </a:extLst>
-                </p14:cNvPr>
-                <p14:cNvContentPartPr/>
-                <p14:nvPr/>
-              </p14:nvContentPartPr>
-              <p14:xfrm>
-                <a:off x="4286190" y="5247900"/>
-                <a:ext cx="309960" cy="134280"/>
-              </p14:xfrm>
-            </p:contentPart>
-          </mc:Choice>
-          <mc:Fallback xmlns="">
-            <p:pic>
-              <p:nvPicPr>
-                <p:cNvPr id="32" name="Рукописні дані 31">
-                  <a:extLst>
-                    <a:ext uri="{FF2B5EF4-FFF2-40B4-BE49-F238E27FC236}">
-                      <a16:creationId xmlns:a16="http://schemas.microsoft.com/office/drawing/2014/main" id="{DAF2FBCF-9880-445B-A711-4E49099F64A6}"/>
-                    </a:ext>
-                  </a:extLst>
-                </p:cNvPr>
-                <p:cNvPicPr/>
-                <p:nvPr/>
-              </p:nvPicPr>
-              <p:blipFill>
-                <a:blip r:embed="rId49"/>
-                <a:stretch>
-                  <a:fillRect/>
-                </a:stretch>
-              </p:blipFill>
-              <p:spPr>
-                <a:xfrm>
-                  <a:off x="4277190" y="5239260"/>
-                  <a:ext cx="327600" cy="151920"/>
-                </a:xfrm>
-                <a:prstGeom prst="rect">
-                  <a:avLst/>
-                </a:prstGeom>
-              </p:spPr>
-            </p:pic>
-          </mc:Fallback>
-        </mc:AlternateContent>
-      </p:grpSp>
-      <p:grpSp>
-        <p:nvGrpSpPr>
-          <p:cNvPr id="36" name="Групувати 35">
-            <a:extLst>
-              <a:ext uri="{FF2B5EF4-FFF2-40B4-BE49-F238E27FC236}">
-                <a16:creationId xmlns:a16="http://schemas.microsoft.com/office/drawing/2014/main" id="{A48FD0D4-962A-429B-A4D1-FA2591BB6148}"/>
-              </a:ext>
-            </a:extLst>
-          </p:cNvPr>
-          <p:cNvGrpSpPr/>
-          <p:nvPr/>
-        </p:nvGrpSpPr>
-        <p:grpSpPr>
-          <a:xfrm>
-            <a:off x="6428190" y="638100"/>
-            <a:ext cx="4716360" cy="1208880"/>
-            <a:chOff x="6428190" y="638100"/>
-            <a:chExt cx="4716360" cy="1208880"/>
-          </a:xfrm>
-        </p:grpSpPr>
-        <mc:AlternateContent xmlns:mc="http://schemas.openxmlformats.org/markup-compatibility/2006" xmlns:p14="http://schemas.microsoft.com/office/powerpoint/2010/main">
-          <mc:Choice Requires="p14">
-            <p:contentPart p14:bwMode="auto" r:id="rId50">
-              <p14:nvContentPartPr>
-                <p14:cNvPr id="34" name="Рукописні дані 33">
-                  <a:extLst>
-                    <a:ext uri="{FF2B5EF4-FFF2-40B4-BE49-F238E27FC236}">
-                      <a16:creationId xmlns:a16="http://schemas.microsoft.com/office/drawing/2014/main" id="{906A25C3-D676-419C-8066-A79F09B24588}"/>
-                    </a:ext>
-                  </a:extLst>
-                </p14:cNvPr>
-                <p14:cNvContentPartPr/>
-                <p14:nvPr/>
-              </p14:nvContentPartPr>
-              <p14:xfrm>
-                <a:off x="6428190" y="932580"/>
-                <a:ext cx="3331080" cy="914400"/>
-              </p14:xfrm>
-            </p:contentPart>
-          </mc:Choice>
-          <mc:Fallback xmlns="">
-            <p:pic>
-              <p:nvPicPr>
-                <p:cNvPr id="34" name="Рукописні дані 33">
-                  <a:extLst>
-                    <a:ext uri="{FF2B5EF4-FFF2-40B4-BE49-F238E27FC236}">
-                      <a16:creationId xmlns:a16="http://schemas.microsoft.com/office/drawing/2014/main" id="{906A25C3-D676-419C-8066-A79F09B24588}"/>
-                    </a:ext>
-                  </a:extLst>
-                </p:cNvPr>
-                <p:cNvPicPr/>
-                <p:nvPr/>
-              </p:nvPicPr>
-              <p:blipFill>
-                <a:blip r:embed="rId51"/>
-                <a:stretch>
-                  <a:fillRect/>
-                </a:stretch>
-              </p:blipFill>
-              <p:spPr>
-                <a:xfrm>
-                  <a:off x="6419550" y="923580"/>
-                  <a:ext cx="3348720" cy="932040"/>
-                </a:xfrm>
-                <a:prstGeom prst="rect">
-                  <a:avLst/>
-                </a:prstGeom>
-              </p:spPr>
-            </p:pic>
-          </mc:Fallback>
-        </mc:AlternateContent>
-        <mc:AlternateContent xmlns:mc="http://schemas.openxmlformats.org/markup-compatibility/2006" xmlns:p14="http://schemas.microsoft.com/office/powerpoint/2010/main">
-          <mc:Choice Requires="p14">
-            <p:contentPart p14:bwMode="auto" r:id="rId52">
-              <p14:nvContentPartPr>
-                <p14:cNvPr id="35" name="Рукописні дані 34">
-                  <a:extLst>
-                    <a:ext uri="{FF2B5EF4-FFF2-40B4-BE49-F238E27FC236}">
-                      <a16:creationId xmlns:a16="http://schemas.microsoft.com/office/drawing/2014/main" id="{F75B45FE-D387-481F-B396-664A5220499C}"/>
-                    </a:ext>
-                  </a:extLst>
-                </p14:cNvPr>
-                <p14:cNvContentPartPr/>
-                <p14:nvPr/>
-              </p14:nvContentPartPr>
-              <p14:xfrm>
-                <a:off x="9773310" y="638100"/>
-                <a:ext cx="1371240" cy="745200"/>
-              </p14:xfrm>
-            </p:contentPart>
-          </mc:Choice>
-          <mc:Fallback xmlns="">
-            <p:pic>
-              <p:nvPicPr>
-                <p:cNvPr id="35" name="Рукописні дані 34">
-                  <a:extLst>
-                    <a:ext uri="{FF2B5EF4-FFF2-40B4-BE49-F238E27FC236}">
-                      <a16:creationId xmlns:a16="http://schemas.microsoft.com/office/drawing/2014/main" id="{F75B45FE-D387-481F-B396-664A5220499C}"/>
-                    </a:ext>
-                  </a:extLst>
-                </p:cNvPr>
-                <p:cNvPicPr/>
-                <p:nvPr/>
-              </p:nvPicPr>
-              <p:blipFill>
-                <a:blip r:embed="rId53"/>
-                <a:stretch>
-                  <a:fillRect/>
-                </a:stretch>
-              </p:blipFill>
-              <p:spPr>
-                <a:xfrm>
-                  <a:off x="9764310" y="629460"/>
-                  <a:ext cx="1388880" cy="762840"/>
-                </a:xfrm>
-                <a:prstGeom prst="rect">
-                  <a:avLst/>
-                </a:prstGeom>
-              </p:spPr>
-            </p:pic>
-          </mc:Fallback>
-        </mc:AlternateContent>
-      </p:grpSp>
     </p:spTree>
     <p:extLst>
       <p:ext uri="{BB962C8B-B14F-4D97-AF65-F5344CB8AC3E}">
@@ -20405,690 +14928,6 @@
           </a:p>
         </p:txBody>
       </p:sp>
-      <mc:AlternateContent xmlns:mc="http://schemas.openxmlformats.org/markup-compatibility/2006" xmlns:p14="http://schemas.microsoft.com/office/powerpoint/2010/main">
-        <mc:Choice Requires="p14">
-          <p:contentPart p14:bwMode="auto" r:id="rId2">
-            <p14:nvContentPartPr>
-              <p14:cNvPr id="4" name="Рукописні дані 3">
-                <a:extLst>
-                  <a:ext uri="{FF2B5EF4-FFF2-40B4-BE49-F238E27FC236}">
-                    <a16:creationId xmlns:a16="http://schemas.microsoft.com/office/drawing/2014/main" id="{1C5EB02C-6D37-46C4-8433-AF11D43B36D6}"/>
-                  </a:ext>
-                </a:extLst>
-              </p14:cNvPr>
-              <p14:cNvContentPartPr/>
-              <p14:nvPr/>
-            </p14:nvContentPartPr>
-            <p14:xfrm>
-              <a:off x="2228790" y="5333940"/>
-              <a:ext cx="2044080" cy="163080"/>
-            </p14:xfrm>
-          </p:contentPart>
-        </mc:Choice>
-        <mc:Fallback xmlns="">
-          <p:pic>
-            <p:nvPicPr>
-              <p:cNvPr id="4" name="Рукописні дані 3">
-                <a:extLst>
-                  <a:ext uri="{FF2B5EF4-FFF2-40B4-BE49-F238E27FC236}">
-                    <a16:creationId xmlns:a16="http://schemas.microsoft.com/office/drawing/2014/main" id="{1C5EB02C-6D37-46C4-8433-AF11D43B36D6}"/>
-                  </a:ext>
-                </a:extLst>
-              </p:cNvPr>
-              <p:cNvPicPr/>
-              <p:nvPr/>
-            </p:nvPicPr>
-            <p:blipFill>
-              <a:blip r:embed="rId3"/>
-              <a:stretch>
-                <a:fillRect/>
-              </a:stretch>
-            </p:blipFill>
-            <p:spPr>
-              <a:xfrm>
-                <a:off x="2219790" y="5324940"/>
-                <a:ext cx="2061720" cy="180720"/>
-              </a:xfrm>
-              <a:prstGeom prst="rect">
-                <a:avLst/>
-              </a:prstGeom>
-            </p:spPr>
-          </p:pic>
-        </mc:Fallback>
-      </mc:AlternateContent>
-      <mc:AlternateContent xmlns:mc="http://schemas.openxmlformats.org/markup-compatibility/2006" xmlns:p14="http://schemas.microsoft.com/office/powerpoint/2010/main">
-        <mc:Choice Requires="p14">
-          <p:contentPart p14:bwMode="auto" r:id="rId4">
-            <p14:nvContentPartPr>
-              <p14:cNvPr id="5" name="Рукописні дані 4">
-                <a:extLst>
-                  <a:ext uri="{FF2B5EF4-FFF2-40B4-BE49-F238E27FC236}">
-                    <a16:creationId xmlns:a16="http://schemas.microsoft.com/office/drawing/2014/main" id="{541862D8-467B-4DC7-A239-ECC57B31F850}"/>
-                  </a:ext>
-                </a:extLst>
-              </p14:cNvPr>
-              <p14:cNvContentPartPr/>
-              <p14:nvPr/>
-            </p14:nvContentPartPr>
-            <p14:xfrm>
-              <a:off x="1209270" y="1546380"/>
-              <a:ext cx="1591920" cy="54360"/>
-            </p14:xfrm>
-          </p:contentPart>
-        </mc:Choice>
-        <mc:Fallback xmlns="">
-          <p:pic>
-            <p:nvPicPr>
-              <p:cNvPr id="5" name="Рукописні дані 4">
-                <a:extLst>
-                  <a:ext uri="{FF2B5EF4-FFF2-40B4-BE49-F238E27FC236}">
-                    <a16:creationId xmlns:a16="http://schemas.microsoft.com/office/drawing/2014/main" id="{541862D8-467B-4DC7-A239-ECC57B31F850}"/>
-                  </a:ext>
-                </a:extLst>
-              </p:cNvPr>
-              <p:cNvPicPr/>
-              <p:nvPr/>
-            </p:nvPicPr>
-            <p:blipFill>
-              <a:blip r:embed="rId5"/>
-              <a:stretch>
-                <a:fillRect/>
-              </a:stretch>
-            </p:blipFill>
-            <p:spPr>
-              <a:xfrm>
-                <a:off x="1200630" y="1537740"/>
-                <a:ext cx="1609560" cy="72000"/>
-              </a:xfrm>
-              <a:prstGeom prst="rect">
-                <a:avLst/>
-              </a:prstGeom>
-            </p:spPr>
-          </p:pic>
-        </mc:Fallback>
-      </mc:AlternateContent>
-      <mc:AlternateContent xmlns:mc="http://schemas.openxmlformats.org/markup-compatibility/2006" xmlns:p14="http://schemas.microsoft.com/office/powerpoint/2010/main">
-        <mc:Choice Requires="p14">
-          <p:contentPart p14:bwMode="auto" r:id="rId6">
-            <p14:nvContentPartPr>
-              <p14:cNvPr id="7" name="Рукописні дані 6">
-                <a:extLst>
-                  <a:ext uri="{FF2B5EF4-FFF2-40B4-BE49-F238E27FC236}">
-                    <a16:creationId xmlns:a16="http://schemas.microsoft.com/office/drawing/2014/main" id="{FCDDA7A6-EED5-4257-A66D-3B55FE9BFC2B}"/>
-                  </a:ext>
-                </a:extLst>
-              </p14:cNvPr>
-              <p14:cNvContentPartPr/>
-              <p14:nvPr/>
-            </p14:nvContentPartPr>
-            <p14:xfrm>
-              <a:off x="411870" y="1600020"/>
-              <a:ext cx="1770840" cy="315720"/>
-            </p14:xfrm>
-          </p:contentPart>
-        </mc:Choice>
-        <mc:Fallback xmlns="">
-          <p:pic>
-            <p:nvPicPr>
-              <p:cNvPr id="7" name="Рукописні дані 6">
-                <a:extLst>
-                  <a:ext uri="{FF2B5EF4-FFF2-40B4-BE49-F238E27FC236}">
-                    <a16:creationId xmlns:a16="http://schemas.microsoft.com/office/drawing/2014/main" id="{FCDDA7A6-EED5-4257-A66D-3B55FE9BFC2B}"/>
-                  </a:ext>
-                </a:extLst>
-              </p:cNvPr>
-              <p:cNvPicPr/>
-              <p:nvPr/>
-            </p:nvPicPr>
-            <p:blipFill>
-              <a:blip r:embed="rId7"/>
-              <a:stretch>
-                <a:fillRect/>
-              </a:stretch>
-            </p:blipFill>
-            <p:spPr>
-              <a:xfrm>
-                <a:off x="402870" y="1591020"/>
-                <a:ext cx="1788480" cy="333360"/>
-              </a:xfrm>
-              <a:prstGeom prst="rect">
-                <a:avLst/>
-              </a:prstGeom>
-            </p:spPr>
-          </p:pic>
-        </mc:Fallback>
-      </mc:AlternateContent>
-      <mc:AlternateContent xmlns:mc="http://schemas.openxmlformats.org/markup-compatibility/2006" xmlns:p14="http://schemas.microsoft.com/office/powerpoint/2010/main">
-        <mc:Choice Requires="p14">
-          <p:contentPart p14:bwMode="auto" r:id="rId8">
-            <p14:nvContentPartPr>
-              <p14:cNvPr id="8" name="Рукописні дані 7">
-                <a:extLst>
-                  <a:ext uri="{FF2B5EF4-FFF2-40B4-BE49-F238E27FC236}">
-                    <a16:creationId xmlns:a16="http://schemas.microsoft.com/office/drawing/2014/main" id="{48B22E74-6EB3-44E9-B8CF-1E86AA9D9B7F}"/>
-                  </a:ext>
-                </a:extLst>
-              </p14:cNvPr>
-              <p14:cNvContentPartPr/>
-              <p14:nvPr/>
-            </p14:nvContentPartPr>
-            <p14:xfrm>
-              <a:off x="485670" y="1742580"/>
-              <a:ext cx="1570320" cy="57960"/>
-            </p14:xfrm>
-          </p:contentPart>
-        </mc:Choice>
-        <mc:Fallback xmlns="">
-          <p:pic>
-            <p:nvPicPr>
-              <p:cNvPr id="8" name="Рукописні дані 7">
-                <a:extLst>
-                  <a:ext uri="{FF2B5EF4-FFF2-40B4-BE49-F238E27FC236}">
-                    <a16:creationId xmlns:a16="http://schemas.microsoft.com/office/drawing/2014/main" id="{48B22E74-6EB3-44E9-B8CF-1E86AA9D9B7F}"/>
-                  </a:ext>
-                </a:extLst>
-              </p:cNvPr>
-              <p:cNvPicPr/>
-              <p:nvPr/>
-            </p:nvPicPr>
-            <p:blipFill>
-              <a:blip r:embed="rId9"/>
-              <a:stretch>
-                <a:fillRect/>
-              </a:stretch>
-            </p:blipFill>
-            <p:spPr>
-              <a:xfrm>
-                <a:off x="396030" y="1562580"/>
-                <a:ext cx="1749960" cy="417600"/>
-              </a:xfrm>
-              <a:prstGeom prst="rect">
-                <a:avLst/>
-              </a:prstGeom>
-            </p:spPr>
-          </p:pic>
-        </mc:Fallback>
-      </mc:AlternateContent>
-      <mc:AlternateContent xmlns:mc="http://schemas.openxmlformats.org/markup-compatibility/2006" xmlns:p14="http://schemas.microsoft.com/office/powerpoint/2010/main">
-        <mc:Choice Requires="p14">
-          <p:contentPart p14:bwMode="auto" r:id="rId10">
-            <p14:nvContentPartPr>
-              <p14:cNvPr id="9" name="Рукописні дані 8">
-                <a:extLst>
-                  <a:ext uri="{FF2B5EF4-FFF2-40B4-BE49-F238E27FC236}">
-                    <a16:creationId xmlns:a16="http://schemas.microsoft.com/office/drawing/2014/main" id="{C9A89663-73A4-4BBC-B20E-BA85CF883EAC}"/>
-                  </a:ext>
-                </a:extLst>
-              </p14:cNvPr>
-              <p14:cNvContentPartPr/>
-              <p14:nvPr/>
-            </p14:nvContentPartPr>
-            <p14:xfrm>
-              <a:off x="530670" y="1989540"/>
-              <a:ext cx="2127240" cy="30240"/>
-            </p14:xfrm>
-          </p:contentPart>
-        </mc:Choice>
-        <mc:Fallback xmlns="">
-          <p:pic>
-            <p:nvPicPr>
-              <p:cNvPr id="9" name="Рукописні дані 8">
-                <a:extLst>
-                  <a:ext uri="{FF2B5EF4-FFF2-40B4-BE49-F238E27FC236}">
-                    <a16:creationId xmlns:a16="http://schemas.microsoft.com/office/drawing/2014/main" id="{C9A89663-73A4-4BBC-B20E-BA85CF883EAC}"/>
-                  </a:ext>
-                </a:extLst>
-              </p:cNvPr>
-              <p:cNvPicPr/>
-              <p:nvPr/>
-            </p:nvPicPr>
-            <p:blipFill>
-              <a:blip r:embed="rId11"/>
-              <a:stretch>
-                <a:fillRect/>
-              </a:stretch>
-            </p:blipFill>
-            <p:spPr>
-              <a:xfrm>
-                <a:off x="440670" y="1809540"/>
-                <a:ext cx="2306880" cy="389880"/>
-              </a:xfrm>
-              <a:prstGeom prst="rect">
-                <a:avLst/>
-              </a:prstGeom>
-            </p:spPr>
-          </p:pic>
-        </mc:Fallback>
-      </mc:AlternateContent>
-      <mc:AlternateContent xmlns:mc="http://schemas.openxmlformats.org/markup-compatibility/2006" xmlns:p14="http://schemas.microsoft.com/office/powerpoint/2010/main">
-        <mc:Choice Requires="p14">
-          <p:contentPart p14:bwMode="auto" r:id="rId12">
-            <p14:nvContentPartPr>
-              <p14:cNvPr id="12" name="Рукописні дані 11">
-                <a:extLst>
-                  <a:ext uri="{FF2B5EF4-FFF2-40B4-BE49-F238E27FC236}">
-                    <a16:creationId xmlns:a16="http://schemas.microsoft.com/office/drawing/2014/main" id="{B39EBAD8-00A3-40E6-886C-62BCC277913D}"/>
-                  </a:ext>
-                </a:extLst>
-              </p14:cNvPr>
-              <p14:cNvContentPartPr/>
-              <p14:nvPr/>
-            </p14:nvContentPartPr>
-            <p14:xfrm>
-              <a:off x="66270" y="2084580"/>
-              <a:ext cx="397800" cy="477720"/>
-            </p14:xfrm>
-          </p:contentPart>
-        </mc:Choice>
-        <mc:Fallback xmlns="">
-          <p:pic>
-            <p:nvPicPr>
-              <p:cNvPr id="12" name="Рукописні дані 11">
-                <a:extLst>
-                  <a:ext uri="{FF2B5EF4-FFF2-40B4-BE49-F238E27FC236}">
-                    <a16:creationId xmlns:a16="http://schemas.microsoft.com/office/drawing/2014/main" id="{B39EBAD8-00A3-40E6-886C-62BCC277913D}"/>
-                  </a:ext>
-                </a:extLst>
-              </p:cNvPr>
-              <p:cNvPicPr/>
-              <p:nvPr/>
-            </p:nvPicPr>
-            <p:blipFill>
-              <a:blip r:embed="rId13"/>
-              <a:stretch>
-                <a:fillRect/>
-              </a:stretch>
-            </p:blipFill>
-            <p:spPr>
-              <a:xfrm>
-                <a:off x="57630" y="2075580"/>
-                <a:ext cx="415440" cy="495360"/>
-              </a:xfrm>
-              <a:prstGeom prst="rect">
-                <a:avLst/>
-              </a:prstGeom>
-            </p:spPr>
-          </p:pic>
-        </mc:Fallback>
-      </mc:AlternateContent>
-      <mc:AlternateContent xmlns:mc="http://schemas.openxmlformats.org/markup-compatibility/2006" xmlns:p14="http://schemas.microsoft.com/office/powerpoint/2010/main">
-        <mc:Choice Requires="p14">
-          <p:contentPart p14:bwMode="auto" r:id="rId14">
-            <p14:nvContentPartPr>
-              <p14:cNvPr id="16" name="Рукописні дані 15">
-                <a:extLst>
-                  <a:ext uri="{FF2B5EF4-FFF2-40B4-BE49-F238E27FC236}">
-                    <a16:creationId xmlns:a16="http://schemas.microsoft.com/office/drawing/2014/main" id="{0163BACC-2718-48AC-98C1-65500011DADD}"/>
-                  </a:ext>
-                </a:extLst>
-              </p14:cNvPr>
-              <p14:cNvContentPartPr/>
-              <p14:nvPr/>
-            </p14:nvContentPartPr>
-            <p14:xfrm>
-              <a:off x="3467190" y="1704780"/>
-              <a:ext cx="360" cy="360"/>
-            </p14:xfrm>
-          </p:contentPart>
-        </mc:Choice>
-        <mc:Fallback xmlns="">
-          <p:pic>
-            <p:nvPicPr>
-              <p:cNvPr id="16" name="Рукописні дані 15">
-                <a:extLst>
-                  <a:ext uri="{FF2B5EF4-FFF2-40B4-BE49-F238E27FC236}">
-                    <a16:creationId xmlns:a16="http://schemas.microsoft.com/office/drawing/2014/main" id="{0163BACC-2718-48AC-98C1-65500011DADD}"/>
-                  </a:ext>
-                </a:extLst>
-              </p:cNvPr>
-              <p:cNvPicPr/>
-              <p:nvPr/>
-            </p:nvPicPr>
-            <p:blipFill>
-              <a:blip r:embed="rId15"/>
-              <a:stretch>
-                <a:fillRect/>
-              </a:stretch>
-            </p:blipFill>
-            <p:spPr>
-              <a:xfrm>
-                <a:off x="3458190" y="1695780"/>
-                <a:ext cx="18000" cy="18000"/>
-              </a:xfrm>
-              <a:prstGeom prst="rect">
-                <a:avLst/>
-              </a:prstGeom>
-            </p:spPr>
-          </p:pic>
-        </mc:Fallback>
-      </mc:AlternateContent>
-      <p:grpSp>
-        <p:nvGrpSpPr>
-          <p:cNvPr id="18" name="Групувати 17">
-            <a:extLst>
-              <a:ext uri="{FF2B5EF4-FFF2-40B4-BE49-F238E27FC236}">
-                <a16:creationId xmlns:a16="http://schemas.microsoft.com/office/drawing/2014/main" id="{B6578080-53DA-4BB5-B251-453051A69F59}"/>
-              </a:ext>
-            </a:extLst>
-          </p:cNvPr>
-          <p:cNvGrpSpPr/>
-          <p:nvPr/>
-        </p:nvGrpSpPr>
-        <p:grpSpPr>
-          <a:xfrm>
-            <a:off x="3498870" y="1885860"/>
-            <a:ext cx="165240" cy="216360"/>
-            <a:chOff x="3498870" y="1885860"/>
-            <a:chExt cx="165240" cy="216360"/>
-          </a:xfrm>
-        </p:grpSpPr>
-        <mc:AlternateContent xmlns:mc="http://schemas.openxmlformats.org/markup-compatibility/2006" xmlns:p14="http://schemas.microsoft.com/office/powerpoint/2010/main">
-          <mc:Choice Requires="p14">
-            <p:contentPart p14:bwMode="auto" r:id="rId16">
-              <p14:nvContentPartPr>
-                <p14:cNvPr id="14" name="Рукописні дані 13">
-                  <a:extLst>
-                    <a:ext uri="{FF2B5EF4-FFF2-40B4-BE49-F238E27FC236}">
-                      <a16:creationId xmlns:a16="http://schemas.microsoft.com/office/drawing/2014/main" id="{23E09C39-D1A3-4F26-8205-4E727008C626}"/>
-                    </a:ext>
-                  </a:extLst>
-                </p14:cNvPr>
-                <p14:cNvContentPartPr/>
-                <p14:nvPr/>
-              </p14:nvContentPartPr>
-              <p14:xfrm>
-                <a:off x="3498870" y="1990260"/>
-                <a:ext cx="16560" cy="111960"/>
-              </p14:xfrm>
-            </p:contentPart>
-          </mc:Choice>
-          <mc:Fallback xmlns="">
-            <p:pic>
-              <p:nvPicPr>
-                <p:cNvPr id="14" name="Рукописні дані 13">
-                  <a:extLst>
-                    <a:ext uri="{FF2B5EF4-FFF2-40B4-BE49-F238E27FC236}">
-                      <a16:creationId xmlns:a16="http://schemas.microsoft.com/office/drawing/2014/main" id="{23E09C39-D1A3-4F26-8205-4E727008C626}"/>
-                    </a:ext>
-                  </a:extLst>
-                </p:cNvPr>
-                <p:cNvPicPr/>
-                <p:nvPr/>
-              </p:nvPicPr>
-              <p:blipFill>
-                <a:blip r:embed="rId17"/>
-                <a:stretch>
-                  <a:fillRect/>
-                </a:stretch>
-              </p:blipFill>
-              <p:spPr>
-                <a:xfrm>
-                  <a:off x="3489870" y="1981620"/>
-                  <a:ext cx="34200" cy="129600"/>
-                </a:xfrm>
-                <a:prstGeom prst="rect">
-                  <a:avLst/>
-                </a:prstGeom>
-              </p:spPr>
-            </p:pic>
-          </mc:Fallback>
-        </mc:AlternateContent>
-        <mc:AlternateContent xmlns:mc="http://schemas.openxmlformats.org/markup-compatibility/2006" xmlns:p14="http://schemas.microsoft.com/office/powerpoint/2010/main">
-          <mc:Choice Requires="p14">
-            <p:contentPart p14:bwMode="auto" r:id="rId18">
-              <p14:nvContentPartPr>
-                <p14:cNvPr id="17" name="Рукописні дані 16">
-                  <a:extLst>
-                    <a:ext uri="{FF2B5EF4-FFF2-40B4-BE49-F238E27FC236}">
-                      <a16:creationId xmlns:a16="http://schemas.microsoft.com/office/drawing/2014/main" id="{0F39EBAD-91A1-497C-A101-EF4F417850EB}"/>
-                    </a:ext>
-                  </a:extLst>
-                </p14:cNvPr>
-                <p14:cNvContentPartPr/>
-                <p14:nvPr/>
-              </p14:nvContentPartPr>
-              <p14:xfrm>
-                <a:off x="3581310" y="1885860"/>
-                <a:ext cx="82800" cy="164160"/>
-              </p14:xfrm>
-            </p:contentPart>
-          </mc:Choice>
-          <mc:Fallback xmlns="">
-            <p:pic>
-              <p:nvPicPr>
-                <p:cNvPr id="17" name="Рукописні дані 16">
-                  <a:extLst>
-                    <a:ext uri="{FF2B5EF4-FFF2-40B4-BE49-F238E27FC236}">
-                      <a16:creationId xmlns:a16="http://schemas.microsoft.com/office/drawing/2014/main" id="{0F39EBAD-91A1-497C-A101-EF4F417850EB}"/>
-                    </a:ext>
-                  </a:extLst>
-                </p:cNvPr>
-                <p:cNvPicPr/>
-                <p:nvPr/>
-              </p:nvPicPr>
-              <p:blipFill>
-                <a:blip r:embed="rId19"/>
-                <a:stretch>
-                  <a:fillRect/>
-                </a:stretch>
-              </p:blipFill>
-              <p:spPr>
-                <a:xfrm>
-                  <a:off x="3572670" y="1877220"/>
-                  <a:ext cx="100440" cy="181800"/>
-                </a:xfrm>
-                <a:prstGeom prst="rect">
-                  <a:avLst/>
-                </a:prstGeom>
-              </p:spPr>
-            </p:pic>
-          </mc:Fallback>
-        </mc:AlternateContent>
-      </p:grpSp>
-      <mc:AlternateContent xmlns:mc="http://schemas.openxmlformats.org/markup-compatibility/2006" xmlns:p14="http://schemas.microsoft.com/office/powerpoint/2010/main">
-        <mc:Choice Requires="p14">
-          <p:contentPart p14:bwMode="auto" r:id="rId20">
-            <p14:nvContentPartPr>
-              <p14:cNvPr id="19" name="Рукописні дані 18">
-                <a:extLst>
-                  <a:ext uri="{FF2B5EF4-FFF2-40B4-BE49-F238E27FC236}">
-                    <a16:creationId xmlns:a16="http://schemas.microsoft.com/office/drawing/2014/main" id="{F862829B-5D22-4F6E-B147-D7BEED450ECA}"/>
-                  </a:ext>
-                </a:extLst>
-              </p14:cNvPr>
-              <p14:cNvContentPartPr/>
-              <p14:nvPr/>
-            </p14:nvContentPartPr>
-            <p14:xfrm>
-              <a:off x="-826890" y="3861180"/>
-              <a:ext cx="5640120" cy="2473920"/>
-            </p14:xfrm>
-          </p:contentPart>
-        </mc:Choice>
-        <mc:Fallback xmlns="">
-          <p:pic>
-            <p:nvPicPr>
-              <p:cNvPr id="19" name="Рукописні дані 18">
-                <a:extLst>
-                  <a:ext uri="{FF2B5EF4-FFF2-40B4-BE49-F238E27FC236}">
-                    <a16:creationId xmlns:a16="http://schemas.microsoft.com/office/drawing/2014/main" id="{F862829B-5D22-4F6E-B147-D7BEED450ECA}"/>
-                  </a:ext>
-                </a:extLst>
-              </p:cNvPr>
-              <p:cNvPicPr/>
-              <p:nvPr/>
-            </p:nvPicPr>
-            <p:blipFill>
-              <a:blip r:embed="rId21"/>
-              <a:stretch>
-                <a:fillRect/>
-              </a:stretch>
-            </p:blipFill>
-            <p:spPr>
-              <a:xfrm>
-                <a:off x="-835890" y="3852540"/>
-                <a:ext cx="5657760" cy="2491560"/>
-              </a:xfrm>
-              <a:prstGeom prst="rect">
-                <a:avLst/>
-              </a:prstGeom>
-            </p:spPr>
-          </p:pic>
-        </mc:Fallback>
-      </mc:AlternateContent>
-      <mc:AlternateContent xmlns:mc="http://schemas.openxmlformats.org/markup-compatibility/2006" xmlns:p14="http://schemas.microsoft.com/office/powerpoint/2010/main">
-        <mc:Choice Requires="p14">
-          <p:contentPart p14:bwMode="auto" r:id="rId22">
-            <p14:nvContentPartPr>
-              <p14:cNvPr id="20" name="Рукописні дані 19">
-                <a:extLst>
-                  <a:ext uri="{FF2B5EF4-FFF2-40B4-BE49-F238E27FC236}">
-                    <a16:creationId xmlns:a16="http://schemas.microsoft.com/office/drawing/2014/main" id="{7D33853A-3D5F-444D-954E-51A270B28B7F}"/>
-                  </a:ext>
-                </a:extLst>
-              </p14:cNvPr>
-              <p14:cNvContentPartPr/>
-              <p14:nvPr/>
-            </p14:nvContentPartPr>
-            <p14:xfrm>
-              <a:off x="-325050" y="2657340"/>
-              <a:ext cx="10888560" cy="1251000"/>
-            </p14:xfrm>
-          </p:contentPart>
-        </mc:Choice>
-        <mc:Fallback xmlns="">
-          <p:pic>
-            <p:nvPicPr>
-              <p:cNvPr id="20" name="Рукописні дані 19">
-                <a:extLst>
-                  <a:ext uri="{FF2B5EF4-FFF2-40B4-BE49-F238E27FC236}">
-                    <a16:creationId xmlns:a16="http://schemas.microsoft.com/office/drawing/2014/main" id="{7D33853A-3D5F-444D-954E-51A270B28B7F}"/>
-                  </a:ext>
-                </a:extLst>
-              </p:cNvPr>
-              <p:cNvPicPr/>
-              <p:nvPr/>
-            </p:nvPicPr>
-            <p:blipFill>
-              <a:blip r:embed="rId23"/>
-              <a:stretch>
-                <a:fillRect/>
-              </a:stretch>
-            </p:blipFill>
-            <p:spPr>
-              <a:xfrm>
-                <a:off x="-334050" y="2648340"/>
-                <a:ext cx="10906200" cy="1268640"/>
-              </a:xfrm>
-              <a:prstGeom prst="rect">
-                <a:avLst/>
-              </a:prstGeom>
-            </p:spPr>
-          </p:pic>
-        </mc:Fallback>
-      </mc:AlternateContent>
-      <mc:AlternateContent xmlns:mc="http://schemas.openxmlformats.org/markup-compatibility/2006" xmlns:p14="http://schemas.microsoft.com/office/powerpoint/2010/main">
-        <mc:Choice Requires="p14">
-          <p:contentPart p14:bwMode="auto" r:id="rId24">
-            <p14:nvContentPartPr>
-              <p14:cNvPr id="21" name="Рукописні дані 20">
-                <a:extLst>
-                  <a:ext uri="{FF2B5EF4-FFF2-40B4-BE49-F238E27FC236}">
-                    <a16:creationId xmlns:a16="http://schemas.microsoft.com/office/drawing/2014/main" id="{3DE02F5B-5DE4-4454-82A4-80DD6449587C}"/>
-                  </a:ext>
-                </a:extLst>
-              </p14:cNvPr>
-              <p14:cNvContentPartPr/>
-              <p14:nvPr/>
-            </p14:nvContentPartPr>
-            <p14:xfrm>
-              <a:off x="-649050" y="2176740"/>
-              <a:ext cx="1017720" cy="1585800"/>
-            </p14:xfrm>
-          </p:contentPart>
-        </mc:Choice>
-        <mc:Fallback xmlns="">
-          <p:pic>
-            <p:nvPicPr>
-              <p:cNvPr id="21" name="Рукописні дані 20">
-                <a:extLst>
-                  <a:ext uri="{FF2B5EF4-FFF2-40B4-BE49-F238E27FC236}">
-                    <a16:creationId xmlns:a16="http://schemas.microsoft.com/office/drawing/2014/main" id="{3DE02F5B-5DE4-4454-82A4-80DD6449587C}"/>
-                  </a:ext>
-                </a:extLst>
-              </p:cNvPr>
-              <p:cNvPicPr/>
-              <p:nvPr/>
-            </p:nvPicPr>
-            <p:blipFill>
-              <a:blip r:embed="rId25"/>
-              <a:stretch>
-                <a:fillRect/>
-              </a:stretch>
-            </p:blipFill>
-            <p:spPr>
-              <a:xfrm>
-                <a:off x="-658050" y="2167740"/>
-                <a:ext cx="1035360" cy="1603440"/>
-              </a:xfrm>
-              <a:prstGeom prst="rect">
-                <a:avLst/>
-              </a:prstGeom>
-            </p:spPr>
-          </p:pic>
-        </mc:Fallback>
-      </mc:AlternateContent>
-      <mc:AlternateContent xmlns:mc="http://schemas.openxmlformats.org/markup-compatibility/2006" xmlns:p14="http://schemas.microsoft.com/office/powerpoint/2010/main">
-        <mc:Choice Requires="p14">
-          <p:contentPart p14:bwMode="auto" r:id="rId26">
-            <p14:nvContentPartPr>
-              <p14:cNvPr id="22" name="Рукописні дані 21">
-                <a:extLst>
-                  <a:ext uri="{FF2B5EF4-FFF2-40B4-BE49-F238E27FC236}">
-                    <a16:creationId xmlns:a16="http://schemas.microsoft.com/office/drawing/2014/main" id="{2F59EE6A-D1CE-466F-992C-27AB2786A1B0}"/>
-                  </a:ext>
-                </a:extLst>
-              </p14:cNvPr>
-              <p14:cNvContentPartPr/>
-              <p14:nvPr/>
-            </p14:nvContentPartPr>
-            <p14:xfrm>
-              <a:off x="342750" y="5688180"/>
-              <a:ext cx="2884320" cy="47160"/>
-            </p14:xfrm>
-          </p:contentPart>
-        </mc:Choice>
-        <mc:Fallback xmlns="">
-          <p:pic>
-            <p:nvPicPr>
-              <p:cNvPr id="22" name="Рукописні дані 21">
-                <a:extLst>
-                  <a:ext uri="{FF2B5EF4-FFF2-40B4-BE49-F238E27FC236}">
-                    <a16:creationId xmlns:a16="http://schemas.microsoft.com/office/drawing/2014/main" id="{2F59EE6A-D1CE-466F-992C-27AB2786A1B0}"/>
-                  </a:ext>
-                </a:extLst>
-              </p:cNvPr>
-              <p:cNvPicPr/>
-              <p:nvPr/>
-            </p:nvPicPr>
-            <p:blipFill>
-              <a:blip r:embed="rId27"/>
-              <a:stretch>
-                <a:fillRect/>
-              </a:stretch>
-            </p:blipFill>
-            <p:spPr>
-              <a:xfrm>
-                <a:off x="333750" y="5679180"/>
-                <a:ext cx="2901960" cy="64800"/>
-              </a:xfrm>
-              <a:prstGeom prst="rect">
-                <a:avLst/>
-              </a:prstGeom>
-            </p:spPr>
-          </p:pic>
-        </mc:Fallback>
-      </mc:AlternateContent>
     </p:spTree>
     <p:extLst>
       <p:ext uri="{BB962C8B-B14F-4D97-AF65-F5344CB8AC3E}">
@@ -23141,57 +16980,6 @@
           </a:p>
         </p:txBody>
       </p:sp>
-      <mc:AlternateContent xmlns:mc="http://schemas.openxmlformats.org/markup-compatibility/2006" xmlns:p14="http://schemas.microsoft.com/office/powerpoint/2010/main">
-        <mc:Choice Requires="p14">
-          <p:contentPart p14:bwMode="auto" r:id="rId2">
-            <p14:nvContentPartPr>
-              <p14:cNvPr id="3" name="Рукописні дані 2">
-                <a:extLst>
-                  <a:ext uri="{FF2B5EF4-FFF2-40B4-BE49-F238E27FC236}">
-                    <a16:creationId xmlns:a16="http://schemas.microsoft.com/office/drawing/2014/main" id="{DEAD3F85-153C-4C80-A5B3-97C32C2C5510}"/>
-                  </a:ext>
-                </a:extLst>
-              </p14:cNvPr>
-              <p14:cNvContentPartPr/>
-              <p14:nvPr/>
-            </p14:nvContentPartPr>
-            <p14:xfrm>
-              <a:off x="674310" y="3178980"/>
-              <a:ext cx="794520" cy="460080"/>
-            </p14:xfrm>
-          </p:contentPart>
-        </mc:Choice>
-        <mc:Fallback xmlns="">
-          <p:pic>
-            <p:nvPicPr>
-              <p:cNvPr id="3" name="Рукописні дані 2">
-                <a:extLst>
-                  <a:ext uri="{FF2B5EF4-FFF2-40B4-BE49-F238E27FC236}">
-                    <a16:creationId xmlns:a16="http://schemas.microsoft.com/office/drawing/2014/main" id="{DEAD3F85-153C-4C80-A5B3-97C32C2C5510}"/>
-                  </a:ext>
-                </a:extLst>
-              </p:cNvPr>
-              <p:cNvPicPr/>
-              <p:nvPr/>
-            </p:nvPicPr>
-            <p:blipFill>
-              <a:blip r:embed="rId3"/>
-              <a:stretch>
-                <a:fillRect/>
-              </a:stretch>
-            </p:blipFill>
-            <p:spPr>
-              <a:xfrm>
-                <a:off x="665310" y="3170340"/>
-                <a:ext cx="812160" cy="477720"/>
-              </a:xfrm>
-              <a:prstGeom prst="rect">
-                <a:avLst/>
-              </a:prstGeom>
-            </p:spPr>
-          </p:pic>
-        </mc:Fallback>
-      </mc:AlternateContent>
     </p:spTree>
     <p:extLst>
       <p:ext uri="{BB962C8B-B14F-4D97-AF65-F5344CB8AC3E}">
@@ -25753,6 +19541,261 @@
           </a:extLst>
         </p:spPr>
       </p:pic>
+      <mc:AlternateContent xmlns:mc="http://schemas.openxmlformats.org/markup-compatibility/2006">
+        <mc:Choice xmlns:p14="http://schemas.microsoft.com/office/powerpoint/2010/main" Requires="p14">
+          <p:contentPart p14:bwMode="auto" r:id="rId3">
+            <p14:nvContentPartPr>
+              <p14:cNvPr id="9" name="Рукописні дані 8">
+                <a:extLst>
+                  <a:ext uri="{FF2B5EF4-FFF2-40B4-BE49-F238E27FC236}">
+                    <a16:creationId xmlns:a16="http://schemas.microsoft.com/office/drawing/2014/main" id="{94924670-4852-4717-84FF-BD7E47B5D55B}"/>
+                  </a:ext>
+                </a:extLst>
+              </p14:cNvPr>
+              <p14:cNvContentPartPr/>
+              <p14:nvPr/>
+            </p14:nvContentPartPr>
+            <p14:xfrm>
+              <a:off x="1304670" y="1767060"/>
+              <a:ext cx="702720" cy="23760"/>
+            </p14:xfrm>
+          </p:contentPart>
+        </mc:Choice>
+        <mc:Fallback>
+          <p:pic>
+            <p:nvPicPr>
+              <p:cNvPr id="9" name="Рукописні дані 8">
+                <a:extLst>
+                  <a:ext uri="{FF2B5EF4-FFF2-40B4-BE49-F238E27FC236}">
+                    <a16:creationId xmlns:a16="http://schemas.microsoft.com/office/drawing/2014/main" id="{94924670-4852-4717-84FF-BD7E47B5D55B}"/>
+                  </a:ext>
+                </a:extLst>
+              </p:cNvPr>
+              <p:cNvPicPr/>
+              <p:nvPr/>
+            </p:nvPicPr>
+            <p:blipFill>
+              <a:blip r:embed="rId4"/>
+              <a:stretch>
+                <a:fillRect/>
+              </a:stretch>
+            </p:blipFill>
+            <p:spPr>
+              <a:xfrm>
+                <a:off x="1215030" y="1587420"/>
+                <a:ext cx="882360" cy="383400"/>
+              </a:xfrm>
+              <a:prstGeom prst="rect">
+                <a:avLst/>
+              </a:prstGeom>
+            </p:spPr>
+          </p:pic>
+        </mc:Fallback>
+      </mc:AlternateContent>
+      <mc:AlternateContent xmlns:mc="http://schemas.openxmlformats.org/markup-compatibility/2006">
+        <mc:Choice xmlns:p14="http://schemas.microsoft.com/office/powerpoint/2010/main" Requires="p14">
+          <p:contentPart p14:bwMode="auto" r:id="rId5">
+            <p14:nvContentPartPr>
+              <p14:cNvPr id="10" name="Рукописні дані 9">
+                <a:extLst>
+                  <a:ext uri="{FF2B5EF4-FFF2-40B4-BE49-F238E27FC236}">
+                    <a16:creationId xmlns:a16="http://schemas.microsoft.com/office/drawing/2014/main" id="{81D88B05-3974-4877-954C-472273F39774}"/>
+                  </a:ext>
+                </a:extLst>
+              </p14:cNvPr>
+              <p14:cNvContentPartPr/>
+              <p14:nvPr/>
+            </p14:nvContentPartPr>
+            <p14:xfrm>
+              <a:off x="1447590" y="1999980"/>
+              <a:ext cx="480240" cy="29160"/>
+            </p14:xfrm>
+          </p:contentPart>
+        </mc:Choice>
+        <mc:Fallback>
+          <p:pic>
+            <p:nvPicPr>
+              <p:cNvPr id="10" name="Рукописні дані 9">
+                <a:extLst>
+                  <a:ext uri="{FF2B5EF4-FFF2-40B4-BE49-F238E27FC236}">
+                    <a16:creationId xmlns:a16="http://schemas.microsoft.com/office/drawing/2014/main" id="{81D88B05-3974-4877-954C-472273F39774}"/>
+                  </a:ext>
+                </a:extLst>
+              </p:cNvPr>
+              <p:cNvPicPr/>
+              <p:nvPr/>
+            </p:nvPicPr>
+            <p:blipFill>
+              <a:blip r:embed="rId6"/>
+              <a:stretch>
+                <a:fillRect/>
+              </a:stretch>
+            </p:blipFill>
+            <p:spPr>
+              <a:xfrm>
+                <a:off x="1357590" y="1819980"/>
+                <a:ext cx="659880" cy="388800"/>
+              </a:xfrm>
+              <a:prstGeom prst="rect">
+                <a:avLst/>
+              </a:prstGeom>
+            </p:spPr>
+          </p:pic>
+        </mc:Fallback>
+      </mc:AlternateContent>
+      <mc:AlternateContent xmlns:mc="http://schemas.openxmlformats.org/markup-compatibility/2006">
+        <mc:Choice xmlns:p14="http://schemas.microsoft.com/office/powerpoint/2010/main" Requires="p14">
+          <p:contentPart p14:bwMode="auto" r:id="rId7">
+            <p14:nvContentPartPr>
+              <p14:cNvPr id="11" name="Рукописні дані 10">
+                <a:extLst>
+                  <a:ext uri="{FF2B5EF4-FFF2-40B4-BE49-F238E27FC236}">
+                    <a16:creationId xmlns:a16="http://schemas.microsoft.com/office/drawing/2014/main" id="{516025FB-4AF9-4108-9927-66C6C8936F12}"/>
+                  </a:ext>
+                </a:extLst>
+              </p14:cNvPr>
+              <p14:cNvContentPartPr/>
+              <p14:nvPr/>
+            </p14:nvContentPartPr>
+            <p14:xfrm>
+              <a:off x="1266510" y="3381300"/>
+              <a:ext cx="352080" cy="360"/>
+            </p14:xfrm>
+          </p:contentPart>
+        </mc:Choice>
+        <mc:Fallback>
+          <p:pic>
+            <p:nvPicPr>
+              <p:cNvPr id="11" name="Рукописні дані 10">
+                <a:extLst>
+                  <a:ext uri="{FF2B5EF4-FFF2-40B4-BE49-F238E27FC236}">
+                    <a16:creationId xmlns:a16="http://schemas.microsoft.com/office/drawing/2014/main" id="{516025FB-4AF9-4108-9927-66C6C8936F12}"/>
+                  </a:ext>
+                </a:extLst>
+              </p:cNvPr>
+              <p:cNvPicPr/>
+              <p:nvPr/>
+            </p:nvPicPr>
+            <p:blipFill>
+              <a:blip r:embed="rId8"/>
+              <a:stretch>
+                <a:fillRect/>
+              </a:stretch>
+            </p:blipFill>
+            <p:spPr>
+              <a:xfrm>
+                <a:off x="1176870" y="3201660"/>
+                <a:ext cx="531720" cy="360000"/>
+              </a:xfrm>
+              <a:prstGeom prst="rect">
+                <a:avLst/>
+              </a:prstGeom>
+            </p:spPr>
+          </p:pic>
+        </mc:Fallback>
+      </mc:AlternateContent>
+      <mc:AlternateContent xmlns:mc="http://schemas.openxmlformats.org/markup-compatibility/2006">
+        <mc:Choice xmlns:p14="http://schemas.microsoft.com/office/powerpoint/2010/main" Requires="p14">
+          <p:contentPart p14:bwMode="auto" r:id="rId9">
+            <p14:nvContentPartPr>
+              <p14:cNvPr id="12" name="Рукописні дані 11">
+                <a:extLst>
+                  <a:ext uri="{FF2B5EF4-FFF2-40B4-BE49-F238E27FC236}">
+                    <a16:creationId xmlns:a16="http://schemas.microsoft.com/office/drawing/2014/main" id="{58E9A5CB-1B1B-4F3B-A25A-A7C3F5BA7925}"/>
+                  </a:ext>
+                </a:extLst>
+              </p14:cNvPr>
+              <p14:cNvContentPartPr/>
+              <p14:nvPr/>
+            </p14:nvContentPartPr>
+            <p14:xfrm>
+              <a:off x="1275870" y="4743540"/>
+              <a:ext cx="559800" cy="18360"/>
+            </p14:xfrm>
+          </p:contentPart>
+        </mc:Choice>
+        <mc:Fallback>
+          <p:pic>
+            <p:nvPicPr>
+              <p:cNvPr id="12" name="Рукописні дані 11">
+                <a:extLst>
+                  <a:ext uri="{FF2B5EF4-FFF2-40B4-BE49-F238E27FC236}">
+                    <a16:creationId xmlns:a16="http://schemas.microsoft.com/office/drawing/2014/main" id="{58E9A5CB-1B1B-4F3B-A25A-A7C3F5BA7925}"/>
+                  </a:ext>
+                </a:extLst>
+              </p:cNvPr>
+              <p:cNvPicPr/>
+              <p:nvPr/>
+            </p:nvPicPr>
+            <p:blipFill>
+              <a:blip r:embed="rId10"/>
+              <a:stretch>
+                <a:fillRect/>
+              </a:stretch>
+            </p:blipFill>
+            <p:spPr>
+              <a:xfrm>
+                <a:off x="1186230" y="4563540"/>
+                <a:ext cx="739440" cy="378000"/>
+              </a:xfrm>
+              <a:prstGeom prst="rect">
+                <a:avLst/>
+              </a:prstGeom>
+            </p:spPr>
+          </p:pic>
+        </mc:Fallback>
+      </mc:AlternateContent>
+      <mc:AlternateContent xmlns:mc="http://schemas.openxmlformats.org/markup-compatibility/2006">
+        <mc:Choice xmlns:p14="http://schemas.microsoft.com/office/powerpoint/2010/main" Requires="p14">
+          <p:contentPart p14:bwMode="auto" r:id="rId11">
+            <p14:nvContentPartPr>
+              <p14:cNvPr id="13" name="Рукописні дані 12">
+                <a:extLst>
+                  <a:ext uri="{FF2B5EF4-FFF2-40B4-BE49-F238E27FC236}">
+                    <a16:creationId xmlns:a16="http://schemas.microsoft.com/office/drawing/2014/main" id="{4DDB1A03-DDF5-4BDA-BD59-3DDF587FB99B}"/>
+                  </a:ext>
+                </a:extLst>
+              </p14:cNvPr>
+              <p14:cNvContentPartPr/>
+              <p14:nvPr/>
+            </p14:nvContentPartPr>
+            <p14:xfrm>
+              <a:off x="1228710" y="6123780"/>
+              <a:ext cx="682560" cy="29520"/>
+            </p14:xfrm>
+          </p:contentPart>
+        </mc:Choice>
+        <mc:Fallback>
+          <p:pic>
+            <p:nvPicPr>
+              <p:cNvPr id="13" name="Рукописні дані 12">
+                <a:extLst>
+                  <a:ext uri="{FF2B5EF4-FFF2-40B4-BE49-F238E27FC236}">
+                    <a16:creationId xmlns:a16="http://schemas.microsoft.com/office/drawing/2014/main" id="{4DDB1A03-DDF5-4BDA-BD59-3DDF587FB99B}"/>
+                  </a:ext>
+                </a:extLst>
+              </p:cNvPr>
+              <p:cNvPicPr/>
+              <p:nvPr/>
+            </p:nvPicPr>
+            <p:blipFill>
+              <a:blip r:embed="rId12"/>
+              <a:stretch>
+                <a:fillRect/>
+              </a:stretch>
+            </p:blipFill>
+            <p:spPr>
+              <a:xfrm>
+                <a:off x="1139070" y="5944140"/>
+                <a:ext cx="862200" cy="389160"/>
+              </a:xfrm>
+              <a:prstGeom prst="rect">
+                <a:avLst/>
+              </a:prstGeom>
+            </p:spPr>
+          </p:pic>
+        </mc:Fallback>
+      </mc:AlternateContent>
     </p:spTree>
     <p:extLst>
       <p:ext uri="{BB962C8B-B14F-4D97-AF65-F5344CB8AC3E}">
@@ -30819,6 +24862,108 @@
           </p:pic>
         </mc:Fallback>
       </mc:AlternateContent>
+      <mc:AlternateContent xmlns:mc="http://schemas.openxmlformats.org/markup-compatibility/2006">
+        <mc:Choice xmlns:p14="http://schemas.microsoft.com/office/powerpoint/2010/main" Requires="p14">
+          <p:contentPart p14:bwMode="auto" r:id="rId12">
+            <p14:nvContentPartPr>
+              <p14:cNvPr id="7" name="Рукописні дані 6">
+                <a:extLst>
+                  <a:ext uri="{FF2B5EF4-FFF2-40B4-BE49-F238E27FC236}">
+                    <a16:creationId xmlns:a16="http://schemas.microsoft.com/office/drawing/2014/main" id="{A394CD16-D1A3-43E7-AE8B-1556F0BE4964}"/>
+                  </a:ext>
+                </a:extLst>
+              </p14:cNvPr>
+              <p14:cNvContentPartPr/>
+              <p14:nvPr/>
+            </p14:nvContentPartPr>
+            <p14:xfrm>
+              <a:off x="2047710" y="3787020"/>
+              <a:ext cx="60840" cy="3960"/>
+            </p14:xfrm>
+          </p:contentPart>
+        </mc:Choice>
+        <mc:Fallback>
+          <p:pic>
+            <p:nvPicPr>
+              <p:cNvPr id="7" name="Рукописні дані 6">
+                <a:extLst>
+                  <a:ext uri="{FF2B5EF4-FFF2-40B4-BE49-F238E27FC236}">
+                    <a16:creationId xmlns:a16="http://schemas.microsoft.com/office/drawing/2014/main" id="{A394CD16-D1A3-43E7-AE8B-1556F0BE4964}"/>
+                  </a:ext>
+                </a:extLst>
+              </p:cNvPr>
+              <p:cNvPicPr/>
+              <p:nvPr/>
+            </p:nvPicPr>
+            <p:blipFill>
+              <a:blip r:embed="rId13"/>
+              <a:stretch>
+                <a:fillRect/>
+              </a:stretch>
+            </p:blipFill>
+            <p:spPr>
+              <a:xfrm>
+                <a:off x="1958070" y="3607380"/>
+                <a:ext cx="240480" cy="363600"/>
+              </a:xfrm>
+              <a:prstGeom prst="rect">
+                <a:avLst/>
+              </a:prstGeom>
+            </p:spPr>
+          </p:pic>
+        </mc:Fallback>
+      </mc:AlternateContent>
+      <mc:AlternateContent xmlns:mc="http://schemas.openxmlformats.org/markup-compatibility/2006">
+        <mc:Choice xmlns:p14="http://schemas.microsoft.com/office/powerpoint/2010/main" Requires="p14">
+          <p:contentPart p14:bwMode="auto" r:id="rId14">
+            <p14:nvContentPartPr>
+              <p14:cNvPr id="8" name="Рукописні дані 7">
+                <a:extLst>
+                  <a:ext uri="{FF2B5EF4-FFF2-40B4-BE49-F238E27FC236}">
+                    <a16:creationId xmlns:a16="http://schemas.microsoft.com/office/drawing/2014/main" id="{FAFCD63A-C256-4E54-87D7-EE8D409D51A9}"/>
+                  </a:ext>
+                </a:extLst>
+              </p14:cNvPr>
+              <p14:cNvContentPartPr/>
+              <p14:nvPr/>
+            </p14:nvContentPartPr>
+            <p14:xfrm>
+              <a:off x="1961670" y="3998700"/>
+              <a:ext cx="126000" cy="30600"/>
+            </p14:xfrm>
+          </p:contentPart>
+        </mc:Choice>
+        <mc:Fallback>
+          <p:pic>
+            <p:nvPicPr>
+              <p:cNvPr id="8" name="Рукописні дані 7">
+                <a:extLst>
+                  <a:ext uri="{FF2B5EF4-FFF2-40B4-BE49-F238E27FC236}">
+                    <a16:creationId xmlns:a16="http://schemas.microsoft.com/office/drawing/2014/main" id="{FAFCD63A-C256-4E54-87D7-EE8D409D51A9}"/>
+                  </a:ext>
+                </a:extLst>
+              </p:cNvPr>
+              <p:cNvPicPr/>
+              <p:nvPr/>
+            </p:nvPicPr>
+            <p:blipFill>
+              <a:blip r:embed="rId15"/>
+              <a:stretch>
+                <a:fillRect/>
+              </a:stretch>
+            </p:blipFill>
+            <p:spPr>
+              <a:xfrm>
+                <a:off x="1872030" y="3818700"/>
+                <a:ext cx="305640" cy="390240"/>
+              </a:xfrm>
+              <a:prstGeom prst="rect">
+                <a:avLst/>
+              </a:prstGeom>
+            </p:spPr>
+          </p:pic>
+        </mc:Fallback>
+      </mc:AlternateContent>
     </p:spTree>
     <p:extLst>
       <p:ext uri="{BB962C8B-B14F-4D97-AF65-F5344CB8AC3E}">
@@ -31364,6 +25509,57 @@
           </a:p>
         </p:txBody>
       </p:sp>
+      <mc:AlternateContent xmlns:mc="http://schemas.openxmlformats.org/markup-compatibility/2006">
+        <mc:Choice xmlns:p14="http://schemas.microsoft.com/office/powerpoint/2010/main" xmlns:aink="http://schemas.microsoft.com/office/drawing/2016/ink" Requires="p14 aink">
+          <p:contentPart p14:bwMode="auto" r:id="rId2">
+            <p14:nvContentPartPr>
+              <p14:cNvPr id="3" name="Рукописні дані 2">
+                <a:extLst>
+                  <a:ext uri="{FF2B5EF4-FFF2-40B4-BE49-F238E27FC236}">
+                    <a16:creationId xmlns:a16="http://schemas.microsoft.com/office/drawing/2014/main" id="{63DA6390-7551-4797-8932-DC76B981FECD}"/>
+                  </a:ext>
+                </a:extLst>
+              </p14:cNvPr>
+              <p14:cNvContentPartPr/>
+              <p14:nvPr/>
+            </p14:nvContentPartPr>
+            <p14:xfrm>
+              <a:off x="2866710" y="2498940"/>
+              <a:ext cx="1782720" cy="82800"/>
+            </p14:xfrm>
+          </p:contentPart>
+        </mc:Choice>
+        <mc:Fallback>
+          <p:pic>
+            <p:nvPicPr>
+              <p:cNvPr id="3" name="Рукописні дані 2">
+                <a:extLst>
+                  <a:ext uri="{FF2B5EF4-FFF2-40B4-BE49-F238E27FC236}">
+                    <a16:creationId xmlns:a16="http://schemas.microsoft.com/office/drawing/2014/main" id="{63DA6390-7551-4797-8932-DC76B981FECD}"/>
+                  </a:ext>
+                </a:extLst>
+              </p:cNvPr>
+              <p:cNvPicPr/>
+              <p:nvPr/>
+            </p:nvPicPr>
+            <p:blipFill>
+              <a:blip r:embed="rId3"/>
+              <a:stretch>
+                <a:fillRect/>
+              </a:stretch>
+            </p:blipFill>
+            <p:spPr>
+              <a:xfrm>
+                <a:off x="2858070" y="2490300"/>
+                <a:ext cx="1800360" cy="100440"/>
+              </a:xfrm>
+              <a:prstGeom prst="rect">
+                <a:avLst/>
+              </a:prstGeom>
+            </p:spPr>
+          </p:pic>
+        </mc:Fallback>
+      </mc:AlternateContent>
     </p:spTree>
     <p:extLst>
       <p:ext uri="{BB962C8B-B14F-4D97-AF65-F5344CB8AC3E}">
@@ -36167,282 +30363,6 @@
           </a:p>
         </p:txBody>
       </p:sp>
-      <p:grpSp>
-        <p:nvGrpSpPr>
-          <p:cNvPr id="17" name="Групувати 16">
-            <a:extLst>
-              <a:ext uri="{FF2B5EF4-FFF2-40B4-BE49-F238E27FC236}">
-                <a16:creationId xmlns:a16="http://schemas.microsoft.com/office/drawing/2014/main" id="{66F4FC34-DEF9-42EE-8971-833FA281BC60}"/>
-              </a:ext>
-            </a:extLst>
-          </p:cNvPr>
-          <p:cNvGrpSpPr/>
-          <p:nvPr/>
-        </p:nvGrpSpPr>
-        <p:grpSpPr>
-          <a:xfrm>
-            <a:off x="-348810" y="1914300"/>
-            <a:ext cx="4742280" cy="527040"/>
-            <a:chOff x="-348810" y="1914300"/>
-            <a:chExt cx="4742280" cy="527040"/>
-          </a:xfrm>
-        </p:grpSpPr>
-        <mc:AlternateContent xmlns:mc="http://schemas.openxmlformats.org/markup-compatibility/2006" xmlns:p14="http://schemas.microsoft.com/office/powerpoint/2010/main">
-          <mc:Choice Requires="p14">
-            <p:contentPart p14:bwMode="auto" r:id="rId2">
-              <p14:nvContentPartPr>
-                <p14:cNvPr id="6" name="Рукописні дані 5">
-                  <a:extLst>
-                    <a:ext uri="{FF2B5EF4-FFF2-40B4-BE49-F238E27FC236}">
-                      <a16:creationId xmlns:a16="http://schemas.microsoft.com/office/drawing/2014/main" id="{93202D07-71B5-48ED-85DE-B18257C6BFCA}"/>
-                    </a:ext>
-                  </a:extLst>
-                </p14:cNvPr>
-                <p14:cNvContentPartPr/>
-                <p14:nvPr/>
-              </p14:nvContentPartPr>
-              <p14:xfrm>
-                <a:off x="1019190" y="2354580"/>
-                <a:ext cx="442440" cy="36360"/>
-              </p14:xfrm>
-            </p:contentPart>
-          </mc:Choice>
-          <mc:Fallback xmlns="">
-            <p:pic>
-              <p:nvPicPr>
-                <p:cNvPr id="6" name="Рукописні дані 5">
-                  <a:extLst>
-                    <a:ext uri="{FF2B5EF4-FFF2-40B4-BE49-F238E27FC236}">
-                      <a16:creationId xmlns:a16="http://schemas.microsoft.com/office/drawing/2014/main" id="{93202D07-71B5-48ED-85DE-B18257C6BFCA}"/>
-                    </a:ext>
-                  </a:extLst>
-                </p:cNvPr>
-                <p:cNvPicPr/>
-                <p:nvPr/>
-              </p:nvPicPr>
-              <p:blipFill>
-                <a:blip r:embed="rId3"/>
-                <a:stretch>
-                  <a:fillRect/>
-                </a:stretch>
-              </p:blipFill>
-              <p:spPr>
-                <a:xfrm>
-                  <a:off x="1010190" y="2345580"/>
-                  <a:ext cx="460080" cy="54000"/>
-                </a:xfrm>
-                <a:prstGeom prst="rect">
-                  <a:avLst/>
-                </a:prstGeom>
-              </p:spPr>
-            </p:pic>
-          </mc:Fallback>
-        </mc:AlternateContent>
-        <mc:AlternateContent xmlns:mc="http://schemas.openxmlformats.org/markup-compatibility/2006" xmlns:p14="http://schemas.microsoft.com/office/powerpoint/2010/main">
-          <mc:Choice Requires="p14">
-            <p:contentPart p14:bwMode="auto" r:id="rId4">
-              <p14:nvContentPartPr>
-                <p14:cNvPr id="9" name="Рукописні дані 8">
-                  <a:extLst>
-                    <a:ext uri="{FF2B5EF4-FFF2-40B4-BE49-F238E27FC236}">
-                      <a16:creationId xmlns:a16="http://schemas.microsoft.com/office/drawing/2014/main" id="{0D3BAFE1-17C9-4754-838A-C3F267EEBE6C}"/>
-                    </a:ext>
-                  </a:extLst>
-                </p14:cNvPr>
-                <p14:cNvContentPartPr/>
-                <p14:nvPr/>
-              </p14:nvContentPartPr>
-              <p14:xfrm>
-                <a:off x="1828470" y="2333340"/>
-                <a:ext cx="2432880" cy="106560"/>
-              </p14:xfrm>
-            </p:contentPart>
-          </mc:Choice>
-          <mc:Fallback xmlns="">
-            <p:pic>
-              <p:nvPicPr>
-                <p:cNvPr id="9" name="Рукописні дані 8">
-                  <a:extLst>
-                    <a:ext uri="{FF2B5EF4-FFF2-40B4-BE49-F238E27FC236}">
-                      <a16:creationId xmlns:a16="http://schemas.microsoft.com/office/drawing/2014/main" id="{0D3BAFE1-17C9-4754-838A-C3F267EEBE6C}"/>
-                    </a:ext>
-                  </a:extLst>
-                </p:cNvPr>
-                <p:cNvPicPr/>
-                <p:nvPr/>
-              </p:nvPicPr>
-              <p:blipFill>
-                <a:blip r:embed="rId5"/>
-                <a:stretch>
-                  <a:fillRect/>
-                </a:stretch>
-              </p:blipFill>
-              <p:spPr>
-                <a:xfrm>
-                  <a:off x="1819830" y="2324340"/>
-                  <a:ext cx="2450520" cy="124200"/>
-                </a:xfrm>
-                <a:prstGeom prst="rect">
-                  <a:avLst/>
-                </a:prstGeom>
-              </p:spPr>
-            </p:pic>
-          </mc:Fallback>
-        </mc:AlternateContent>
-        <mc:AlternateContent xmlns:mc="http://schemas.openxmlformats.org/markup-compatibility/2006" xmlns:p14="http://schemas.microsoft.com/office/powerpoint/2010/main">
-          <mc:Choice Requires="p14">
-            <p:contentPart p14:bwMode="auto" r:id="rId6">
-              <p14:nvContentPartPr>
-                <p14:cNvPr id="13" name="Рукописні дані 12">
-                  <a:extLst>
-                    <a:ext uri="{FF2B5EF4-FFF2-40B4-BE49-F238E27FC236}">
-                      <a16:creationId xmlns:a16="http://schemas.microsoft.com/office/drawing/2014/main" id="{789E1507-D723-40FF-813A-9B6B74B6398A}"/>
-                    </a:ext>
-                  </a:extLst>
-                </p14:cNvPr>
-                <p14:cNvContentPartPr/>
-                <p14:nvPr/>
-              </p14:nvContentPartPr>
-              <p14:xfrm>
-                <a:off x="3581310" y="2222100"/>
-                <a:ext cx="812160" cy="26280"/>
-              </p14:xfrm>
-            </p:contentPart>
-          </mc:Choice>
-          <mc:Fallback xmlns="">
-            <p:pic>
-              <p:nvPicPr>
-                <p:cNvPr id="13" name="Рукописні дані 12">
-                  <a:extLst>
-                    <a:ext uri="{FF2B5EF4-FFF2-40B4-BE49-F238E27FC236}">
-                      <a16:creationId xmlns:a16="http://schemas.microsoft.com/office/drawing/2014/main" id="{789E1507-D723-40FF-813A-9B6B74B6398A}"/>
-                    </a:ext>
-                  </a:extLst>
-                </p:cNvPr>
-                <p:cNvPicPr/>
-                <p:nvPr/>
-              </p:nvPicPr>
-              <p:blipFill>
-                <a:blip r:embed="rId7"/>
-                <a:stretch>
-                  <a:fillRect/>
-                </a:stretch>
-              </p:blipFill>
-              <p:spPr>
-                <a:xfrm>
-                  <a:off x="3572670" y="2213100"/>
-                  <a:ext cx="829800" cy="43920"/>
-                </a:xfrm>
-                <a:prstGeom prst="rect">
-                  <a:avLst/>
-                </a:prstGeom>
-              </p:spPr>
-            </p:pic>
-          </mc:Fallback>
-        </mc:AlternateContent>
-        <mc:AlternateContent xmlns:mc="http://schemas.openxmlformats.org/markup-compatibility/2006" xmlns:p14="http://schemas.microsoft.com/office/powerpoint/2010/main">
-          <mc:Choice Requires="p14">
-            <p:contentPart p14:bwMode="auto" r:id="rId8">
-              <p14:nvContentPartPr>
-                <p14:cNvPr id="14" name="Рукописні дані 13">
-                  <a:extLst>
-                    <a:ext uri="{FF2B5EF4-FFF2-40B4-BE49-F238E27FC236}">
-                      <a16:creationId xmlns:a16="http://schemas.microsoft.com/office/drawing/2014/main" id="{03B25E93-0F42-47BB-A458-B75C9025A8B0}"/>
-                    </a:ext>
-                  </a:extLst>
-                </p14:cNvPr>
-                <p14:cNvContentPartPr/>
-                <p14:nvPr/>
-              </p14:nvContentPartPr>
-              <p14:xfrm>
-                <a:off x="3476550" y="2154780"/>
-                <a:ext cx="522720" cy="286560"/>
-              </p14:xfrm>
-            </p:contentPart>
-          </mc:Choice>
-          <mc:Fallback xmlns="">
-            <p:pic>
-              <p:nvPicPr>
-                <p:cNvPr id="14" name="Рукописні дані 13">
-                  <a:extLst>
-                    <a:ext uri="{FF2B5EF4-FFF2-40B4-BE49-F238E27FC236}">
-                      <a16:creationId xmlns:a16="http://schemas.microsoft.com/office/drawing/2014/main" id="{03B25E93-0F42-47BB-A458-B75C9025A8B0}"/>
-                    </a:ext>
-                  </a:extLst>
-                </p:cNvPr>
-                <p:cNvPicPr/>
-                <p:nvPr/>
-              </p:nvPicPr>
-              <p:blipFill>
-                <a:blip r:embed="rId9"/>
-                <a:stretch>
-                  <a:fillRect/>
-                </a:stretch>
-              </p:blipFill>
-              <p:spPr>
-                <a:xfrm>
-                  <a:off x="3467550" y="2146140"/>
-                  <a:ext cx="540360" cy="304200"/>
-                </a:xfrm>
-                <a:prstGeom prst="rect">
-                  <a:avLst/>
-                </a:prstGeom>
-              </p:spPr>
-            </p:pic>
-          </mc:Fallback>
-        </mc:AlternateContent>
-        <mc:AlternateContent xmlns:mc="http://schemas.openxmlformats.org/markup-compatibility/2006" xmlns:p14="http://schemas.microsoft.com/office/powerpoint/2010/main">
-          <mc:Choice Requires="p14">
-            <p:contentPart p14:bwMode="auto" r:id="rId10">
-              <p14:nvContentPartPr>
-                <p14:cNvPr id="16" name="Рукописні дані 15">
-                  <a:extLst>
-                    <a:ext uri="{FF2B5EF4-FFF2-40B4-BE49-F238E27FC236}">
-                      <a16:creationId xmlns:a16="http://schemas.microsoft.com/office/drawing/2014/main" id="{60127930-6FCC-4AA0-BA45-21463D186985}"/>
-                    </a:ext>
-                  </a:extLst>
-                </p14:cNvPr>
-                <p14:cNvContentPartPr/>
-                <p14:nvPr/>
-              </p14:nvContentPartPr>
-              <p14:xfrm>
-                <a:off x="-348810" y="1914300"/>
-                <a:ext cx="3968640" cy="477360"/>
-              </p14:xfrm>
-            </p:contentPart>
-          </mc:Choice>
-          <mc:Fallback xmlns="">
-            <p:pic>
-              <p:nvPicPr>
-                <p:cNvPr id="16" name="Рукописні дані 15">
-                  <a:extLst>
-                    <a:ext uri="{FF2B5EF4-FFF2-40B4-BE49-F238E27FC236}">
-                      <a16:creationId xmlns:a16="http://schemas.microsoft.com/office/drawing/2014/main" id="{60127930-6FCC-4AA0-BA45-21463D186985}"/>
-                    </a:ext>
-                  </a:extLst>
-                </p:cNvPr>
-                <p:cNvPicPr/>
-                <p:nvPr/>
-              </p:nvPicPr>
-              <p:blipFill>
-                <a:blip r:embed="rId11"/>
-                <a:stretch>
-                  <a:fillRect/>
-                </a:stretch>
-              </p:blipFill>
-              <p:spPr>
-                <a:xfrm>
-                  <a:off x="-357810" y="1905300"/>
-                  <a:ext cx="3986280" cy="495000"/>
-                </a:xfrm>
-                <a:prstGeom prst="rect">
-                  <a:avLst/>
-                </a:prstGeom>
-              </p:spPr>
-            </p:pic>
-          </mc:Fallback>
-        </mc:AlternateContent>
-      </p:grpSp>
     </p:spTree>
     <p:extLst>
       <p:ext uri="{BB962C8B-B14F-4D97-AF65-F5344CB8AC3E}">
@@ -39258,159 +33178,6 @@
           </a:p>
         </p:txBody>
       </p:sp>
-      <mc:AlternateContent xmlns:mc="http://schemas.openxmlformats.org/markup-compatibility/2006" xmlns:p14="http://schemas.microsoft.com/office/powerpoint/2010/main">
-        <mc:Choice Requires="p14">
-          <p:contentPart p14:bwMode="auto" r:id="rId2">
-            <p14:nvContentPartPr>
-              <p14:cNvPr id="3" name="Рукописні дані 2">
-                <a:extLst>
-                  <a:ext uri="{FF2B5EF4-FFF2-40B4-BE49-F238E27FC236}">
-                    <a16:creationId xmlns:a16="http://schemas.microsoft.com/office/drawing/2014/main" id="{43F99A99-8D86-449A-A0B8-0595E89A44D2}"/>
-                  </a:ext>
-                </a:extLst>
-              </p14:cNvPr>
-              <p14:cNvContentPartPr/>
-              <p14:nvPr/>
-            </p14:nvContentPartPr>
-            <p14:xfrm>
-              <a:off x="2752950" y="3523500"/>
-              <a:ext cx="293760" cy="48960"/>
-            </p14:xfrm>
-          </p:contentPart>
-        </mc:Choice>
-        <mc:Fallback xmlns="">
-          <p:pic>
-            <p:nvPicPr>
-              <p:cNvPr id="3" name="Рукописні дані 2">
-                <a:extLst>
-                  <a:ext uri="{FF2B5EF4-FFF2-40B4-BE49-F238E27FC236}">
-                    <a16:creationId xmlns:a16="http://schemas.microsoft.com/office/drawing/2014/main" id="{43F99A99-8D86-449A-A0B8-0595E89A44D2}"/>
-                  </a:ext>
-                </a:extLst>
-              </p:cNvPr>
-              <p:cNvPicPr/>
-              <p:nvPr/>
-            </p:nvPicPr>
-            <p:blipFill>
-              <a:blip r:embed="rId3"/>
-              <a:stretch>
-                <a:fillRect/>
-              </a:stretch>
-            </p:blipFill>
-            <p:spPr>
-              <a:xfrm>
-                <a:off x="2744310" y="3514500"/>
-                <a:ext cx="311400" cy="66600"/>
-              </a:xfrm>
-              <a:prstGeom prst="rect">
-                <a:avLst/>
-              </a:prstGeom>
-            </p:spPr>
-          </p:pic>
-        </mc:Fallback>
-      </mc:AlternateContent>
-      <mc:AlternateContent xmlns:mc="http://schemas.openxmlformats.org/markup-compatibility/2006" xmlns:p14="http://schemas.microsoft.com/office/powerpoint/2010/main">
-        <mc:Choice Requires="p14">
-          <p:contentPart p14:bwMode="auto" r:id="rId4">
-            <p14:nvContentPartPr>
-              <p14:cNvPr id="6" name="Рукописні дані 5">
-                <a:extLst>
-                  <a:ext uri="{FF2B5EF4-FFF2-40B4-BE49-F238E27FC236}">
-                    <a16:creationId xmlns:a16="http://schemas.microsoft.com/office/drawing/2014/main" id="{DC71E458-A56D-477C-BC9B-F80CBA44D175}"/>
-                  </a:ext>
-                </a:extLst>
-              </p14:cNvPr>
-              <p14:cNvContentPartPr/>
-              <p14:nvPr/>
-            </p14:nvContentPartPr>
-            <p14:xfrm>
-              <a:off x="4184670" y="2961900"/>
-              <a:ext cx="263880" cy="332640"/>
-            </p14:xfrm>
-          </p:contentPart>
-        </mc:Choice>
-        <mc:Fallback xmlns="">
-          <p:pic>
-            <p:nvPicPr>
-              <p:cNvPr id="6" name="Рукописні дані 5">
-                <a:extLst>
-                  <a:ext uri="{FF2B5EF4-FFF2-40B4-BE49-F238E27FC236}">
-                    <a16:creationId xmlns:a16="http://schemas.microsoft.com/office/drawing/2014/main" id="{DC71E458-A56D-477C-BC9B-F80CBA44D175}"/>
-                  </a:ext>
-                </a:extLst>
-              </p:cNvPr>
-              <p:cNvPicPr/>
-              <p:nvPr/>
-            </p:nvPicPr>
-            <p:blipFill>
-              <a:blip r:embed="rId5"/>
-              <a:stretch>
-                <a:fillRect/>
-              </a:stretch>
-            </p:blipFill>
-            <p:spPr>
-              <a:xfrm>
-                <a:off x="4175670" y="2953260"/>
-                <a:ext cx="281520" cy="350280"/>
-              </a:xfrm>
-              <a:prstGeom prst="rect">
-                <a:avLst/>
-              </a:prstGeom>
-            </p:spPr>
-          </p:pic>
-        </mc:Fallback>
-      </mc:AlternateContent>
-      <mc:AlternateContent xmlns:mc="http://schemas.openxmlformats.org/markup-compatibility/2006" xmlns:p14="http://schemas.microsoft.com/office/powerpoint/2010/main">
-        <mc:Choice Requires="p14">
-          <p:contentPart p14:bwMode="auto" r:id="rId6">
-            <p14:nvContentPartPr>
-              <p14:cNvPr id="7" name="Рукописні дані 6">
-                <a:extLst>
-                  <a:ext uri="{FF2B5EF4-FFF2-40B4-BE49-F238E27FC236}">
-                    <a16:creationId xmlns:a16="http://schemas.microsoft.com/office/drawing/2014/main" id="{E05573E6-5A8C-438F-A948-F2DD668B8B42}"/>
-                  </a:ext>
-                </a:extLst>
-              </p14:cNvPr>
-              <p14:cNvContentPartPr/>
-              <p14:nvPr/>
-            </p14:nvContentPartPr>
-            <p14:xfrm>
-              <a:off x="123510" y="2532060"/>
-              <a:ext cx="681480" cy="1002240"/>
-            </p14:xfrm>
-          </p:contentPart>
-        </mc:Choice>
-        <mc:Fallback xmlns="">
-          <p:pic>
-            <p:nvPicPr>
-              <p:cNvPr id="7" name="Рукописні дані 6">
-                <a:extLst>
-                  <a:ext uri="{FF2B5EF4-FFF2-40B4-BE49-F238E27FC236}">
-                    <a16:creationId xmlns:a16="http://schemas.microsoft.com/office/drawing/2014/main" id="{E05573E6-5A8C-438F-A948-F2DD668B8B42}"/>
-                  </a:ext>
-                </a:extLst>
-              </p:cNvPr>
-              <p:cNvPicPr/>
-              <p:nvPr/>
-            </p:nvPicPr>
-            <p:blipFill>
-              <a:blip r:embed="rId7"/>
-              <a:stretch>
-                <a:fillRect/>
-              </a:stretch>
-            </p:blipFill>
-            <p:spPr>
-              <a:xfrm>
-                <a:off x="114510" y="2523060"/>
-                <a:ext cx="699120" cy="1019880"/>
-              </a:xfrm>
-              <a:prstGeom prst="rect">
-                <a:avLst/>
-              </a:prstGeom>
-            </p:spPr>
-          </p:pic>
-        </mc:Fallback>
-      </mc:AlternateContent>
     </p:spTree>
     <p:extLst>
       <p:ext uri="{BB962C8B-B14F-4D97-AF65-F5344CB8AC3E}">
@@ -42976,108 +36743,6 @@
           </a:p>
         </p:txBody>
       </p:sp>
-      <mc:AlternateContent xmlns:mc="http://schemas.openxmlformats.org/markup-compatibility/2006" xmlns:p14="http://schemas.microsoft.com/office/powerpoint/2010/main">
-        <mc:Choice Requires="p14">
-          <p:contentPart p14:bwMode="auto" r:id="rId2">
-            <p14:nvContentPartPr>
-              <p14:cNvPr id="3" name="Рукописні дані 2">
-                <a:extLst>
-                  <a:ext uri="{FF2B5EF4-FFF2-40B4-BE49-F238E27FC236}">
-                    <a16:creationId xmlns:a16="http://schemas.microsoft.com/office/drawing/2014/main" id="{3DF96B9E-B304-4050-9A9C-32BA713B0140}"/>
-                  </a:ext>
-                </a:extLst>
-              </p14:cNvPr>
-              <p14:cNvContentPartPr/>
-              <p14:nvPr/>
-            </p14:nvContentPartPr>
-            <p14:xfrm>
-              <a:off x="1428510" y="3057300"/>
-              <a:ext cx="135360" cy="360"/>
-            </p14:xfrm>
-          </p:contentPart>
-        </mc:Choice>
-        <mc:Fallback xmlns="">
-          <p:pic>
-            <p:nvPicPr>
-              <p:cNvPr id="3" name="Рукописні дані 2">
-                <a:extLst>
-                  <a:ext uri="{FF2B5EF4-FFF2-40B4-BE49-F238E27FC236}">
-                    <a16:creationId xmlns:a16="http://schemas.microsoft.com/office/drawing/2014/main" id="{3DF96B9E-B304-4050-9A9C-32BA713B0140}"/>
-                  </a:ext>
-                </a:extLst>
-              </p:cNvPr>
-              <p:cNvPicPr/>
-              <p:nvPr/>
-            </p:nvPicPr>
-            <p:blipFill>
-              <a:blip r:embed="rId3"/>
-              <a:stretch>
-                <a:fillRect/>
-              </a:stretch>
-            </p:blipFill>
-            <p:spPr>
-              <a:xfrm>
-                <a:off x="1419870" y="3048660"/>
-                <a:ext cx="153000" cy="18000"/>
-              </a:xfrm>
-              <a:prstGeom prst="rect">
-                <a:avLst/>
-              </a:prstGeom>
-            </p:spPr>
-          </p:pic>
-        </mc:Fallback>
-      </mc:AlternateContent>
-      <mc:AlternateContent xmlns:mc="http://schemas.openxmlformats.org/markup-compatibility/2006" xmlns:p14="http://schemas.microsoft.com/office/powerpoint/2010/main">
-        <mc:Choice Requires="p14">
-          <p:contentPart p14:bwMode="auto" r:id="rId4">
-            <p14:nvContentPartPr>
-              <p14:cNvPr id="4" name="Рукописні дані 3">
-                <a:extLst>
-                  <a:ext uri="{FF2B5EF4-FFF2-40B4-BE49-F238E27FC236}">
-                    <a16:creationId xmlns:a16="http://schemas.microsoft.com/office/drawing/2014/main" id="{05925E8B-5A06-4D50-A9DA-2894DEE375D6}"/>
-                  </a:ext>
-                </a:extLst>
-              </p14:cNvPr>
-              <p14:cNvContentPartPr/>
-              <p14:nvPr/>
-            </p14:nvContentPartPr>
-            <p14:xfrm>
-              <a:off x="3524070" y="3057300"/>
-              <a:ext cx="1299600" cy="39240"/>
-            </p14:xfrm>
-          </p:contentPart>
-        </mc:Choice>
-        <mc:Fallback xmlns="">
-          <p:pic>
-            <p:nvPicPr>
-              <p:cNvPr id="4" name="Рукописні дані 3">
-                <a:extLst>
-                  <a:ext uri="{FF2B5EF4-FFF2-40B4-BE49-F238E27FC236}">
-                    <a16:creationId xmlns:a16="http://schemas.microsoft.com/office/drawing/2014/main" id="{05925E8B-5A06-4D50-A9DA-2894DEE375D6}"/>
-                  </a:ext>
-                </a:extLst>
-              </p:cNvPr>
-              <p:cNvPicPr/>
-              <p:nvPr/>
-            </p:nvPicPr>
-            <p:blipFill>
-              <a:blip r:embed="rId5"/>
-              <a:stretch>
-                <a:fillRect/>
-              </a:stretch>
-            </p:blipFill>
-            <p:spPr>
-              <a:xfrm>
-                <a:off x="3515430" y="3048660"/>
-                <a:ext cx="1317240" cy="56880"/>
-              </a:xfrm>
-              <a:prstGeom prst="rect">
-                <a:avLst/>
-              </a:prstGeom>
-            </p:spPr>
-          </p:pic>
-        </mc:Fallback>
-      </mc:AlternateContent>
     </p:spTree>
     <p:extLst>
       <p:ext uri="{BB962C8B-B14F-4D97-AF65-F5344CB8AC3E}">
@@ -43628,57 +37293,6 @@
           </a:p>
         </p:txBody>
       </p:sp>
-      <mc:AlternateContent xmlns:mc="http://schemas.openxmlformats.org/markup-compatibility/2006" xmlns:p14="http://schemas.microsoft.com/office/powerpoint/2010/main">
-        <mc:Choice Requires="p14">
-          <p:contentPart p14:bwMode="auto" r:id="rId2">
-            <p14:nvContentPartPr>
-              <p14:cNvPr id="4" name="Рукописні дані 3">
-                <a:extLst>
-                  <a:ext uri="{FF2B5EF4-FFF2-40B4-BE49-F238E27FC236}">
-                    <a16:creationId xmlns:a16="http://schemas.microsoft.com/office/drawing/2014/main" id="{9D210D42-0E95-4B1E-AAD1-67E1670B2055}"/>
-                  </a:ext>
-                </a:extLst>
-              </p14:cNvPr>
-              <p14:cNvContentPartPr/>
-              <p14:nvPr/>
-            </p14:nvContentPartPr>
-            <p14:xfrm>
-              <a:off x="3657270" y="3962340"/>
-              <a:ext cx="543960" cy="10080"/>
-            </p14:xfrm>
-          </p:contentPart>
-        </mc:Choice>
-        <mc:Fallback xmlns="">
-          <p:pic>
-            <p:nvPicPr>
-              <p:cNvPr id="4" name="Рукописні дані 3">
-                <a:extLst>
-                  <a:ext uri="{FF2B5EF4-FFF2-40B4-BE49-F238E27FC236}">
-                    <a16:creationId xmlns:a16="http://schemas.microsoft.com/office/drawing/2014/main" id="{9D210D42-0E95-4B1E-AAD1-67E1670B2055}"/>
-                  </a:ext>
-                </a:extLst>
-              </p:cNvPr>
-              <p:cNvPicPr/>
-              <p:nvPr/>
-            </p:nvPicPr>
-            <p:blipFill>
-              <a:blip r:embed="rId3"/>
-              <a:stretch>
-                <a:fillRect/>
-              </a:stretch>
-            </p:blipFill>
-            <p:spPr>
-              <a:xfrm>
-                <a:off x="3648630" y="3953340"/>
-                <a:ext cx="561600" cy="27720"/>
-              </a:xfrm>
-              <a:prstGeom prst="rect">
-                <a:avLst/>
-              </a:prstGeom>
-            </p:spPr>
-          </p:pic>
-        </mc:Fallback>
-      </mc:AlternateContent>
     </p:spTree>
     <p:extLst>
       <p:ext uri="{BB962C8B-B14F-4D97-AF65-F5344CB8AC3E}">
@@ -44094,57 +37708,6 @@
           </a:p>
         </p:txBody>
       </p:sp>
-      <mc:AlternateContent xmlns:mc="http://schemas.openxmlformats.org/markup-compatibility/2006" xmlns:p14="http://schemas.microsoft.com/office/powerpoint/2010/main">
-        <mc:Choice Requires="p14">
-          <p:contentPart p14:bwMode="auto" r:id="rId2">
-            <p14:nvContentPartPr>
-              <p14:cNvPr id="3" name="Рукописні дані 2">
-                <a:extLst>
-                  <a:ext uri="{FF2B5EF4-FFF2-40B4-BE49-F238E27FC236}">
-                    <a16:creationId xmlns:a16="http://schemas.microsoft.com/office/drawing/2014/main" id="{DA7A0827-408F-4413-ADA8-54AC10D17EA5}"/>
-                  </a:ext>
-                </a:extLst>
-              </p14:cNvPr>
-              <p14:cNvContentPartPr/>
-              <p14:nvPr/>
-            </p14:nvContentPartPr>
-            <p14:xfrm>
-              <a:off x="799950" y="3771180"/>
-              <a:ext cx="2593080" cy="49320"/>
-            </p14:xfrm>
-          </p:contentPart>
-        </mc:Choice>
-        <mc:Fallback xmlns="">
-          <p:pic>
-            <p:nvPicPr>
-              <p:cNvPr id="3" name="Рукописні дані 2">
-                <a:extLst>
-                  <a:ext uri="{FF2B5EF4-FFF2-40B4-BE49-F238E27FC236}">
-                    <a16:creationId xmlns:a16="http://schemas.microsoft.com/office/drawing/2014/main" id="{DA7A0827-408F-4413-ADA8-54AC10D17EA5}"/>
-                  </a:ext>
-                </a:extLst>
-              </p:cNvPr>
-              <p:cNvPicPr/>
-              <p:nvPr/>
-            </p:nvPicPr>
-            <p:blipFill>
-              <a:blip r:embed="rId3"/>
-              <a:stretch>
-                <a:fillRect/>
-              </a:stretch>
-            </p:blipFill>
-            <p:spPr>
-              <a:xfrm>
-                <a:off x="790950" y="3762180"/>
-                <a:ext cx="2610720" cy="66960"/>
-              </a:xfrm>
-              <a:prstGeom prst="rect">
-                <a:avLst/>
-              </a:prstGeom>
-            </p:spPr>
-          </p:pic>
-        </mc:Fallback>
-      </mc:AlternateContent>
     </p:spTree>
     <p:extLst>
       <p:ext uri="{BB962C8B-B14F-4D97-AF65-F5344CB8AC3E}">
@@ -45727,14 +39290,14 @@
           </a:p>
         </p:txBody>
       </p:sp>
-      <mc:AlternateContent xmlns:mc="http://schemas.openxmlformats.org/markup-compatibility/2006" xmlns:p14="http://schemas.microsoft.com/office/powerpoint/2010/main">
-        <mc:Choice Requires="p14">
+      <mc:AlternateContent xmlns:mc="http://schemas.openxmlformats.org/markup-compatibility/2006">
+        <mc:Choice xmlns:p14="http://schemas.microsoft.com/office/powerpoint/2010/main" xmlns:aink="http://schemas.microsoft.com/office/drawing/2016/ink" Requires="p14 aink">
           <p:contentPart p14:bwMode="auto" r:id="rId2">
             <p14:nvContentPartPr>
-              <p14:cNvPr id="3" name="Рукописні дані 2">
+              <p14:cNvPr id="7" name="Рукописні дані 6">
                 <a:extLst>
                   <a:ext uri="{FF2B5EF4-FFF2-40B4-BE49-F238E27FC236}">
-                    <a16:creationId xmlns:a16="http://schemas.microsoft.com/office/drawing/2014/main" id="{9C8C9AB0-D229-4C33-AB7B-2B87611C5003}"/>
+                    <a16:creationId xmlns:a16="http://schemas.microsoft.com/office/drawing/2014/main" id="{1F6FB00D-309A-4F85-875A-74B9EA7B8E10}"/>
                   </a:ext>
                 </a:extLst>
               </p14:cNvPr>
@@ -45742,18 +39305,18 @@
               <p14:nvPr/>
             </p14:nvContentPartPr>
             <p14:xfrm>
-              <a:off x="1466610" y="2297340"/>
-              <a:ext cx="105480" cy="17640"/>
+              <a:off x="-221070" y="1075500"/>
+              <a:ext cx="11900160" cy="4546440"/>
             </p14:xfrm>
           </p:contentPart>
         </mc:Choice>
-        <mc:Fallback xmlns="">
+        <mc:Fallback>
           <p:pic>
             <p:nvPicPr>
-              <p:cNvPr id="3" name="Рукописні дані 2">
+              <p:cNvPr id="7" name="Рукописні дані 6">
                 <a:extLst>
                   <a:ext uri="{FF2B5EF4-FFF2-40B4-BE49-F238E27FC236}">
-                    <a16:creationId xmlns:a16="http://schemas.microsoft.com/office/drawing/2014/main" id="{9C8C9AB0-D229-4C33-AB7B-2B87611C5003}"/>
+                    <a16:creationId xmlns:a16="http://schemas.microsoft.com/office/drawing/2014/main" id="{1F6FB00D-309A-4F85-875A-74B9EA7B8E10}"/>
                   </a:ext>
                 </a:extLst>
               </p:cNvPr>
@@ -45768,8 +39331,8 @@
             </p:blipFill>
             <p:spPr>
               <a:xfrm>
-                <a:off x="1457970" y="2288340"/>
-                <a:ext cx="123120" cy="35280"/>
+                <a:off x="-229710" y="1066860"/>
+                <a:ext cx="11917800" cy="4564080"/>
               </a:xfrm>
               <a:prstGeom prst="rect">
                 <a:avLst/>
@@ -50446,6 +44009,108 @@
           </a:p>
         </p:txBody>
       </p:sp>
+      <mc:AlternateContent xmlns:mc="http://schemas.openxmlformats.org/markup-compatibility/2006">
+        <mc:Choice xmlns:p14="http://schemas.microsoft.com/office/powerpoint/2010/main" xmlns:aink="http://schemas.microsoft.com/office/drawing/2016/ink" Requires="p14 aink">
+          <p:contentPart p14:bwMode="auto" r:id="rId3">
+            <p14:nvContentPartPr>
+              <p14:cNvPr id="2" name="Рукописні дані 1">
+                <a:extLst>
+                  <a:ext uri="{FF2B5EF4-FFF2-40B4-BE49-F238E27FC236}">
+                    <a16:creationId xmlns:a16="http://schemas.microsoft.com/office/drawing/2014/main" id="{752B8927-E54E-4184-A385-ECF691DFD98B}"/>
+                  </a:ext>
+                </a:extLst>
+              </p14:cNvPr>
+              <p14:cNvContentPartPr/>
+              <p14:nvPr/>
+            </p14:nvContentPartPr>
+            <p14:xfrm>
+              <a:off x="7473270" y="3704910"/>
+              <a:ext cx="2862360" cy="639000"/>
+            </p14:xfrm>
+          </p:contentPart>
+        </mc:Choice>
+        <mc:Fallback>
+          <p:pic>
+            <p:nvPicPr>
+              <p:cNvPr id="2" name="Рукописні дані 1">
+                <a:extLst>
+                  <a:ext uri="{FF2B5EF4-FFF2-40B4-BE49-F238E27FC236}">
+                    <a16:creationId xmlns:a16="http://schemas.microsoft.com/office/drawing/2014/main" id="{752B8927-E54E-4184-A385-ECF691DFD98B}"/>
+                  </a:ext>
+                </a:extLst>
+              </p:cNvPr>
+              <p:cNvPicPr/>
+              <p:nvPr/>
+            </p:nvPicPr>
+            <p:blipFill>
+              <a:blip r:embed="rId4"/>
+              <a:stretch>
+                <a:fillRect/>
+              </a:stretch>
+            </p:blipFill>
+            <p:spPr>
+              <a:xfrm>
+                <a:off x="7464270" y="3696270"/>
+                <a:ext cx="2880000" cy="656640"/>
+              </a:xfrm>
+              <a:prstGeom prst="rect">
+                <a:avLst/>
+              </a:prstGeom>
+            </p:spPr>
+          </p:pic>
+        </mc:Fallback>
+      </mc:AlternateContent>
+      <mc:AlternateContent xmlns:mc="http://schemas.openxmlformats.org/markup-compatibility/2006">
+        <mc:Choice xmlns:p14="http://schemas.microsoft.com/office/powerpoint/2010/main" xmlns:aink="http://schemas.microsoft.com/office/drawing/2016/ink" Requires="p14 aink">
+          <p:contentPart p14:bwMode="auto" r:id="rId5">
+            <p14:nvContentPartPr>
+              <p14:cNvPr id="3" name="Рукописні дані 2">
+                <a:extLst>
+                  <a:ext uri="{FF2B5EF4-FFF2-40B4-BE49-F238E27FC236}">
+                    <a16:creationId xmlns:a16="http://schemas.microsoft.com/office/drawing/2014/main" id="{C9CCF5AF-8A59-4020-9F70-5102AD785A71}"/>
+                  </a:ext>
+                </a:extLst>
+              </p14:cNvPr>
+              <p14:cNvContentPartPr/>
+              <p14:nvPr/>
+            </p14:nvContentPartPr>
+            <p14:xfrm>
+              <a:off x="7253310" y="3219270"/>
+              <a:ext cx="1944000" cy="601560"/>
+            </p14:xfrm>
+          </p:contentPart>
+        </mc:Choice>
+        <mc:Fallback>
+          <p:pic>
+            <p:nvPicPr>
+              <p:cNvPr id="3" name="Рукописні дані 2">
+                <a:extLst>
+                  <a:ext uri="{FF2B5EF4-FFF2-40B4-BE49-F238E27FC236}">
+                    <a16:creationId xmlns:a16="http://schemas.microsoft.com/office/drawing/2014/main" id="{C9CCF5AF-8A59-4020-9F70-5102AD785A71}"/>
+                  </a:ext>
+                </a:extLst>
+              </p:cNvPr>
+              <p:cNvPicPr/>
+              <p:nvPr/>
+            </p:nvPicPr>
+            <p:blipFill>
+              <a:blip r:embed="rId6"/>
+              <a:stretch>
+                <a:fillRect/>
+              </a:stretch>
+            </p:blipFill>
+            <p:spPr>
+              <a:xfrm>
+                <a:off x="7244310" y="3210270"/>
+                <a:ext cx="1961640" cy="619200"/>
+              </a:xfrm>
+              <a:prstGeom prst="rect">
+                <a:avLst/>
+              </a:prstGeom>
+            </p:spPr>
+          </p:pic>
+        </mc:Fallback>
+      </mc:AlternateContent>
     </p:spTree>
     <p:extLst>
       <p:ext uri="{BB962C8B-B14F-4D97-AF65-F5344CB8AC3E}">
